--- a/Workshop_WSL2_Linux_unterrichten_neu.pptx
+++ b/Workshop_WSL2_Linux_unterrichten_neu.pptx
@@ -1,6 +1,6 @@
 
 <file path=ppt/presentation.xml><?xml version="1.0" encoding="utf-8"?>
-<p:presentation xmlns:a="http://schemas.openxmlformats.org/drawingml/2006/main" xmlns:r="http://schemas.openxmlformats.org/officeDocument/2006/relationships" xmlns:p="http://schemas.openxmlformats.org/presentationml/2006/main" saveSubsetFonts="1" autoCompressPictures="0">
+<p:presentation xmlns:a="http://schemas.openxmlformats.org/drawingml/2006/main" xmlns:r="http://schemas.openxmlformats.org/officeDocument/2006/relationships" xmlns:p="http://schemas.openxmlformats.org/presentationml/2006/main" embedTrueTypeFonts="1" saveSubsetFonts="1" autoCompressPictures="0">
   <p:sldMasterIdLst>
     <p:sldMasterId id="2147483648" r:id="rId1"/>
   </p:sldMasterIdLst>
@@ -22,8 +22,17 @@
   <p:notesMasterIdLst>
     <p:notesMasterId r:id="rId15"/>
   </p:notesMasterIdLst>
-  <p:sldSz cx="9144000" cy="5143500"/>
+  <p:sldSz cx="12192000" cy="6858000"/>
   <p:notesSz cx="5143500" cy="9144000"/>
+  <p:embeddedFontLst>
+    <p:embeddedFont>
+      <p:font typeface="Roboto" panose="02000000000000000000" pitchFamily="2" charset="0"/>
+      <p:regular r:id="rIdF1"/>
+      <p:bold r:id="rIdF2"/>
+      <p:italic r:id="rIdF3"/>
+      <p:boldItalic r:id="rIdF4"/>
+    </p:embeddedFont>
+  </p:embeddedFontLst>
   <p:defaultTextStyle>
     <a:lvl1pPr marL="0" algn="l" defTabSz="914400" rtl="0" eaLnBrk="1" latinLnBrk="0" hangingPunct="1">
       <a:defRPr sz="1800" kern="1200">
@@ -1042,7 +1051,7 @@
           <a:p>
             <a:r>
               <a:rPr lang="en-US" dirty="0"/>
-              <a:t>Kurz halten – maximal eine Minute. Wichtigste Botschaft: 'Sie schauen nicht nur zu – die Hälfte der Zeit arbeiten Sie selbst in einer Linux-Shell, direkt im Browser, ohne irgendetwas zu installieren.'</a:t>
+              <a:t>Kurz halten – maximal eine Minute. Wichtigste Botschaft: 'Sie schauen nicht nur zu – die Hälfte der Zeit arbeiten Sie selbst in einer Linux-Shell, per SSH aus der Windows-PowerShell heraus, ohne irgendetwas zu installieren.'</a:t>
             </a:r>
             <a:endParaRPr lang="en-US" dirty="0"/>
           </a:p>
@@ -1482,7 +1491,7 @@
           <a:p>
             <a:r>
               <a:rPr lang="en-US" dirty="0"/>
-              <a:t>CHECKPOINT-FOLIE – hier nicht weitergehen, bevor jedes Team einen Prompt hat. VORHER: setup-workshop.sh auf dem Übungsserver ausführen, echte IP-Adresse auf dieser Folie eintragen (Platzhalter 10.0.0.5), Zugangsdaten-Zettel je Team (user01–user20, Passwort akademieNN). Typische Hänger: Fingerprint-Frage (mit yes beantworten), Tippfehler in der IP, Firmen-Notebooks mit blockiertem Port 22 – dafür 1–2 Leihgeräte oder Teams mischen. Wer mit eigenem WSL2 arbeiten will: gern, gleiche Aufgaben. Arbeitsblätter jetzt austeilen.</a:t>
+              <a:t>CHECKPOINT-FOLIE – hier nicht weitergehen, bevor jedes Team einen Prompt hat. VORHER: setup-workshop.sh auf dem Übungsserver ausführen, echte IP-Adresse auf dieser Folie eintragen (Platzhalter 10.0.0.5), Zugangsdaten-Zettel je Team (user01–user40, Passwort akademieNN). Typische Hänger: Fingerprint-Frage (mit yes beantworten), Tippfehler in der IP, Firmen-Notebooks mit blockiertem Port 22 – dafür 1–2 Leihgeräte oder Teams mischen. Wer mit eigenem WSL2 arbeiten will: gern, gleiche Aufgaben. Arbeitsblätter jetzt austeilen.</a:t>
             </a:r>
             <a:endParaRPr lang="en-US" dirty="0"/>
           </a:p>
@@ -1613,8 +1622,1256 @@
 </file>
 
 <file path=ppt/slideLayouts/slideLayout1.xml><?xml version="1.0" encoding="utf-8"?>
-<p:sldLayout xmlns:a="http://schemas.openxmlformats.org/drawingml/2006/main" xmlns:r="http://schemas.openxmlformats.org/officeDocument/2006/relationships" xmlns:p="http://schemas.openxmlformats.org/presentationml/2006/main" preserve="1">
-  <p:cSld name="DEFAULT">
+<p:sldLayout xmlns:a="http://schemas.openxmlformats.org/drawingml/2006/main" xmlns:r="http://schemas.openxmlformats.org/officeDocument/2006/relationships" xmlns:p="http://schemas.openxmlformats.org/presentationml/2006/main" preserve="1" userDrawn="1">
+  <p:cSld name="Titel- &amp; Untertitelfolie">
+    <p:spTree>
+      <p:nvGrpSpPr>
+        <p:cNvPr id="1" name=""/>
+        <p:cNvGrpSpPr/>
+        <p:nvPr/>
+      </p:nvGrpSpPr>
+      <p:grpSpPr>
+        <a:xfrm>
+          <a:off x="0" y="0"/>
+          <a:ext cx="0" cy="0"/>
+          <a:chOff x="0" y="0"/>
+          <a:chExt cx="0" cy="0"/>
+        </a:xfrm>
+      </p:grpSpPr>
+      <p:sp>
+        <p:nvSpPr>
+          <p:cNvPr id="7" name="Rechteck 6">
+            <a:extLst>
+              <a:ext uri="{FF2B5EF4-FFF2-40B4-BE49-F238E27FC236}">
+                <a16:creationId xmlns:a16="http://schemas.microsoft.com/office/drawing/2014/main" id="{9BDC343F-72B0-EDEC-BF3A-990505ACABFE}"/>
+              </a:ext>
+            </a:extLst>
+          </p:cNvPr>
+          <p:cNvSpPr/>
+          <p:nvPr userDrawn="1"/>
+        </p:nvSpPr>
+        <p:spPr>
+          <a:xfrm>
+            <a:off x="0" y="0"/>
+            <a:ext cx="12192000" cy="6858000"/>
+          </a:xfrm>
+          <a:prstGeom prst="rect">
+            <a:avLst/>
+          </a:prstGeom>
+          <a:gradFill>
+            <a:gsLst>
+              <a:gs pos="0">
+                <a:schemeClr val="accent5"/>
+              </a:gs>
+              <a:gs pos="100000">
+                <a:schemeClr val="accent4"/>
+              </a:gs>
+            </a:gsLst>
+            <a:path path="circle">
+              <a:fillToRect r="100000" b="100000"/>
+            </a:path>
+          </a:gradFill>
+          <a:ln>
+            <a:noFill/>
+          </a:ln>
+        </p:spPr>
+        <p:style>
+          <a:lnRef idx="2">
+            <a:schemeClr val="accent1">
+              <a:shade val="15000"/>
+            </a:schemeClr>
+          </a:lnRef>
+          <a:fillRef idx="1">
+            <a:schemeClr val="accent1"/>
+          </a:fillRef>
+          <a:effectRef idx="0">
+            <a:schemeClr val="accent1"/>
+          </a:effectRef>
+          <a:fontRef idx="minor">
+            <a:schemeClr val="lt1"/>
+          </a:fontRef>
+        </p:style>
+        <p:txBody>
+          <a:bodyPr rtlCol="0" anchor="ctr"/>
+          <a:lstStyle/>
+          <a:p>
+            <a:pPr algn="ctr"/>
+            <a:endParaRPr lang="de-DE" b="0" i="0">
+              <a:latin typeface="Roboto" panose="02000000000000000000" pitchFamily="2" charset="0"/>
+            </a:endParaRPr>
+          </a:p>
+        </p:txBody>
+      </p:sp>
+      <p:sp>
+        <p:nvSpPr>
+          <p:cNvPr id="9" name="Untertitel 2">
+            <a:extLst>
+              <a:ext uri="{FF2B5EF4-FFF2-40B4-BE49-F238E27FC236}">
+                <a16:creationId xmlns:a16="http://schemas.microsoft.com/office/drawing/2014/main" id="{0BF7C7DB-E9CA-B399-402F-4B6E930FE768}"/>
+              </a:ext>
+            </a:extLst>
+          </p:cNvPr>
+          <p:cNvSpPr>
+            <a:spLocks noGrp="1"/>
+          </p:cNvSpPr>
+          <p:nvPr>
+            <p:ph type="subTitle" idx="1" hasCustomPrompt="1"/>
+          </p:nvPr>
+        </p:nvSpPr>
+        <p:spPr>
+          <a:xfrm>
+            <a:off x="831600" y="4190400"/>
+            <a:ext cx="10515600" cy="1414800"/>
+          </a:xfrm>
+        </p:spPr>
+        <p:txBody>
+          <a:bodyPr lIns="72000" tIns="36000" rIns="72000" bIns="36000">
+            <a:normAutofit/>
+          </a:bodyPr>
+          <a:lstStyle>
+            <a:lvl1pPr marL="0" indent="0" algn="l">
+              <a:lnSpc>
+                <a:spcPct val="120000"/>
+              </a:lnSpc>
+              <a:spcBef>
+                <a:spcPts val="0"/>
+              </a:spcBef>
+              <a:buNone/>
+              <a:defRPr sz="2400" b="0">
+                <a:solidFill>
+                  <a:schemeClr val="bg1"/>
+                </a:solidFill>
+              </a:defRPr>
+            </a:lvl1pPr>
+            <a:lvl2pPr marL="457200" indent="0" algn="ctr">
+              <a:buNone/>
+              <a:defRPr sz="2000"/>
+            </a:lvl2pPr>
+            <a:lvl3pPr marL="914400" indent="0" algn="ctr">
+              <a:buNone/>
+              <a:defRPr sz="1800"/>
+            </a:lvl3pPr>
+            <a:lvl4pPr marL="1371600" indent="0" algn="ctr">
+              <a:buNone/>
+              <a:defRPr sz="1600"/>
+            </a:lvl4pPr>
+            <a:lvl5pPr marL="1828800" indent="0" algn="ctr">
+              <a:buNone/>
+              <a:defRPr sz="1600"/>
+            </a:lvl5pPr>
+            <a:lvl6pPr marL="2286000" indent="0" algn="ctr">
+              <a:buNone/>
+              <a:defRPr sz="1600"/>
+            </a:lvl6pPr>
+            <a:lvl7pPr marL="2743200" indent="0" algn="ctr">
+              <a:buNone/>
+              <a:defRPr sz="1600"/>
+            </a:lvl7pPr>
+            <a:lvl8pPr marL="3200400" indent="0" algn="ctr">
+              <a:buNone/>
+              <a:defRPr sz="1600"/>
+            </a:lvl8pPr>
+            <a:lvl9pPr marL="3657600" indent="0" algn="ctr">
+              <a:buNone/>
+              <a:defRPr sz="1600"/>
+            </a:lvl9pPr>
+          </a:lstStyle>
+          <a:p>
+            <a:r>
+              <a:rPr lang="de-DE" dirty="0"/>
+              <a:t>Einstieg</a:t>
+            </a:r>
+          </a:p>
+        </p:txBody>
+      </p:sp>
+      <p:sp>
+        <p:nvSpPr>
+          <p:cNvPr id="6" name="Titel 5">
+            <a:extLst>
+              <a:ext uri="{FF2B5EF4-FFF2-40B4-BE49-F238E27FC236}">
+                <a16:creationId xmlns:a16="http://schemas.microsoft.com/office/drawing/2014/main" id="{1A8C46BE-CEE7-929D-10CA-4899288A1390}"/>
+              </a:ext>
+            </a:extLst>
+          </p:cNvPr>
+          <p:cNvSpPr>
+            <a:spLocks noGrp="1"/>
+          </p:cNvSpPr>
+          <p:nvPr>
+            <p:ph type="title" hasCustomPrompt="1"/>
+          </p:nvPr>
+        </p:nvSpPr>
+        <p:spPr>
+          <a:xfrm>
+            <a:off x="838800" y="1957674"/>
+            <a:ext cx="10515600" cy="2121125"/>
+          </a:xfrm>
+          <a:prstGeom prst="rect">
+            <a:avLst/>
+          </a:prstGeom>
+        </p:spPr>
+        <p:txBody>
+          <a:bodyPr>
+            <a:normAutofit/>
+          </a:bodyPr>
+          <a:lstStyle>
+            <a:lvl1pPr>
+              <a:defRPr sz="6000">
+                <a:solidFill>
+                  <a:schemeClr val="bg1"/>
+                </a:solidFill>
+              </a:defRPr>
+            </a:lvl1pPr>
+          </a:lstStyle>
+          <a:p>
+            <a:r>
+              <a:rPr lang="de-DE" dirty="0"/>
+              <a:t>Titel- &amp; Untertitelfolie</a:t>
+            </a:r>
+          </a:p>
+        </p:txBody>
+      </p:sp>
+      <p:pic>
+        <p:nvPicPr>
+          <p:cNvPr id="4" name="Grafik 3">
+            <a:extLst>
+              <a:ext uri="{FF2B5EF4-FFF2-40B4-BE49-F238E27FC236}">
+                <a16:creationId xmlns:a16="http://schemas.microsoft.com/office/drawing/2014/main" id="{C7FCB547-8C3F-453A-08D3-4C029E1064F0}"/>
+              </a:ext>
+            </a:extLst>
+          </p:cNvPr>
+          <p:cNvPicPr>
+            <a:picLocks noChangeAspect="1"/>
+          </p:cNvPicPr>
+          <p:nvPr userDrawn="1"/>
+        </p:nvPicPr>
+        <p:blipFill>
+          <a:blip r:embed="rId2"/>
+          <a:stretch>
+            <a:fillRect/>
+          </a:stretch>
+        </p:blipFill>
+        <p:spPr>
+          <a:xfrm>
+            <a:off x="8292300" y="517036"/>
+            <a:ext cx="3062100" cy="923603"/>
+          </a:xfrm>
+          <a:prstGeom prst="rect">
+            <a:avLst/>
+          </a:prstGeom>
+        </p:spPr>
+      </p:pic>
+      <p:cxnSp>
+        <p:nvCxnSpPr>
+          <p:cNvPr id="10" name="Gerade Verbindung 9">
+            <a:extLst>
+              <a:ext uri="{FF2B5EF4-FFF2-40B4-BE49-F238E27FC236}">
+                <a16:creationId xmlns:a16="http://schemas.microsoft.com/office/drawing/2014/main" id="{22D14591-A2A8-7FC7-3EB3-865C25F922E7}"/>
+              </a:ext>
+            </a:extLst>
+          </p:cNvPr>
+          <p:cNvCxnSpPr>
+            <a:cxnSpLocks/>
+          </p:cNvCxnSpPr>
+          <p:nvPr userDrawn="1"/>
+        </p:nvCxnSpPr>
+        <p:spPr>
+          <a:xfrm>
+            <a:off x="0" y="6800193"/>
+            <a:ext cx="12192000" cy="0"/>
+          </a:xfrm>
+          <a:prstGeom prst="line">
+            <a:avLst/>
+          </a:prstGeom>
+          <a:ln w="127000">
+            <a:solidFill>
+              <a:srgbClr val="FAE661"/>
+            </a:solidFill>
+          </a:ln>
+        </p:spPr>
+        <p:style>
+          <a:lnRef idx="1">
+            <a:schemeClr val="accent1"/>
+          </a:lnRef>
+          <a:fillRef idx="0">
+            <a:schemeClr val="accent1"/>
+          </a:fillRef>
+          <a:effectRef idx="0">
+            <a:schemeClr val="accent1"/>
+          </a:effectRef>
+          <a:fontRef idx="minor">
+            <a:schemeClr val="tx1"/>
+          </a:fontRef>
+        </p:style>
+      </p:cxnSp>
+    </p:spTree>
+    <p:extLst>
+      <p:ext uri="{BB962C8B-B14F-4D97-AF65-F5344CB8AC3E}">
+        <p14:creationId xmlns:p14="http://schemas.microsoft.com/office/powerpoint/2010/main" val="1981330381"/>
+      </p:ext>
+    </p:extLst>
+  </p:cSld>
+  <p:clrMapOvr>
+    <a:masterClrMapping/>
+  </p:clrMapOvr>
+</p:sldLayout>
+</file>
+
+<file path=ppt/slideLayouts/slideLayout2.xml><?xml version="1.0" encoding="utf-8"?>
+<p:sldLayout xmlns:a="http://schemas.openxmlformats.org/drawingml/2006/main" xmlns:r="http://schemas.openxmlformats.org/officeDocument/2006/relationships" xmlns:p="http://schemas.openxmlformats.org/presentationml/2006/main" preserve="1" userDrawn="1">
+  <p:cSld name="Inhaltsfolie">
+    <p:spTree>
+      <p:nvGrpSpPr>
+        <p:cNvPr id="1" name=""/>
+        <p:cNvGrpSpPr/>
+        <p:nvPr/>
+      </p:nvGrpSpPr>
+      <p:grpSpPr>
+        <a:xfrm>
+          <a:off x="0" y="0"/>
+          <a:ext cx="0" cy="0"/>
+          <a:chOff x="0" y="0"/>
+          <a:chExt cx="0" cy="0"/>
+        </a:xfrm>
+      </p:grpSpPr>
+      <p:sp>
+        <p:nvSpPr>
+          <p:cNvPr id="7" name="Rechteck 6">
+            <a:extLst>
+              <a:ext uri="{FF2B5EF4-FFF2-40B4-BE49-F238E27FC236}">
+                <a16:creationId xmlns:a16="http://schemas.microsoft.com/office/drawing/2014/main" id="{9BDC343F-72B0-EDEC-BF3A-990505ACABFE}"/>
+              </a:ext>
+            </a:extLst>
+          </p:cNvPr>
+          <p:cNvSpPr/>
+          <p:nvPr userDrawn="1"/>
+        </p:nvSpPr>
+        <p:spPr>
+          <a:xfrm>
+            <a:off x="0" y="0"/>
+            <a:ext cx="12192000" cy="6858000"/>
+          </a:xfrm>
+          <a:prstGeom prst="rect">
+            <a:avLst/>
+          </a:prstGeom>
+          <a:gradFill>
+            <a:gsLst>
+              <a:gs pos="0">
+                <a:schemeClr val="accent5"/>
+              </a:gs>
+              <a:gs pos="100000">
+                <a:schemeClr val="accent4"/>
+              </a:gs>
+            </a:gsLst>
+            <a:path path="circle">
+              <a:fillToRect r="100000" b="100000"/>
+            </a:path>
+          </a:gradFill>
+          <a:ln>
+            <a:noFill/>
+          </a:ln>
+        </p:spPr>
+        <p:style>
+          <a:lnRef idx="2">
+            <a:schemeClr val="accent1">
+              <a:shade val="15000"/>
+            </a:schemeClr>
+          </a:lnRef>
+          <a:fillRef idx="1">
+            <a:schemeClr val="accent1"/>
+          </a:fillRef>
+          <a:effectRef idx="0">
+            <a:schemeClr val="accent1"/>
+          </a:effectRef>
+          <a:fontRef idx="minor">
+            <a:schemeClr val="lt1"/>
+          </a:fontRef>
+        </p:style>
+        <p:txBody>
+          <a:bodyPr rtlCol="0" anchor="ctr"/>
+          <a:lstStyle/>
+          <a:p>
+            <a:pPr algn="ctr"/>
+            <a:endParaRPr lang="de-DE" b="0" i="0">
+              <a:latin typeface="Roboto" panose="02000000000000000000" pitchFamily="2" charset="0"/>
+            </a:endParaRPr>
+          </a:p>
+        </p:txBody>
+      </p:sp>
+      <p:sp>
+        <p:nvSpPr>
+          <p:cNvPr id="9" name="Untertitel 2">
+            <a:extLst>
+              <a:ext uri="{FF2B5EF4-FFF2-40B4-BE49-F238E27FC236}">
+                <a16:creationId xmlns:a16="http://schemas.microsoft.com/office/drawing/2014/main" id="{0BF7C7DB-E9CA-B399-402F-4B6E930FE768}"/>
+              </a:ext>
+            </a:extLst>
+          </p:cNvPr>
+          <p:cNvSpPr>
+            <a:spLocks noGrp="1"/>
+          </p:cNvSpPr>
+          <p:nvPr>
+            <p:ph type="subTitle" idx="1" hasCustomPrompt="1"/>
+          </p:nvPr>
+        </p:nvSpPr>
+        <p:spPr>
+          <a:xfrm>
+            <a:off x="831600" y="4190400"/>
+            <a:ext cx="5900593" cy="1414800"/>
+          </a:xfrm>
+        </p:spPr>
+        <p:txBody>
+          <a:bodyPr lIns="72000" tIns="36000" rIns="72000" bIns="36000">
+            <a:normAutofit/>
+          </a:bodyPr>
+          <a:lstStyle>
+            <a:lvl1pPr marL="0" indent="0" algn="l">
+              <a:lnSpc>
+                <a:spcPct val="120000"/>
+              </a:lnSpc>
+              <a:spcBef>
+                <a:spcPts val="0"/>
+              </a:spcBef>
+              <a:buNone/>
+              <a:defRPr sz="2400" b="0">
+                <a:solidFill>
+                  <a:schemeClr val="bg1"/>
+                </a:solidFill>
+              </a:defRPr>
+            </a:lvl1pPr>
+            <a:lvl2pPr marL="457200" indent="0" algn="ctr">
+              <a:buNone/>
+              <a:defRPr sz="2000"/>
+            </a:lvl2pPr>
+            <a:lvl3pPr marL="914400" indent="0" algn="ctr">
+              <a:buNone/>
+              <a:defRPr sz="1800"/>
+            </a:lvl3pPr>
+            <a:lvl4pPr marL="1371600" indent="0" algn="ctr">
+              <a:buNone/>
+              <a:defRPr sz="1600"/>
+            </a:lvl4pPr>
+            <a:lvl5pPr marL="1828800" indent="0" algn="ctr">
+              <a:buNone/>
+              <a:defRPr sz="1600"/>
+            </a:lvl5pPr>
+            <a:lvl6pPr marL="2286000" indent="0" algn="ctr">
+              <a:buNone/>
+              <a:defRPr sz="1600"/>
+            </a:lvl6pPr>
+            <a:lvl7pPr marL="2743200" indent="0" algn="ctr">
+              <a:buNone/>
+              <a:defRPr sz="1600"/>
+            </a:lvl7pPr>
+            <a:lvl8pPr marL="3200400" indent="0" algn="ctr">
+              <a:buNone/>
+              <a:defRPr sz="1600"/>
+            </a:lvl8pPr>
+            <a:lvl9pPr marL="3657600" indent="0" algn="ctr">
+              <a:buNone/>
+              <a:defRPr sz="1600"/>
+            </a:lvl9pPr>
+          </a:lstStyle>
+          <a:p>
+            <a:r>
+              <a:rPr lang="de-DE" dirty="0"/>
+              <a:t>Textinhalte etc.</a:t>
+            </a:r>
+          </a:p>
+        </p:txBody>
+      </p:sp>
+      <p:pic>
+        <p:nvPicPr>
+          <p:cNvPr id="2" name="Grafik 1">
+            <a:extLst>
+              <a:ext uri="{FF2B5EF4-FFF2-40B4-BE49-F238E27FC236}">
+                <a16:creationId xmlns:a16="http://schemas.microsoft.com/office/drawing/2014/main" id="{1B6CAE3C-165D-6E15-9A97-2B5BF37DFC1B}"/>
+              </a:ext>
+            </a:extLst>
+          </p:cNvPr>
+          <p:cNvPicPr>
+            <a:picLocks noChangeAspect="1"/>
+          </p:cNvPicPr>
+          <p:nvPr userDrawn="1"/>
+        </p:nvPicPr>
+        <p:blipFill>
+          <a:blip r:embed="rId2"/>
+          <a:srcRect r="25628" b="29491"/>
+          <a:stretch>
+            <a:fillRect/>
+          </a:stretch>
+        </p:blipFill>
+        <p:spPr>
+          <a:xfrm>
+            <a:off x="6411540" y="2593399"/>
+            <a:ext cx="5780460" cy="4206794"/>
+          </a:xfrm>
+          <a:prstGeom prst="rect">
+            <a:avLst/>
+          </a:prstGeom>
+        </p:spPr>
+      </p:pic>
+      <p:cxnSp>
+        <p:nvCxnSpPr>
+          <p:cNvPr id="5" name="Gerade Verbindung 4">
+            <a:extLst>
+              <a:ext uri="{FF2B5EF4-FFF2-40B4-BE49-F238E27FC236}">
+                <a16:creationId xmlns:a16="http://schemas.microsoft.com/office/drawing/2014/main" id="{F0326A2E-26ED-A62D-7E2F-2C7433566933}"/>
+              </a:ext>
+            </a:extLst>
+          </p:cNvPr>
+          <p:cNvCxnSpPr>
+            <a:cxnSpLocks/>
+          </p:cNvCxnSpPr>
+          <p:nvPr userDrawn="1"/>
+        </p:nvCxnSpPr>
+        <p:spPr>
+          <a:xfrm>
+            <a:off x="0" y="6800193"/>
+            <a:ext cx="12192000" cy="0"/>
+          </a:xfrm>
+          <a:prstGeom prst="line">
+            <a:avLst/>
+          </a:prstGeom>
+          <a:ln w="127000">
+            <a:solidFill>
+              <a:srgbClr val="FAE661"/>
+            </a:solidFill>
+          </a:ln>
+        </p:spPr>
+        <p:style>
+          <a:lnRef idx="1">
+            <a:schemeClr val="accent1"/>
+          </a:lnRef>
+          <a:fillRef idx="0">
+            <a:schemeClr val="accent1"/>
+          </a:fillRef>
+          <a:effectRef idx="0">
+            <a:schemeClr val="accent1"/>
+          </a:effectRef>
+          <a:fontRef idx="minor">
+            <a:schemeClr val="tx1"/>
+          </a:fontRef>
+        </p:style>
+      </p:cxnSp>
+      <p:sp>
+        <p:nvSpPr>
+          <p:cNvPr id="8" name="Titel 5">
+            <a:extLst>
+              <a:ext uri="{FF2B5EF4-FFF2-40B4-BE49-F238E27FC236}">
+                <a16:creationId xmlns:a16="http://schemas.microsoft.com/office/drawing/2014/main" id="{D8E8C8B7-76D5-496D-CE2B-7944FBB0F583}"/>
+              </a:ext>
+            </a:extLst>
+          </p:cNvPr>
+          <p:cNvSpPr>
+            <a:spLocks noGrp="1"/>
+          </p:cNvSpPr>
+          <p:nvPr>
+            <p:ph type="title" hasCustomPrompt="1"/>
+          </p:nvPr>
+        </p:nvSpPr>
+        <p:spPr>
+          <a:xfrm>
+            <a:off x="838800" y="1957674"/>
+            <a:ext cx="8434075" cy="2121125"/>
+          </a:xfrm>
+          <a:prstGeom prst="rect">
+            <a:avLst/>
+          </a:prstGeom>
+        </p:spPr>
+        <p:txBody>
+          <a:bodyPr anchor="t">
+            <a:normAutofit/>
+          </a:bodyPr>
+          <a:lstStyle>
+            <a:lvl1pPr marL="0">
+              <a:defRPr sz="4800">
+                <a:solidFill>
+                  <a:schemeClr val="bg1"/>
+                </a:solidFill>
+              </a:defRPr>
+            </a:lvl1pPr>
+          </a:lstStyle>
+          <a:p>
+            <a:r>
+              <a:rPr lang="de-DE" dirty="0"/>
+              <a:t>Inhaltsfolie</a:t>
+            </a:r>
+          </a:p>
+        </p:txBody>
+      </p:sp>
+    </p:spTree>
+    <p:extLst>
+      <p:ext uri="{BB962C8B-B14F-4D97-AF65-F5344CB8AC3E}">
+        <p14:creationId xmlns:p14="http://schemas.microsoft.com/office/powerpoint/2010/main" val="2120241158"/>
+      </p:ext>
+    </p:extLst>
+  </p:cSld>
+  <p:clrMapOvr>
+    <a:masterClrMapping/>
+  </p:clrMapOvr>
+</p:sldLayout>
+</file>
+
+<file path=ppt/slideLayouts/slideLayout3.xml><?xml version="1.0" encoding="utf-8"?>
+<p:sldLayout xmlns:a="http://schemas.openxmlformats.org/drawingml/2006/main" xmlns:r="http://schemas.openxmlformats.org/officeDocument/2006/relationships" xmlns:p="http://schemas.openxmlformats.org/presentationml/2006/main" preserve="1" userDrawn="1">
+  <p:cSld name="Titel Text Text">
+    <p:spTree>
+      <p:nvGrpSpPr>
+        <p:cNvPr id="1" name=""/>
+        <p:cNvGrpSpPr/>
+        <p:nvPr/>
+      </p:nvGrpSpPr>
+      <p:grpSpPr>
+        <a:xfrm>
+          <a:off x="0" y="0"/>
+          <a:ext cx="0" cy="0"/>
+          <a:chOff x="0" y="0"/>
+          <a:chExt cx="0" cy="0"/>
+        </a:xfrm>
+      </p:grpSpPr>
+      <p:sp>
+        <p:nvSpPr>
+          <p:cNvPr id="3" name="Inhaltsplatzhalter 2">
+            <a:extLst>
+              <a:ext uri="{FF2B5EF4-FFF2-40B4-BE49-F238E27FC236}">
+                <a16:creationId xmlns:a16="http://schemas.microsoft.com/office/drawing/2014/main" id="{9CA773C1-EA8C-120F-F1D4-E6238995073B}"/>
+              </a:ext>
+            </a:extLst>
+          </p:cNvPr>
+          <p:cNvSpPr>
+            <a:spLocks noGrp="1"/>
+          </p:cNvSpPr>
+          <p:nvPr>
+            <p:ph sz="half" idx="1"/>
+          </p:nvPr>
+        </p:nvSpPr>
+        <p:spPr>
+          <a:xfrm>
+            <a:off x="838200" y="1818000"/>
+            <a:ext cx="5180400" cy="3787200"/>
+          </a:xfrm>
+        </p:spPr>
+        <p:txBody>
+          <a:bodyPr lIns="90000" tIns="46800" rIns="90000" bIns="46800"/>
+          <a:lstStyle/>
+          <a:p>
+            <a:pPr lvl="0"/>
+            <a:r>
+              <a:rPr lang="de-DE" dirty="0"/>
+              <a:t>Mastertextformat bearbeiten</a:t>
+            </a:r>
+          </a:p>
+          <a:p>
+            <a:pPr lvl="1"/>
+            <a:r>
+              <a:rPr lang="de-DE" dirty="0"/>
+              <a:t>Zweite Ebene</a:t>
+            </a:r>
+          </a:p>
+          <a:p>
+            <a:pPr lvl="2"/>
+            <a:r>
+              <a:rPr lang="de-DE" dirty="0"/>
+              <a:t>Dritte Ebene</a:t>
+            </a:r>
+          </a:p>
+          <a:p>
+            <a:pPr lvl="3"/>
+            <a:r>
+              <a:rPr lang="de-DE" dirty="0"/>
+              <a:t>Vierte Ebene</a:t>
+            </a:r>
+          </a:p>
+          <a:p>
+            <a:pPr lvl="4"/>
+            <a:r>
+              <a:rPr lang="de-DE" dirty="0"/>
+              <a:t>Fünfte Ebene</a:t>
+            </a:r>
+          </a:p>
+        </p:txBody>
+      </p:sp>
+      <p:sp>
+        <p:nvSpPr>
+          <p:cNvPr id="7" name="Foliennummernplatzhalter 6">
+            <a:extLst>
+              <a:ext uri="{FF2B5EF4-FFF2-40B4-BE49-F238E27FC236}">
+                <a16:creationId xmlns:a16="http://schemas.microsoft.com/office/drawing/2014/main" id="{08770F45-2D74-3159-6AC4-B8F2D89C0218}"/>
+              </a:ext>
+            </a:extLst>
+          </p:cNvPr>
+          <p:cNvSpPr>
+            <a:spLocks noGrp="1"/>
+          </p:cNvSpPr>
+          <p:nvPr>
+            <p:ph type="sldNum" sz="quarter" idx="12"/>
+          </p:nvPr>
+        </p:nvSpPr>
+        <p:spPr>
+          <a:xfrm>
+            <a:off x="786442" y="6258016"/>
+            <a:ext cx="806400" cy="365125"/>
+          </a:xfrm>
+        </p:spPr>
+        <p:txBody>
+          <a:bodyPr/>
+          <a:lstStyle/>
+          <a:p>
+            <a:fld id="{B7E13D07-A954-7D45-9CFC-776D35F33DC4}" type="slidenum">
+              <a:rPr lang="de-DE" smtClean="0"/>
+              <a:t>‹Nr.›</a:t>
+            </a:fld>
+            <a:endParaRPr lang="de-DE"/>
+          </a:p>
+        </p:txBody>
+      </p:sp>
+      <p:sp>
+        <p:nvSpPr>
+          <p:cNvPr id="8" name="Inhaltsplatzhalter 2">
+            <a:extLst>
+              <a:ext uri="{FF2B5EF4-FFF2-40B4-BE49-F238E27FC236}">
+                <a16:creationId xmlns:a16="http://schemas.microsoft.com/office/drawing/2014/main" id="{56B8ACB6-F06D-DFC1-43B3-6B9BC4D66006}"/>
+              </a:ext>
+            </a:extLst>
+          </p:cNvPr>
+          <p:cNvSpPr>
+            <a:spLocks noGrp="1"/>
+          </p:cNvSpPr>
+          <p:nvPr>
+            <p:ph sz="half" idx="13"/>
+          </p:nvPr>
+        </p:nvSpPr>
+        <p:spPr>
+          <a:xfrm>
+            <a:off x="6178550" y="1818000"/>
+            <a:ext cx="5180400" cy="3787200"/>
+          </a:xfrm>
+        </p:spPr>
+        <p:txBody>
+          <a:bodyPr lIns="90000" tIns="46800" rIns="90000" bIns="46800"/>
+          <a:lstStyle/>
+          <a:p>
+            <a:pPr lvl="0"/>
+            <a:r>
+              <a:rPr lang="de-DE"/>
+              <a:t>Mastertextformat bearbeiten</a:t>
+            </a:r>
+          </a:p>
+          <a:p>
+            <a:pPr lvl="1"/>
+            <a:r>
+              <a:rPr lang="de-DE"/>
+              <a:t>Zweite Ebene</a:t>
+            </a:r>
+          </a:p>
+          <a:p>
+            <a:pPr lvl="2"/>
+            <a:r>
+              <a:rPr lang="de-DE"/>
+              <a:t>Dritte Ebene</a:t>
+            </a:r>
+          </a:p>
+          <a:p>
+            <a:pPr lvl="3"/>
+            <a:r>
+              <a:rPr lang="de-DE"/>
+              <a:t>Vierte Ebene</a:t>
+            </a:r>
+          </a:p>
+          <a:p>
+            <a:pPr lvl="4"/>
+            <a:r>
+              <a:rPr lang="de-DE"/>
+              <a:t>Fünfte Ebene</a:t>
+            </a:r>
+          </a:p>
+        </p:txBody>
+      </p:sp>
+      <p:sp>
+        <p:nvSpPr>
+          <p:cNvPr id="10" name="Titel 9">
+            <a:extLst>
+              <a:ext uri="{FF2B5EF4-FFF2-40B4-BE49-F238E27FC236}">
+                <a16:creationId xmlns:a16="http://schemas.microsoft.com/office/drawing/2014/main" id="{0D888D36-3889-00BE-CACC-3F21AADD9654}"/>
+              </a:ext>
+            </a:extLst>
+          </p:cNvPr>
+          <p:cNvSpPr>
+            <a:spLocks noGrp="1"/>
+          </p:cNvSpPr>
+          <p:nvPr>
+            <p:ph type="title" hasCustomPrompt="1"/>
+          </p:nvPr>
+        </p:nvSpPr>
+        <p:spPr/>
+        <p:txBody>
+          <a:bodyPr/>
+          <a:lstStyle>
+            <a:lvl1pPr>
+              <a:defRPr>
+                <a:solidFill>
+                  <a:schemeClr val="tx1"/>
+                </a:solidFill>
+              </a:defRPr>
+            </a:lvl1pPr>
+          </a:lstStyle>
+          <a:p>
+            <a:r>
+              <a:rPr lang="de-DE" dirty="0"/>
+              <a:t>Titel hier</a:t>
+            </a:r>
+          </a:p>
+        </p:txBody>
+      </p:sp>
+      <p:cxnSp>
+        <p:nvCxnSpPr>
+          <p:cNvPr id="9" name="Gerade Verbindung 8">
+            <a:extLst>
+              <a:ext uri="{FF2B5EF4-FFF2-40B4-BE49-F238E27FC236}">
+                <a16:creationId xmlns:a16="http://schemas.microsoft.com/office/drawing/2014/main" id="{E4BACE39-468B-7F21-8A97-1FF7D8754D81}"/>
+              </a:ext>
+            </a:extLst>
+          </p:cNvPr>
+          <p:cNvCxnSpPr/>
+          <p:nvPr userDrawn="1"/>
+        </p:nvCxnSpPr>
+        <p:spPr>
+          <a:xfrm>
+            <a:off x="0" y="6831723"/>
+            <a:ext cx="12192000" cy="0"/>
+          </a:xfrm>
+          <a:prstGeom prst="line">
+            <a:avLst/>
+          </a:prstGeom>
+          <a:ln w="63500">
+            <a:solidFill>
+              <a:srgbClr val="FAE661"/>
+            </a:solidFill>
+          </a:ln>
+        </p:spPr>
+        <p:style>
+          <a:lnRef idx="1">
+            <a:schemeClr val="accent1"/>
+          </a:lnRef>
+          <a:fillRef idx="0">
+            <a:schemeClr val="accent1"/>
+          </a:fillRef>
+          <a:effectRef idx="0">
+            <a:schemeClr val="accent1"/>
+          </a:effectRef>
+          <a:fontRef idx="minor">
+            <a:schemeClr val="tx1"/>
+          </a:fontRef>
+        </p:style>
+      </p:cxnSp>
+      <p:pic>
+        <p:nvPicPr>
+          <p:cNvPr id="4" name="Grafik 3">
+            <a:extLst>
+              <a:ext uri="{FF2B5EF4-FFF2-40B4-BE49-F238E27FC236}">
+                <a16:creationId xmlns:a16="http://schemas.microsoft.com/office/drawing/2014/main" id="{ADBE4210-2677-8D59-2851-FA3A2621676D}"/>
+              </a:ext>
+            </a:extLst>
+          </p:cNvPr>
+          <p:cNvPicPr>
+            <a:picLocks noChangeAspect="1"/>
+          </p:cNvPicPr>
+          <p:nvPr userDrawn="1"/>
+        </p:nvPicPr>
+        <p:blipFill>
+          <a:blip r:embed="rId2"/>
+          <a:srcRect/>
+          <a:stretch/>
+        </p:blipFill>
+        <p:spPr>
+          <a:xfrm>
+            <a:off x="10589443" y="5819470"/>
+            <a:ext cx="665655" cy="665655"/>
+          </a:xfrm>
+          <a:prstGeom prst="rect">
+            <a:avLst/>
+          </a:prstGeom>
+        </p:spPr>
+      </p:pic>
+      <p:sp>
+        <p:nvSpPr>
+          <p:cNvPr id="2" name="Datumsplatzhalter 3">
+            <a:extLst>
+              <a:ext uri="{FF2B5EF4-FFF2-40B4-BE49-F238E27FC236}">
+                <a16:creationId xmlns:a16="http://schemas.microsoft.com/office/drawing/2014/main" id="{A2F30055-0E6D-F929-7410-45345AABA6AB}"/>
+              </a:ext>
+            </a:extLst>
+          </p:cNvPr>
+          <p:cNvSpPr>
+            <a:spLocks noGrp="1"/>
+          </p:cNvSpPr>
+          <p:nvPr>
+            <p:ph type="dt" sz="half" idx="2"/>
+          </p:nvPr>
+        </p:nvSpPr>
+        <p:spPr>
+          <a:xfrm>
+            <a:off x="9609615" y="6265040"/>
+            <a:ext cx="977443" cy="365125"/>
+          </a:xfrm>
+          <a:prstGeom prst="rect">
+            <a:avLst/>
+          </a:prstGeom>
+        </p:spPr>
+        <p:txBody>
+          <a:bodyPr vert="horz" lIns="91440" tIns="45720" rIns="91440" bIns="45720" rtlCol="0" anchor="ctr"/>
+          <a:lstStyle>
+            <a:lvl1pPr algn="r">
+              <a:defRPr sz="800">
+                <a:solidFill>
+                  <a:schemeClr val="tx1"/>
+                </a:solidFill>
+                <a:latin typeface="Roboto" panose="02000000000000000000" pitchFamily="2" charset="0"/>
+                <a:ea typeface="Roboto" panose="02000000000000000000" pitchFamily="2" charset="0"/>
+              </a:defRPr>
+            </a:lvl1pPr>
+          </a:lstStyle>
+          <a:p>
+            <a:fld id="{86B4728B-49EC-AC4B-92D0-45D4091857E0}" type="datetime1">
+              <a:rPr lang="de-DE" smtClean="0"/>
+              <a:pPr/>
+              <a:t>05.12.2025</a:t>
+            </a:fld>
+            <a:endParaRPr lang="de-DE"/>
+          </a:p>
+        </p:txBody>
+      </p:sp>
+      <p:sp>
+        <p:nvSpPr>
+          <p:cNvPr id="5" name="Fußzeilenplatzhalter 2">
+            <a:extLst>
+              <a:ext uri="{FF2B5EF4-FFF2-40B4-BE49-F238E27FC236}">
+                <a16:creationId xmlns:a16="http://schemas.microsoft.com/office/drawing/2014/main" id="{C9C71B0D-C4B5-1FCA-91B7-C0D1EF84927C}"/>
+              </a:ext>
+            </a:extLst>
+          </p:cNvPr>
+          <p:cNvSpPr>
+            <a:spLocks noGrp="1"/>
+          </p:cNvSpPr>
+          <p:nvPr>
+            <p:ph type="ftr" sz="quarter" idx="11"/>
+          </p:nvPr>
+        </p:nvSpPr>
+        <p:spPr>
+          <a:xfrm>
+            <a:off x="4033742" y="6265039"/>
+            <a:ext cx="4114800" cy="365125"/>
+          </a:xfrm>
+        </p:spPr>
+        <p:txBody>
+          <a:bodyPr/>
+          <a:lstStyle/>
+          <a:p>
+            <a:r>
+              <a:rPr lang="de-DE"/>
+              <a:t>Fußzeile bearb. über „Einfügen &gt; Kopf- und Fußzeile“</a:t>
+            </a:r>
+          </a:p>
+        </p:txBody>
+      </p:sp>
+    </p:spTree>
+    <p:extLst>
+      <p:ext uri="{BB962C8B-B14F-4D97-AF65-F5344CB8AC3E}">
+        <p14:creationId xmlns:p14="http://schemas.microsoft.com/office/powerpoint/2010/main" val="2598515396"/>
+      </p:ext>
+    </p:extLst>
+  </p:cSld>
+  <p:clrMapOvr>
+    <a:masterClrMapping/>
+  </p:clrMapOvr>
+</p:sldLayout>
+</file>
+
+<file path=ppt/slideLayouts/slideLayout4.xml><?xml version="1.0" encoding="utf-8"?>
+<p:sldLayout xmlns:a="http://schemas.openxmlformats.org/drawingml/2006/main" xmlns:r="http://schemas.openxmlformats.org/officeDocument/2006/relationships" xmlns:p="http://schemas.openxmlformats.org/presentationml/2006/main" preserve="1" userDrawn="1">
+  <p:cSld name="Leer">
+    <p:spTree>
+      <p:nvGrpSpPr>
+        <p:cNvPr id="1" name=""/>
+        <p:cNvGrpSpPr/>
+        <p:nvPr/>
+      </p:nvGrpSpPr>
+      <p:grpSpPr>
+        <a:xfrm>
+          <a:off x="0" y="0"/>
+          <a:ext cx="0" cy="0"/>
+          <a:chOff x="0" y="0"/>
+          <a:chExt cx="0" cy="0"/>
+        </a:xfrm>
+      </p:grpSpPr>
+      <p:sp>
+        <p:nvSpPr>
+          <p:cNvPr id="5" name="Fußzeilenplatzhalter 4">
+            <a:extLst>
+              <a:ext uri="{FF2B5EF4-FFF2-40B4-BE49-F238E27FC236}">
+                <a16:creationId xmlns:a16="http://schemas.microsoft.com/office/drawing/2014/main" id="{8328D334-4D11-362C-27E8-F8D3122996A0}"/>
+              </a:ext>
+            </a:extLst>
+          </p:cNvPr>
+          <p:cNvSpPr>
+            <a:spLocks noGrp="1"/>
+          </p:cNvSpPr>
+          <p:nvPr>
+            <p:ph type="ftr" sz="quarter" idx="11"/>
+          </p:nvPr>
+        </p:nvSpPr>
+        <p:spPr>
+          <a:xfrm>
+            <a:off x="4033742" y="6265039"/>
+            <a:ext cx="4114800" cy="365125"/>
+          </a:xfrm>
+        </p:spPr>
+        <p:txBody>
+          <a:bodyPr/>
+          <a:lstStyle/>
+          <a:p>
+            <a:r>
+              <a:rPr lang="de-DE"/>
+              <a:t>Fußzeile bearb. über „Einfügen &gt; Kopf- und Fußzeile“</a:t>
+            </a:r>
+          </a:p>
+        </p:txBody>
+      </p:sp>
+      <p:cxnSp>
+        <p:nvCxnSpPr>
+          <p:cNvPr id="7" name="Gerade Verbindung 6">
+            <a:extLst>
+              <a:ext uri="{FF2B5EF4-FFF2-40B4-BE49-F238E27FC236}">
+                <a16:creationId xmlns:a16="http://schemas.microsoft.com/office/drawing/2014/main" id="{57E85784-07C7-E131-BB93-1587BA129A5B}"/>
+              </a:ext>
+            </a:extLst>
+          </p:cNvPr>
+          <p:cNvCxnSpPr/>
+          <p:nvPr userDrawn="1"/>
+        </p:nvCxnSpPr>
+        <p:spPr>
+          <a:xfrm>
+            <a:off x="0" y="6831723"/>
+            <a:ext cx="12192000" cy="0"/>
+          </a:xfrm>
+          <a:prstGeom prst="line">
+            <a:avLst/>
+          </a:prstGeom>
+          <a:ln w="63500">
+            <a:solidFill>
+              <a:srgbClr val="FAE661"/>
+            </a:solidFill>
+          </a:ln>
+        </p:spPr>
+        <p:style>
+          <a:lnRef idx="1">
+            <a:schemeClr val="accent1"/>
+          </a:lnRef>
+          <a:fillRef idx="0">
+            <a:schemeClr val="accent1"/>
+          </a:fillRef>
+          <a:effectRef idx="0">
+            <a:schemeClr val="accent1"/>
+          </a:effectRef>
+          <a:fontRef idx="minor">
+            <a:schemeClr val="tx1"/>
+          </a:fontRef>
+        </p:style>
+      </p:cxnSp>
+      <p:pic>
+        <p:nvPicPr>
+          <p:cNvPr id="3" name="Grafik 2">
+            <a:extLst>
+              <a:ext uri="{FF2B5EF4-FFF2-40B4-BE49-F238E27FC236}">
+                <a16:creationId xmlns:a16="http://schemas.microsoft.com/office/drawing/2014/main" id="{427D472F-8494-CF8C-D2DF-A11315AF1911}"/>
+              </a:ext>
+            </a:extLst>
+          </p:cNvPr>
+          <p:cNvPicPr>
+            <a:picLocks noChangeAspect="1"/>
+          </p:cNvPicPr>
+          <p:nvPr userDrawn="1"/>
+        </p:nvPicPr>
+        <p:blipFill>
+          <a:blip r:embed="rId2"/>
+          <a:srcRect/>
+          <a:stretch/>
+        </p:blipFill>
+        <p:spPr>
+          <a:xfrm>
+            <a:off x="10589443" y="5819470"/>
+            <a:ext cx="665655" cy="665655"/>
+          </a:xfrm>
+          <a:prstGeom prst="rect">
+            <a:avLst/>
+          </a:prstGeom>
+        </p:spPr>
+      </p:pic>
+      <p:sp>
+        <p:nvSpPr>
+          <p:cNvPr id="4" name="Inhaltsplatzhalter 4">
+            <a:extLst>
+              <a:ext uri="{FF2B5EF4-FFF2-40B4-BE49-F238E27FC236}">
+                <a16:creationId xmlns:a16="http://schemas.microsoft.com/office/drawing/2014/main" id="{27BDD994-59D2-9A4E-8264-E164C08DB13A}"/>
+              </a:ext>
+            </a:extLst>
+          </p:cNvPr>
+          <p:cNvSpPr>
+            <a:spLocks noGrp="1"/>
+          </p:cNvSpPr>
+          <p:nvPr>
+            <p:ph sz="half" idx="13"/>
+          </p:nvPr>
+        </p:nvSpPr>
+        <p:spPr>
+          <a:xfrm>
+            <a:off x="838200" y="1818000"/>
+            <a:ext cx="10520750" cy="3787200"/>
+          </a:xfrm>
+        </p:spPr>
+        <p:txBody>
+          <a:bodyPr/>
+          <a:lstStyle/>
+          <a:p>
+            <a:endParaRPr lang="de-DE" dirty="0"/>
+          </a:p>
+        </p:txBody>
+      </p:sp>
+      <p:sp>
+        <p:nvSpPr>
+          <p:cNvPr id="8" name="Titel 5">
+            <a:extLst>
+              <a:ext uri="{FF2B5EF4-FFF2-40B4-BE49-F238E27FC236}">
+                <a16:creationId xmlns:a16="http://schemas.microsoft.com/office/drawing/2014/main" id="{662DB78A-D2E4-BF7D-8EF9-7E912CF9CDF3}"/>
+              </a:ext>
+            </a:extLst>
+          </p:cNvPr>
+          <p:cNvSpPr>
+            <a:spLocks noGrp="1"/>
+          </p:cNvSpPr>
+          <p:nvPr>
+            <p:ph type="title" hasCustomPrompt="1"/>
+          </p:nvPr>
+        </p:nvSpPr>
+        <p:spPr>
+          <a:xfrm>
+            <a:off x="838200" y="365125"/>
+            <a:ext cx="10515600" cy="1325563"/>
+          </a:xfrm>
+        </p:spPr>
+        <p:txBody>
+          <a:bodyPr/>
+          <a:lstStyle>
+            <a:lvl1pPr>
+              <a:defRPr/>
+            </a:lvl1pPr>
+          </a:lstStyle>
+          <a:p>
+            <a:r>
+              <a:rPr lang="de-DE" dirty="0"/>
+              <a:t>Überschrift</a:t>
+            </a:r>
+          </a:p>
+        </p:txBody>
+      </p:sp>
+      <p:sp>
+        <p:nvSpPr>
+          <p:cNvPr id="9" name="Foliennummernplatzhalter 6">
+            <a:extLst>
+              <a:ext uri="{FF2B5EF4-FFF2-40B4-BE49-F238E27FC236}">
+                <a16:creationId xmlns:a16="http://schemas.microsoft.com/office/drawing/2014/main" id="{ECC500E9-AB0F-D444-9389-CEAB52DBCA67}"/>
+              </a:ext>
+            </a:extLst>
+          </p:cNvPr>
+          <p:cNvSpPr>
+            <a:spLocks noGrp="1"/>
+          </p:cNvSpPr>
+          <p:nvPr>
+            <p:ph type="sldNum" sz="quarter" idx="12"/>
+          </p:nvPr>
+        </p:nvSpPr>
+        <p:spPr>
+          <a:xfrm>
+            <a:off x="786442" y="6258016"/>
+            <a:ext cx="806400" cy="365125"/>
+          </a:xfrm>
+        </p:spPr>
+        <p:txBody>
+          <a:bodyPr/>
+          <a:lstStyle/>
+          <a:p>
+            <a:fld id="{B7E13D07-A954-7D45-9CFC-776D35F33DC4}" type="slidenum">
+              <a:rPr lang="de-DE" smtClean="0"/>
+              <a:t>‹Nr.›</a:t>
+            </a:fld>
+            <a:endParaRPr lang="de-DE"/>
+          </a:p>
+        </p:txBody>
+      </p:sp>
+      <p:sp>
+        <p:nvSpPr>
+          <p:cNvPr id="10" name="Datumsplatzhalter 3">
+            <a:extLst>
+              <a:ext uri="{FF2B5EF4-FFF2-40B4-BE49-F238E27FC236}">
+                <a16:creationId xmlns:a16="http://schemas.microsoft.com/office/drawing/2014/main" id="{59BD953E-0B23-1677-A923-2AC81684AEC4}"/>
+              </a:ext>
+            </a:extLst>
+          </p:cNvPr>
+          <p:cNvSpPr>
+            <a:spLocks noGrp="1"/>
+          </p:cNvSpPr>
+          <p:nvPr>
+            <p:ph type="dt" sz="half" idx="2"/>
+          </p:nvPr>
+        </p:nvSpPr>
+        <p:spPr>
+          <a:xfrm>
+            <a:off x="9609615" y="6265040"/>
+            <a:ext cx="977443" cy="365125"/>
+          </a:xfrm>
+          <a:prstGeom prst="rect">
+            <a:avLst/>
+          </a:prstGeom>
+        </p:spPr>
+        <p:txBody>
+          <a:bodyPr vert="horz" lIns="91440" tIns="45720" rIns="91440" bIns="45720" rtlCol="0" anchor="ctr"/>
+          <a:lstStyle>
+            <a:lvl1pPr algn="r">
+              <a:defRPr sz="800">
+                <a:solidFill>
+                  <a:schemeClr val="tx1"/>
+                </a:solidFill>
+                <a:latin typeface="Roboto" panose="02000000000000000000" pitchFamily="2" charset="0"/>
+                <a:ea typeface="Roboto" panose="02000000000000000000" pitchFamily="2" charset="0"/>
+              </a:defRPr>
+            </a:lvl1pPr>
+          </a:lstStyle>
+          <a:p>
+            <a:fld id="{86B4728B-49EC-AC4B-92D0-45D4091857E0}" type="datetime1">
+              <a:rPr lang="de-DE" smtClean="0"/>
+              <a:pPr/>
+              <a:t>05.12.2025</a:t>
+            </a:fld>
+            <a:endParaRPr lang="de-DE"/>
+          </a:p>
+        </p:txBody>
+      </p:sp>
+    </p:spTree>
+    <p:extLst>
+      <p:ext uri="{BB962C8B-B14F-4D97-AF65-F5344CB8AC3E}">
+        <p14:creationId xmlns:p14="http://schemas.microsoft.com/office/powerpoint/2010/main" val="173996153"/>
+      </p:ext>
+    </p:extLst>
+  </p:cSld>
+  <p:clrMapOvr>
+    <a:masterClrMapping/>
+  </p:clrMapOvr>
+</p:sldLayout>
+</file>
+
+<file path=ppt/slideMasters/slideMaster1.xml><?xml version="1.0" encoding="utf-8"?>
+<p:sldMaster xmlns:a="http://schemas.openxmlformats.org/drawingml/2006/main" xmlns:r="http://schemas.openxmlformats.org/officeDocument/2006/relationships" xmlns:p="http://schemas.openxmlformats.org/presentationml/2006/main">
+  <p:cSld>
     <p:bg>
       <p:bgRef idx="1001">
         <a:schemeClr val="bg1"/>
@@ -1634,138 +2891,401 @@
           <a:chExt cx="0" cy="0"/>
         </a:xfrm>
       </p:grpSpPr>
+      <p:sp>
+        <p:nvSpPr>
+          <p:cNvPr id="3" name="Textplatzhalter 2">
+            <a:extLst>
+              <a:ext uri="{FF2B5EF4-FFF2-40B4-BE49-F238E27FC236}">
+                <a16:creationId xmlns:a16="http://schemas.microsoft.com/office/drawing/2014/main" id="{D3D783FB-39D7-ABF7-16DE-8DB3E65EF090}"/>
+              </a:ext>
+            </a:extLst>
+          </p:cNvPr>
+          <p:cNvSpPr>
+            <a:spLocks noGrp="1"/>
+          </p:cNvSpPr>
+          <p:nvPr>
+            <p:ph type="body" idx="1"/>
+          </p:nvPr>
+        </p:nvSpPr>
+        <p:spPr>
+          <a:xfrm>
+            <a:off x="838200" y="1825625"/>
+            <a:ext cx="10515600" cy="4140000"/>
+          </a:xfrm>
+          <a:prstGeom prst="rect">
+            <a:avLst/>
+          </a:prstGeom>
+        </p:spPr>
+        <p:txBody>
+          <a:bodyPr vert="horz" lIns="91440" tIns="45720" rIns="91440" bIns="45720" rtlCol="0">
+            <a:normAutofit/>
+          </a:bodyPr>
+          <a:lstStyle/>
+          <a:p>
+            <a:pPr lvl="0"/>
+            <a:r>
+              <a:rPr lang="de-DE" dirty="0"/>
+              <a:t>Mastertextformat bearbeiten</a:t>
+            </a:r>
+          </a:p>
+          <a:p>
+            <a:pPr lvl="1"/>
+            <a:r>
+              <a:rPr lang="de-DE" dirty="0"/>
+              <a:t>Zweite Ebene</a:t>
+            </a:r>
+          </a:p>
+          <a:p>
+            <a:pPr lvl="2"/>
+            <a:r>
+              <a:rPr lang="de-DE" dirty="0"/>
+              <a:t>Dritte Ebene</a:t>
+            </a:r>
+          </a:p>
+          <a:p>
+            <a:pPr lvl="3"/>
+            <a:r>
+              <a:rPr lang="de-DE" dirty="0"/>
+              <a:t>Vierte Ebene</a:t>
+            </a:r>
+          </a:p>
+          <a:p>
+            <a:pPr lvl="4"/>
+            <a:r>
+              <a:rPr lang="de-DE" dirty="0"/>
+              <a:t>Fünfte Ebene</a:t>
+            </a:r>
+          </a:p>
+        </p:txBody>
+      </p:sp>
+      <p:sp>
+        <p:nvSpPr>
+          <p:cNvPr id="4" name="Datumsplatzhalter 3">
+            <a:extLst>
+              <a:ext uri="{FF2B5EF4-FFF2-40B4-BE49-F238E27FC236}">
+                <a16:creationId xmlns:a16="http://schemas.microsoft.com/office/drawing/2014/main" id="{84C5986A-5D8D-D2C4-9671-420CD5F93225}"/>
+              </a:ext>
+            </a:extLst>
+          </p:cNvPr>
+          <p:cNvSpPr>
+            <a:spLocks noGrp="1"/>
+          </p:cNvSpPr>
+          <p:nvPr>
+            <p:ph type="dt" sz="half" idx="2"/>
+          </p:nvPr>
+        </p:nvSpPr>
+        <p:spPr>
+          <a:xfrm>
+            <a:off x="9612000" y="6120000"/>
+            <a:ext cx="977443" cy="365125"/>
+          </a:xfrm>
+          <a:prstGeom prst="rect">
+            <a:avLst/>
+          </a:prstGeom>
+        </p:spPr>
+        <p:txBody>
+          <a:bodyPr vert="horz" lIns="91440" tIns="45720" rIns="91440" bIns="45720" rtlCol="0" anchor="ctr"/>
+          <a:lstStyle>
+            <a:lvl1pPr algn="r">
+              <a:defRPr sz="800">
+                <a:solidFill>
+                  <a:schemeClr val="tx1"/>
+                </a:solidFill>
+                <a:latin typeface="Roboto" panose="02000000000000000000" pitchFamily="2" charset="0"/>
+                <a:ea typeface="Roboto" panose="02000000000000000000" pitchFamily="2" charset="0"/>
+              </a:defRPr>
+            </a:lvl1pPr>
+          </a:lstStyle>
+          <a:p>
+            <a:fld id="{86B4728B-49EC-AC4B-92D0-45D4091857E0}" type="datetime1">
+              <a:rPr lang="de-DE" smtClean="0"/>
+              <a:pPr/>
+              <a:t>05.12.2025</a:t>
+            </a:fld>
+            <a:endParaRPr lang="de-DE"/>
+          </a:p>
+        </p:txBody>
+      </p:sp>
+      <p:sp>
+        <p:nvSpPr>
+          <p:cNvPr id="5" name="Fußzeilenplatzhalter 4">
+            <a:extLst>
+              <a:ext uri="{FF2B5EF4-FFF2-40B4-BE49-F238E27FC236}">
+                <a16:creationId xmlns:a16="http://schemas.microsoft.com/office/drawing/2014/main" id="{E293E0F8-1D03-C1B4-4453-1506268BA3BF}"/>
+              </a:ext>
+            </a:extLst>
+          </p:cNvPr>
+          <p:cNvSpPr>
+            <a:spLocks noGrp="1"/>
+          </p:cNvSpPr>
+          <p:nvPr>
+            <p:ph type="ftr" sz="quarter" idx="3"/>
+          </p:nvPr>
+        </p:nvSpPr>
+        <p:spPr>
+          <a:xfrm>
+            <a:off x="1656000" y="6120000"/>
+            <a:ext cx="4114800" cy="365125"/>
+          </a:xfrm>
+          <a:prstGeom prst="rect">
+            <a:avLst/>
+          </a:prstGeom>
+        </p:spPr>
+        <p:txBody>
+          <a:bodyPr vert="horz" lIns="91440" tIns="45720" rIns="91440" bIns="45720" rtlCol="0" anchor="ctr"/>
+          <a:lstStyle>
+            <a:lvl1pPr algn="ctr">
+              <a:defRPr sz="800">
+                <a:solidFill>
+                  <a:schemeClr val="tx1"/>
+                </a:solidFill>
+                <a:latin typeface="Roboto" panose="02000000000000000000" pitchFamily="2" charset="0"/>
+                <a:ea typeface="Roboto" panose="02000000000000000000" pitchFamily="2" charset="0"/>
+              </a:defRPr>
+            </a:lvl1pPr>
+          </a:lstStyle>
+          <a:p>
+            <a:r>
+              <a:rPr lang="de-DE"/>
+              <a:t>Fußzeile bearb. über „Einfügen &gt; Kopf- und Fußzeile“</a:t>
+            </a:r>
+          </a:p>
+        </p:txBody>
+      </p:sp>
+      <p:sp>
+        <p:nvSpPr>
+          <p:cNvPr id="6" name="Foliennummernplatzhalter 5">
+            <a:extLst>
+              <a:ext uri="{FF2B5EF4-FFF2-40B4-BE49-F238E27FC236}">
+                <a16:creationId xmlns:a16="http://schemas.microsoft.com/office/drawing/2014/main" id="{926D5A66-E4DE-B187-1897-965666ED7179}"/>
+              </a:ext>
+            </a:extLst>
+          </p:cNvPr>
+          <p:cNvSpPr>
+            <a:spLocks noGrp="1"/>
+          </p:cNvSpPr>
+          <p:nvPr>
+            <p:ph type="sldNum" sz="quarter" idx="4"/>
+          </p:nvPr>
+        </p:nvSpPr>
+        <p:spPr>
+          <a:xfrm>
+            <a:off x="838200" y="6120000"/>
+            <a:ext cx="806400" cy="365125"/>
+          </a:xfrm>
+          <a:prstGeom prst="rect">
+            <a:avLst/>
+          </a:prstGeom>
+        </p:spPr>
+        <p:txBody>
+          <a:bodyPr vert="horz" lIns="91440" tIns="45720" rIns="91440" bIns="45720" rtlCol="0" anchor="ctr"/>
+          <a:lstStyle>
+            <a:lvl1pPr algn="l">
+              <a:defRPr sz="800">
+                <a:solidFill>
+                  <a:schemeClr val="tx1"/>
+                </a:solidFill>
+                <a:latin typeface="Roboto" panose="02000000000000000000" pitchFamily="2" charset="0"/>
+                <a:ea typeface="Roboto" panose="02000000000000000000" pitchFamily="2" charset="0"/>
+              </a:defRPr>
+            </a:lvl1pPr>
+          </a:lstStyle>
+          <a:p>
+            <a:fld id="{B7E13D07-A954-7D45-9CFC-776D35F33DC4}" type="slidenum">
+              <a:rPr lang="de-DE" smtClean="0"/>
+              <a:pPr/>
+              <a:t>‹Nr.›</a:t>
+            </a:fld>
+            <a:endParaRPr lang="de-DE"/>
+          </a:p>
+        </p:txBody>
+      </p:sp>
+      <p:sp>
+        <p:nvSpPr>
+          <p:cNvPr id="9" name="Titelplatzhalter 8">
+            <a:extLst>
+              <a:ext uri="{FF2B5EF4-FFF2-40B4-BE49-F238E27FC236}">
+                <a16:creationId xmlns:a16="http://schemas.microsoft.com/office/drawing/2014/main" id="{8ECFFDB3-11A5-1EF7-FF69-1CA10E04E75B}"/>
+              </a:ext>
+            </a:extLst>
+          </p:cNvPr>
+          <p:cNvSpPr>
+            <a:spLocks noGrp="1"/>
+          </p:cNvSpPr>
+          <p:nvPr>
+            <p:ph type="title"/>
+          </p:nvPr>
+        </p:nvSpPr>
+        <p:spPr>
+          <a:xfrm>
+            <a:off x="838200" y="365125"/>
+            <a:ext cx="10515600" cy="1325563"/>
+          </a:xfrm>
+          <a:prstGeom prst="rect">
+            <a:avLst/>
+          </a:prstGeom>
+        </p:spPr>
+        <p:txBody>
+          <a:bodyPr vert="horz" lIns="91440" tIns="45720" rIns="91440" bIns="45720" rtlCol="0" anchor="b">
+            <a:normAutofit/>
+          </a:bodyPr>
+          <a:lstStyle/>
+          <a:p>
+            <a:r>
+              <a:rPr lang="de-DE" dirty="0" err="1"/>
+              <a:t>MMBbS</a:t>
+            </a:r>
+            <a:r>
+              <a:rPr lang="de-DE" dirty="0"/>
+              <a:t> </a:t>
+            </a:r>
+            <a:r>
+              <a:rPr lang="de-DE" dirty="0" err="1"/>
+              <a:t>Powerpoint</a:t>
+            </a:r>
+            <a:r>
+              <a:rPr lang="de-DE" dirty="0"/>
+              <a:t> Vorlage</a:t>
+            </a:r>
+          </a:p>
+        </p:txBody>
+      </p:sp>
     </p:spTree>
-  </p:cSld>
-  <p:clrMapOvr>
-    <a:masterClrMapping/>
-  </p:clrMapOvr>
-</p:sldLayout>
-</file>
-
-<file path=ppt/slideMasters/slideMaster1.xml><?xml version="1.0" encoding="utf-8"?>
-<p:sldMaster xmlns:a="http://schemas.openxmlformats.org/drawingml/2006/main" xmlns:r="http://schemas.openxmlformats.org/officeDocument/2006/relationships" xmlns:p="http://schemas.openxmlformats.org/presentationml/2006/main">
-  <p:cSld>
-    <p:spTree>
-      <p:nvGrpSpPr>
-        <p:cNvPr id="1" name=""/>
-        <p:cNvGrpSpPr/>
-        <p:nvPr/>
-      </p:nvGrpSpPr>
-      <p:grpSpPr>
-        <a:xfrm>
-          <a:off x="0" y="0"/>
-          <a:ext cx="0" cy="0"/>
-          <a:chOff x="0" y="0"/>
-          <a:chExt cx="0" cy="0"/>
-        </a:xfrm>
-      </p:grpSpPr>
-    </p:spTree>
+    <p:extLst>
+      <p:ext uri="{BB962C8B-B14F-4D97-AF65-F5344CB8AC3E}">
+        <p14:creationId xmlns:p14="http://schemas.microsoft.com/office/powerpoint/2010/main" val="181058324"/>
+      </p:ext>
+    </p:extLst>
   </p:cSld>
   <p:clrMap bg1="lt1" tx1="dk1" bg2="lt2" tx2="dk2" accent1="accent1" accent2="accent2" accent3="accent3" accent4="accent4" accent5="accent5" accent6="accent6" hlink="hlink" folHlink="folHlink"/>
   <p:sldLayoutIdLst>
-    <p:sldLayoutId id="2147483649" r:id="rId1"/>
+    <p:sldLayoutId id="2147483650" r:id="rId1"/>
+    <p:sldLayoutId id="2147483680" r:id="rId2"/>
+    <p:sldLayoutId id="2147483661" r:id="rId3"/>
+    <p:sldLayoutId id="2147483651" r:id="rId4"/>
   </p:sldLayoutIdLst>
-  <p:hf sldNum="0" hdr="0" ftr="0" dt="0"/>
+  <p:hf hdr="0"/>
   <p:txStyles>
     <p:titleStyle>
-      <a:lvl1pPr algn="ctr" defTabSz="914400" rtl="0" eaLnBrk="1" latinLnBrk="0" hangingPunct="1">
+      <a:lvl1pPr algn="l" defTabSz="914400" rtl="0" eaLnBrk="1" latinLnBrk="0" hangingPunct="1">
+        <a:lnSpc>
+          <a:spcPct val="90000"/>
+        </a:lnSpc>
         <a:spcBef>
           <a:spcPct val="0"/>
         </a:spcBef>
         <a:buNone/>
-        <a:defRPr sz="4400" kern="1200">
+        <a:defRPr sz="4400" b="1" i="0" kern="1200" cap="none" spc="0" baseline="0">
           <a:solidFill>
             <a:schemeClr val="tx1"/>
           </a:solidFill>
-          <a:latin typeface="+mj-lt"/>
-          <a:ea typeface="+mj-ea"/>
+          <a:latin typeface="Roboto" panose="02000000000000000000" pitchFamily="2" charset="0"/>
+          <a:ea typeface="Roboto" panose="02000000000000000000" pitchFamily="2" charset="0"/>
           <a:cs typeface="+mj-cs"/>
         </a:defRPr>
       </a:lvl1pPr>
     </p:titleStyle>
     <p:bodyStyle>
-      <a:lvl1pPr marL="342900" indent="-342900" algn="l" defTabSz="914400" rtl="0" eaLnBrk="1" latinLnBrk="0" hangingPunct="1">
+      <a:lvl1pPr marL="0" indent="0" algn="l" defTabSz="914400" rtl="0" eaLnBrk="1" latinLnBrk="0" hangingPunct="1">
+        <a:lnSpc>
+          <a:spcPct val="150000"/>
+        </a:lnSpc>
         <a:spcBef>
-          <a:spcPct val="20000"/>
+          <a:spcPts val="1000"/>
         </a:spcBef>
-        <a:buFont typeface="Arial" pitchFamily="34" charset="0"/>
-        <a:buChar char="•"/>
-        <a:defRPr sz="3200" kern="1200">
+        <a:buFont typeface="Arial" panose="020B0604020202020204" pitchFamily="34" charset="0"/>
+        <a:buNone/>
+        <a:defRPr sz="1800" kern="1200">
           <a:solidFill>
             <a:schemeClr val="tx1"/>
           </a:solidFill>
-          <a:latin typeface="+mn-lt"/>
-          <a:ea typeface="+mn-ea"/>
+          <a:latin typeface="Roboto" panose="02000000000000000000" pitchFamily="2" charset="0"/>
+          <a:ea typeface="Roboto" panose="02000000000000000000" pitchFamily="2" charset="0"/>
           <a:cs typeface="+mn-cs"/>
         </a:defRPr>
       </a:lvl1pPr>
-      <a:lvl2pPr marL="742950" indent="-285750" algn="l" defTabSz="914400" rtl="0" eaLnBrk="1" latinLnBrk="0" hangingPunct="1">
+      <a:lvl2pPr marL="457200" indent="0" algn="l" defTabSz="914400" rtl="0" eaLnBrk="1" latinLnBrk="0" hangingPunct="1">
+        <a:lnSpc>
+          <a:spcPct val="150000"/>
+        </a:lnSpc>
         <a:spcBef>
-          <a:spcPct val="20000"/>
+          <a:spcPts val="500"/>
         </a:spcBef>
-        <a:buFont typeface="Arial" pitchFamily="34" charset="0"/>
-        <a:buChar char="–"/>
-        <a:defRPr sz="2800" kern="1200">
+        <a:buFont typeface="Arial" panose="020B0604020202020204" pitchFamily="34" charset="0"/>
+        <a:buNone/>
+        <a:defRPr sz="1600" kern="1200">
           <a:solidFill>
             <a:schemeClr val="tx1"/>
           </a:solidFill>
-          <a:latin typeface="+mn-lt"/>
-          <a:ea typeface="+mn-ea"/>
+          <a:latin typeface="Roboto" panose="02000000000000000000" pitchFamily="2" charset="0"/>
+          <a:ea typeface="Roboto" panose="02000000000000000000" pitchFamily="2" charset="0"/>
           <a:cs typeface="+mn-cs"/>
         </a:defRPr>
       </a:lvl2pPr>
-      <a:lvl3pPr marL="1143000" indent="-228600" algn="l" defTabSz="914400" rtl="0" eaLnBrk="1" latinLnBrk="0" hangingPunct="1">
+      <a:lvl3pPr marL="914400" indent="0" algn="l" defTabSz="914400" rtl="0" eaLnBrk="1" latinLnBrk="0" hangingPunct="1">
+        <a:lnSpc>
+          <a:spcPct val="150000"/>
+        </a:lnSpc>
         <a:spcBef>
-          <a:spcPct val="20000"/>
+          <a:spcPts val="500"/>
         </a:spcBef>
-        <a:buFont typeface="Arial" pitchFamily="34" charset="0"/>
-        <a:buChar char="•"/>
-        <a:defRPr sz="2400" kern="1200">
+        <a:buFont typeface="Arial" panose="020B0604020202020204" pitchFamily="34" charset="0"/>
+        <a:buNone/>
+        <a:defRPr sz="1400" kern="1200">
           <a:solidFill>
             <a:schemeClr val="tx1"/>
           </a:solidFill>
-          <a:latin typeface="+mn-lt"/>
-          <a:ea typeface="+mn-ea"/>
+          <a:latin typeface="Roboto" panose="02000000000000000000" pitchFamily="2" charset="0"/>
+          <a:ea typeface="Roboto" panose="02000000000000000000" pitchFamily="2" charset="0"/>
           <a:cs typeface="+mn-cs"/>
         </a:defRPr>
       </a:lvl3pPr>
-      <a:lvl4pPr marL="1600200" indent="-228600" algn="l" defTabSz="914400" rtl="0" eaLnBrk="1" latinLnBrk="0" hangingPunct="1">
+      <a:lvl4pPr marL="1371600" indent="0" algn="l" defTabSz="914400" rtl="0" eaLnBrk="1" latinLnBrk="0" hangingPunct="1">
+        <a:lnSpc>
+          <a:spcPct val="150000"/>
+        </a:lnSpc>
         <a:spcBef>
-          <a:spcPct val="20000"/>
+          <a:spcPts val="500"/>
         </a:spcBef>
-        <a:buFont typeface="Arial" pitchFamily="34" charset="0"/>
-        <a:buChar char="–"/>
-        <a:defRPr sz="2000" kern="1200">
+        <a:buFont typeface="Arial" panose="020B0604020202020204" pitchFamily="34" charset="0"/>
+        <a:buNone/>
+        <a:defRPr sz="1200" kern="1200">
           <a:solidFill>
             <a:schemeClr val="tx1"/>
           </a:solidFill>
-          <a:latin typeface="+mn-lt"/>
-          <a:ea typeface="+mn-ea"/>
+          <a:latin typeface="Roboto" panose="02000000000000000000" pitchFamily="2" charset="0"/>
+          <a:ea typeface="Roboto" panose="02000000000000000000" pitchFamily="2" charset="0"/>
           <a:cs typeface="+mn-cs"/>
         </a:defRPr>
       </a:lvl4pPr>
-      <a:lvl5pPr marL="2057400" indent="-228600" algn="l" defTabSz="914400" rtl="0" eaLnBrk="1" latinLnBrk="0" hangingPunct="1">
+      <a:lvl5pPr marL="1828800" indent="0" algn="l" defTabSz="914400" rtl="0" eaLnBrk="1" latinLnBrk="0" hangingPunct="1">
+        <a:lnSpc>
+          <a:spcPct val="150000"/>
+        </a:lnSpc>
         <a:spcBef>
-          <a:spcPct val="20000"/>
+          <a:spcPts val="500"/>
         </a:spcBef>
-        <a:buFont typeface="Arial" pitchFamily="34" charset="0"/>
-        <a:buChar char="»"/>
-        <a:defRPr sz="2000" kern="1200">
+        <a:buFont typeface="Arial" panose="020B0604020202020204" pitchFamily="34" charset="0"/>
+        <a:buNone/>
+        <a:defRPr sz="1000" kern="1200">
           <a:solidFill>
             <a:schemeClr val="tx1"/>
           </a:solidFill>
-          <a:latin typeface="+mn-lt"/>
-          <a:ea typeface="+mn-ea"/>
+          <a:latin typeface="Roboto" panose="02000000000000000000" pitchFamily="2" charset="0"/>
+          <a:ea typeface="Roboto" panose="02000000000000000000" pitchFamily="2" charset="0"/>
           <a:cs typeface="+mn-cs"/>
         </a:defRPr>
       </a:lvl5pPr>
       <a:lvl6pPr marL="2514600" indent="-228600" algn="l" defTabSz="914400" rtl="0" eaLnBrk="1" latinLnBrk="0" hangingPunct="1">
+        <a:lnSpc>
+          <a:spcPct val="90000"/>
+        </a:lnSpc>
         <a:spcBef>
-          <a:spcPct val="20000"/>
+          <a:spcPts val="500"/>
         </a:spcBef>
-        <a:buFont typeface="Arial" pitchFamily="34" charset="0"/>
+        <a:buFont typeface="Arial" panose="020B0604020202020204" pitchFamily="34" charset="0"/>
         <a:buChar char="•"/>
-        <a:defRPr sz="2000" kern="1200">
+        <a:defRPr sz="1800" kern="1200">
           <a:solidFill>
             <a:schemeClr val="tx1"/>
           </a:solidFill>
@@ -1775,12 +3295,15 @@
         </a:defRPr>
       </a:lvl6pPr>
       <a:lvl7pPr marL="2971800" indent="-228600" algn="l" defTabSz="914400" rtl="0" eaLnBrk="1" latinLnBrk="0" hangingPunct="1">
+        <a:lnSpc>
+          <a:spcPct val="90000"/>
+        </a:lnSpc>
         <a:spcBef>
-          <a:spcPct val="20000"/>
+          <a:spcPts val="500"/>
         </a:spcBef>
-        <a:buFont typeface="Arial" pitchFamily="34" charset="0"/>
+        <a:buFont typeface="Arial" panose="020B0604020202020204" pitchFamily="34" charset="0"/>
         <a:buChar char="•"/>
-        <a:defRPr sz="2000" kern="1200">
+        <a:defRPr sz="1800" kern="1200">
           <a:solidFill>
             <a:schemeClr val="tx1"/>
           </a:solidFill>
@@ -1790,12 +3313,15 @@
         </a:defRPr>
       </a:lvl7pPr>
       <a:lvl8pPr marL="3429000" indent="-228600" algn="l" defTabSz="914400" rtl="0" eaLnBrk="1" latinLnBrk="0" hangingPunct="1">
+        <a:lnSpc>
+          <a:spcPct val="90000"/>
+        </a:lnSpc>
         <a:spcBef>
-          <a:spcPct val="20000"/>
+          <a:spcPts val="500"/>
         </a:spcBef>
-        <a:buFont typeface="Arial" pitchFamily="34" charset="0"/>
+        <a:buFont typeface="Arial" panose="020B0604020202020204" pitchFamily="34" charset="0"/>
         <a:buChar char="•"/>
-        <a:defRPr sz="2000" kern="1200">
+        <a:defRPr sz="1800" kern="1200">
           <a:solidFill>
             <a:schemeClr val="tx1"/>
           </a:solidFill>
@@ -1805,12 +3331,15 @@
         </a:defRPr>
       </a:lvl8pPr>
       <a:lvl9pPr marL="3886200" indent="-228600" algn="l" defTabSz="914400" rtl="0" eaLnBrk="1" latinLnBrk="0" hangingPunct="1">
+        <a:lnSpc>
+          <a:spcPct val="90000"/>
+        </a:lnSpc>
         <a:spcBef>
-          <a:spcPct val="20000"/>
+          <a:spcPts val="500"/>
         </a:spcBef>
-        <a:buFont typeface="Arial" pitchFamily="34" charset="0"/>
+        <a:buFont typeface="Arial" panose="020B0604020202020204" pitchFamily="34" charset="0"/>
         <a:buChar char="•"/>
-        <a:defRPr sz="2000" kern="1200">
+        <a:defRPr sz="1800" kern="1200">
           <a:solidFill>
             <a:schemeClr val="tx1"/>
           </a:solidFill>
@@ -1822,7 +3351,7 @@
     </p:bodyStyle>
     <p:otherStyle>
       <a:defPPr>
-        <a:defRPr lang="en-US"/>
+        <a:defRPr lang="de-DE"/>
       </a:defPPr>
       <a:lvl1pPr marL="0" algn="l" defTabSz="914400" rtl="0" eaLnBrk="1" latinLnBrk="0" hangingPunct="1">
         <a:defRPr sz="1800" kern="1200">
@@ -1922,20 +3451,6 @@
 <file path=ppt/slides/slide1.xml><?xml version="1.0" encoding="utf-8"?>
 <p:sld xmlns:a="http://schemas.openxmlformats.org/drawingml/2006/main" xmlns:r="http://schemas.openxmlformats.org/officeDocument/2006/relationships" xmlns:p="http://schemas.openxmlformats.org/presentationml/2006/main">
   <p:cSld name="Slide 1">
-    <p:bg>
-      <p:bgPr>
-        <a:blipFill dpi="0" rotWithShape="1">
-          <a:blip r:embed="rId1">
-            <a:lum/>
-          </a:blip>
-          <a:srcRect/>
-          <a:stretch>
-            <a:fillRect/>
-          </a:stretch>
-        </a:blipFill>
-        <a:effectLst/>
-      </p:bgPr>
-    </p:bg>
     <p:spTree>
       <p:nvGrpSpPr>
         <p:cNvPr id="1" name=""/>
@@ -1958,8 +3473,8 @@
         </p:nvSpPr>
         <p:spPr>
           <a:xfrm>
-            <a:off x="5120640" y="1143000"/>
-            <a:ext cx="3520440" cy="2834640"/>
+            <a:off x="6827520" y="1752600"/>
+            <a:ext cx="4693920" cy="2743200"/>
           </a:xfrm>
           <a:prstGeom prst="roundRect">
             <a:avLst>
@@ -1967,11 +3482,11 @@
             </a:avLst>
           </a:prstGeom>
           <a:solidFill>
-            <a:srgbClr val="1A2652"/>
+            <a:srgbClr val="1E1E1E"/>
           </a:solidFill>
           <a:ln/>
           <a:effectLst>
-            <a:outerShdw sx="100000" sy="100000" kx="0" ky="0" algn="bl" rotWithShape="0" blurRad="101600" dist="38100" dir="5400000">
+            <a:outerShdw sx="100000" sy="100000" kx="0" ky="0" algn="bl" rotWithShape="0" blurRad="135467" dist="50800" dir="5400000">
               <a:srgbClr val="000000">
                 <a:alpha val="25000"/>
               </a:srgbClr>
@@ -1987,8 +3502,8 @@
         </p:nvSpPr>
         <p:spPr>
           <a:xfrm>
-            <a:off x="5248656" y="1252728"/>
-            <a:ext cx="100584" cy="100584"/>
+            <a:off x="6998208" y="1898904"/>
+            <a:ext cx="134112" cy="134112"/>
           </a:xfrm>
           <a:prstGeom prst="ellipse">
             <a:avLst/>
@@ -2007,8 +3522,8 @@
         </p:nvSpPr>
         <p:spPr>
           <a:xfrm>
-            <a:off x="5431536" y="1252728"/>
-            <a:ext cx="100584" cy="100584"/>
+            <a:off x="7242048" y="1898904"/>
+            <a:ext cx="134112" cy="134112"/>
           </a:xfrm>
           <a:prstGeom prst="ellipse">
             <a:avLst/>
@@ -2027,8 +3542,8 @@
         </p:nvSpPr>
         <p:spPr>
           <a:xfrm>
-            <a:off x="5614416" y="1252728"/>
-            <a:ext cx="100584" cy="100584"/>
+            <a:off x="7485888" y="1898904"/>
+            <a:ext cx="134112" cy="134112"/>
           </a:xfrm>
           <a:prstGeom prst="ellipse">
             <a:avLst/>
@@ -2047,8 +3562,8 @@
         </p:nvSpPr>
         <p:spPr>
           <a:xfrm>
-            <a:off x="5285232" y="1453896"/>
-            <a:ext cx="3191256" cy="2414016"/>
+            <a:off x="7046976" y="2167128"/>
+            <a:ext cx="4255008" cy="2194560"/>
           </a:xfrm>
           <a:prstGeom prst="rect">
             <a:avLst/>
@@ -2062,14 +3577,14 @@
           <a:p>
             <a:pPr algn="l" indent="0" marL="0">
               <a:lnSpc>
-                <a:spcPts val="2030"/>
+                <a:spcPts val="2707"/>
               </a:lnSpc>
               <a:buNone/>
             </a:pPr>
             <a:r>
-              <a:rPr lang="en-US" sz="1400" dirty="0">
-                <a:solidFill>
-                  <a:srgbClr val="9AA7C4"/>
+              <a:rPr lang="en-US" sz="1867" dirty="0">
+                <a:solidFill>
+                  <a:srgbClr val="BADCF6"/>
                 </a:solidFill>
                 <a:latin typeface="Courier New" pitchFamily="34" charset="0"/>
                 <a:ea typeface="Courier New" pitchFamily="34" charset="-122"/>
@@ -2077,19 +3592,19 @@
               </a:rPr>
               <a:t>PS C:\&gt; wsl --install</a:t>
             </a:r>
-            <a:endParaRPr lang="en-US" sz="1400" dirty="0"/>
+            <a:endParaRPr lang="en-US" sz="1867" dirty="0"/>
           </a:p>
           <a:p>
             <a:pPr algn="l" indent="0" marL="0">
               <a:lnSpc>
-                <a:spcPts val="2030"/>
+                <a:spcPts val="2707"/>
               </a:lnSpc>
               <a:buNone/>
             </a:pPr>
             <a:r>
-              <a:rPr lang="en-US" sz="1400" dirty="0">
-                <a:solidFill>
-                  <a:srgbClr val="9AA7C4"/>
+              <a:rPr lang="en-US" sz="1867" dirty="0">
+                <a:solidFill>
+                  <a:srgbClr val="BADCF6"/>
                 </a:solidFill>
                 <a:latin typeface="Courier New" pitchFamily="34" charset="0"/>
                 <a:ea typeface="Courier New" pitchFamily="34" charset="-122"/>
@@ -2097,106 +3612,36 @@
               </a:rPr>
               <a:t>Ubuntu wird installiert ...</a:t>
             </a:r>
-            <a:endParaRPr lang="en-US" sz="1400" dirty="0"/>
+            <a:endParaRPr lang="en-US" sz="1867" dirty="0"/>
           </a:p>
           <a:p>
             <a:pPr algn="l" indent="0" marL="0">
               <a:lnSpc>
-                <a:spcPts val="2030"/>
+                <a:spcPts val="2707"/>
               </a:lnSpc>
               <a:buNone/>
             </a:pPr>
-            <a:endParaRPr lang="en-US" sz="1400" dirty="0"/>
+            <a:endParaRPr lang="en-US" sz="1867" dirty="0"/>
           </a:p>
           <a:p>
             <a:pPr algn="l" indent="0" marL="0">
               <a:lnSpc>
-                <a:spcPts val="2030"/>
+                <a:spcPts val="2707"/>
               </a:lnSpc>
               <a:buNone/>
             </a:pPr>
             <a:r>
-              <a:rPr lang="en-US" sz="1400" b="1" dirty="0">
-                <a:solidFill>
-                  <a:srgbClr val="FFC20E"/>
+              <a:rPr lang="en-US" sz="1867" b="1" dirty="0">
+                <a:solidFill>
+                  <a:srgbClr val="FAE55F"/>
                 </a:solidFill>
                 <a:latin typeface="Courier New" pitchFamily="34" charset="0"/>
                 <a:ea typeface="Courier New" pitchFamily="34" charset="-122"/>
                 <a:cs typeface="Courier New" pitchFamily="34" charset="-120"/>
               </a:rPr>
-              <a:t>zi@srv-schule01:~$ _</a:t>
-            </a:r>
-            <a:endParaRPr lang="en-US" sz="1400" dirty="0"/>
-          </a:p>
-        </p:txBody>
-      </p:sp>
-      <p:sp>
-        <p:nvSpPr>
-          <p:cNvPr id="7" name="Shape 5"/>
-          <p:cNvSpPr/>
-          <p:nvPr/>
-        </p:nvSpPr>
-        <p:spPr>
-          <a:xfrm>
-            <a:off x="6903720" y="320040"/>
-            <a:ext cx="1920240" cy="594360"/>
-          </a:xfrm>
-          <a:prstGeom prst="roundRect">
-            <a:avLst>
-              <a:gd name="adj" fmla="val 9231"/>
-            </a:avLst>
-          </a:prstGeom>
-          <a:solidFill>
-            <a:srgbClr val="FFFFFF">
-              <a:alpha val="8000"/>
-            </a:srgbClr>
-          </a:solidFill>
-          <a:ln w="9525">
-            <a:solidFill>
-              <a:srgbClr val="FFFFFF">
-                <a:alpha val="60000"/>
-              </a:srgbClr>
-            </a:solidFill>
-            <a:prstDash val="dash"/>
-          </a:ln>
-        </p:spPr>
-      </p:sp>
-      <p:sp>
-        <p:nvSpPr>
-          <p:cNvPr id="8" name="Text 6"/>
-          <p:cNvSpPr/>
-          <p:nvPr/>
-        </p:nvSpPr>
-        <p:spPr>
-          <a:xfrm>
-            <a:off x="6903720" y="320040"/>
-            <a:ext cx="1920240" cy="594360"/>
-          </a:xfrm>
-          <a:prstGeom prst="rect">
-            <a:avLst/>
-          </a:prstGeom>
-          <a:noFill/>
-          <a:ln/>
-        </p:spPr>
-        <p:txBody>
-          <a:bodyPr wrap="square" lIns="0" tIns="0" rIns="0" bIns="0" rtlCol="0" anchor="ctr"/>
-          <a:lstStyle/>
-          <a:p>
-            <a:pPr algn="ctr" indent="0" marL="0">
-              <a:buNone/>
-            </a:pPr>
-            <a:r>
-              <a:rPr lang="en-US" sz="1100" dirty="0">
-                <a:solidFill>
-                  <a:srgbClr val="F2F5FC"/>
-                </a:solidFill>
-                <a:latin typeface="Calibri" pitchFamily="34" charset="0"/>
-                <a:ea typeface="Calibri" pitchFamily="34" charset="-122"/>
-                <a:cs typeface="Calibri" pitchFamily="34" charset="-120"/>
-              </a:rPr>
-              <a:t>MMBbS-Logo</a:t>
-            </a:r>
-            <a:endParaRPr lang="en-US" sz="1100" dirty="0"/>
+              <a:t>zi@PC:~$ _</a:t>
+            </a:r>
+            <a:endParaRPr lang="en-US" sz="1867" dirty="0"/>
           </a:p>
         </p:txBody>
       </p:sp>
@@ -2216,8 +3661,8 @@
         </p:blipFill>
         <p:spPr>
           <a:xfrm>
-            <a:off x="548640" y="685800"/>
-            <a:ext cx="594360" cy="594360"/>
+            <a:off x="731520" y="914400"/>
+            <a:ext cx="792480" cy="792480"/>
           </a:xfrm>
           <a:prstGeom prst="rect">
             <a:avLst/>
@@ -2232,8 +3677,8 @@
         </p:nvSpPr>
         <p:spPr>
           <a:xfrm>
-            <a:off x="502920" y="1508760"/>
-            <a:ext cx="4480560" cy="1371600"/>
+            <a:off x="670560" y="2011680"/>
+            <a:ext cx="5974080" cy="1828800"/>
           </a:xfrm>
           <a:prstGeom prst="rect">
             <a:avLst/>
@@ -2249,39 +3694,19 @@
               <a:buNone/>
             </a:pPr>
             <a:r>
-              <a:rPr lang="en-US" sz="3300" b="1" dirty="0">
+              <a:rPr lang="en-US" sz="4400" b="1" dirty="0">
                 <a:solidFill>
                   <a:srgbClr val="FFFFFF"/>
                 </a:solidFill>
-                <a:latin typeface="Calibri" pitchFamily="34" charset="0"/>
-                <a:ea typeface="Calibri" pitchFamily="34" charset="-122"/>
-                <a:cs typeface="Calibri" pitchFamily="34" charset="-120"/>
+                <a:latin typeface="Roboto" pitchFamily="34" charset="0"/>
+                <a:ea typeface="Roboto" pitchFamily="34" charset="-122"/>
+                <a:cs typeface="Roboto" pitchFamily="34" charset="-120"/>
               </a:rPr>
               <a:t>Linux unterrichten – auf Windows-Rechnern</a:t>
             </a:r>
-            <a:endParaRPr lang="en-US" sz="3300" dirty="0"/>
-          </a:p>
-        </p:txBody>
-      </p:sp>
-      <p:sp>
-        <p:nvSpPr>
-          <p:cNvPr id="11" name="Shape 8"/>
-          <p:cNvSpPr/>
-          <p:nvPr/>
-        </p:nvSpPr>
-        <p:spPr>
-          <a:xfrm>
-            <a:off x="521208" y="2788920"/>
-            <a:ext cx="1005840" cy="64008"/>
-          </a:xfrm>
-          <a:prstGeom prst="rect">
-            <a:avLst/>
-          </a:prstGeom>
-          <a:solidFill>
-            <a:srgbClr val="FFC20E"/>
-          </a:solidFill>
-          <a:ln/>
-        </p:spPr>
+            <a:endParaRPr lang="en-US" sz="4400" dirty="0"/>
+          </a:p>
+        </p:txBody>
       </p:sp>
       <p:sp>
         <p:nvSpPr>
@@ -2291,8 +3716,8 @@
         </p:nvSpPr>
         <p:spPr>
           <a:xfrm>
-            <a:off x="502920" y="2971800"/>
-            <a:ext cx="4297680" cy="548640"/>
+            <a:off x="670560" y="3962400"/>
+            <a:ext cx="6035040" cy="731520"/>
           </a:xfrm>
           <a:prstGeom prst="rect">
             <a:avLst/>
@@ -2308,17 +3733,17 @@
               <a:buNone/>
             </a:pPr>
             <a:r>
-              <a:rPr lang="en-US" sz="1700" dirty="0">
-                <a:solidFill>
-                  <a:srgbClr val="FFC20E"/>
-                </a:solidFill>
-                <a:latin typeface="Calibri" pitchFamily="34" charset="0"/>
-                <a:ea typeface="Calibri" pitchFamily="34" charset="-122"/>
-                <a:cs typeface="Calibri" pitchFamily="34" charset="-120"/>
+              <a:rPr lang="en-US" sz="2000" dirty="0">
+                <a:solidFill>
+                  <a:srgbClr val="FAE55F"/>
+                </a:solidFill>
+                <a:latin typeface="Roboto" pitchFamily="34" charset="0"/>
+                <a:ea typeface="Roboto" pitchFamily="34" charset="-122"/>
+                <a:cs typeface="Roboto" pitchFamily="34" charset="-120"/>
               </a:rPr>
               <a:t>WSL2 im Schulkontext: Ein Weg für alle IT-Berufe</a:t>
             </a:r>
-            <a:endParaRPr lang="en-US" sz="1700" dirty="0"/>
+            <a:endParaRPr lang="en-US" sz="2000" dirty="0"/>
           </a:p>
         </p:txBody>
       </p:sp>
@@ -2330,8 +3755,8 @@
         </p:nvSpPr>
         <p:spPr>
           <a:xfrm>
-            <a:off x="502920" y="4434840"/>
-            <a:ext cx="8138160" cy="320040"/>
+            <a:off x="670560" y="5913120"/>
+            <a:ext cx="10850880" cy="426720"/>
           </a:xfrm>
           <a:prstGeom prst="rect">
             <a:avLst/>
@@ -2347,17 +3772,17 @@
               <a:buNone/>
             </a:pPr>
             <a:r>
-              <a:rPr lang="en-US" sz="1200" dirty="0">
-                <a:solidFill>
-                  <a:srgbClr val="E8EDFA"/>
-                </a:solidFill>
-                <a:latin typeface="Calibri" pitchFamily="34" charset="0"/>
-                <a:ea typeface="Calibri" pitchFamily="34" charset="-122"/>
-                <a:cs typeface="Calibri" pitchFamily="34" charset="-120"/>
+              <a:rPr lang="en-US" sz="1600" dirty="0">
+                <a:solidFill>
+                  <a:srgbClr val="FFFFFF"/>
+                </a:solidFill>
+                <a:latin typeface="Roboto" pitchFamily="34" charset="0"/>
+                <a:ea typeface="Roboto" pitchFamily="34" charset="-122"/>
+                <a:cs typeface="Roboto" pitchFamily="34" charset="-120"/>
               </a:rPr>
               <a:t>Workshop · Regionaler Akademietag der Cisco Networking Academy · 60 Minuten</a:t>
             </a:r>
-            <a:endParaRPr lang="en-US" sz="1200" dirty="0"/>
+            <a:endParaRPr lang="en-US" sz="1600" dirty="0"/>
           </a:p>
         </p:txBody>
       </p:sp>
@@ -2372,13 +3797,6 @@
 <file path=ppt/slides/slide10.xml><?xml version="1.0" encoding="utf-8"?>
 <p:sld xmlns:a="http://schemas.openxmlformats.org/drawingml/2006/main" xmlns:r="http://schemas.openxmlformats.org/officeDocument/2006/relationships" xmlns:p="http://schemas.openxmlformats.org/presentationml/2006/main">
   <p:cSld name="Slide 10">
-    <p:bg>
-      <p:bgPr>
-        <a:solidFill>
-          <a:srgbClr val="FFFFFF"/>
-        </a:solidFill>
-      </p:bgPr>
-    </p:bg>
     <p:spTree>
       <p:nvGrpSpPr>
         <p:cNvPr id="1" name=""/>
@@ -2395,20 +3813,67 @@
       </p:grpSpPr>
       <p:sp>
         <p:nvSpPr>
+          <p:cNvPr id="9001" name="Datumsplatzhalter 9001"/>
+          <p:cNvSpPr>
+            <a:spLocks noGrp="1"/>
+          </p:cNvSpPr>
+          <p:nvPr>
+            <p:ph type="dt" sz="half" idx="2"/>
+          </p:nvPr>
+        </p:nvSpPr>
+        <p:spPr/>
+        <p:txBody>
+          <a:bodyPr/>
+          <a:lstStyle/>
+          <a:p>
+            <a:fld id="{86B4728B-49EC-AC4B-92D0-45D4091857E0}" type="datetime1">
+              <a:rPr lang="de-DE"/>
+              <a:pPr/>
+              <a:t>28.10.2026</a:t>
+            </a:fld>
+            <a:endParaRPr lang="de-DE"/>
+          </a:p>
+        </p:txBody>
+      </p:sp>
+      <p:sp>
+        <p:nvSpPr>
+          <p:cNvPr id="9002" name="Foliennummernplatzhalter 9002"/>
+          <p:cNvSpPr>
+            <a:spLocks noGrp="1"/>
+          </p:cNvSpPr>
+          <p:nvPr>
+            <p:ph type="sldNum" sz="quarter" idx="12"/>
+          </p:nvPr>
+        </p:nvSpPr>
+        <p:spPr/>
+        <p:txBody>
+          <a:bodyPr/>
+          <a:lstStyle/>
+          <a:p>
+            <a:fld id="{B7E13D07-A954-7D45-9CFC-776D35F33DC4}" type="slidenum">
+              <a:rPr lang="de-DE"/>
+              <a:t>10</a:t>
+            </a:fld>
+            <a:endParaRPr lang="de-DE"/>
+          </a:p>
+        </p:txBody>
+      </p:sp>
+      <p:sp>
+        <p:nvSpPr>
           <p:cNvPr id="2" name="Shape 0"/>
           <p:cNvSpPr/>
           <p:nvPr/>
         </p:nvSpPr>
         <p:spPr>
           <a:xfrm>
-            <a:off x="502920" y="329184"/>
-            <a:ext cx="118872" cy="118872"/>
+            <a:off x="670560" y="438912"/>
+            <a:ext cx="158496" cy="158496"/>
           </a:xfrm>
           <a:prstGeom prst="rect">
             <a:avLst/>
           </a:prstGeom>
           <a:solidFill>
-            <a:srgbClr val="FFC20E"/>
+            <a:srgbClr val="FAE55F"/>
           </a:solidFill>
           <a:ln/>
         </p:spPr>
@@ -2421,8 +3886,8 @@
         </p:nvSpPr>
         <p:spPr>
           <a:xfrm>
-            <a:off x="713232" y="292608"/>
-            <a:ext cx="7955280" cy="274320"/>
+            <a:off x="950976" y="390144"/>
+            <a:ext cx="10607040" cy="365760"/>
           </a:xfrm>
           <a:prstGeom prst="rect">
             <a:avLst/>
@@ -2438,17 +3903,17 @@
               <a:buNone/>
             </a:pPr>
             <a:r>
-              <a:rPr lang="en-US" sz="1200" b="1" spc="300" kern="0" dirty="0">
-                <a:solidFill>
-                  <a:srgbClr val="2E5AAC"/>
-                </a:solidFill>
-                <a:latin typeface="Calibri" pitchFamily="34" charset="0"/>
-                <a:ea typeface="Calibri" pitchFamily="34" charset="-122"/>
-                <a:cs typeface="Calibri" pitchFamily="34" charset="-120"/>
+              <a:rPr lang="en-US" sz="1600" b="1" spc="300" kern="0" dirty="0">
+                <a:solidFill>
+                  <a:srgbClr val="14508D"/>
+                </a:solidFill>
+                <a:latin typeface="Roboto" pitchFamily="34" charset="0"/>
+                <a:ea typeface="Roboto" pitchFamily="34" charset="-122"/>
+                <a:cs typeface="Roboto" pitchFamily="34" charset="-120"/>
               </a:rPr>
               <a:t>HANDS-ON II · MINUTE 37–49</a:t>
             </a:r>
-            <a:endParaRPr lang="en-US" sz="1200" dirty="0"/>
+            <a:endParaRPr lang="en-US" sz="1600" dirty="0"/>
           </a:p>
         </p:txBody>
       </p:sp>
@@ -2460,8 +3925,8 @@
         </p:nvSpPr>
         <p:spPr>
           <a:xfrm>
-            <a:off x="502920" y="566928"/>
-            <a:ext cx="8138160" cy="685800"/>
+            <a:off x="670560" y="755904"/>
+            <a:ext cx="10850880" cy="914400"/>
           </a:xfrm>
           <a:prstGeom prst="rect">
             <a:avLst/>
@@ -2477,39 +3942,19 @@
               <a:buNone/>
             </a:pPr>
             <a:r>
-              <a:rPr lang="en-US" sz="3000" b="1" dirty="0">
-                <a:solidFill>
-                  <a:srgbClr val="222A44"/>
-                </a:solidFill>
-                <a:latin typeface="Calibri" pitchFamily="34" charset="0"/>
-                <a:ea typeface="Calibri" pitchFamily="34" charset="-122"/>
-                <a:cs typeface="Calibri" pitchFamily="34" charset="-120"/>
+              <a:rPr lang="en-US" sz="4000" b="1" dirty="0">
+                <a:solidFill>
+                  <a:srgbClr val="1E1E1E"/>
+                </a:solidFill>
+                <a:latin typeface="Roboto" pitchFamily="34" charset="0"/>
+                <a:ea typeface="Roboto" pitchFamily="34" charset="-122"/>
+                <a:cs typeface="Roboto" pitchFamily="34" charset="-120"/>
               </a:rPr>
               <a:t>Die Pipe: Fließband für Daten</a:t>
             </a:r>
-            <a:endParaRPr lang="en-US" sz="3000" dirty="0"/>
-          </a:p>
-        </p:txBody>
-      </p:sp>
-      <p:sp>
-        <p:nvSpPr>
-          <p:cNvPr id="5" name="Shape 3"/>
-          <p:cNvSpPr/>
-          <p:nvPr/>
-        </p:nvSpPr>
-        <p:spPr>
-          <a:xfrm>
-            <a:off x="521208" y="1280160"/>
-            <a:ext cx="594360" cy="50292"/>
-          </a:xfrm>
-          <a:prstGeom prst="rect">
-            <a:avLst/>
-          </a:prstGeom>
-          <a:solidFill>
-            <a:srgbClr val="FFC20E"/>
-          </a:solidFill>
-          <a:ln/>
-        </p:spPr>
+            <a:endParaRPr lang="en-US" sz="4000" dirty="0"/>
+          </a:p>
+        </p:txBody>
       </p:sp>
       <p:sp>
         <p:nvSpPr>
@@ -2519,8 +3964,8 @@
         </p:nvSpPr>
         <p:spPr>
           <a:xfrm>
-            <a:off x="502920" y="1600200"/>
-            <a:ext cx="1691640" cy="960120"/>
+            <a:off x="670560" y="2098548"/>
+            <a:ext cx="2255520" cy="1152144"/>
           </a:xfrm>
           <a:prstGeom prst="roundRect">
             <a:avLst>
@@ -2528,11 +3973,11 @@
             </a:avLst>
           </a:prstGeom>
           <a:solidFill>
-            <a:srgbClr val="1A2652"/>
+            <a:srgbClr val="1E1E1E"/>
           </a:solidFill>
           <a:ln/>
           <a:effectLst>
-            <a:outerShdw sx="100000" sy="100000" kx="0" ky="0" algn="bl" rotWithShape="0" blurRad="63500" dist="25400" dir="5400000">
+            <a:outerShdw sx="100000" sy="100000" kx="0" ky="0" algn="bl" rotWithShape="0" blurRad="84667" dist="33867" dir="5400000">
               <a:srgbClr val="000000">
                 <a:alpha val="20000"/>
               </a:srgbClr>
@@ -2548,8 +3993,8 @@
         </p:nvSpPr>
         <p:spPr>
           <a:xfrm>
-            <a:off x="502920" y="1700784"/>
-            <a:ext cx="1691640" cy="411480"/>
+            <a:off x="670560" y="2219248"/>
+            <a:ext cx="2255520" cy="493776"/>
           </a:xfrm>
           <a:prstGeom prst="rect">
             <a:avLst/>
@@ -2565,9 +4010,9 @@
               <a:buNone/>
             </a:pPr>
             <a:r>
-              <a:rPr lang="en-US" sz="1600" b="1" dirty="0">
-                <a:solidFill>
-                  <a:srgbClr val="FFC20E"/>
+              <a:rPr lang="en-US" sz="2133" b="1" dirty="0">
+                <a:solidFill>
+                  <a:srgbClr val="FAE55F"/>
                 </a:solidFill>
                 <a:latin typeface="Courier New" pitchFamily="34" charset="0"/>
                 <a:ea typeface="Courier New" pitchFamily="34" charset="-122"/>
@@ -2575,7 +4020,7 @@
               </a:rPr>
               <a:t>grep</a:t>
             </a:r>
-            <a:endParaRPr lang="en-US" sz="1600" dirty="0"/>
+            <a:endParaRPr lang="en-US" sz="2133" dirty="0"/>
           </a:p>
         </p:txBody>
       </p:sp>
@@ -2587,8 +4032,8 @@
         </p:nvSpPr>
         <p:spPr>
           <a:xfrm>
-            <a:off x="502920" y="2103120"/>
-            <a:ext cx="1691640" cy="320040"/>
+            <a:off x="670560" y="2702052"/>
+            <a:ext cx="2255520" cy="384048"/>
           </a:xfrm>
           <a:prstGeom prst="rect">
             <a:avLst/>
@@ -2604,17 +4049,17 @@
               <a:buNone/>
             </a:pPr>
             <a:r>
-              <a:rPr lang="en-US" sz="1100" dirty="0">
-                <a:solidFill>
-                  <a:srgbClr val="9AA7C4"/>
-                </a:solidFill>
-                <a:latin typeface="Calibri" pitchFamily="34" charset="0"/>
-                <a:ea typeface="Calibri" pitchFamily="34" charset="-122"/>
-                <a:cs typeface="Calibri" pitchFamily="34" charset="-120"/>
+              <a:rPr lang="en-US" sz="1467" dirty="0">
+                <a:solidFill>
+                  <a:srgbClr val="BADCF6"/>
+                </a:solidFill>
+                <a:latin typeface="Roboto" pitchFamily="34" charset="0"/>
+                <a:ea typeface="Roboto" pitchFamily="34" charset="-122"/>
+                <a:cs typeface="Roboto" pitchFamily="34" charset="-120"/>
               </a:rPr>
               <a:t>filtern</a:t>
             </a:r>
-            <a:endParaRPr lang="en-US" sz="1100" dirty="0"/>
+            <a:endParaRPr lang="en-US" sz="1467" dirty="0"/>
           </a:p>
         </p:txBody>
       </p:sp>
@@ -2626,8 +4071,8 @@
         </p:nvSpPr>
         <p:spPr>
           <a:xfrm>
-            <a:off x="2212848" y="1664208"/>
-            <a:ext cx="420624" cy="822960"/>
+            <a:off x="2950464" y="2175357"/>
+            <a:ext cx="560832" cy="987552"/>
           </a:xfrm>
           <a:prstGeom prst="rect">
             <a:avLst/>
@@ -2643,9 +4088,9 @@
               <a:buNone/>
             </a:pPr>
             <a:r>
-              <a:rPr lang="en-US" sz="3000" b="1" dirty="0">
-                <a:solidFill>
-                  <a:srgbClr val="2E5AAC"/>
+              <a:rPr lang="en-US" sz="4000" b="1" dirty="0">
+                <a:solidFill>
+                  <a:srgbClr val="14508D"/>
                 </a:solidFill>
                 <a:latin typeface="Courier New" pitchFamily="34" charset="0"/>
                 <a:ea typeface="Courier New" pitchFamily="34" charset="-122"/>
@@ -2653,7 +4098,7 @@
               </a:rPr>
               <a:t>|</a:t>
             </a:r>
-            <a:endParaRPr lang="en-US" sz="3000" dirty="0"/>
+            <a:endParaRPr lang="en-US" sz="4000" dirty="0"/>
           </a:p>
         </p:txBody>
       </p:sp>
@@ -2665,8 +4110,8 @@
         </p:nvSpPr>
         <p:spPr>
           <a:xfrm>
-            <a:off x="2651760" y="1600200"/>
-            <a:ext cx="1691640" cy="960120"/>
+            <a:off x="3535680" y="2098548"/>
+            <a:ext cx="2255520" cy="1152144"/>
           </a:xfrm>
           <a:prstGeom prst="roundRect">
             <a:avLst>
@@ -2674,11 +4119,11 @@
             </a:avLst>
           </a:prstGeom>
           <a:solidFill>
-            <a:srgbClr val="1A2652"/>
+            <a:srgbClr val="1E1E1E"/>
           </a:solidFill>
           <a:ln/>
           <a:effectLst>
-            <a:outerShdw sx="100000" sy="100000" kx="0" ky="0" algn="bl" rotWithShape="0" blurRad="63500" dist="25400" dir="5400000">
+            <a:outerShdw sx="100000" sy="100000" kx="0" ky="0" algn="bl" rotWithShape="0" blurRad="84667" dist="33867" dir="5400000">
               <a:srgbClr val="000000">
                 <a:alpha val="20000"/>
               </a:srgbClr>
@@ -2694,8 +4139,8 @@
         </p:nvSpPr>
         <p:spPr>
           <a:xfrm>
-            <a:off x="2651760" y="1700784"/>
-            <a:ext cx="1691640" cy="411480"/>
+            <a:off x="3535680" y="2219248"/>
+            <a:ext cx="2255520" cy="493776"/>
           </a:xfrm>
           <a:prstGeom prst="rect">
             <a:avLst/>
@@ -2711,9 +4156,9 @@
               <a:buNone/>
             </a:pPr>
             <a:r>
-              <a:rPr lang="en-US" sz="1600" b="1" dirty="0">
-                <a:solidFill>
-                  <a:srgbClr val="FFC20E"/>
+              <a:rPr lang="en-US" sz="2133" b="1" dirty="0">
+                <a:solidFill>
+                  <a:srgbClr val="FAE55F"/>
                 </a:solidFill>
                 <a:latin typeface="Courier New" pitchFamily="34" charset="0"/>
                 <a:ea typeface="Courier New" pitchFamily="34" charset="-122"/>
@@ -2721,7 +4166,7 @@
               </a:rPr>
               <a:t>cut</a:t>
             </a:r>
-            <a:endParaRPr lang="en-US" sz="1600" dirty="0"/>
+            <a:endParaRPr lang="en-US" sz="2133" dirty="0"/>
           </a:p>
         </p:txBody>
       </p:sp>
@@ -2733,8 +4178,8 @@
         </p:nvSpPr>
         <p:spPr>
           <a:xfrm>
-            <a:off x="2651760" y="2103120"/>
-            <a:ext cx="1691640" cy="320040"/>
+            <a:off x="3535680" y="2702052"/>
+            <a:ext cx="2255520" cy="384048"/>
           </a:xfrm>
           <a:prstGeom prst="rect">
             <a:avLst/>
@@ -2750,17 +4195,17 @@
               <a:buNone/>
             </a:pPr>
             <a:r>
-              <a:rPr lang="en-US" sz="1100" dirty="0">
-                <a:solidFill>
-                  <a:srgbClr val="9AA7C4"/>
-                </a:solidFill>
-                <a:latin typeface="Calibri" pitchFamily="34" charset="0"/>
-                <a:ea typeface="Calibri" pitchFamily="34" charset="-122"/>
-                <a:cs typeface="Calibri" pitchFamily="34" charset="-120"/>
+              <a:rPr lang="en-US" sz="1467" dirty="0">
+                <a:solidFill>
+                  <a:srgbClr val="BADCF6"/>
+                </a:solidFill>
+                <a:latin typeface="Roboto" pitchFamily="34" charset="0"/>
+                <a:ea typeface="Roboto" pitchFamily="34" charset="-122"/>
+                <a:cs typeface="Roboto" pitchFamily="34" charset="-120"/>
               </a:rPr>
               <a:t>ausschneiden</a:t>
             </a:r>
-            <a:endParaRPr lang="en-US" sz="1100" dirty="0"/>
+            <a:endParaRPr lang="en-US" sz="1467" dirty="0"/>
           </a:p>
         </p:txBody>
       </p:sp>
@@ -2772,8 +4217,8 @@
         </p:nvSpPr>
         <p:spPr>
           <a:xfrm>
-            <a:off x="4361688" y="1664208"/>
-            <a:ext cx="420624" cy="822960"/>
+            <a:off x="5815584" y="2175357"/>
+            <a:ext cx="560832" cy="987552"/>
           </a:xfrm>
           <a:prstGeom prst="rect">
             <a:avLst/>
@@ -2789,9 +4234,9 @@
               <a:buNone/>
             </a:pPr>
             <a:r>
-              <a:rPr lang="en-US" sz="3000" b="1" dirty="0">
-                <a:solidFill>
-                  <a:srgbClr val="2E5AAC"/>
+              <a:rPr lang="en-US" sz="4000" b="1" dirty="0">
+                <a:solidFill>
+                  <a:srgbClr val="14508D"/>
                 </a:solidFill>
                 <a:latin typeface="Courier New" pitchFamily="34" charset="0"/>
                 <a:ea typeface="Courier New" pitchFamily="34" charset="-122"/>
@@ -2799,7 +4244,7 @@
               </a:rPr>
               <a:t>|</a:t>
             </a:r>
-            <a:endParaRPr lang="en-US" sz="3000" dirty="0"/>
+            <a:endParaRPr lang="en-US" sz="4000" dirty="0"/>
           </a:p>
         </p:txBody>
       </p:sp>
@@ -2811,8 +4256,8 @@
         </p:nvSpPr>
         <p:spPr>
           <a:xfrm>
-            <a:off x="4800600" y="1600200"/>
-            <a:ext cx="1691640" cy="960120"/>
+            <a:off x="6400800" y="2098548"/>
+            <a:ext cx="2255520" cy="1152144"/>
           </a:xfrm>
           <a:prstGeom prst="roundRect">
             <a:avLst>
@@ -2820,11 +4265,11 @@
             </a:avLst>
           </a:prstGeom>
           <a:solidFill>
-            <a:srgbClr val="1A2652"/>
+            <a:srgbClr val="1E1E1E"/>
           </a:solidFill>
           <a:ln/>
           <a:effectLst>
-            <a:outerShdw sx="100000" sy="100000" kx="0" ky="0" algn="bl" rotWithShape="0" blurRad="63500" dist="25400" dir="5400000">
+            <a:outerShdw sx="100000" sy="100000" kx="0" ky="0" algn="bl" rotWithShape="0" blurRad="84667" dist="33867" dir="5400000">
               <a:srgbClr val="000000">
                 <a:alpha val="20000"/>
               </a:srgbClr>
@@ -2840,8 +4285,8 @@
         </p:nvSpPr>
         <p:spPr>
           <a:xfrm>
-            <a:off x="4800600" y="1700784"/>
-            <a:ext cx="1691640" cy="411480"/>
+            <a:off x="6400800" y="2219248"/>
+            <a:ext cx="2255520" cy="493776"/>
           </a:xfrm>
           <a:prstGeom prst="rect">
             <a:avLst/>
@@ -2857,9 +4302,9 @@
               <a:buNone/>
             </a:pPr>
             <a:r>
-              <a:rPr lang="en-US" sz="1600" b="1" dirty="0">
-                <a:solidFill>
-                  <a:srgbClr val="FFC20E"/>
+              <a:rPr lang="en-US" sz="2133" b="1" dirty="0">
+                <a:solidFill>
+                  <a:srgbClr val="FAE55F"/>
                 </a:solidFill>
                 <a:latin typeface="Courier New" pitchFamily="34" charset="0"/>
                 <a:ea typeface="Courier New" pitchFamily="34" charset="-122"/>
@@ -2867,7 +4312,7 @@
               </a:rPr>
               <a:t>sort</a:t>
             </a:r>
-            <a:endParaRPr lang="en-US" sz="1600" dirty="0"/>
+            <a:endParaRPr lang="en-US" sz="2133" dirty="0"/>
           </a:p>
         </p:txBody>
       </p:sp>
@@ -2879,8 +4324,8 @@
         </p:nvSpPr>
         <p:spPr>
           <a:xfrm>
-            <a:off x="4800600" y="2103120"/>
-            <a:ext cx="1691640" cy="320040"/>
+            <a:off x="6400800" y="2702052"/>
+            <a:ext cx="2255520" cy="384048"/>
           </a:xfrm>
           <a:prstGeom prst="rect">
             <a:avLst/>
@@ -2896,17 +4341,17 @@
               <a:buNone/>
             </a:pPr>
             <a:r>
-              <a:rPr lang="en-US" sz="1100" dirty="0">
-                <a:solidFill>
-                  <a:srgbClr val="9AA7C4"/>
-                </a:solidFill>
-                <a:latin typeface="Calibri" pitchFamily="34" charset="0"/>
-                <a:ea typeface="Calibri" pitchFamily="34" charset="-122"/>
-                <a:cs typeface="Calibri" pitchFamily="34" charset="-120"/>
+              <a:rPr lang="en-US" sz="1467" dirty="0">
+                <a:solidFill>
+                  <a:srgbClr val="BADCF6"/>
+                </a:solidFill>
+                <a:latin typeface="Roboto" pitchFamily="34" charset="0"/>
+                <a:ea typeface="Roboto" pitchFamily="34" charset="-122"/>
+                <a:cs typeface="Roboto" pitchFamily="34" charset="-120"/>
               </a:rPr>
               <a:t>sortieren</a:t>
             </a:r>
-            <a:endParaRPr lang="en-US" sz="1100" dirty="0"/>
+            <a:endParaRPr lang="en-US" sz="1467" dirty="0"/>
           </a:p>
         </p:txBody>
       </p:sp>
@@ -2918,8 +4363,8 @@
         </p:nvSpPr>
         <p:spPr>
           <a:xfrm>
-            <a:off x="6510528" y="1664208"/>
-            <a:ext cx="420624" cy="822960"/>
+            <a:off x="8680704" y="2175357"/>
+            <a:ext cx="560832" cy="987552"/>
           </a:xfrm>
           <a:prstGeom prst="rect">
             <a:avLst/>
@@ -2935,9 +4380,9 @@
               <a:buNone/>
             </a:pPr>
             <a:r>
-              <a:rPr lang="en-US" sz="3000" b="1" dirty="0">
-                <a:solidFill>
-                  <a:srgbClr val="2E5AAC"/>
+              <a:rPr lang="en-US" sz="4000" b="1" dirty="0">
+                <a:solidFill>
+                  <a:srgbClr val="14508D"/>
                 </a:solidFill>
                 <a:latin typeface="Courier New" pitchFamily="34" charset="0"/>
                 <a:ea typeface="Courier New" pitchFamily="34" charset="-122"/>
@@ -2945,7 +4390,7 @@
               </a:rPr>
               <a:t>|</a:t>
             </a:r>
-            <a:endParaRPr lang="en-US" sz="3000" dirty="0"/>
+            <a:endParaRPr lang="en-US" sz="4000" dirty="0"/>
           </a:p>
         </p:txBody>
       </p:sp>
@@ -2957,8 +4402,8 @@
         </p:nvSpPr>
         <p:spPr>
           <a:xfrm>
-            <a:off x="6949440" y="1600200"/>
-            <a:ext cx="1691640" cy="960120"/>
+            <a:off x="9265920" y="2098548"/>
+            <a:ext cx="2255520" cy="1152144"/>
           </a:xfrm>
           <a:prstGeom prst="roundRect">
             <a:avLst>
@@ -2966,11 +4411,11 @@
             </a:avLst>
           </a:prstGeom>
           <a:solidFill>
-            <a:srgbClr val="1A2652"/>
+            <a:srgbClr val="1E1E1E"/>
           </a:solidFill>
           <a:ln/>
           <a:effectLst>
-            <a:outerShdw sx="100000" sy="100000" kx="0" ky="0" algn="bl" rotWithShape="0" blurRad="63500" dist="25400" dir="5400000">
+            <a:outerShdw sx="100000" sy="100000" kx="0" ky="0" algn="bl" rotWithShape="0" blurRad="84667" dist="33867" dir="5400000">
               <a:srgbClr val="000000">
                 <a:alpha val="20000"/>
               </a:srgbClr>
@@ -2986,8 +4431,8 @@
         </p:nvSpPr>
         <p:spPr>
           <a:xfrm>
-            <a:off x="6949440" y="1700784"/>
-            <a:ext cx="1691640" cy="411480"/>
+            <a:off x="9265920" y="2219248"/>
+            <a:ext cx="2255520" cy="493776"/>
           </a:xfrm>
           <a:prstGeom prst="rect">
             <a:avLst/>
@@ -3003,9 +4448,9 @@
               <a:buNone/>
             </a:pPr>
             <a:r>
-              <a:rPr lang="en-US" sz="1600" b="1" dirty="0">
-                <a:solidFill>
-                  <a:srgbClr val="FFC20E"/>
+              <a:rPr lang="en-US" sz="2133" b="1" dirty="0">
+                <a:solidFill>
+                  <a:srgbClr val="FAE55F"/>
                 </a:solidFill>
                 <a:latin typeface="Courier New" pitchFamily="34" charset="0"/>
                 <a:ea typeface="Courier New" pitchFamily="34" charset="-122"/>
@@ -3013,7 +4458,7 @@
               </a:rPr>
               <a:t>uniq -c</a:t>
             </a:r>
-            <a:endParaRPr lang="en-US" sz="1600" dirty="0"/>
+            <a:endParaRPr lang="en-US" sz="2133" dirty="0"/>
           </a:p>
         </p:txBody>
       </p:sp>
@@ -3025,8 +4470,8 @@
         </p:nvSpPr>
         <p:spPr>
           <a:xfrm>
-            <a:off x="6949440" y="2103120"/>
-            <a:ext cx="1691640" cy="320040"/>
+            <a:off x="9265920" y="2702052"/>
+            <a:ext cx="2255520" cy="384048"/>
           </a:xfrm>
           <a:prstGeom prst="rect">
             <a:avLst/>
@@ -3042,17 +4487,17 @@
               <a:buNone/>
             </a:pPr>
             <a:r>
-              <a:rPr lang="en-US" sz="1100" dirty="0">
-                <a:solidFill>
-                  <a:srgbClr val="9AA7C4"/>
-                </a:solidFill>
-                <a:latin typeface="Calibri" pitchFamily="34" charset="0"/>
-                <a:ea typeface="Calibri" pitchFamily="34" charset="-122"/>
-                <a:cs typeface="Calibri" pitchFamily="34" charset="-120"/>
+              <a:rPr lang="en-US" sz="1467" dirty="0">
+                <a:solidFill>
+                  <a:srgbClr val="BADCF6"/>
+                </a:solidFill>
+                <a:latin typeface="Roboto" pitchFamily="34" charset="0"/>
+                <a:ea typeface="Roboto" pitchFamily="34" charset="-122"/>
+                <a:cs typeface="Roboto" pitchFamily="34" charset="-120"/>
               </a:rPr>
               <a:t>zählen</a:t>
             </a:r>
-            <a:endParaRPr lang="en-US" sz="1100" dirty="0"/>
+            <a:endParaRPr lang="en-US" sz="1467" dirty="0"/>
           </a:p>
         </p:txBody>
       </p:sp>
@@ -3064,8 +4509,8 @@
         </p:nvSpPr>
         <p:spPr>
           <a:xfrm>
-            <a:off x="502920" y="2880360"/>
-            <a:ext cx="8138160" cy="685800"/>
+            <a:off x="670560" y="3634740"/>
+            <a:ext cx="10850880" cy="822960"/>
           </a:xfrm>
           <a:prstGeom prst="rect">
             <a:avLst/>
@@ -3081,13 +4526,13 @@
               <a:buNone/>
             </a:pPr>
             <a:r>
-              <a:rPr lang="en-US" sz="1400" b="1" dirty="0">
-                <a:solidFill>
-                  <a:srgbClr val="222A44"/>
-                </a:solidFill>
-                <a:latin typeface="Calibri" pitchFamily="34" charset="0"/>
-                <a:ea typeface="Calibri" pitchFamily="34" charset="-122"/>
-                <a:cs typeface="Calibri" pitchFamily="34" charset="-120"/>
+              <a:rPr lang="en-US" sz="1867" b="1" dirty="0">
+                <a:solidFill>
+                  <a:srgbClr val="1E1E1E"/>
+                </a:solidFill>
+                <a:latin typeface="Roboto" pitchFamily="34" charset="0"/>
+                <a:ea typeface="Roboto" pitchFamily="34" charset="-122"/>
+                <a:cs typeface="Roboto" pitchFamily="34" charset="-120"/>
               </a:rPr>
               <a:t>Ein Zeichen, eine Idee: </a:t>
             </a:r>
@@ -3095,17 +4540,17 @@
               <a:buNone/>
             </a:pPr>
             <a:r>
-              <a:rPr lang="en-US" sz="1400" dirty="0">
-                <a:solidFill>
-                  <a:srgbClr val="5F6A85"/>
-                </a:solidFill>
-                <a:latin typeface="Calibri" pitchFamily="34" charset="0"/>
-                <a:ea typeface="Calibri" pitchFamily="34" charset="-122"/>
-                <a:cs typeface="Calibri" pitchFamily="34" charset="-120"/>
+              <a:rPr lang="en-US" sz="1867" dirty="0">
+                <a:solidFill>
+                  <a:srgbClr val="595959"/>
+                </a:solidFill>
+                <a:latin typeface="Roboto" pitchFamily="34" charset="0"/>
+                <a:ea typeface="Roboto" pitchFamily="34" charset="-122"/>
+                <a:cs typeface="Roboto" pitchFamily="34" charset="-120"/>
               </a:rPr>
               <a:t>Die Ausgabe des linken Befehls wird zur Eingabe des rechten. Kleine Werkzeuge, die je eine Sache gut können – kombiniert lösen sie fast alles. Das ist die Unix-Philosophie.</a:t>
             </a:r>
-            <a:endParaRPr lang="en-US" sz="1400" dirty="0"/>
+            <a:endParaRPr lang="en-US" sz="1867" dirty="0"/>
           </a:p>
         </p:txBody>
       </p:sp>
@@ -3117,8 +4562,8 @@
         </p:nvSpPr>
         <p:spPr>
           <a:xfrm>
-            <a:off x="502920" y="3703320"/>
-            <a:ext cx="8138160" cy="914400"/>
+            <a:off x="670560" y="4622292"/>
+            <a:ext cx="10850880" cy="1097280"/>
           </a:xfrm>
           <a:prstGeom prst="roundRect">
             <a:avLst>
@@ -3126,7 +4571,7 @@
             </a:avLst>
           </a:prstGeom>
           <a:solidFill>
-            <a:srgbClr val="EDF2FA"/>
+            <a:srgbClr val="E4F1FB"/>
           </a:solidFill>
           <a:ln/>
         </p:spPr>
@@ -3139,8 +4584,8 @@
         </p:nvSpPr>
         <p:spPr>
           <a:xfrm>
-            <a:off x="731520" y="3822192"/>
-            <a:ext cx="7680960" cy="685800"/>
+            <a:off x="975360" y="4764938"/>
+            <a:ext cx="10241280" cy="822960"/>
           </a:xfrm>
           <a:prstGeom prst="rect">
             <a:avLst/>
@@ -3156,13 +4601,13 @@
               <a:buNone/>
             </a:pPr>
             <a:r>
-              <a:rPr lang="en-US" sz="1300" b="1" dirty="0">
-                <a:solidFill>
-                  <a:srgbClr val="2E5AAC"/>
-                </a:solidFill>
-                <a:latin typeface="Calibri" pitchFamily="34" charset="0"/>
-                <a:ea typeface="Calibri" pitchFamily="34" charset="-122"/>
-                <a:cs typeface="Calibri" pitchFamily="34" charset="-120"/>
+              <a:rPr lang="en-US" sz="1733" b="1" dirty="0">
+                <a:solidFill>
+                  <a:srgbClr val="14508D"/>
+                </a:solidFill>
+                <a:latin typeface="Roboto" pitchFamily="34" charset="0"/>
+                <a:ea typeface="Roboto" pitchFamily="34" charset="-122"/>
+                <a:cs typeface="Roboto" pitchFamily="34" charset="-120"/>
               </a:rPr>
               <a:t>Warum das für Ihre Schüler zählt: </a:t>
             </a:r>
@@ -3170,17 +4615,17 @@
               <a:buNone/>
             </a:pPr>
             <a:r>
-              <a:rPr lang="en-US" sz="1300" dirty="0">
-                <a:solidFill>
-                  <a:srgbClr val="222A44"/>
-                </a:solidFill>
-                <a:latin typeface="Calibri" pitchFamily="34" charset="0"/>
-                <a:ea typeface="Calibri" pitchFamily="34" charset="-122"/>
-                <a:cs typeface="Calibri" pitchFamily="34" charset="-120"/>
+              <a:rPr lang="en-US" sz="1733" dirty="0">
+                <a:solidFill>
+                  <a:srgbClr val="1E1E1E"/>
+                </a:solidFill>
+                <a:latin typeface="Roboto" pitchFamily="34" charset="0"/>
+                <a:ea typeface="Roboto" pitchFamily="34" charset="-122"/>
+                <a:cs typeface="Roboto" pitchFamily="34" charset="-120"/>
               </a:rPr>
               <a:t>Dasselbe Prinzip steckt in jeder Log-Analyse, jedem Deployment-Skript und jeder Prüfungsaufgabe zur Shell – vom Anfänger-Einzeiler bis zur Profi-Kette skaliert es mit jedem Niveau.</a:t>
             </a:r>
-            <a:endParaRPr lang="en-US" sz="1300" dirty="0"/>
+            <a:endParaRPr lang="en-US" sz="1733" dirty="0"/>
           </a:p>
         </p:txBody>
       </p:sp>
@@ -3195,13 +4640,6 @@
 <file path=ppt/slides/slide11.xml><?xml version="1.0" encoding="utf-8"?>
 <p:sld xmlns:a="http://schemas.openxmlformats.org/drawingml/2006/main" xmlns:r="http://schemas.openxmlformats.org/officeDocument/2006/relationships" xmlns:p="http://schemas.openxmlformats.org/presentationml/2006/main">
   <p:cSld name="Slide 11">
-    <p:bg>
-      <p:bgPr>
-        <a:solidFill>
-          <a:srgbClr val="FFFFFF"/>
-        </a:solidFill>
-      </p:bgPr>
-    </p:bg>
     <p:spTree>
       <p:nvGrpSpPr>
         <p:cNvPr id="1" name=""/>
@@ -3218,20 +4656,67 @@
       </p:grpSpPr>
       <p:sp>
         <p:nvSpPr>
+          <p:cNvPr id="9001" name="Datumsplatzhalter 9001"/>
+          <p:cNvSpPr>
+            <a:spLocks noGrp="1"/>
+          </p:cNvSpPr>
+          <p:nvPr>
+            <p:ph type="dt" sz="half" idx="2"/>
+          </p:nvPr>
+        </p:nvSpPr>
+        <p:spPr/>
+        <p:txBody>
+          <a:bodyPr/>
+          <a:lstStyle/>
+          <a:p>
+            <a:fld id="{86B4728B-49EC-AC4B-92D0-45D4091857E0}" type="datetime1">
+              <a:rPr lang="de-DE"/>
+              <a:pPr/>
+              <a:t>28.10.2026</a:t>
+            </a:fld>
+            <a:endParaRPr lang="de-DE"/>
+          </a:p>
+        </p:txBody>
+      </p:sp>
+      <p:sp>
+        <p:nvSpPr>
+          <p:cNvPr id="9002" name="Foliennummernplatzhalter 9002"/>
+          <p:cNvSpPr>
+            <a:spLocks noGrp="1"/>
+          </p:cNvSpPr>
+          <p:nvPr>
+            <p:ph type="sldNum" sz="quarter" idx="12"/>
+          </p:nvPr>
+        </p:nvSpPr>
+        <p:spPr/>
+        <p:txBody>
+          <a:bodyPr/>
+          <a:lstStyle/>
+          <a:p>
+            <a:fld id="{B7E13D07-A954-7D45-9CFC-776D35F33DC4}" type="slidenum">
+              <a:rPr lang="de-DE"/>
+              <a:t>11</a:t>
+            </a:fld>
+            <a:endParaRPr lang="de-DE"/>
+          </a:p>
+        </p:txBody>
+      </p:sp>
+      <p:sp>
+        <p:nvSpPr>
           <p:cNvPr id="2" name="Shape 0"/>
           <p:cNvSpPr/>
           <p:nvPr/>
         </p:nvSpPr>
         <p:spPr>
           <a:xfrm>
-            <a:off x="502920" y="329184"/>
-            <a:ext cx="118872" cy="118872"/>
+            <a:off x="670560" y="438912"/>
+            <a:ext cx="158496" cy="158496"/>
           </a:xfrm>
           <a:prstGeom prst="rect">
             <a:avLst/>
           </a:prstGeom>
           <a:solidFill>
-            <a:srgbClr val="FFC20E"/>
+            <a:srgbClr val="FAE55F"/>
           </a:solidFill>
           <a:ln/>
         </p:spPr>
@@ -3244,8 +4729,8 @@
         </p:nvSpPr>
         <p:spPr>
           <a:xfrm>
-            <a:off x="713232" y="292608"/>
-            <a:ext cx="7955280" cy="274320"/>
+            <a:off x="950976" y="390144"/>
+            <a:ext cx="10607040" cy="365760"/>
           </a:xfrm>
           <a:prstGeom prst="rect">
             <a:avLst/>
@@ -3261,17 +4746,17 @@
               <a:buNone/>
             </a:pPr>
             <a:r>
-              <a:rPr lang="en-US" sz="1200" b="1" spc="300" kern="0" dirty="0">
-                <a:solidFill>
-                  <a:srgbClr val="2E5AAC"/>
-                </a:solidFill>
-                <a:latin typeface="Calibri" pitchFamily="34" charset="0"/>
-                <a:ea typeface="Calibri" pitchFamily="34" charset="-122"/>
-                <a:cs typeface="Calibri" pitchFamily="34" charset="-120"/>
+              <a:rPr lang="en-US" sz="1600" b="1" spc="300" kern="0" dirty="0">
+                <a:solidFill>
+                  <a:srgbClr val="14508D"/>
+                </a:solidFill>
+                <a:latin typeface="Roboto" pitchFamily="34" charset="0"/>
+                <a:ea typeface="Roboto" pitchFamily="34" charset="-122"/>
+                <a:cs typeface="Roboto" pitchFamily="34" charset="-120"/>
               </a:rPr>
               <a:t>HANDS-ON II · DIE CHALLENGE</a:t>
             </a:r>
-            <a:endParaRPr lang="en-US" sz="1200" dirty="0"/>
+            <a:endParaRPr lang="en-US" sz="1600" dirty="0"/>
           </a:p>
         </p:txBody>
       </p:sp>
@@ -3283,8 +4768,8 @@
         </p:nvSpPr>
         <p:spPr>
           <a:xfrm>
-            <a:off x="502920" y="566928"/>
-            <a:ext cx="8138160" cy="685800"/>
+            <a:off x="670560" y="755904"/>
+            <a:ext cx="10850880" cy="914400"/>
           </a:xfrm>
           <a:prstGeom prst="rect">
             <a:avLst/>
@@ -3300,39 +4785,19 @@
               <a:buNone/>
             </a:pPr>
             <a:r>
-              <a:rPr lang="en-US" sz="3000" b="1" dirty="0">
-                <a:solidFill>
-                  <a:srgbClr val="222A44"/>
-                </a:solidFill>
-                <a:latin typeface="Calibri" pitchFamily="34" charset="0"/>
-                <a:ea typeface="Calibri" pitchFamily="34" charset="-122"/>
-                <a:cs typeface="Calibri" pitchFamily="34" charset="-120"/>
+              <a:rPr lang="en-US" sz="4000" b="1" dirty="0">
+                <a:solidFill>
+                  <a:srgbClr val="1E1E1E"/>
+                </a:solidFill>
+                <a:latin typeface="Roboto" pitchFamily="34" charset="0"/>
+                <a:ea typeface="Roboto" pitchFamily="34" charset="-122"/>
+                <a:cs typeface="Roboto" pitchFamily="34" charset="-120"/>
               </a:rPr>
               <a:t>Der Server-Krimi: Wer greift srv-schule01 an?</a:t>
             </a:r>
-            <a:endParaRPr lang="en-US" sz="3000" dirty="0"/>
-          </a:p>
-        </p:txBody>
-      </p:sp>
-      <p:sp>
-        <p:nvSpPr>
-          <p:cNvPr id="5" name="Shape 3"/>
-          <p:cNvSpPr/>
-          <p:nvPr/>
-        </p:nvSpPr>
-        <p:spPr>
-          <a:xfrm>
-            <a:off x="521208" y="1280160"/>
-            <a:ext cx="594360" cy="50292"/>
-          </a:xfrm>
-          <a:prstGeom prst="rect">
-            <a:avLst/>
-          </a:prstGeom>
-          <a:solidFill>
-            <a:srgbClr val="FFC20E"/>
-          </a:solidFill>
-          <a:ln/>
-        </p:spPr>
+            <a:endParaRPr lang="en-US" sz="4000" dirty="0"/>
+          </a:p>
+        </p:txBody>
       </p:sp>
       <p:sp>
         <p:nvSpPr>
@@ -3342,8 +4807,8 @@
         </p:nvSpPr>
         <p:spPr>
           <a:xfrm>
-            <a:off x="502920" y="1417320"/>
-            <a:ext cx="8138160" cy="1325880"/>
+            <a:off x="670560" y="1879092"/>
+            <a:ext cx="10850880" cy="1591056"/>
           </a:xfrm>
           <a:prstGeom prst="roundRect">
             <a:avLst>
@@ -3351,11 +4816,11 @@
             </a:avLst>
           </a:prstGeom>
           <a:solidFill>
-            <a:srgbClr val="1A2652"/>
+            <a:srgbClr val="1E1E1E"/>
           </a:solidFill>
           <a:ln/>
           <a:effectLst>
-            <a:outerShdw sx="100000" sy="100000" kx="0" ky="0" algn="bl" rotWithShape="0" blurRad="101600" dist="38100" dir="5400000">
+            <a:outerShdw sx="100000" sy="100000" kx="0" ky="0" algn="bl" rotWithShape="0" blurRad="135467" dist="50800" dir="5400000">
               <a:srgbClr val="000000">
                 <a:alpha val="25000"/>
               </a:srgbClr>
@@ -3371,8 +4836,8 @@
         </p:nvSpPr>
         <p:spPr>
           <a:xfrm>
-            <a:off x="630936" y="1527048"/>
-            <a:ext cx="100584" cy="100584"/>
+            <a:off x="841248" y="2004060"/>
+            <a:ext cx="134112" cy="134112"/>
           </a:xfrm>
           <a:prstGeom prst="ellipse">
             <a:avLst/>
@@ -3391,8 +4856,8 @@
         </p:nvSpPr>
         <p:spPr>
           <a:xfrm>
-            <a:off x="813816" y="1527048"/>
-            <a:ext cx="100584" cy="100584"/>
+            <a:off x="1085088" y="2004060"/>
+            <a:ext cx="134112" cy="134112"/>
           </a:xfrm>
           <a:prstGeom prst="ellipse">
             <a:avLst/>
@@ -3411,8 +4876,8 @@
         </p:nvSpPr>
         <p:spPr>
           <a:xfrm>
-            <a:off x="996696" y="1527048"/>
-            <a:ext cx="100584" cy="100584"/>
+            <a:off x="1328928" y="2004060"/>
+            <a:ext cx="134112" cy="134112"/>
           </a:xfrm>
           <a:prstGeom prst="ellipse">
             <a:avLst/>
@@ -3431,8 +4896,8 @@
         </p:nvSpPr>
         <p:spPr>
           <a:xfrm>
-            <a:off x="667512" y="1728216"/>
-            <a:ext cx="7808976" cy="905256"/>
+            <a:off x="890016" y="2252167"/>
+            <a:ext cx="10411968" cy="1086307"/>
           </a:xfrm>
           <a:prstGeom prst="rect">
             <a:avLst/>
@@ -3446,14 +4911,14 @@
           <a:p>
             <a:pPr algn="l" indent="0" marL="0">
               <a:lnSpc>
-                <a:spcPts val="1885"/>
+                <a:spcPts val="2513"/>
               </a:lnSpc>
               <a:buNone/>
             </a:pPr>
             <a:r>
-              <a:rPr lang="en-US" sz="1300" dirty="0">
-                <a:solidFill>
-                  <a:srgbClr val="FFC20E"/>
+              <a:rPr lang="en-US" sz="1733" dirty="0">
+                <a:solidFill>
+                  <a:srgbClr val="FAE55F"/>
                 </a:solidFill>
                 <a:latin typeface="Courier New" pitchFamily="34" charset="0"/>
                 <a:ea typeface="Courier New" pitchFamily="34" charset="-122"/>
@@ -3461,19 +4926,19 @@
               </a:rPr>
               <a:t>$ cp /srv/workshop/server.log .</a:t>
             </a:r>
-            <a:endParaRPr lang="en-US" sz="1300" dirty="0"/>
+            <a:endParaRPr lang="en-US" sz="1733" dirty="0"/>
           </a:p>
           <a:p>
             <a:pPr algn="l" indent="0" marL="0">
               <a:lnSpc>
-                <a:spcPts val="1885"/>
+                <a:spcPts val="2513"/>
               </a:lnSpc>
               <a:buNone/>
             </a:pPr>
             <a:r>
-              <a:rPr lang="en-US" sz="1300" dirty="0">
-                <a:solidFill>
-                  <a:srgbClr val="FFC20E"/>
+              <a:rPr lang="en-US" sz="1733" dirty="0">
+                <a:solidFill>
+                  <a:srgbClr val="FAE55F"/>
                 </a:solidFill>
                 <a:latin typeface="Courier New" pitchFamily="34" charset="0"/>
                 <a:ea typeface="Courier New" pitchFamily="34" charset="-122"/>
@@ -3481,19 +4946,19 @@
               </a:rPr>
               <a:t>$ wc -l server.log</a:t>
             </a:r>
-            <a:endParaRPr lang="en-US" sz="1300" dirty="0"/>
+            <a:endParaRPr lang="en-US" sz="1733" dirty="0"/>
           </a:p>
           <a:p>
             <a:pPr algn="l" indent="0" marL="0">
               <a:lnSpc>
-                <a:spcPts val="1885"/>
+                <a:spcPts val="2513"/>
               </a:lnSpc>
               <a:buNone/>
             </a:pPr>
             <a:r>
-              <a:rPr lang="en-US" sz="1300" dirty="0">
-                <a:solidFill>
-                  <a:srgbClr val="DCE3F2"/>
+              <a:rPr lang="en-US" sz="1733" dirty="0">
+                <a:solidFill>
+                  <a:srgbClr val="FFFFFF"/>
                 </a:solidFill>
                 <a:latin typeface="Courier New" pitchFamily="34" charset="0"/>
                 <a:ea typeface="Courier New" pitchFamily="34" charset="-122"/>
@@ -3501,7 +4966,7 @@
               </a:rPr>
               <a:t>210 server.log</a:t>
             </a:r>
-            <a:endParaRPr lang="en-US" sz="1300" dirty="0"/>
+            <a:endParaRPr lang="en-US" sz="1733" dirty="0"/>
           </a:p>
         </p:txBody>
       </p:sp>
@@ -3513,8 +4978,8 @@
         </p:nvSpPr>
         <p:spPr>
           <a:xfrm>
-            <a:off x="502920" y="2971800"/>
-            <a:ext cx="2606040" cy="1691640"/>
+            <a:off x="670560" y="3744468"/>
+            <a:ext cx="3474720" cy="2029968"/>
           </a:xfrm>
           <a:prstGeom prst="roundRect">
             <a:avLst>
@@ -3522,7 +4987,7 @@
             </a:avLst>
           </a:prstGeom>
           <a:solidFill>
-            <a:srgbClr val="EDF2FA"/>
+            <a:srgbClr val="E4F1FB"/>
           </a:solidFill>
           <a:ln/>
         </p:spPr>
@@ -3535,8 +5000,8 @@
         </p:nvSpPr>
         <p:spPr>
           <a:xfrm>
-            <a:off x="704088" y="3172968"/>
-            <a:ext cx="457200" cy="457200"/>
+            <a:off x="938784" y="3955390"/>
+            <a:ext cx="609600" cy="609600"/>
           </a:xfrm>
           <a:prstGeom prst="ellipse">
             <a:avLst/>
@@ -3563,8 +5028,8 @@
         </p:blipFill>
         <p:spPr>
           <a:xfrm>
-            <a:off x="804672" y="3273552"/>
-            <a:ext cx="256032" cy="256032"/>
+            <a:off x="1072896" y="4089502"/>
+            <a:ext cx="341376" cy="341376"/>
           </a:xfrm>
           <a:prstGeom prst="rect">
             <a:avLst/>
@@ -3579,8 +5044,8 @@
         </p:nvSpPr>
         <p:spPr>
           <a:xfrm>
-            <a:off x="1280160" y="3218688"/>
-            <a:ext cx="1783080" cy="411480"/>
+            <a:off x="1706880" y="4040733"/>
+            <a:ext cx="2377440" cy="493776"/>
           </a:xfrm>
           <a:prstGeom prst="rect">
             <a:avLst/>
@@ -3596,17 +5061,17 @@
               <a:buNone/>
             </a:pPr>
             <a:r>
-              <a:rPr lang="en-US" sz="1350" b="1" dirty="0">
-                <a:solidFill>
-                  <a:srgbClr val="222A44"/>
-                </a:solidFill>
-                <a:latin typeface="Calibri" pitchFamily="34" charset="0"/>
-                <a:ea typeface="Calibri" pitchFamily="34" charset="-122"/>
-                <a:cs typeface="Calibri" pitchFamily="34" charset="-120"/>
+              <a:rPr lang="en-US" sz="1800" b="1" dirty="0">
+                <a:solidFill>
+                  <a:srgbClr val="1E1E1E"/>
+                </a:solidFill>
+                <a:latin typeface="Roboto" pitchFamily="34" charset="0"/>
+                <a:ea typeface="Roboto" pitchFamily="34" charset="-122"/>
+                <a:cs typeface="Roboto" pitchFamily="34" charset="-120"/>
               </a:rPr>
               <a:t>Die Spurenlage</a:t>
             </a:r>
-            <a:endParaRPr lang="en-US" sz="1350" dirty="0"/>
+            <a:endParaRPr lang="en-US" sz="1800" dirty="0"/>
           </a:p>
         </p:txBody>
       </p:sp>
@@ -3618,8 +5083,8 @@
         </p:nvSpPr>
         <p:spPr>
           <a:xfrm>
-            <a:off x="704088" y="3730752"/>
-            <a:ext cx="2240280" cy="868680"/>
+            <a:off x="938784" y="4655210"/>
+            <a:ext cx="2987040" cy="1042416"/>
           </a:xfrm>
           <a:prstGeom prst="rect">
             <a:avLst/>
@@ -3635,17 +5100,17 @@
               <a:buNone/>
             </a:pPr>
             <a:r>
-              <a:rPr lang="en-US" sz="1100" dirty="0">
-                <a:solidFill>
-                  <a:srgbClr val="5F6A85"/>
-                </a:solidFill>
-                <a:latin typeface="Calibri" pitchFamily="34" charset="0"/>
-                <a:ea typeface="Calibri" pitchFamily="34" charset="-122"/>
-                <a:cs typeface="Calibri" pitchFamily="34" charset="-120"/>
+              <a:rPr lang="en-US" sz="1467" dirty="0">
+                <a:solidFill>
+                  <a:srgbClr val="595959"/>
+                </a:solidFill>
+                <a:latin typeface="Roboto" pitchFamily="34" charset="0"/>
+                <a:ea typeface="Roboto" pitchFamily="34" charset="-122"/>
+                <a:cs typeface="Roboto" pitchFamily="34" charset="-120"/>
               </a:rPr>
               <a:t>210 Log-Zeilen, irgendwo darin: ein Brute-Force-Angriff auf SSH.</a:t>
             </a:r>
-            <a:endParaRPr lang="en-US" sz="1100" dirty="0"/>
+            <a:endParaRPr lang="en-US" sz="1467" dirty="0"/>
           </a:p>
         </p:txBody>
       </p:sp>
@@ -3657,8 +5122,8 @@
         </p:nvSpPr>
         <p:spPr>
           <a:xfrm>
-            <a:off x="3300984" y="2971800"/>
-            <a:ext cx="2606040" cy="1691640"/>
+            <a:off x="4401312" y="3744468"/>
+            <a:ext cx="3474720" cy="2029968"/>
           </a:xfrm>
           <a:prstGeom prst="roundRect">
             <a:avLst>
@@ -3666,7 +5131,7 @@
             </a:avLst>
           </a:prstGeom>
           <a:solidFill>
-            <a:srgbClr val="EDF2FA"/>
+            <a:srgbClr val="E4F1FB"/>
           </a:solidFill>
           <a:ln/>
         </p:spPr>
@@ -3679,8 +5144,8 @@
         </p:nvSpPr>
         <p:spPr>
           <a:xfrm>
-            <a:off x="3502152" y="3172968"/>
-            <a:ext cx="457200" cy="457200"/>
+            <a:off x="4669536" y="3955390"/>
+            <a:ext cx="609600" cy="609600"/>
           </a:xfrm>
           <a:prstGeom prst="ellipse">
             <a:avLst/>
@@ -3707,8 +5172,8 @@
         </p:blipFill>
         <p:spPr>
           <a:xfrm>
-            <a:off x="3602736" y="3273552"/>
-            <a:ext cx="256032" cy="256032"/>
+            <a:off x="4803648" y="4089502"/>
+            <a:ext cx="341376" cy="341376"/>
           </a:xfrm>
           <a:prstGeom prst="rect">
             <a:avLst/>
@@ -3723,8 +5188,8 @@
         </p:nvSpPr>
         <p:spPr>
           <a:xfrm>
-            <a:off x="4078224" y="3218688"/>
-            <a:ext cx="1783080" cy="411480"/>
+            <a:off x="5437632" y="4040733"/>
+            <a:ext cx="2377440" cy="493776"/>
           </a:xfrm>
           <a:prstGeom prst="rect">
             <a:avLst/>
@@ -3740,17 +5205,17 @@
               <a:buNone/>
             </a:pPr>
             <a:r>
-              <a:rPr lang="en-US" sz="1350" b="1" dirty="0">
-                <a:solidFill>
-                  <a:srgbClr val="222A44"/>
-                </a:solidFill>
-                <a:latin typeface="Calibri" pitchFamily="34" charset="0"/>
-                <a:ea typeface="Calibri" pitchFamily="34" charset="-122"/>
-                <a:cs typeface="Calibri" pitchFamily="34" charset="-120"/>
+              <a:rPr lang="en-US" sz="1800" b="1" dirty="0">
+                <a:solidFill>
+                  <a:srgbClr val="1E1E1E"/>
+                </a:solidFill>
+                <a:latin typeface="Roboto" pitchFamily="34" charset="0"/>
+                <a:ea typeface="Roboto" pitchFamily="34" charset="-122"/>
+                <a:cs typeface="Roboto" pitchFamily="34" charset="-120"/>
               </a:rPr>
               <a:t>Die Ermittlung</a:t>
             </a:r>
-            <a:endParaRPr lang="en-US" sz="1350" dirty="0"/>
+            <a:endParaRPr lang="en-US" sz="1800" dirty="0"/>
           </a:p>
         </p:txBody>
       </p:sp>
@@ -3762,8 +5227,8 @@
         </p:nvSpPr>
         <p:spPr>
           <a:xfrm>
-            <a:off x="3502152" y="3730752"/>
-            <a:ext cx="2240280" cy="868680"/>
+            <a:off x="4669536" y="4655210"/>
+            <a:ext cx="2987040" cy="1042416"/>
           </a:xfrm>
           <a:prstGeom prst="rect">
             <a:avLst/>
@@ -3779,17 +5244,17 @@
               <a:buNone/>
             </a:pPr>
             <a:r>
-              <a:rPr lang="en-US" sz="1100" dirty="0">
-                <a:solidFill>
-                  <a:srgbClr val="5F6A85"/>
-                </a:solidFill>
-                <a:latin typeface="Calibri" pitchFamily="34" charset="0"/>
-                <a:ea typeface="Calibri" pitchFamily="34" charset="-122"/>
-                <a:cs typeface="Calibri" pitchFamily="34" charset="-120"/>
+              <a:rPr lang="en-US" sz="1467" dirty="0">
+                <a:solidFill>
+                  <a:srgbClr val="595959"/>
+                </a:solidFill>
+                <a:latin typeface="Roboto" pitchFamily="34" charset="0"/>
+                <a:ea typeface="Roboto" pitchFamily="34" charset="-122"/>
+                <a:cs typeface="Roboto" pitchFamily="34" charset="-120"/>
               </a:rPr>
               <a:t>6 Aufgaben vom einfachen Zählen bis zur Befehlskette – Arbeitsblatt Teil B.</a:t>
             </a:r>
-            <a:endParaRPr lang="en-US" sz="1100" dirty="0"/>
+            <a:endParaRPr lang="en-US" sz="1467" dirty="0"/>
           </a:p>
         </p:txBody>
       </p:sp>
@@ -3801,8 +5266,8 @@
         </p:nvSpPr>
         <p:spPr>
           <a:xfrm>
-            <a:off x="6099048" y="2971800"/>
-            <a:ext cx="2606040" cy="1691640"/>
+            <a:off x="8132064" y="3744468"/>
+            <a:ext cx="3474720" cy="2029968"/>
           </a:xfrm>
           <a:prstGeom prst="roundRect">
             <a:avLst>
@@ -3810,7 +5275,7 @@
             </a:avLst>
           </a:prstGeom>
           <a:solidFill>
-            <a:srgbClr val="EDF2FA"/>
+            <a:srgbClr val="E4F1FB"/>
           </a:solidFill>
           <a:ln/>
         </p:spPr>
@@ -3823,8 +5288,8 @@
         </p:nvSpPr>
         <p:spPr>
           <a:xfrm>
-            <a:off x="6300216" y="3172968"/>
-            <a:ext cx="457200" cy="457200"/>
+            <a:off x="8400288" y="3955390"/>
+            <a:ext cx="609600" cy="609600"/>
           </a:xfrm>
           <a:prstGeom prst="ellipse">
             <a:avLst/>
@@ -3851,8 +5316,8 @@
         </p:blipFill>
         <p:spPr>
           <a:xfrm>
-            <a:off x="6400800" y="3273552"/>
-            <a:ext cx="256032" cy="256032"/>
+            <a:off x="8534400" y="4089502"/>
+            <a:ext cx="341376" cy="341376"/>
           </a:xfrm>
           <a:prstGeom prst="rect">
             <a:avLst/>
@@ -3867,8 +5332,8 @@
         </p:nvSpPr>
         <p:spPr>
           <a:xfrm>
-            <a:off x="6876288" y="3218688"/>
-            <a:ext cx="1783080" cy="411480"/>
+            <a:off x="9168384" y="4040733"/>
+            <a:ext cx="2377440" cy="493776"/>
           </a:xfrm>
           <a:prstGeom prst="rect">
             <a:avLst/>
@@ -3884,17 +5349,17 @@
               <a:buNone/>
             </a:pPr>
             <a:r>
-              <a:rPr lang="en-US" sz="1350" b="1" dirty="0">
-                <a:solidFill>
-                  <a:srgbClr val="222A44"/>
-                </a:solidFill>
-                <a:latin typeface="Calibri" pitchFamily="34" charset="0"/>
-                <a:ea typeface="Calibri" pitchFamily="34" charset="-122"/>
-                <a:cs typeface="Calibri" pitchFamily="34" charset="-120"/>
+              <a:rPr lang="en-US" sz="1800" b="1" dirty="0">
+                <a:solidFill>
+                  <a:srgbClr val="1E1E1E"/>
+                </a:solidFill>
+                <a:latin typeface="Roboto" pitchFamily="34" charset="0"/>
+                <a:ea typeface="Roboto" pitchFamily="34" charset="-122"/>
+                <a:cs typeface="Roboto" pitchFamily="34" charset="-120"/>
               </a:rPr>
               <a:t>Die Königsdisziplin</a:t>
             </a:r>
-            <a:endParaRPr lang="en-US" sz="1350" dirty="0"/>
+            <a:endParaRPr lang="en-US" sz="1800" dirty="0"/>
           </a:p>
         </p:txBody>
       </p:sp>
@@ -3906,8 +5371,8 @@
         </p:nvSpPr>
         <p:spPr>
           <a:xfrm>
-            <a:off x="6300216" y="3730752"/>
-            <a:ext cx="2240280" cy="868680"/>
+            <a:off x="8400288" y="4655210"/>
+            <a:ext cx="2987040" cy="1042416"/>
           </a:xfrm>
           <a:prstGeom prst="rect">
             <a:avLst/>
@@ -3923,17 +5388,17 @@
               <a:buNone/>
             </a:pPr>
             <a:r>
-              <a:rPr lang="en-US" sz="1100" dirty="0">
-                <a:solidFill>
-                  <a:srgbClr val="5F6A85"/>
-                </a:solidFill>
-                <a:latin typeface="Calibri" pitchFamily="34" charset="0"/>
-                <a:ea typeface="Calibri" pitchFamily="34" charset="-122"/>
-                <a:cs typeface="Calibri" pitchFamily="34" charset="-120"/>
+              <a:rPr lang="en-US" sz="1467" dirty="0">
+                <a:solidFill>
+                  <a:srgbClr val="595959"/>
+                </a:solidFill>
+                <a:latin typeface="Roboto" pitchFamily="34" charset="0"/>
+                <a:ea typeface="Roboto" pitchFamily="34" charset="-122"/>
+                <a:cs typeface="Roboto" pitchFamily="34" charset="-120"/>
               </a:rPr>
               <a:t>Top-Liste der Angreifer-IPs in einer einzigen Zeile. Wer sie hat, ruft „Gefunden!“</a:t>
             </a:r>
-            <a:endParaRPr lang="en-US" sz="1100" dirty="0"/>
+            <a:endParaRPr lang="en-US" sz="1467" dirty="0"/>
           </a:p>
         </p:txBody>
       </p:sp>
@@ -3948,13 +5413,6 @@
 <file path=ppt/slides/slide12.xml><?xml version="1.0" encoding="utf-8"?>
 <p:sld xmlns:a="http://schemas.openxmlformats.org/drawingml/2006/main" xmlns:r="http://schemas.openxmlformats.org/officeDocument/2006/relationships" xmlns:p="http://schemas.openxmlformats.org/presentationml/2006/main">
   <p:cSld name="Slide 12">
-    <p:bg>
-      <p:bgPr>
-        <a:solidFill>
-          <a:srgbClr val="FFFFFF"/>
-        </a:solidFill>
-      </p:bgPr>
-    </p:bg>
     <p:spTree>
       <p:nvGrpSpPr>
         <p:cNvPr id="1" name=""/>
@@ -3971,20 +5429,67 @@
       </p:grpSpPr>
       <p:sp>
         <p:nvSpPr>
+          <p:cNvPr id="9001" name="Datumsplatzhalter 9001"/>
+          <p:cNvSpPr>
+            <a:spLocks noGrp="1"/>
+          </p:cNvSpPr>
+          <p:nvPr>
+            <p:ph type="dt" sz="half" idx="2"/>
+          </p:nvPr>
+        </p:nvSpPr>
+        <p:spPr/>
+        <p:txBody>
+          <a:bodyPr/>
+          <a:lstStyle/>
+          <a:p>
+            <a:fld id="{86B4728B-49EC-AC4B-92D0-45D4091857E0}" type="datetime1">
+              <a:rPr lang="de-DE"/>
+              <a:pPr/>
+              <a:t>28.10.2026</a:t>
+            </a:fld>
+            <a:endParaRPr lang="de-DE"/>
+          </a:p>
+        </p:txBody>
+      </p:sp>
+      <p:sp>
+        <p:nvSpPr>
+          <p:cNvPr id="9002" name="Foliennummernplatzhalter 9002"/>
+          <p:cNvSpPr>
+            <a:spLocks noGrp="1"/>
+          </p:cNvSpPr>
+          <p:nvPr>
+            <p:ph type="sldNum" sz="quarter" idx="12"/>
+          </p:nvPr>
+        </p:nvSpPr>
+        <p:spPr/>
+        <p:txBody>
+          <a:bodyPr/>
+          <a:lstStyle/>
+          <a:p>
+            <a:fld id="{B7E13D07-A954-7D45-9CFC-776D35F33DC4}" type="slidenum">
+              <a:rPr lang="de-DE"/>
+              <a:t>12</a:t>
+            </a:fld>
+            <a:endParaRPr lang="de-DE"/>
+          </a:p>
+        </p:txBody>
+      </p:sp>
+      <p:sp>
+        <p:nvSpPr>
           <p:cNvPr id="2" name="Shape 0"/>
           <p:cNvSpPr/>
           <p:nvPr/>
         </p:nvSpPr>
         <p:spPr>
           <a:xfrm>
-            <a:off x="502920" y="329184"/>
-            <a:ext cx="118872" cy="118872"/>
+            <a:off x="670560" y="438912"/>
+            <a:ext cx="158496" cy="158496"/>
           </a:xfrm>
           <a:prstGeom prst="rect">
             <a:avLst/>
           </a:prstGeom>
           <a:solidFill>
-            <a:srgbClr val="FFC20E"/>
+            <a:srgbClr val="FAE55F"/>
           </a:solidFill>
           <a:ln/>
         </p:spPr>
@@ -3997,8 +5502,8 @@
         </p:nvSpPr>
         <p:spPr>
           <a:xfrm>
-            <a:off x="713232" y="292608"/>
-            <a:ext cx="7955280" cy="274320"/>
+            <a:off x="950976" y="390144"/>
+            <a:ext cx="10607040" cy="365760"/>
           </a:xfrm>
           <a:prstGeom prst="rect">
             <a:avLst/>
@@ -4014,17 +5519,17 @@
               <a:buNone/>
             </a:pPr>
             <a:r>
-              <a:rPr lang="en-US" sz="1200" b="1" spc="300" kern="0" dirty="0">
-                <a:solidFill>
-                  <a:srgbClr val="2E5AAC"/>
-                </a:solidFill>
-                <a:latin typeface="Calibri" pitchFamily="34" charset="0"/>
-                <a:ea typeface="Calibri" pitchFamily="34" charset="-122"/>
-                <a:cs typeface="Calibri" pitchFamily="34" charset="-120"/>
+              <a:rPr lang="en-US" sz="1600" b="1" spc="300" kern="0" dirty="0">
+                <a:solidFill>
+                  <a:srgbClr val="14508D"/>
+                </a:solidFill>
+                <a:latin typeface="Roboto" pitchFamily="34" charset="0"/>
+                <a:ea typeface="Roboto" pitchFamily="34" charset="-122"/>
+                <a:cs typeface="Roboto" pitchFamily="34" charset="-120"/>
               </a:rPr>
               <a:t>TRANSFER · MINUTE 49–55</a:t>
             </a:r>
-            <a:endParaRPr lang="en-US" sz="1200" dirty="0"/>
+            <a:endParaRPr lang="en-US" sz="1600" dirty="0"/>
           </a:p>
         </p:txBody>
       </p:sp>
@@ -4036,8 +5541,8 @@
         </p:nvSpPr>
         <p:spPr>
           <a:xfrm>
-            <a:off x="502920" y="566928"/>
-            <a:ext cx="8138160" cy="685800"/>
+            <a:off x="670560" y="755904"/>
+            <a:ext cx="10850880" cy="914400"/>
           </a:xfrm>
           <a:prstGeom prst="rect">
             <a:avLst/>
@@ -4053,39 +5558,19 @@
               <a:buNone/>
             </a:pPr>
             <a:r>
-              <a:rPr lang="en-US" sz="3000" b="1" dirty="0">
-                <a:solidFill>
-                  <a:srgbClr val="222A44"/>
-                </a:solidFill>
-                <a:latin typeface="Calibri" pitchFamily="34" charset="0"/>
-                <a:ea typeface="Calibri" pitchFamily="34" charset="-122"/>
-                <a:cs typeface="Calibri" pitchFamily="34" charset="-120"/>
+              <a:rPr lang="en-US" sz="4000" b="1" dirty="0">
+                <a:solidFill>
+                  <a:srgbClr val="1E1E1E"/>
+                </a:solidFill>
+                <a:latin typeface="Roboto" pitchFamily="34" charset="0"/>
+                <a:ea typeface="Roboto" pitchFamily="34" charset="-122"/>
+                <a:cs typeface="Roboto" pitchFamily="34" charset="-120"/>
               </a:rPr>
               <a:t>Von hier in Ihren Unterricht</a:t>
             </a:r>
-            <a:endParaRPr lang="en-US" sz="3000" dirty="0"/>
-          </a:p>
-        </p:txBody>
-      </p:sp>
-      <p:sp>
-        <p:nvSpPr>
-          <p:cNvPr id="5" name="Shape 3"/>
-          <p:cNvSpPr/>
-          <p:nvPr/>
-        </p:nvSpPr>
-        <p:spPr>
-          <a:xfrm>
-            <a:off x="521208" y="1280160"/>
-            <a:ext cx="594360" cy="50292"/>
-          </a:xfrm>
-          <a:prstGeom prst="rect">
-            <a:avLst/>
-          </a:prstGeom>
-          <a:solidFill>
-            <a:srgbClr val="FFC20E"/>
-          </a:solidFill>
-          <a:ln/>
-        </p:spPr>
+            <a:endParaRPr lang="en-US" sz="4000" dirty="0"/>
+          </a:p>
+        </p:txBody>
       </p:sp>
       <p:sp>
         <p:nvSpPr>
@@ -4095,8 +5580,8 @@
         </p:nvSpPr>
         <p:spPr>
           <a:xfrm>
-            <a:off x="502920" y="1508760"/>
-            <a:ext cx="2606040" cy="2286000"/>
+            <a:off x="670560" y="1988820"/>
+            <a:ext cx="3474720" cy="2743200"/>
           </a:xfrm>
           <a:prstGeom prst="roundRect">
             <a:avLst>
@@ -4104,7 +5589,7 @@
             </a:avLst>
           </a:prstGeom>
           <a:solidFill>
-            <a:srgbClr val="EDF2FA"/>
+            <a:srgbClr val="E4F1FB"/>
           </a:solidFill>
           <a:ln/>
         </p:spPr>
@@ -4117,8 +5602,8 @@
         </p:nvSpPr>
         <p:spPr>
           <a:xfrm>
-            <a:off x="704088" y="1737360"/>
-            <a:ext cx="512064" cy="512064"/>
+            <a:off x="938784" y="2229003"/>
+            <a:ext cx="682752" cy="682752"/>
           </a:xfrm>
           <a:prstGeom prst="ellipse">
             <a:avLst/>
@@ -4145,8 +5630,8 @@
         </p:blipFill>
         <p:spPr>
           <a:xfrm>
-            <a:off x="822960" y="1856232"/>
-            <a:ext cx="274320" cy="274320"/>
+            <a:off x="1097280" y="2387499"/>
+            <a:ext cx="365760" cy="365760"/>
           </a:xfrm>
           <a:prstGeom prst="rect">
             <a:avLst/>
@@ -4161,8 +5646,8 @@
         </p:nvSpPr>
         <p:spPr>
           <a:xfrm>
-            <a:off x="704088" y="2377440"/>
-            <a:ext cx="2240280" cy="594360"/>
+            <a:off x="938784" y="3031236"/>
+            <a:ext cx="2987040" cy="713232"/>
           </a:xfrm>
           <a:prstGeom prst="rect">
             <a:avLst/>
@@ -4178,17 +5663,17 @@
               <a:buNone/>
             </a:pPr>
             <a:r>
-              <a:rPr lang="en-US" sz="1350" b="1" dirty="0">
-                <a:solidFill>
-                  <a:srgbClr val="222A44"/>
-                </a:solidFill>
-                <a:latin typeface="Calibri" pitchFamily="34" charset="0"/>
-                <a:ea typeface="Calibri" pitchFamily="34" charset="-122"/>
-                <a:cs typeface="Calibri" pitchFamily="34" charset="-120"/>
+              <a:rPr lang="en-US" sz="1800" b="1" dirty="0">
+                <a:solidFill>
+                  <a:srgbClr val="1E1E1E"/>
+                </a:solidFill>
+                <a:latin typeface="Roboto" pitchFamily="34" charset="0"/>
+                <a:ea typeface="Roboto" pitchFamily="34" charset="-122"/>
+                <a:cs typeface="Roboto" pitchFamily="34" charset="-120"/>
               </a:rPr>
               <a:t>Heute erlebt: der Übungsserver</a:t>
             </a:r>
-            <a:endParaRPr lang="en-US" sz="1350" dirty="0"/>
+            <a:endParaRPr lang="en-US" sz="1800" dirty="0"/>
           </a:p>
         </p:txBody>
       </p:sp>
@@ -4200,8 +5685,8 @@
         </p:nvSpPr>
         <p:spPr>
           <a:xfrm>
-            <a:off x="704088" y="2944368"/>
-            <a:ext cx="2240280" cy="777240"/>
+            <a:off x="938784" y="3711549"/>
+            <a:ext cx="2987040" cy="932688"/>
           </a:xfrm>
           <a:prstGeom prst="rect">
             <a:avLst/>
@@ -4217,17 +5702,17 @@
               <a:buNone/>
             </a:pPr>
             <a:r>
-              <a:rPr lang="en-US" sz="1100" dirty="0">
-                <a:solidFill>
-                  <a:srgbClr val="5F6A85"/>
-                </a:solidFill>
-                <a:latin typeface="Calibri" pitchFamily="34" charset="0"/>
-                <a:ea typeface="Calibri" pitchFamily="34" charset="-122"/>
-                <a:cs typeface="Calibri" pitchFamily="34" charset="-120"/>
+              <a:rPr lang="en-US" sz="1467" dirty="0">
+                <a:solidFill>
+                  <a:srgbClr val="595959"/>
+                </a:solidFill>
+                <a:latin typeface="Roboto" pitchFamily="34" charset="0"/>
+                <a:ea typeface="Roboto" pitchFamily="34" charset="-122"/>
+                <a:cs typeface="Roboto" pitchFamily="34" charset="-120"/>
               </a:rPr>
               <a:t>Ein Linux im Netz, 40 Konten, SSH – die Setup-Skripte dafür nehmen Sie fertig mit.</a:t>
             </a:r>
-            <a:endParaRPr lang="en-US" sz="1100" dirty="0"/>
+            <a:endParaRPr lang="en-US" sz="1467" dirty="0"/>
           </a:p>
         </p:txBody>
       </p:sp>
@@ -4239,8 +5724,8 @@
         </p:nvSpPr>
         <p:spPr>
           <a:xfrm>
-            <a:off x="3300984" y="1508760"/>
-            <a:ext cx="2606040" cy="2286000"/>
+            <a:off x="4401312" y="1988820"/>
+            <a:ext cx="3474720" cy="2743200"/>
           </a:xfrm>
           <a:prstGeom prst="roundRect">
             <a:avLst>
@@ -4248,7 +5733,7 @@
             </a:avLst>
           </a:prstGeom>
           <a:solidFill>
-            <a:srgbClr val="EDF2FA"/>
+            <a:srgbClr val="E4F1FB"/>
           </a:solidFill>
           <a:ln/>
         </p:spPr>
@@ -4261,8 +5746,8 @@
         </p:nvSpPr>
         <p:spPr>
           <a:xfrm>
-            <a:off x="3502152" y="1737360"/>
-            <a:ext cx="512064" cy="512064"/>
+            <a:off x="4669536" y="2229003"/>
+            <a:ext cx="682752" cy="682752"/>
           </a:xfrm>
           <a:prstGeom prst="ellipse">
             <a:avLst/>
@@ -4289,8 +5774,8 @@
         </p:blipFill>
         <p:spPr>
           <a:xfrm>
-            <a:off x="3621024" y="1856232"/>
-            <a:ext cx="274320" cy="274320"/>
+            <a:off x="4828032" y="2387499"/>
+            <a:ext cx="365760" cy="365760"/>
           </a:xfrm>
           <a:prstGeom prst="rect">
             <a:avLst/>
@@ -4305,8 +5790,8 @@
         </p:nvSpPr>
         <p:spPr>
           <a:xfrm>
-            <a:off x="3502152" y="2377440"/>
-            <a:ext cx="2240280" cy="594360"/>
+            <a:off x="4669536" y="3031236"/>
+            <a:ext cx="2987040" cy="713232"/>
           </a:xfrm>
           <a:prstGeom prst="rect">
             <a:avLst/>
@@ -4322,17 +5807,17 @@
               <a:buNone/>
             </a:pPr>
             <a:r>
-              <a:rPr lang="en-US" sz="1350" b="1" dirty="0">
-                <a:solidFill>
-                  <a:srgbClr val="222A44"/>
-                </a:solidFill>
-                <a:latin typeface="Calibri" pitchFamily="34" charset="0"/>
-                <a:ea typeface="Calibri" pitchFamily="34" charset="-122"/>
-                <a:cs typeface="Calibri" pitchFamily="34" charset="-120"/>
+              <a:rPr lang="en-US" sz="1800" b="1" dirty="0">
+                <a:solidFill>
+                  <a:srgbClr val="1E1E1E"/>
+                </a:solidFill>
+                <a:latin typeface="Roboto" pitchFamily="34" charset="0"/>
+                <a:ea typeface="Roboto" pitchFamily="34" charset="-122"/>
+                <a:cs typeface="Roboto" pitchFamily="34" charset="-120"/>
               </a:rPr>
               <a:t>Morgen im Raum: WSL2</a:t>
             </a:r>
-            <a:endParaRPr lang="en-US" sz="1350" dirty="0"/>
+            <a:endParaRPr lang="en-US" sz="1800" dirty="0"/>
           </a:p>
         </p:txBody>
       </p:sp>
@@ -4344,8 +5829,8 @@
         </p:nvSpPr>
         <p:spPr>
           <a:xfrm>
-            <a:off x="3502152" y="2944368"/>
-            <a:ext cx="2240280" cy="777240"/>
+            <a:off x="4669536" y="3711549"/>
+            <a:ext cx="2987040" cy="932688"/>
           </a:xfrm>
           <a:prstGeom prst="rect">
             <a:avLst/>
@@ -4361,17 +5846,17 @@
               <a:buNone/>
             </a:pPr>
             <a:r>
-              <a:rPr lang="en-US" sz="1100" dirty="0">
-                <a:solidFill>
-                  <a:srgbClr val="5F6A85"/>
-                </a:solidFill>
-                <a:latin typeface="Calibri" pitchFamily="34" charset="0"/>
-                <a:ea typeface="Calibri" pitchFamily="34" charset="-122"/>
-                <a:cs typeface="Calibri" pitchFamily="34" charset="-120"/>
+              <a:rPr lang="en-US" sz="1467" dirty="0">
+                <a:solidFill>
+                  <a:srgbClr val="595959"/>
+                </a:solidFill>
+                <a:latin typeface="Roboto" pitchFamily="34" charset="0"/>
+                <a:ea typeface="Roboto" pitchFamily="34" charset="-122"/>
+                <a:cs typeface="Roboto" pitchFamily="34" charset="-120"/>
               </a:rPr>
               <a:t>Klassen-Image importieren, fertig. Persistente Umgebung für ganze Lernsituationen.</a:t>
             </a:r>
-            <a:endParaRPr lang="en-US" sz="1100" dirty="0"/>
+            <a:endParaRPr lang="en-US" sz="1467" dirty="0"/>
           </a:p>
         </p:txBody>
       </p:sp>
@@ -4383,8 +5868,8 @@
         </p:nvSpPr>
         <p:spPr>
           <a:xfrm>
-            <a:off x="6099048" y="1508760"/>
-            <a:ext cx="2606040" cy="2286000"/>
+            <a:off x="8132064" y="1988820"/>
+            <a:ext cx="3474720" cy="2743200"/>
           </a:xfrm>
           <a:prstGeom prst="roundRect">
             <a:avLst>
@@ -4392,7 +5877,7 @@
             </a:avLst>
           </a:prstGeom>
           <a:solidFill>
-            <a:srgbClr val="EDF2FA"/>
+            <a:srgbClr val="E4F1FB"/>
           </a:solidFill>
           <a:ln/>
         </p:spPr>
@@ -4405,8 +5890,8 @@
         </p:nvSpPr>
         <p:spPr>
           <a:xfrm>
-            <a:off x="6300216" y="1737360"/>
-            <a:ext cx="512064" cy="512064"/>
+            <a:off x="8400288" y="2229003"/>
+            <a:ext cx="682752" cy="682752"/>
           </a:xfrm>
           <a:prstGeom prst="ellipse">
             <a:avLst/>
@@ -4433,8 +5918,8 @@
         </p:blipFill>
         <p:spPr>
           <a:xfrm>
-            <a:off x="6419088" y="1856232"/>
-            <a:ext cx="274320" cy="274320"/>
+            <a:off x="8558784" y="2387499"/>
+            <a:ext cx="365760" cy="365760"/>
           </a:xfrm>
           <a:prstGeom prst="rect">
             <a:avLst/>
@@ -4449,8 +5934,8 @@
         </p:nvSpPr>
         <p:spPr>
           <a:xfrm>
-            <a:off x="6300216" y="2377440"/>
-            <a:ext cx="2240280" cy="594360"/>
+            <a:off x="8400288" y="3031236"/>
+            <a:ext cx="2987040" cy="713232"/>
           </a:xfrm>
           <a:prstGeom prst="rect">
             <a:avLst/>
@@ -4466,17 +5951,17 @@
               <a:buNone/>
             </a:pPr>
             <a:r>
-              <a:rPr lang="en-US" sz="1350" b="1" dirty="0">
-                <a:solidFill>
-                  <a:srgbClr val="222A44"/>
-                </a:solidFill>
-                <a:latin typeface="Calibri" pitchFamily="34" charset="0"/>
-                <a:ea typeface="Calibri" pitchFamily="34" charset="-122"/>
-                <a:cs typeface="Calibri" pitchFamily="34" charset="-120"/>
+              <a:rPr lang="en-US" sz="1800" b="1" dirty="0">
+                <a:solidFill>
+                  <a:srgbClr val="1E1E1E"/>
+                </a:solidFill>
+                <a:latin typeface="Roboto" pitchFamily="34" charset="0"/>
+                <a:ea typeface="Roboto" pitchFamily="34" charset="-122"/>
+                <a:cs typeface="Roboto" pitchFamily="34" charset="-120"/>
               </a:rPr>
               <a:t>Material liegt bereit: LPI</a:t>
             </a:r>
-            <a:endParaRPr lang="en-US" sz="1350" dirty="0"/>
+            <a:endParaRPr lang="en-US" sz="1800" dirty="0"/>
           </a:p>
         </p:txBody>
       </p:sp>
@@ -4488,8 +5973,8 @@
         </p:nvSpPr>
         <p:spPr>
           <a:xfrm>
-            <a:off x="6300216" y="2944368"/>
-            <a:ext cx="2240280" cy="777240"/>
+            <a:off x="8400288" y="3711549"/>
+            <a:ext cx="2987040" cy="932688"/>
           </a:xfrm>
           <a:prstGeom prst="rect">
             <a:avLst/>
@@ -4505,17 +5990,17 @@
               <a:buNone/>
             </a:pPr>
             <a:r>
-              <a:rPr lang="en-US" sz="1100" dirty="0">
-                <a:solidFill>
-                  <a:srgbClr val="5F6A85"/>
-                </a:solidFill>
-                <a:latin typeface="Calibri" pitchFamily="34" charset="0"/>
-                <a:ea typeface="Calibri" pitchFamily="34" charset="-122"/>
-                <a:cs typeface="Calibri" pitchFamily="34" charset="-120"/>
+              <a:rPr lang="en-US" sz="1467" dirty="0">
+                <a:solidFill>
+                  <a:srgbClr val="595959"/>
+                </a:solidFill>
+                <a:latin typeface="Roboto" pitchFamily="34" charset="0"/>
+                <a:ea typeface="Roboto" pitchFamily="34" charset="-122"/>
+                <a:cs typeface="Roboto" pitchFamily="34" charset="-120"/>
               </a:rPr>
               <a:t>LPIC-1-Lernmaterialien: deutsch, kostenlos, mit Übungen samt Lösungen zu jeder Lektion.</a:t>
             </a:r>
-            <a:endParaRPr lang="en-US" sz="1100" dirty="0"/>
+            <a:endParaRPr lang="en-US" sz="1467" dirty="0"/>
           </a:p>
         </p:txBody>
       </p:sp>
@@ -4527,8 +6012,8 @@
         </p:nvSpPr>
         <p:spPr>
           <a:xfrm>
-            <a:off x="502920" y="4069080"/>
-            <a:ext cx="8138160" cy="594360"/>
+            <a:off x="670560" y="5061204"/>
+            <a:ext cx="9799320" cy="713232"/>
           </a:xfrm>
           <a:prstGeom prst="rect">
             <a:avLst/>
@@ -4544,13 +6029,13 @@
               <a:buNone/>
             </a:pPr>
             <a:r>
-              <a:rPr lang="en-US" sz="1400" b="1" dirty="0">
-                <a:solidFill>
-                  <a:srgbClr val="2E5AAC"/>
-                </a:solidFill>
-                <a:latin typeface="Calibri" pitchFamily="34" charset="0"/>
-                <a:ea typeface="Calibri" pitchFamily="34" charset="-122"/>
-                <a:cs typeface="Calibri" pitchFamily="34" charset="-120"/>
+              <a:rPr lang="en-US" sz="1867" b="1" dirty="0">
+                <a:solidFill>
+                  <a:srgbClr val="14508D"/>
+                </a:solidFill>
+                <a:latin typeface="Roboto" pitchFamily="34" charset="0"/>
+                <a:ea typeface="Roboto" pitchFamily="34" charset="-122"/>
+                <a:cs typeface="Roboto" pitchFamily="34" charset="-120"/>
               </a:rPr>
               <a:t>Murmelrunde (2 Min.): </a:t>
             </a:r>
@@ -4558,17 +6043,17 @@
               <a:buNone/>
             </a:pPr>
             <a:r>
-              <a:rPr lang="en-US" sz="1400" dirty="0">
-                <a:solidFill>
-                  <a:srgbClr val="222A44"/>
-                </a:solidFill>
-                <a:latin typeface="Calibri" pitchFamily="34" charset="0"/>
-                <a:ea typeface="Calibri" pitchFamily="34" charset="-122"/>
-                <a:cs typeface="Calibri" pitchFamily="34" charset="-120"/>
+              <a:rPr lang="en-US" sz="1867" dirty="0">
+                <a:solidFill>
+                  <a:srgbClr val="1E1E1E"/>
+                </a:solidFill>
+                <a:latin typeface="Roboto" pitchFamily="34" charset="0"/>
+                <a:ea typeface="Roboto" pitchFamily="34" charset="-122"/>
+                <a:cs typeface="Roboto" pitchFamily="34" charset="-120"/>
               </a:rPr>
               <a:t>Wo passt das in Ihren Bildungsgang – welches Lernfeld, welche Klasse, welche Woche? Besprechen Sie es mit Ihrem Sitznachbarn.</a:t>
             </a:r>
-            <a:endParaRPr lang="en-US" sz="1400" dirty="0"/>
+            <a:endParaRPr lang="en-US" sz="1867" dirty="0"/>
           </a:p>
         </p:txBody>
       </p:sp>
@@ -4583,20 +6068,6 @@
 <file path=ppt/slides/slide13.xml><?xml version="1.0" encoding="utf-8"?>
 <p:sld xmlns:a="http://schemas.openxmlformats.org/drawingml/2006/main" xmlns:r="http://schemas.openxmlformats.org/officeDocument/2006/relationships" xmlns:p="http://schemas.openxmlformats.org/presentationml/2006/main">
   <p:cSld name="Slide 13">
-    <p:bg>
-      <p:bgPr>
-        <a:blipFill dpi="0" rotWithShape="1">
-          <a:blip r:embed="rId1">
-            <a:lum/>
-          </a:blip>
-          <a:srcRect/>
-          <a:stretch>
-            <a:fillRect/>
-          </a:stretch>
-        </a:blipFill>
-        <a:effectLst/>
-      </p:bgPr>
-    </p:bg>
     <p:spTree>
       <p:nvGrpSpPr>
         <p:cNvPr id="1" name=""/>
@@ -4627,8 +6098,8 @@
         </p:blipFill>
         <p:spPr>
           <a:xfrm>
-            <a:off x="548640" y="640080"/>
-            <a:ext cx="548640" cy="548640"/>
+            <a:off x="731520" y="853440"/>
+            <a:ext cx="731520" cy="731520"/>
           </a:xfrm>
           <a:prstGeom prst="rect">
             <a:avLst/>
@@ -4643,8 +6114,8 @@
         </p:nvSpPr>
         <p:spPr>
           <a:xfrm>
-            <a:off x="502920" y="1371600"/>
-            <a:ext cx="8138160" cy="640080"/>
+            <a:off x="670560" y="1828800"/>
+            <a:ext cx="10850880" cy="853440"/>
           </a:xfrm>
           <a:prstGeom prst="rect">
             <a:avLst/>
@@ -4660,39 +6131,19 @@
               <a:buNone/>
             </a:pPr>
             <a:r>
-              <a:rPr lang="en-US" sz="3200" b="1" dirty="0">
+              <a:rPr lang="en-US" sz="4267" b="1" dirty="0">
                 <a:solidFill>
                   <a:srgbClr val="FFFFFF"/>
                 </a:solidFill>
-                <a:latin typeface="Calibri" pitchFamily="34" charset="0"/>
-                <a:ea typeface="Calibri" pitchFamily="34" charset="-122"/>
-                <a:cs typeface="Calibri" pitchFamily="34" charset="-120"/>
+                <a:latin typeface="Roboto" pitchFamily="34" charset="0"/>
+                <a:ea typeface="Roboto" pitchFamily="34" charset="-122"/>
+                <a:cs typeface="Roboto" pitchFamily="34" charset="-120"/>
               </a:rPr>
               <a:t>Nehmen Sie drei Dinge mit</a:t>
             </a:r>
-            <a:endParaRPr lang="en-US" sz="3200" dirty="0"/>
-          </a:p>
-        </p:txBody>
-      </p:sp>
-      <p:sp>
-        <p:nvSpPr>
-          <p:cNvPr id="4" name="Shape 1"/>
-          <p:cNvSpPr/>
-          <p:nvPr/>
-        </p:nvSpPr>
-        <p:spPr>
-          <a:xfrm>
-            <a:off x="521208" y="2029968"/>
-            <a:ext cx="1005840" cy="64008"/>
-          </a:xfrm>
-          <a:prstGeom prst="rect">
-            <a:avLst/>
-          </a:prstGeom>
-          <a:solidFill>
-            <a:srgbClr val="FFC20E"/>
-          </a:solidFill>
-          <a:ln/>
-        </p:spPr>
+            <a:endParaRPr lang="en-US" sz="4267" dirty="0"/>
+          </a:p>
+        </p:txBody>
       </p:sp>
       <p:sp>
         <p:nvSpPr>
@@ -4702,8 +6153,8 @@
         </p:nvSpPr>
         <p:spPr>
           <a:xfrm>
-            <a:off x="566928" y="2286000"/>
-            <a:ext cx="457200" cy="457200"/>
+            <a:off x="755904" y="3048000"/>
+            <a:ext cx="609600" cy="609600"/>
           </a:xfrm>
           <a:prstGeom prst="rect">
             <a:avLst/>
@@ -4719,17 +6170,17 @@
               <a:buNone/>
             </a:pPr>
             <a:r>
-              <a:rPr lang="en-US" sz="2600" b="1" dirty="0">
-                <a:solidFill>
-                  <a:srgbClr val="FFC20E"/>
-                </a:solidFill>
-                <a:latin typeface="Cambria" pitchFamily="34" charset="0"/>
-                <a:ea typeface="Cambria" pitchFamily="34" charset="-122"/>
-                <a:cs typeface="Cambria" pitchFamily="34" charset="-120"/>
+              <a:rPr lang="en-US" sz="3467" b="1" dirty="0">
+                <a:solidFill>
+                  <a:srgbClr val="FAE55F"/>
+                </a:solidFill>
+                <a:latin typeface="Roboto" pitchFamily="34" charset="0"/>
+                <a:ea typeface="Roboto" pitchFamily="34" charset="-122"/>
+                <a:cs typeface="Roboto" pitchFamily="34" charset="-120"/>
               </a:rPr>
               <a:t>1</a:t>
             </a:r>
-            <a:endParaRPr lang="en-US" sz="2600" dirty="0"/>
+            <a:endParaRPr lang="en-US" sz="3467" dirty="0"/>
           </a:p>
         </p:txBody>
       </p:sp>
@@ -4741,8 +6192,8 @@
         </p:nvSpPr>
         <p:spPr>
           <a:xfrm>
-            <a:off x="1188720" y="2331720"/>
-            <a:ext cx="7315200" cy="640080"/>
+            <a:off x="1584960" y="3108960"/>
+            <a:ext cx="9753600" cy="853440"/>
           </a:xfrm>
           <a:prstGeom prst="rect">
             <a:avLst/>
@@ -4758,13 +6209,13 @@
               <a:buNone/>
             </a:pPr>
             <a:r>
-              <a:rPr lang="en-US" sz="1500" b="1" dirty="0">
+              <a:rPr lang="en-US" sz="2000" b="1" dirty="0">
                 <a:solidFill>
                   <a:srgbClr val="FFFFFF"/>
                 </a:solidFill>
-                <a:latin typeface="Calibri" pitchFamily="34" charset="0"/>
-                <a:ea typeface="Calibri" pitchFamily="34" charset="-122"/>
-                <a:cs typeface="Calibri" pitchFamily="34" charset="-120"/>
+                <a:latin typeface="Roboto" pitchFamily="34" charset="0"/>
+                <a:ea typeface="Roboto" pitchFamily="34" charset="-122"/>
+                <a:cs typeface="Roboto" pitchFamily="34" charset="-120"/>
               </a:rPr>
               <a:t>Das Handout  –  </a:t>
             </a:r>
@@ -4772,17 +6223,17 @@
               <a:buNone/>
             </a:pPr>
             <a:r>
-              <a:rPr lang="en-US" sz="1500" dirty="0">
-                <a:solidFill>
-                  <a:srgbClr val="E8EDFA"/>
-                </a:solidFill>
-                <a:latin typeface="Calibri" pitchFamily="34" charset="0"/>
-                <a:ea typeface="Calibri" pitchFamily="34" charset="-122"/>
-                <a:cs typeface="Calibri" pitchFamily="34" charset="-120"/>
+              <a:rPr lang="en-US" sz="2000" dirty="0">
+                <a:solidFill>
+                  <a:srgbClr val="FFFFFF"/>
+                </a:solidFill>
+                <a:latin typeface="Roboto" pitchFamily="34" charset="0"/>
+                <a:ea typeface="Roboto" pitchFamily="34" charset="-122"/>
+                <a:cs typeface="Roboto" pitchFamily="34" charset="-120"/>
               </a:rPr>
               <a:t>WSL2-Installation, Klassen-Image-Rezept, Stolperstellen, alle Links</a:t>
             </a:r>
-            <a:endParaRPr lang="en-US" sz="1500" dirty="0"/>
+            <a:endParaRPr lang="en-US" sz="2000" dirty="0"/>
           </a:p>
         </p:txBody>
       </p:sp>
@@ -4794,8 +6245,8 @@
         </p:nvSpPr>
         <p:spPr>
           <a:xfrm>
-            <a:off x="566928" y="3035808"/>
-            <a:ext cx="457200" cy="457200"/>
+            <a:off x="755904" y="4047744"/>
+            <a:ext cx="609600" cy="609600"/>
           </a:xfrm>
           <a:prstGeom prst="rect">
             <a:avLst/>
@@ -4811,17 +6262,17 @@
               <a:buNone/>
             </a:pPr>
             <a:r>
-              <a:rPr lang="en-US" sz="2600" b="1" dirty="0">
-                <a:solidFill>
-                  <a:srgbClr val="FFC20E"/>
-                </a:solidFill>
-                <a:latin typeface="Cambria" pitchFamily="34" charset="0"/>
-                <a:ea typeface="Cambria" pitchFamily="34" charset="-122"/>
-                <a:cs typeface="Cambria" pitchFamily="34" charset="-120"/>
+              <a:rPr lang="en-US" sz="3467" b="1" dirty="0">
+                <a:solidFill>
+                  <a:srgbClr val="FAE55F"/>
+                </a:solidFill>
+                <a:latin typeface="Roboto" pitchFamily="34" charset="0"/>
+                <a:ea typeface="Roboto" pitchFamily="34" charset="-122"/>
+                <a:cs typeface="Roboto" pitchFamily="34" charset="-120"/>
               </a:rPr>
               <a:t>2</a:t>
             </a:r>
-            <a:endParaRPr lang="en-US" sz="2600" dirty="0"/>
+            <a:endParaRPr lang="en-US" sz="3467" dirty="0"/>
           </a:p>
         </p:txBody>
       </p:sp>
@@ -4833,8 +6284,8 @@
         </p:nvSpPr>
         <p:spPr>
           <a:xfrm>
-            <a:off x="1188720" y="3081528"/>
-            <a:ext cx="7315200" cy="640080"/>
+            <a:off x="1584960" y="4108704"/>
+            <a:ext cx="9753600" cy="853440"/>
           </a:xfrm>
           <a:prstGeom prst="rect">
             <a:avLst/>
@@ -4850,13 +6301,13 @@
               <a:buNone/>
             </a:pPr>
             <a:r>
-              <a:rPr lang="en-US" sz="1500" b="1" dirty="0">
+              <a:rPr lang="en-US" sz="2000" b="1" dirty="0">
                 <a:solidFill>
                   <a:srgbClr val="FFFFFF"/>
                 </a:solidFill>
-                <a:latin typeface="Calibri" pitchFamily="34" charset="0"/>
-                <a:ea typeface="Calibri" pitchFamily="34" charset="-122"/>
-                <a:cs typeface="Calibri" pitchFamily="34" charset="-120"/>
+                <a:latin typeface="Roboto" pitchFamily="34" charset="0"/>
+                <a:ea typeface="Roboto" pitchFamily="34" charset="-122"/>
+                <a:cs typeface="Roboto" pitchFamily="34" charset="-120"/>
               </a:rPr>
               <a:t>Die Übungen  –  </a:t>
             </a:r>
@@ -4864,17 +6315,17 @@
               <a:buNone/>
             </a:pPr>
             <a:r>
-              <a:rPr lang="en-US" sz="1500" dirty="0">
-                <a:solidFill>
-                  <a:srgbClr val="E8EDFA"/>
-                </a:solidFill>
-                <a:latin typeface="Calibri" pitchFamily="34" charset="0"/>
-                <a:ea typeface="Calibri" pitchFamily="34" charset="-122"/>
-                <a:cs typeface="Calibri" pitchFamily="34" charset="-120"/>
+              <a:rPr lang="en-US" sz="2000" dirty="0">
+                <a:solidFill>
+                  <a:srgbClr val="FFFFFF"/>
+                </a:solidFill>
+                <a:latin typeface="Roboto" pitchFamily="34" charset="0"/>
+                <a:ea typeface="Roboto" pitchFamily="34" charset="-122"/>
+                <a:cs typeface="Roboto" pitchFamily="34" charset="-120"/>
               </a:rPr>
               <a:t>Arbeitsblatt, server.log und Lösungen – direkt einsetzbar, frei anpassbar</a:t>
             </a:r>
-            <a:endParaRPr lang="en-US" sz="1500" dirty="0"/>
+            <a:endParaRPr lang="en-US" sz="2000" dirty="0"/>
           </a:p>
         </p:txBody>
       </p:sp>
@@ -4886,8 +6337,8 @@
         </p:nvSpPr>
         <p:spPr>
           <a:xfrm>
-            <a:off x="566928" y="3785616"/>
-            <a:ext cx="457200" cy="457200"/>
+            <a:off x="755904" y="5047488"/>
+            <a:ext cx="609600" cy="609600"/>
           </a:xfrm>
           <a:prstGeom prst="rect">
             <a:avLst/>
@@ -4903,17 +6354,17 @@
               <a:buNone/>
             </a:pPr>
             <a:r>
-              <a:rPr lang="en-US" sz="2600" b="1" dirty="0">
-                <a:solidFill>
-                  <a:srgbClr val="FFC20E"/>
-                </a:solidFill>
-                <a:latin typeface="Cambria" pitchFamily="34" charset="0"/>
-                <a:ea typeface="Cambria" pitchFamily="34" charset="-122"/>
-                <a:cs typeface="Cambria" pitchFamily="34" charset="-120"/>
+              <a:rPr lang="en-US" sz="3467" b="1" dirty="0">
+                <a:solidFill>
+                  <a:srgbClr val="FAE55F"/>
+                </a:solidFill>
+                <a:latin typeface="Roboto" pitchFamily="34" charset="0"/>
+                <a:ea typeface="Roboto" pitchFamily="34" charset="-122"/>
+                <a:cs typeface="Roboto" pitchFamily="34" charset="-120"/>
               </a:rPr>
               <a:t>3</a:t>
             </a:r>
-            <a:endParaRPr lang="en-US" sz="2600" dirty="0"/>
+            <a:endParaRPr lang="en-US" sz="3467" dirty="0"/>
           </a:p>
         </p:txBody>
       </p:sp>
@@ -4925,8 +6376,8 @@
         </p:nvSpPr>
         <p:spPr>
           <a:xfrm>
-            <a:off x="1188720" y="3831336"/>
-            <a:ext cx="7315200" cy="640080"/>
+            <a:off x="1584960" y="5108448"/>
+            <a:ext cx="9753600" cy="853440"/>
           </a:xfrm>
           <a:prstGeom prst="rect">
             <a:avLst/>
@@ -4942,13 +6393,13 @@
               <a:buNone/>
             </a:pPr>
             <a:r>
-              <a:rPr lang="en-US" sz="1500" b="1" dirty="0">
+              <a:rPr lang="en-US" sz="2000" b="1" dirty="0">
                 <a:solidFill>
                   <a:srgbClr val="FFFFFF"/>
                 </a:solidFill>
-                <a:latin typeface="Calibri" pitchFamily="34" charset="0"/>
-                <a:ea typeface="Calibri" pitchFamily="34" charset="-122"/>
-                <a:cs typeface="Calibri" pitchFamily="34" charset="-120"/>
+                <a:latin typeface="Roboto" pitchFamily="34" charset="0"/>
+                <a:ea typeface="Roboto" pitchFamily="34" charset="-122"/>
+                <a:cs typeface="Roboto" pitchFamily="34" charset="-120"/>
               </a:rPr>
               <a:t>Einen Vorsatz  –  </a:t>
             </a:r>
@@ -4956,17 +6407,17 @@
               <a:buNone/>
             </a:pPr>
             <a:r>
-              <a:rPr lang="en-US" sz="1500" dirty="0">
-                <a:solidFill>
-                  <a:srgbClr val="E8EDFA"/>
-                </a:solidFill>
-                <a:latin typeface="Calibri" pitchFamily="34" charset="0"/>
-                <a:ea typeface="Calibri" pitchFamily="34" charset="-122"/>
-                <a:cs typeface="Calibri" pitchFamily="34" charset="-120"/>
+              <a:rPr lang="en-US" sz="2000" dirty="0">
+                <a:solidFill>
+                  <a:srgbClr val="FFFFFF"/>
+                </a:solidFill>
+                <a:latin typeface="Roboto" pitchFamily="34" charset="0"/>
+                <a:ea typeface="Roboto" pitchFamily="34" charset="-122"/>
+                <a:cs typeface="Roboto" pitchFamily="34" charset="-120"/>
               </a:rPr>
               <a:t>Exit-Ticket: Welche eine Sache probieren Sie nächste Woche aus?</a:t>
             </a:r>
-            <a:endParaRPr lang="en-US" sz="1500" dirty="0"/>
+            <a:endParaRPr lang="en-US" sz="2000" dirty="0"/>
           </a:p>
         </p:txBody>
       </p:sp>
@@ -4978,8 +6429,8 @@
         </p:nvSpPr>
         <p:spPr>
           <a:xfrm>
-            <a:off x="502920" y="4617720"/>
-            <a:ext cx="8138160" cy="320040"/>
+            <a:off x="670560" y="6156960"/>
+            <a:ext cx="10850880" cy="426720"/>
           </a:xfrm>
           <a:prstGeom prst="rect">
             <a:avLst/>
@@ -4995,17 +6446,17 @@
               <a:buNone/>
             </a:pPr>
             <a:r>
-              <a:rPr lang="en-US" sz="1200" dirty="0">
-                <a:solidFill>
-                  <a:srgbClr val="FFC20E"/>
-                </a:solidFill>
-                <a:latin typeface="Calibri" pitchFamily="34" charset="0"/>
-                <a:ea typeface="Calibri" pitchFamily="34" charset="-122"/>
-                <a:cs typeface="Calibri" pitchFamily="34" charset="-120"/>
+              <a:rPr lang="en-US" sz="1600" dirty="0">
+                <a:solidFill>
+                  <a:srgbClr val="FAE55F"/>
+                </a:solidFill>
+                <a:latin typeface="Roboto" pitchFamily="34" charset="0"/>
+                <a:ea typeface="Roboto" pitchFamily="34" charset="-122"/>
+                <a:cs typeface="Roboto" pitchFamily="34" charset="-120"/>
               </a:rPr>
               <a:t>learning.lpi.org/de  ·  learn.microsoft.com/de-de/windows/wsl  ·  Material: &lt;Link/QR&gt;</a:t>
             </a:r>
-            <a:endParaRPr lang="en-US" sz="1200" dirty="0"/>
+            <a:endParaRPr lang="en-US" sz="1600" dirty="0"/>
           </a:p>
         </p:txBody>
       </p:sp>
@@ -5020,13 +6471,6 @@
 <file path=ppt/slides/slide2.xml><?xml version="1.0" encoding="utf-8"?>
 <p:sld xmlns:a="http://schemas.openxmlformats.org/drawingml/2006/main" xmlns:r="http://schemas.openxmlformats.org/officeDocument/2006/relationships" xmlns:p="http://schemas.openxmlformats.org/presentationml/2006/main">
   <p:cSld name="Slide 2">
-    <p:bg>
-      <p:bgPr>
-        <a:solidFill>
-          <a:srgbClr val="FFFFFF"/>
-        </a:solidFill>
-      </p:bgPr>
-    </p:bg>
     <p:spTree>
       <p:nvGrpSpPr>
         <p:cNvPr id="1" name=""/>
@@ -5043,20 +6487,67 @@
       </p:grpSpPr>
       <p:sp>
         <p:nvSpPr>
+          <p:cNvPr id="9001" name="Datumsplatzhalter 9001"/>
+          <p:cNvSpPr>
+            <a:spLocks noGrp="1"/>
+          </p:cNvSpPr>
+          <p:nvPr>
+            <p:ph type="dt" sz="half" idx="2"/>
+          </p:nvPr>
+        </p:nvSpPr>
+        <p:spPr/>
+        <p:txBody>
+          <a:bodyPr/>
+          <a:lstStyle/>
+          <a:p>
+            <a:fld id="{86B4728B-49EC-AC4B-92D0-45D4091857E0}" type="datetime1">
+              <a:rPr lang="de-DE"/>
+              <a:pPr/>
+              <a:t>28.10.2026</a:t>
+            </a:fld>
+            <a:endParaRPr lang="de-DE"/>
+          </a:p>
+        </p:txBody>
+      </p:sp>
+      <p:sp>
+        <p:nvSpPr>
+          <p:cNvPr id="9002" name="Foliennummernplatzhalter 9002"/>
+          <p:cNvSpPr>
+            <a:spLocks noGrp="1"/>
+          </p:cNvSpPr>
+          <p:nvPr>
+            <p:ph type="sldNum" sz="quarter" idx="12"/>
+          </p:nvPr>
+        </p:nvSpPr>
+        <p:spPr/>
+        <p:txBody>
+          <a:bodyPr/>
+          <a:lstStyle/>
+          <a:p>
+            <a:fld id="{B7E13D07-A954-7D45-9CFC-776D35F33DC4}" type="slidenum">
+              <a:rPr lang="de-DE"/>
+              <a:t>2</a:t>
+            </a:fld>
+            <a:endParaRPr lang="de-DE"/>
+          </a:p>
+        </p:txBody>
+      </p:sp>
+      <p:sp>
+        <p:nvSpPr>
           <p:cNvPr id="2" name="Shape 0"/>
           <p:cNvSpPr/>
           <p:nvPr/>
         </p:nvSpPr>
         <p:spPr>
           <a:xfrm>
-            <a:off x="502920" y="329184"/>
-            <a:ext cx="118872" cy="118872"/>
+            <a:off x="670560" y="438912"/>
+            <a:ext cx="158496" cy="158496"/>
           </a:xfrm>
           <a:prstGeom prst="rect">
             <a:avLst/>
           </a:prstGeom>
           <a:solidFill>
-            <a:srgbClr val="FFC20E"/>
+            <a:srgbClr val="FAE55F"/>
           </a:solidFill>
           <a:ln/>
         </p:spPr>
@@ -5069,8 +6560,8 @@
         </p:nvSpPr>
         <p:spPr>
           <a:xfrm>
-            <a:off x="713232" y="292608"/>
-            <a:ext cx="7955280" cy="274320"/>
+            <a:off x="950976" y="390144"/>
+            <a:ext cx="10607040" cy="365760"/>
           </a:xfrm>
           <a:prstGeom prst="rect">
             <a:avLst/>
@@ -5086,17 +6577,17 @@
               <a:buNone/>
             </a:pPr>
             <a:r>
-              <a:rPr lang="en-US" sz="1200" b="1" spc="300" kern="0" dirty="0">
-                <a:solidFill>
-                  <a:srgbClr val="2E5AAC"/>
-                </a:solidFill>
-                <a:latin typeface="Calibri" pitchFamily="34" charset="0"/>
-                <a:ea typeface="Calibri" pitchFamily="34" charset="-122"/>
-                <a:cs typeface="Calibri" pitchFamily="34" charset="-120"/>
+              <a:rPr lang="en-US" sz="1600" b="1" spc="300" kern="0" dirty="0">
+                <a:solidFill>
+                  <a:srgbClr val="14508D"/>
+                </a:solidFill>
+                <a:latin typeface="Roboto" pitchFamily="34" charset="0"/>
+                <a:ea typeface="Roboto" pitchFamily="34" charset="-122"/>
+                <a:cs typeface="Roboto" pitchFamily="34" charset="-120"/>
               </a:rPr>
               <a:t>EINSTIEG · MINUTE 0–5</a:t>
             </a:r>
-            <a:endParaRPr lang="en-US" sz="1200" dirty="0"/>
+            <a:endParaRPr lang="en-US" sz="1600" dirty="0"/>
           </a:p>
         </p:txBody>
       </p:sp>
@@ -5108,8 +6599,8 @@
         </p:nvSpPr>
         <p:spPr>
           <a:xfrm>
-            <a:off x="502920" y="566928"/>
-            <a:ext cx="8138160" cy="685800"/>
+            <a:off x="670560" y="755904"/>
+            <a:ext cx="10850880" cy="914400"/>
           </a:xfrm>
           <a:prstGeom prst="rect">
             <a:avLst/>
@@ -5125,39 +6616,19 @@
               <a:buNone/>
             </a:pPr>
             <a:r>
-              <a:rPr lang="en-US" sz="3000" b="1" dirty="0">
-                <a:solidFill>
-                  <a:srgbClr val="222A44"/>
-                </a:solidFill>
-                <a:latin typeface="Calibri" pitchFamily="34" charset="0"/>
-                <a:ea typeface="Calibri" pitchFamily="34" charset="-122"/>
-                <a:cs typeface="Calibri" pitchFamily="34" charset="-120"/>
+              <a:rPr lang="en-US" sz="4000" b="1" dirty="0">
+                <a:solidFill>
+                  <a:srgbClr val="1E1E1E"/>
+                </a:solidFill>
+                <a:latin typeface="Roboto" pitchFamily="34" charset="0"/>
+                <a:ea typeface="Roboto" pitchFamily="34" charset="-122"/>
+                <a:cs typeface="Roboto" pitchFamily="34" charset="-120"/>
               </a:rPr>
               <a:t>Das Dilemma jedes IT-Bildungsgangs</a:t>
             </a:r>
-            <a:endParaRPr lang="en-US" sz="3000" dirty="0"/>
-          </a:p>
-        </p:txBody>
-      </p:sp>
-      <p:sp>
-        <p:nvSpPr>
-          <p:cNvPr id="5" name="Shape 3"/>
-          <p:cNvSpPr/>
-          <p:nvPr/>
-        </p:nvSpPr>
-        <p:spPr>
-          <a:xfrm>
-            <a:off x="521208" y="1280160"/>
-            <a:ext cx="594360" cy="50292"/>
-          </a:xfrm>
-          <a:prstGeom prst="rect">
-            <a:avLst/>
-          </a:prstGeom>
-          <a:solidFill>
-            <a:srgbClr val="FFC20E"/>
-          </a:solidFill>
-          <a:ln/>
-        </p:spPr>
+            <a:endParaRPr lang="en-US" sz="4000" dirty="0"/>
+          </a:p>
+        </p:txBody>
       </p:sp>
       <p:sp>
         <p:nvSpPr>
@@ -5167,8 +6638,8 @@
         </p:nvSpPr>
         <p:spPr>
           <a:xfrm>
-            <a:off x="502920" y="1508760"/>
-            <a:ext cx="3913632" cy="2148840"/>
+            <a:off x="670560" y="1988820"/>
+            <a:ext cx="5218176" cy="2578608"/>
           </a:xfrm>
           <a:prstGeom prst="roundRect">
             <a:avLst>
@@ -5176,7 +6647,7 @@
             </a:avLst>
           </a:prstGeom>
           <a:solidFill>
-            <a:srgbClr val="EDF2FA"/>
+            <a:srgbClr val="E4F1FB"/>
           </a:solidFill>
           <a:ln/>
         </p:spPr>
@@ -5189,8 +6660,8 @@
         </p:nvSpPr>
         <p:spPr>
           <a:xfrm>
-            <a:off x="758952" y="1783080"/>
-            <a:ext cx="566928" cy="566928"/>
+            <a:off x="1011936" y="2280209"/>
+            <a:ext cx="755904" cy="755904"/>
           </a:xfrm>
           <a:prstGeom prst="ellipse">
             <a:avLst/>
@@ -5217,8 +6688,8 @@
         </p:blipFill>
         <p:spPr>
           <a:xfrm>
-            <a:off x="877824" y="1901952"/>
-            <a:ext cx="329184" cy="329184"/>
+            <a:off x="1170432" y="2438705"/>
+            <a:ext cx="438912" cy="438912"/>
           </a:xfrm>
           <a:prstGeom prst="rect">
             <a:avLst/>
@@ -5233,8 +6704,8 @@
         </p:nvSpPr>
         <p:spPr>
           <a:xfrm>
-            <a:off x="758952" y="2487168"/>
-            <a:ext cx="3429000" cy="365760"/>
+            <a:off x="1011936" y="3162909"/>
+            <a:ext cx="4572000" cy="438912"/>
           </a:xfrm>
           <a:prstGeom prst="rect">
             <a:avLst/>
@@ -5250,17 +6721,17 @@
               <a:buNone/>
             </a:pPr>
             <a:r>
-              <a:rPr lang="en-US" sz="1600" b="1" dirty="0">
-                <a:solidFill>
-                  <a:srgbClr val="222A44"/>
-                </a:solidFill>
-                <a:latin typeface="Calibri" pitchFamily="34" charset="0"/>
-                <a:ea typeface="Calibri" pitchFamily="34" charset="-122"/>
-                <a:cs typeface="Calibri" pitchFamily="34" charset="-120"/>
+              <a:rPr lang="en-US" sz="2133" b="1" dirty="0">
+                <a:solidFill>
+                  <a:srgbClr val="1E1E1E"/>
+                </a:solidFill>
+                <a:latin typeface="Roboto" pitchFamily="34" charset="0"/>
+                <a:ea typeface="Roboto" pitchFamily="34" charset="-122"/>
+                <a:cs typeface="Roboto" pitchFamily="34" charset="-120"/>
               </a:rPr>
               <a:t>Die Lehrpläne verlangen Linux</a:t>
             </a:r>
-            <a:endParaRPr lang="en-US" sz="1600" dirty="0"/>
+            <a:endParaRPr lang="en-US" sz="2133" dirty="0"/>
           </a:p>
         </p:txBody>
       </p:sp>
@@ -5272,8 +6743,8 @@
         </p:nvSpPr>
         <p:spPr>
           <a:xfrm>
-            <a:off x="758952" y="2852928"/>
-            <a:ext cx="3429000" cy="777240"/>
+            <a:off x="1011936" y="3601821"/>
+            <a:ext cx="4572000" cy="932688"/>
           </a:xfrm>
           <a:prstGeom prst="rect">
             <a:avLst/>
@@ -5289,17 +6760,17 @@
               <a:buNone/>
             </a:pPr>
             <a:r>
-              <a:rPr lang="en-US" sz="1250" dirty="0">
-                <a:solidFill>
-                  <a:srgbClr val="5F6A85"/>
-                </a:solidFill>
-                <a:latin typeface="Calibri" pitchFamily="34" charset="0"/>
-                <a:ea typeface="Calibri" pitchFamily="34" charset="-122"/>
-                <a:cs typeface="Calibri" pitchFamily="34" charset="-120"/>
+              <a:rPr lang="en-US" sz="1667" dirty="0">
+                <a:solidFill>
+                  <a:srgbClr val="595959"/>
+                </a:solidFill>
+                <a:latin typeface="Roboto" pitchFamily="34" charset="0"/>
+                <a:ea typeface="Roboto" pitchFamily="34" charset="-122"/>
+                <a:cs typeface="Roboto" pitchFamily="34" charset="-120"/>
               </a:rPr>
               <a:t>Server, Cloud, Container, Netzwerktechnik, Abschlussprüfungen – überall Linux-Kommandozeile. Quer durch alle IT-Berufe.</a:t>
             </a:r>
-            <a:endParaRPr lang="en-US" sz="1250" dirty="0"/>
+            <a:endParaRPr lang="en-US" sz="1667" dirty="0"/>
           </a:p>
         </p:txBody>
       </p:sp>
@@ -5311,8 +6782,8 @@
         </p:nvSpPr>
         <p:spPr>
           <a:xfrm>
-            <a:off x="4727448" y="1508760"/>
-            <a:ext cx="3913632" cy="2148840"/>
+            <a:off x="6303264" y="1988820"/>
+            <a:ext cx="5218176" cy="2578608"/>
           </a:xfrm>
           <a:prstGeom prst="roundRect">
             <a:avLst>
@@ -5320,7 +6791,7 @@
             </a:avLst>
           </a:prstGeom>
           <a:solidFill>
-            <a:srgbClr val="EDF2FA"/>
+            <a:srgbClr val="E4F1FB"/>
           </a:solidFill>
           <a:ln/>
         </p:spPr>
@@ -5333,8 +6804,8 @@
         </p:nvSpPr>
         <p:spPr>
           <a:xfrm>
-            <a:off x="4983480" y="1783080"/>
-            <a:ext cx="566928" cy="566928"/>
+            <a:off x="6644640" y="2280209"/>
+            <a:ext cx="755904" cy="755904"/>
           </a:xfrm>
           <a:prstGeom prst="ellipse">
             <a:avLst/>
@@ -5361,8 +6832,8 @@
         </p:blipFill>
         <p:spPr>
           <a:xfrm>
-            <a:off x="5102352" y="1901952"/>
-            <a:ext cx="329184" cy="329184"/>
+            <a:off x="6803136" y="2438705"/>
+            <a:ext cx="438912" cy="438912"/>
           </a:xfrm>
           <a:prstGeom prst="rect">
             <a:avLst/>
@@ -5377,8 +6848,8 @@
         </p:nvSpPr>
         <p:spPr>
           <a:xfrm>
-            <a:off x="4983480" y="2487168"/>
-            <a:ext cx="3429000" cy="365760"/>
+            <a:off x="6644640" y="3162909"/>
+            <a:ext cx="4572000" cy="438912"/>
           </a:xfrm>
           <a:prstGeom prst="rect">
             <a:avLst/>
@@ -5394,17 +6865,17 @@
               <a:buNone/>
             </a:pPr>
             <a:r>
-              <a:rPr lang="en-US" sz="1600" b="1" dirty="0">
-                <a:solidFill>
-                  <a:srgbClr val="222A44"/>
-                </a:solidFill>
-                <a:latin typeface="Calibri" pitchFamily="34" charset="0"/>
-                <a:ea typeface="Calibri" pitchFamily="34" charset="-122"/>
-                <a:cs typeface="Calibri" pitchFamily="34" charset="-120"/>
+              <a:rPr lang="en-US" sz="2133" b="1" dirty="0">
+                <a:solidFill>
+                  <a:srgbClr val="1E1E1E"/>
+                </a:solidFill>
+                <a:latin typeface="Roboto" pitchFamily="34" charset="0"/>
+                <a:ea typeface="Roboto" pitchFamily="34" charset="-122"/>
+                <a:cs typeface="Roboto" pitchFamily="34" charset="-120"/>
               </a:rPr>
               <a:t>Die Schule hat Windows</a:t>
             </a:r>
-            <a:endParaRPr lang="en-US" sz="1600" dirty="0"/>
+            <a:endParaRPr lang="en-US" sz="2133" dirty="0"/>
           </a:p>
         </p:txBody>
       </p:sp>
@@ -5416,8 +6887,8 @@
         </p:nvSpPr>
         <p:spPr>
           <a:xfrm>
-            <a:off x="4983480" y="2852928"/>
-            <a:ext cx="3429000" cy="777240"/>
+            <a:off x="6644640" y="3601821"/>
+            <a:ext cx="4572000" cy="932688"/>
           </a:xfrm>
           <a:prstGeom prst="rect">
             <a:avLst/>
@@ -5433,17 +6904,17 @@
               <a:buNone/>
             </a:pPr>
             <a:r>
-              <a:rPr lang="en-US" sz="1250" dirty="0">
-                <a:solidFill>
-                  <a:srgbClr val="5F6A85"/>
-                </a:solidFill>
-                <a:latin typeface="Calibri" pitchFamily="34" charset="0"/>
-                <a:ea typeface="Calibri" pitchFamily="34" charset="-122"/>
-                <a:cs typeface="Calibri" pitchFamily="34" charset="-120"/>
+              <a:rPr lang="en-US" sz="1667" dirty="0">
+                <a:solidFill>
+                  <a:srgbClr val="595959"/>
+                </a:solidFill>
+                <a:latin typeface="Roboto" pitchFamily="34" charset="0"/>
+                <a:ea typeface="Roboto" pitchFamily="34" charset="-122"/>
+                <a:cs typeface="Roboto" pitchFamily="34" charset="-120"/>
               </a:rPr>
               <a:t>Computerräume, Dienstgeräte, Softwareverteilung: Windows 10/11. Dual-Boot und eigene Linux-Räume sind Pflegemonster.</a:t>
             </a:r>
-            <a:endParaRPr lang="en-US" sz="1250" dirty="0"/>
+            <a:endParaRPr lang="en-US" sz="1667" dirty="0"/>
           </a:p>
         </p:txBody>
       </p:sp>
@@ -5455,8 +6926,8 @@
         </p:nvSpPr>
         <p:spPr>
           <a:xfrm>
-            <a:off x="502920" y="3977640"/>
-            <a:ext cx="8138160" cy="685800"/>
+            <a:off x="670560" y="4951476"/>
+            <a:ext cx="9799320" cy="822960"/>
           </a:xfrm>
           <a:prstGeom prst="rect">
             <a:avLst/>
@@ -5472,13 +6943,13 @@
               <a:buNone/>
             </a:pPr>
             <a:r>
-              <a:rPr lang="en-US" sz="1400" b="1" dirty="0">
-                <a:solidFill>
-                  <a:srgbClr val="2E5AAC"/>
-                </a:solidFill>
-                <a:latin typeface="Calibri" pitchFamily="34" charset="0"/>
-                <a:ea typeface="Calibri" pitchFamily="34" charset="-122"/>
-                <a:cs typeface="Calibri" pitchFamily="34" charset="-120"/>
+              <a:rPr lang="en-US" sz="1867" b="1" dirty="0">
+                <a:solidFill>
+                  <a:srgbClr val="14508D"/>
+                </a:solidFill>
+                <a:latin typeface="Roboto" pitchFamily="34" charset="0"/>
+                <a:ea typeface="Roboto" pitchFamily="34" charset="-122"/>
+                <a:cs typeface="Roboto" pitchFamily="34" charset="-120"/>
               </a:rPr>
               <a:t>Blitzumfrage: </a:t>
             </a:r>
@@ -5486,17 +6957,17 @@
               <a:buNone/>
             </a:pPr>
             <a:r>
-              <a:rPr lang="en-US" sz="1400" dirty="0">
-                <a:solidFill>
-                  <a:srgbClr val="222A44"/>
-                </a:solidFill>
-                <a:latin typeface="Calibri" pitchFamily="34" charset="0"/>
-                <a:ea typeface="Calibri" pitchFamily="34" charset="-122"/>
-                <a:cs typeface="Calibri" pitchFamily="34" charset="-120"/>
+              <a:rPr lang="en-US" sz="1867" dirty="0">
+                <a:solidFill>
+                  <a:srgbClr val="1E1E1E"/>
+                </a:solidFill>
+                <a:latin typeface="Roboto" pitchFamily="34" charset="0"/>
+                <a:ea typeface="Roboto" pitchFamily="34" charset="-122"/>
+                <a:cs typeface="Roboto" pitchFamily="34" charset="-120"/>
               </a:rPr>
               <a:t>Wer hat Linux-Inhalte im Lehrplan? Und wer hat dafür Linux-Rechner im Klassenraum? – Die Lücke dazwischen schließen wir heute.</a:t>
             </a:r>
-            <a:endParaRPr lang="en-US" sz="1400" dirty="0"/>
+            <a:endParaRPr lang="en-US" sz="1867" dirty="0"/>
           </a:p>
         </p:txBody>
       </p:sp>
@@ -5511,13 +6982,6 @@
 <file path=ppt/slides/slide3.xml><?xml version="1.0" encoding="utf-8"?>
 <p:sld xmlns:a="http://schemas.openxmlformats.org/drawingml/2006/main" xmlns:r="http://schemas.openxmlformats.org/officeDocument/2006/relationships" xmlns:p="http://schemas.openxmlformats.org/presentationml/2006/main">
   <p:cSld name="Slide 3">
-    <p:bg>
-      <p:bgPr>
-        <a:solidFill>
-          <a:srgbClr val="FFFFFF"/>
-        </a:solidFill>
-      </p:bgPr>
-    </p:bg>
     <p:spTree>
       <p:nvGrpSpPr>
         <p:cNvPr id="1" name=""/>
@@ -5534,20 +6998,67 @@
       </p:grpSpPr>
       <p:sp>
         <p:nvSpPr>
+          <p:cNvPr id="9001" name="Datumsplatzhalter 9001"/>
+          <p:cNvSpPr>
+            <a:spLocks noGrp="1"/>
+          </p:cNvSpPr>
+          <p:nvPr>
+            <p:ph type="dt" sz="half" idx="2"/>
+          </p:nvPr>
+        </p:nvSpPr>
+        <p:spPr/>
+        <p:txBody>
+          <a:bodyPr/>
+          <a:lstStyle/>
+          <a:p>
+            <a:fld id="{86B4728B-49EC-AC4B-92D0-45D4091857E0}" type="datetime1">
+              <a:rPr lang="de-DE"/>
+              <a:pPr/>
+              <a:t>28.10.2026</a:t>
+            </a:fld>
+            <a:endParaRPr lang="de-DE"/>
+          </a:p>
+        </p:txBody>
+      </p:sp>
+      <p:sp>
+        <p:nvSpPr>
+          <p:cNvPr id="9002" name="Foliennummernplatzhalter 9002"/>
+          <p:cNvSpPr>
+            <a:spLocks noGrp="1"/>
+          </p:cNvSpPr>
+          <p:nvPr>
+            <p:ph type="sldNum" sz="quarter" idx="12"/>
+          </p:nvPr>
+        </p:nvSpPr>
+        <p:spPr/>
+        <p:txBody>
+          <a:bodyPr/>
+          <a:lstStyle/>
+          <a:p>
+            <a:fld id="{B7E13D07-A954-7D45-9CFC-776D35F33DC4}" type="slidenum">
+              <a:rPr lang="de-DE"/>
+              <a:t>3</a:t>
+            </a:fld>
+            <a:endParaRPr lang="de-DE"/>
+          </a:p>
+        </p:txBody>
+      </p:sp>
+      <p:sp>
+        <p:nvSpPr>
           <p:cNvPr id="2" name="Shape 0"/>
           <p:cNvSpPr/>
           <p:nvPr/>
         </p:nvSpPr>
         <p:spPr>
           <a:xfrm>
-            <a:off x="502920" y="329184"/>
-            <a:ext cx="118872" cy="118872"/>
+            <a:off x="670560" y="438912"/>
+            <a:ext cx="158496" cy="158496"/>
           </a:xfrm>
           <a:prstGeom prst="rect">
             <a:avLst/>
           </a:prstGeom>
           <a:solidFill>
-            <a:srgbClr val="FFC20E"/>
+            <a:srgbClr val="FAE55F"/>
           </a:solidFill>
           <a:ln/>
         </p:spPr>
@@ -5560,8 +7071,8 @@
         </p:nvSpPr>
         <p:spPr>
           <a:xfrm>
-            <a:off x="713232" y="292608"/>
-            <a:ext cx="7955280" cy="274320"/>
+            <a:off x="950976" y="390144"/>
+            <a:ext cx="10607040" cy="365760"/>
           </a:xfrm>
           <a:prstGeom prst="rect">
             <a:avLst/>
@@ -5577,17 +7088,17 @@
               <a:buNone/>
             </a:pPr>
             <a:r>
-              <a:rPr lang="en-US" sz="1200" b="1" spc="300" kern="0" dirty="0">
-                <a:solidFill>
-                  <a:srgbClr val="2E5AAC"/>
-                </a:solidFill>
-                <a:latin typeface="Calibri" pitchFamily="34" charset="0"/>
-                <a:ea typeface="Calibri" pitchFamily="34" charset="-122"/>
-                <a:cs typeface="Calibri" pitchFamily="34" charset="-120"/>
+              <a:rPr lang="en-US" sz="1600" b="1" spc="300" kern="0" dirty="0">
+                <a:solidFill>
+                  <a:srgbClr val="14508D"/>
+                </a:solidFill>
+                <a:latin typeface="Roboto" pitchFamily="34" charset="0"/>
+                <a:ea typeface="Roboto" pitchFamily="34" charset="-122"/>
+                <a:cs typeface="Roboto" pitchFamily="34" charset="-120"/>
               </a:rPr>
               <a:t>FAHRPLAN</a:t>
             </a:r>
-            <a:endParaRPr lang="en-US" sz="1200" dirty="0"/>
+            <a:endParaRPr lang="en-US" sz="1600" dirty="0"/>
           </a:p>
         </p:txBody>
       </p:sp>
@@ -5599,8 +7110,8 @@
         </p:nvSpPr>
         <p:spPr>
           <a:xfrm>
-            <a:off x="502920" y="566928"/>
-            <a:ext cx="8138160" cy="685800"/>
+            <a:off x="670560" y="755904"/>
+            <a:ext cx="10850880" cy="914400"/>
           </a:xfrm>
           <a:prstGeom prst="rect">
             <a:avLst/>
@@ -5616,39 +7127,19 @@
               <a:buNone/>
             </a:pPr>
             <a:r>
-              <a:rPr lang="en-US" sz="3000" b="1" dirty="0">
-                <a:solidFill>
-                  <a:srgbClr val="222A44"/>
-                </a:solidFill>
-                <a:latin typeface="Calibri" pitchFamily="34" charset="0"/>
-                <a:ea typeface="Calibri" pitchFamily="34" charset="-122"/>
-                <a:cs typeface="Calibri" pitchFamily="34" charset="-120"/>
+              <a:rPr lang="en-US" sz="4000" b="1" dirty="0">
+                <a:solidFill>
+                  <a:srgbClr val="1E1E1E"/>
+                </a:solidFill>
+                <a:latin typeface="Roboto" pitchFamily="34" charset="0"/>
+                <a:ea typeface="Roboto" pitchFamily="34" charset="-122"/>
+                <a:cs typeface="Roboto" pitchFamily="34" charset="-120"/>
               </a:rPr>
               <a:t>60 Minuten, drei Stationen</a:t>
             </a:r>
-            <a:endParaRPr lang="en-US" sz="3000" dirty="0"/>
-          </a:p>
-        </p:txBody>
-      </p:sp>
-      <p:sp>
-        <p:nvSpPr>
-          <p:cNvPr id="5" name="Shape 3"/>
-          <p:cNvSpPr/>
-          <p:nvPr/>
-        </p:nvSpPr>
-        <p:spPr>
-          <a:xfrm>
-            <a:off x="521208" y="1280160"/>
-            <a:ext cx="594360" cy="50292"/>
-          </a:xfrm>
-          <a:prstGeom prst="rect">
-            <a:avLst/>
-          </a:prstGeom>
-          <a:solidFill>
-            <a:srgbClr val="FFC20E"/>
-          </a:solidFill>
-          <a:ln/>
-        </p:spPr>
+            <a:endParaRPr lang="en-US" sz="4000" dirty="0"/>
+          </a:p>
+        </p:txBody>
       </p:sp>
       <p:sp>
         <p:nvSpPr>
@@ -5658,8 +7149,8 @@
         </p:nvSpPr>
         <p:spPr>
           <a:xfrm>
-            <a:off x="502920" y="1481328"/>
-            <a:ext cx="868680" cy="822960"/>
+            <a:off x="670560" y="1955901"/>
+            <a:ext cx="1158240" cy="987552"/>
           </a:xfrm>
           <a:prstGeom prst="rect">
             <a:avLst/>
@@ -5675,17 +7166,17 @@
               <a:buNone/>
             </a:pPr>
             <a:r>
-              <a:rPr lang="en-US" sz="4000" b="1" dirty="0">
-                <a:solidFill>
-                  <a:srgbClr val="D7263D"/>
-                </a:solidFill>
-                <a:latin typeface="Cambria" pitchFamily="34" charset="0"/>
-                <a:ea typeface="Cambria" pitchFamily="34" charset="-122"/>
-                <a:cs typeface="Cambria" pitchFamily="34" charset="-120"/>
+              <a:rPr lang="en-US" sz="5333" b="1" dirty="0">
+                <a:solidFill>
+                  <a:srgbClr val="954161"/>
+                </a:solidFill>
+                <a:latin typeface="Roboto" pitchFamily="34" charset="0"/>
+                <a:ea typeface="Roboto" pitchFamily="34" charset="-122"/>
+                <a:cs typeface="Roboto" pitchFamily="34" charset="-120"/>
               </a:rPr>
               <a:t>01</a:t>
             </a:r>
-            <a:endParaRPr lang="en-US" sz="4000" dirty="0"/>
+            <a:endParaRPr lang="en-US" sz="5333" dirty="0"/>
           </a:p>
         </p:txBody>
       </p:sp>
@@ -5697,8 +7188,8 @@
         </p:nvSpPr>
         <p:spPr>
           <a:xfrm>
-            <a:off x="1554480" y="1527048"/>
-            <a:ext cx="2926080" cy="411480"/>
+            <a:off x="2072640" y="2010765"/>
+            <a:ext cx="3901440" cy="493776"/>
           </a:xfrm>
           <a:prstGeom prst="rect">
             <a:avLst/>
@@ -5714,17 +7205,17 @@
               <a:buNone/>
             </a:pPr>
             <a:r>
-              <a:rPr lang="en-US" sz="1900" b="1" dirty="0">
-                <a:solidFill>
-                  <a:srgbClr val="222A44"/>
-                </a:solidFill>
-                <a:latin typeface="Calibri" pitchFamily="34" charset="0"/>
-                <a:ea typeface="Calibri" pitchFamily="34" charset="-122"/>
-                <a:cs typeface="Calibri" pitchFamily="34" charset="-120"/>
+              <a:rPr lang="en-US" sz="2533" b="1" dirty="0">
+                <a:solidFill>
+                  <a:srgbClr val="1E1E1E"/>
+                </a:solidFill>
+                <a:latin typeface="Roboto" pitchFamily="34" charset="0"/>
+                <a:ea typeface="Roboto" pitchFamily="34" charset="-122"/>
+                <a:cs typeface="Roboto" pitchFamily="34" charset="-120"/>
               </a:rPr>
               <a:t>Sehen</a:t>
             </a:r>
-            <a:endParaRPr lang="en-US" sz="1900" dirty="0"/>
+            <a:endParaRPr lang="en-US" sz="2533" dirty="0"/>
           </a:p>
         </p:txBody>
       </p:sp>
@@ -5736,8 +7227,8 @@
         </p:nvSpPr>
         <p:spPr>
           <a:xfrm>
-            <a:off x="1554480" y="1911096"/>
-            <a:ext cx="5669280" cy="457200"/>
+            <a:off x="2072640" y="2471623"/>
+            <a:ext cx="7559040" cy="548640"/>
           </a:xfrm>
           <a:prstGeom prst="rect">
             <a:avLst/>
@@ -5753,17 +7244,17 @@
               <a:buNone/>
             </a:pPr>
             <a:r>
-              <a:rPr lang="en-US" sz="1250" dirty="0">
-                <a:solidFill>
-                  <a:srgbClr val="5F6A85"/>
-                </a:solidFill>
-                <a:latin typeface="Calibri" pitchFamily="34" charset="0"/>
-                <a:ea typeface="Calibri" pitchFamily="34" charset="-122"/>
-                <a:cs typeface="Calibri" pitchFamily="34" charset="-120"/>
+              <a:rPr lang="en-US" sz="1667" dirty="0">
+                <a:solidFill>
+                  <a:srgbClr val="595959"/>
+                </a:solidFill>
+                <a:latin typeface="Roboto" pitchFamily="34" charset="0"/>
+                <a:ea typeface="Roboto" pitchFamily="34" charset="-122"/>
+                <a:cs typeface="Roboto" pitchFamily="34" charset="-120"/>
               </a:rPr>
               <a:t>Demo: WSL2 auf einem echten Windows-Rechner – vom Install-Befehl bis zum Klassen-Image</a:t>
             </a:r>
-            <a:endParaRPr lang="en-US" sz="1250" dirty="0"/>
+            <a:endParaRPr lang="en-US" sz="1667" dirty="0"/>
           </a:p>
         </p:txBody>
       </p:sp>
@@ -5775,8 +7266,8 @@
         </p:nvSpPr>
         <p:spPr>
           <a:xfrm>
-            <a:off x="7452360" y="1554480"/>
-            <a:ext cx="1188720" cy="365760"/>
+            <a:off x="9936480" y="2043684"/>
+            <a:ext cx="1584960" cy="438912"/>
           </a:xfrm>
           <a:prstGeom prst="rect">
             <a:avLst/>
@@ -5792,17 +7283,17 @@
               <a:buNone/>
             </a:pPr>
             <a:r>
-              <a:rPr lang="en-US" sz="1400" b="1" dirty="0">
-                <a:solidFill>
-                  <a:srgbClr val="2E5AAC"/>
-                </a:solidFill>
-                <a:latin typeface="Calibri" pitchFamily="34" charset="0"/>
-                <a:ea typeface="Calibri" pitchFamily="34" charset="-122"/>
-                <a:cs typeface="Calibri" pitchFamily="34" charset="-120"/>
+              <a:rPr lang="en-US" sz="1867" b="1" dirty="0">
+                <a:solidFill>
+                  <a:srgbClr val="14508D"/>
+                </a:solidFill>
+                <a:latin typeface="Roboto" pitchFamily="34" charset="0"/>
+                <a:ea typeface="Roboto" pitchFamily="34" charset="-122"/>
+                <a:cs typeface="Roboto" pitchFamily="34" charset="-120"/>
               </a:rPr>
               <a:t>15 Min.</a:t>
             </a:r>
-            <a:endParaRPr lang="en-US" sz="1400" dirty="0"/>
+            <a:endParaRPr lang="en-US" sz="1867" dirty="0"/>
           </a:p>
         </p:txBody>
       </p:sp>
@@ -5814,8 +7305,8 @@
         </p:nvSpPr>
         <p:spPr>
           <a:xfrm>
-            <a:off x="502920" y="2505456"/>
-            <a:ext cx="868680" cy="822960"/>
+            <a:off x="670560" y="3184855"/>
+            <a:ext cx="1158240" cy="987552"/>
           </a:xfrm>
           <a:prstGeom prst="rect">
             <a:avLst/>
@@ -5831,17 +7322,17 @@
               <a:buNone/>
             </a:pPr>
             <a:r>
-              <a:rPr lang="en-US" sz="4000" b="1" dirty="0">
-                <a:solidFill>
-                  <a:srgbClr val="D7263D"/>
-                </a:solidFill>
-                <a:latin typeface="Cambria" pitchFamily="34" charset="0"/>
-                <a:ea typeface="Cambria" pitchFamily="34" charset="-122"/>
-                <a:cs typeface="Cambria" pitchFamily="34" charset="-120"/>
+              <a:rPr lang="en-US" sz="5333" b="1" dirty="0">
+                <a:solidFill>
+                  <a:srgbClr val="954161"/>
+                </a:solidFill>
+                <a:latin typeface="Roboto" pitchFamily="34" charset="0"/>
+                <a:ea typeface="Roboto" pitchFamily="34" charset="-122"/>
+                <a:cs typeface="Roboto" pitchFamily="34" charset="-120"/>
               </a:rPr>
               <a:t>02</a:t>
             </a:r>
-            <a:endParaRPr lang="en-US" sz="4000" dirty="0"/>
+            <a:endParaRPr lang="en-US" sz="5333" dirty="0"/>
           </a:p>
         </p:txBody>
       </p:sp>
@@ -5853,8 +7344,8 @@
         </p:nvSpPr>
         <p:spPr>
           <a:xfrm>
-            <a:off x="1554480" y="2551176"/>
-            <a:ext cx="2926080" cy="411480"/>
+            <a:off x="2072640" y="3239719"/>
+            <a:ext cx="3901440" cy="493776"/>
           </a:xfrm>
           <a:prstGeom prst="rect">
             <a:avLst/>
@@ -5870,17 +7361,17 @@
               <a:buNone/>
             </a:pPr>
             <a:r>
-              <a:rPr lang="en-US" sz="1900" b="1" dirty="0">
-                <a:solidFill>
-                  <a:srgbClr val="222A44"/>
-                </a:solidFill>
-                <a:latin typeface="Calibri" pitchFamily="34" charset="0"/>
-                <a:ea typeface="Calibri" pitchFamily="34" charset="-122"/>
-                <a:cs typeface="Calibri" pitchFamily="34" charset="-120"/>
+              <a:rPr lang="en-US" sz="2533" b="1" dirty="0">
+                <a:solidFill>
+                  <a:srgbClr val="1E1E1E"/>
+                </a:solidFill>
+                <a:latin typeface="Roboto" pitchFamily="34" charset="0"/>
+                <a:ea typeface="Roboto" pitchFamily="34" charset="-122"/>
+                <a:cs typeface="Roboto" pitchFamily="34" charset="-120"/>
               </a:rPr>
               <a:t>Selbst machen</a:t>
             </a:r>
-            <a:endParaRPr lang="en-US" sz="1900" dirty="0"/>
+            <a:endParaRPr lang="en-US" sz="2533" dirty="0"/>
           </a:p>
         </p:txBody>
       </p:sp>
@@ -5892,8 +7383,8 @@
         </p:nvSpPr>
         <p:spPr>
           <a:xfrm>
-            <a:off x="1554480" y="2935224"/>
-            <a:ext cx="5669280" cy="457200"/>
+            <a:off x="2072640" y="3700576"/>
+            <a:ext cx="7559040" cy="548640"/>
           </a:xfrm>
           <a:prstGeom prst="rect">
             <a:avLst/>
@@ -5909,17 +7400,17 @@
               <a:buNone/>
             </a:pPr>
             <a:r>
-              <a:rPr lang="en-US" sz="1250" dirty="0">
-                <a:solidFill>
-                  <a:srgbClr val="5F6A85"/>
-                </a:solidFill>
-                <a:latin typeface="Calibri" pitchFamily="34" charset="0"/>
-                <a:ea typeface="Calibri" pitchFamily="34" charset="-122"/>
-                <a:cs typeface="Calibri" pitchFamily="34" charset="-120"/>
+              <a:rPr lang="en-US" sz="1667" dirty="0">
+                <a:solidFill>
+                  <a:srgbClr val="595959"/>
+                </a:solidFill>
+                <a:latin typeface="Roboto" pitchFamily="34" charset="0"/>
+                <a:ea typeface="Roboto" pitchFamily="34" charset="-122"/>
+                <a:cs typeface="Roboto" pitchFamily="34" charset="-120"/>
               </a:rPr>
               <a:t>Hands-on auf dem Übungsserver per SSH: Kommandozeilen-Rallye und der Server-Krimi mit Pipes</a:t>
             </a:r>
-            <a:endParaRPr lang="en-US" sz="1250" dirty="0"/>
+            <a:endParaRPr lang="en-US" sz="1667" dirty="0"/>
           </a:p>
         </p:txBody>
       </p:sp>
@@ -5931,8 +7422,8 @@
         </p:nvSpPr>
         <p:spPr>
           <a:xfrm>
-            <a:off x="7452360" y="2578608"/>
-            <a:ext cx="1188720" cy="365760"/>
+            <a:off x="9936480" y="3272637"/>
+            <a:ext cx="1584960" cy="438912"/>
           </a:xfrm>
           <a:prstGeom prst="rect">
             <a:avLst/>
@@ -5948,17 +7439,17 @@
               <a:buNone/>
             </a:pPr>
             <a:r>
-              <a:rPr lang="en-US" sz="1400" b="1" dirty="0">
-                <a:solidFill>
-                  <a:srgbClr val="2E5AAC"/>
-                </a:solidFill>
-                <a:latin typeface="Calibri" pitchFamily="34" charset="0"/>
-                <a:ea typeface="Calibri" pitchFamily="34" charset="-122"/>
-                <a:cs typeface="Calibri" pitchFamily="34" charset="-120"/>
+              <a:rPr lang="en-US" sz="1867" b="1" dirty="0">
+                <a:solidFill>
+                  <a:srgbClr val="14508D"/>
+                </a:solidFill>
+                <a:latin typeface="Roboto" pitchFamily="34" charset="0"/>
+                <a:ea typeface="Roboto" pitchFamily="34" charset="-122"/>
+                <a:cs typeface="Roboto" pitchFamily="34" charset="-120"/>
               </a:rPr>
               <a:t>30 Min.</a:t>
             </a:r>
-            <a:endParaRPr lang="en-US" sz="1400" dirty="0"/>
+            <a:endParaRPr lang="en-US" sz="1867" dirty="0"/>
           </a:p>
         </p:txBody>
       </p:sp>
@@ -5970,8 +7461,8 @@
         </p:nvSpPr>
         <p:spPr>
           <a:xfrm>
-            <a:off x="502920" y="3529584"/>
-            <a:ext cx="868680" cy="822960"/>
+            <a:off x="670560" y="4413808"/>
+            <a:ext cx="1158240" cy="987552"/>
           </a:xfrm>
           <a:prstGeom prst="rect">
             <a:avLst/>
@@ -5987,17 +7478,17 @@
               <a:buNone/>
             </a:pPr>
             <a:r>
-              <a:rPr lang="en-US" sz="4000" b="1" dirty="0">
-                <a:solidFill>
-                  <a:srgbClr val="D7263D"/>
-                </a:solidFill>
-                <a:latin typeface="Cambria" pitchFamily="34" charset="0"/>
-                <a:ea typeface="Cambria" pitchFamily="34" charset="-122"/>
-                <a:cs typeface="Cambria" pitchFamily="34" charset="-120"/>
+              <a:rPr lang="en-US" sz="5333" b="1" dirty="0">
+                <a:solidFill>
+                  <a:srgbClr val="954161"/>
+                </a:solidFill>
+                <a:latin typeface="Roboto" pitchFamily="34" charset="0"/>
+                <a:ea typeface="Roboto" pitchFamily="34" charset="-122"/>
+                <a:cs typeface="Roboto" pitchFamily="34" charset="-120"/>
               </a:rPr>
               <a:t>03</a:t>
             </a:r>
-            <a:endParaRPr lang="en-US" sz="4000" dirty="0"/>
+            <a:endParaRPr lang="en-US" sz="5333" dirty="0"/>
           </a:p>
         </p:txBody>
       </p:sp>
@@ -6009,8 +7500,8 @@
         </p:nvSpPr>
         <p:spPr>
           <a:xfrm>
-            <a:off x="1554480" y="3575304"/>
-            <a:ext cx="2926080" cy="411480"/>
+            <a:off x="2072640" y="4468672"/>
+            <a:ext cx="3901440" cy="493776"/>
           </a:xfrm>
           <a:prstGeom prst="rect">
             <a:avLst/>
@@ -6026,17 +7517,17 @@
               <a:buNone/>
             </a:pPr>
             <a:r>
-              <a:rPr lang="en-US" sz="1900" b="1" dirty="0">
-                <a:solidFill>
-                  <a:srgbClr val="222A44"/>
-                </a:solidFill>
-                <a:latin typeface="Calibri" pitchFamily="34" charset="0"/>
-                <a:ea typeface="Calibri" pitchFamily="34" charset="-122"/>
-                <a:cs typeface="Calibri" pitchFamily="34" charset="-120"/>
+              <a:rPr lang="en-US" sz="2533" b="1" dirty="0">
+                <a:solidFill>
+                  <a:srgbClr val="1E1E1E"/>
+                </a:solidFill>
+                <a:latin typeface="Roboto" pitchFamily="34" charset="0"/>
+                <a:ea typeface="Roboto" pitchFamily="34" charset="-122"/>
+                <a:cs typeface="Roboto" pitchFamily="34" charset="-120"/>
               </a:rPr>
               <a:t>Mitnehmen</a:t>
             </a:r>
-            <a:endParaRPr lang="en-US" sz="1900" dirty="0"/>
+            <a:endParaRPr lang="en-US" sz="2533" dirty="0"/>
           </a:p>
         </p:txBody>
       </p:sp>
@@ -6048,8 +7539,8 @@
         </p:nvSpPr>
         <p:spPr>
           <a:xfrm>
-            <a:off x="1554480" y="3959352"/>
-            <a:ext cx="5669280" cy="457200"/>
+            <a:off x="2072640" y="4929530"/>
+            <a:ext cx="7559040" cy="548640"/>
           </a:xfrm>
           <a:prstGeom prst="rect">
             <a:avLst/>
@@ -6065,17 +7556,17 @@
               <a:buNone/>
             </a:pPr>
             <a:r>
-              <a:rPr lang="en-US" sz="1250" dirty="0">
-                <a:solidFill>
-                  <a:srgbClr val="5F6A85"/>
-                </a:solidFill>
-                <a:latin typeface="Calibri" pitchFamily="34" charset="0"/>
-                <a:ea typeface="Calibri" pitchFamily="34" charset="-122"/>
-                <a:cs typeface="Calibri" pitchFamily="34" charset="-120"/>
+              <a:rPr lang="en-US" sz="1667" dirty="0">
+                <a:solidFill>
+                  <a:srgbClr val="595959"/>
+                </a:solidFill>
+                <a:latin typeface="Roboto" pitchFamily="34" charset="0"/>
+                <a:ea typeface="Roboto" pitchFamily="34" charset="-122"/>
+                <a:cs typeface="Roboto" pitchFamily="34" charset="-120"/>
               </a:rPr>
               <a:t>Transfer in Ihren Unterricht: LPI-Materialien, Einsatzszenarien, Handout</a:t>
             </a:r>
-            <a:endParaRPr lang="en-US" sz="1250" dirty="0"/>
+            <a:endParaRPr lang="en-US" sz="1667" dirty="0"/>
           </a:p>
         </p:txBody>
       </p:sp>
@@ -6087,8 +7578,8 @@
         </p:nvSpPr>
         <p:spPr>
           <a:xfrm>
-            <a:off x="7452360" y="3602736"/>
-            <a:ext cx="1188720" cy="365760"/>
+            <a:off x="9936480" y="4501591"/>
+            <a:ext cx="1584960" cy="438912"/>
           </a:xfrm>
           <a:prstGeom prst="rect">
             <a:avLst/>
@@ -6104,17 +7595,17 @@
               <a:buNone/>
             </a:pPr>
             <a:r>
-              <a:rPr lang="en-US" sz="1400" b="1" dirty="0">
-                <a:solidFill>
-                  <a:srgbClr val="2E5AAC"/>
-                </a:solidFill>
-                <a:latin typeface="Calibri" pitchFamily="34" charset="0"/>
-                <a:ea typeface="Calibri" pitchFamily="34" charset="-122"/>
-                <a:cs typeface="Calibri" pitchFamily="34" charset="-120"/>
-              </a:rPr>
-              <a:t>15 Min.</a:t>
-            </a:r>
-            <a:endParaRPr lang="en-US" sz="1400" dirty="0"/>
+              <a:rPr lang="en-US" sz="1867" b="1" dirty="0">
+                <a:solidFill>
+                  <a:srgbClr val="14508D"/>
+                </a:solidFill>
+                <a:latin typeface="Roboto" pitchFamily="34" charset="0"/>
+                <a:ea typeface="Roboto" pitchFamily="34" charset="-122"/>
+                <a:cs typeface="Roboto" pitchFamily="34" charset="-120"/>
+              </a:rPr>
+              <a:t>10 Min.</a:t>
+            </a:r>
+            <a:endParaRPr lang="en-US" sz="1867" dirty="0"/>
           </a:p>
         </p:txBody>
       </p:sp>
@@ -6129,13 +7620,6 @@
 <file path=ppt/slides/slide4.xml><?xml version="1.0" encoding="utf-8"?>
 <p:sld xmlns:a="http://schemas.openxmlformats.org/drawingml/2006/main" xmlns:r="http://schemas.openxmlformats.org/officeDocument/2006/relationships" xmlns:p="http://schemas.openxmlformats.org/presentationml/2006/main">
   <p:cSld name="Slide 4">
-    <p:bg>
-      <p:bgPr>
-        <a:solidFill>
-          <a:srgbClr val="FFFFFF"/>
-        </a:solidFill>
-      </p:bgPr>
-    </p:bg>
     <p:spTree>
       <p:nvGrpSpPr>
         <p:cNvPr id="1" name=""/>
@@ -6152,20 +7636,67 @@
       </p:grpSpPr>
       <p:sp>
         <p:nvSpPr>
+          <p:cNvPr id="9001" name="Datumsplatzhalter 9001"/>
+          <p:cNvSpPr>
+            <a:spLocks noGrp="1"/>
+          </p:cNvSpPr>
+          <p:nvPr>
+            <p:ph type="dt" sz="half" idx="2"/>
+          </p:nvPr>
+        </p:nvSpPr>
+        <p:spPr/>
+        <p:txBody>
+          <a:bodyPr/>
+          <a:lstStyle/>
+          <a:p>
+            <a:fld id="{86B4728B-49EC-AC4B-92D0-45D4091857E0}" type="datetime1">
+              <a:rPr lang="de-DE"/>
+              <a:pPr/>
+              <a:t>28.10.2026</a:t>
+            </a:fld>
+            <a:endParaRPr lang="de-DE"/>
+          </a:p>
+        </p:txBody>
+      </p:sp>
+      <p:sp>
+        <p:nvSpPr>
+          <p:cNvPr id="9002" name="Foliennummernplatzhalter 9002"/>
+          <p:cNvSpPr>
+            <a:spLocks noGrp="1"/>
+          </p:cNvSpPr>
+          <p:nvPr>
+            <p:ph type="sldNum" sz="quarter" idx="12"/>
+          </p:nvPr>
+        </p:nvSpPr>
+        <p:spPr/>
+        <p:txBody>
+          <a:bodyPr/>
+          <a:lstStyle/>
+          <a:p>
+            <a:fld id="{B7E13D07-A954-7D45-9CFC-776D35F33DC4}" type="slidenum">
+              <a:rPr lang="de-DE"/>
+              <a:t>4</a:t>
+            </a:fld>
+            <a:endParaRPr lang="de-DE"/>
+          </a:p>
+        </p:txBody>
+      </p:sp>
+      <p:sp>
+        <p:nvSpPr>
           <p:cNvPr id="2" name="Shape 0"/>
           <p:cNvSpPr/>
           <p:nvPr/>
         </p:nvSpPr>
         <p:spPr>
           <a:xfrm>
-            <a:off x="502920" y="329184"/>
-            <a:ext cx="118872" cy="118872"/>
+            <a:off x="670560" y="438912"/>
+            <a:ext cx="158496" cy="158496"/>
           </a:xfrm>
           <a:prstGeom prst="rect">
             <a:avLst/>
           </a:prstGeom>
           <a:solidFill>
-            <a:srgbClr val="FFC20E"/>
+            <a:srgbClr val="FAE55F"/>
           </a:solidFill>
           <a:ln/>
         </p:spPr>
@@ -6178,8 +7709,8 @@
         </p:nvSpPr>
         <p:spPr>
           <a:xfrm>
-            <a:off x="713232" y="292608"/>
-            <a:ext cx="7955280" cy="274320"/>
+            <a:off x="950976" y="390144"/>
+            <a:ext cx="10607040" cy="365760"/>
           </a:xfrm>
           <a:prstGeom prst="rect">
             <a:avLst/>
@@ -6195,17 +7726,17 @@
               <a:buNone/>
             </a:pPr>
             <a:r>
-              <a:rPr lang="en-US" sz="1200" b="1" spc="300" kern="0" dirty="0">
-                <a:solidFill>
-                  <a:srgbClr val="2E5AAC"/>
-                </a:solidFill>
-                <a:latin typeface="Calibri" pitchFamily="34" charset="0"/>
-                <a:ea typeface="Calibri" pitchFamily="34" charset="-122"/>
-                <a:cs typeface="Calibri" pitchFamily="34" charset="-120"/>
+              <a:rPr lang="en-US" sz="1600" b="1" spc="300" kern="0" dirty="0">
+                <a:solidFill>
+                  <a:srgbClr val="14508D"/>
+                </a:solidFill>
+                <a:latin typeface="Roboto" pitchFamily="34" charset="0"/>
+                <a:ea typeface="Roboto" pitchFamily="34" charset="-122"/>
+                <a:cs typeface="Roboto" pitchFamily="34" charset="-120"/>
               </a:rPr>
               <a:t>DEMO · MINUTE 5–20</a:t>
             </a:r>
-            <a:endParaRPr lang="en-US" sz="1200" dirty="0"/>
+            <a:endParaRPr lang="en-US" sz="1600" dirty="0"/>
           </a:p>
         </p:txBody>
       </p:sp>
@@ -6217,8 +7748,8 @@
         </p:nvSpPr>
         <p:spPr>
           <a:xfrm>
-            <a:off x="502920" y="566928"/>
-            <a:ext cx="8138160" cy="685800"/>
+            <a:off x="670560" y="755904"/>
+            <a:ext cx="10850880" cy="914400"/>
           </a:xfrm>
           <a:prstGeom prst="rect">
             <a:avLst/>
@@ -6234,39 +7765,19 @@
               <a:buNone/>
             </a:pPr>
             <a:r>
-              <a:rPr lang="en-US" sz="3000" b="1" dirty="0">
-                <a:solidFill>
-                  <a:srgbClr val="222A44"/>
-                </a:solidFill>
-                <a:latin typeface="Calibri" pitchFamily="34" charset="0"/>
-                <a:ea typeface="Calibri" pitchFamily="34" charset="-122"/>
-                <a:cs typeface="Calibri" pitchFamily="34" charset="-120"/>
+              <a:rPr lang="en-US" sz="4000" b="1" dirty="0">
+                <a:solidFill>
+                  <a:srgbClr val="1E1E1E"/>
+                </a:solidFill>
+                <a:latin typeface="Roboto" pitchFamily="34" charset="0"/>
+                <a:ea typeface="Roboto" pitchFamily="34" charset="-122"/>
+                <a:cs typeface="Roboto" pitchFamily="34" charset="-120"/>
               </a:rPr>
               <a:t>WSL2: Ein echtes Linux, kein Imitat</a:t>
             </a:r>
-            <a:endParaRPr lang="en-US" sz="3000" dirty="0"/>
-          </a:p>
-        </p:txBody>
-      </p:sp>
-      <p:sp>
-        <p:nvSpPr>
-          <p:cNvPr id="5" name="Shape 3"/>
-          <p:cNvSpPr/>
-          <p:nvPr/>
-        </p:nvSpPr>
-        <p:spPr>
-          <a:xfrm>
-            <a:off x="521208" y="1280160"/>
-            <a:ext cx="594360" cy="50292"/>
-          </a:xfrm>
-          <a:prstGeom prst="rect">
-            <a:avLst/>
-          </a:prstGeom>
-          <a:solidFill>
-            <a:srgbClr val="FFC20E"/>
-          </a:solidFill>
-          <a:ln/>
-        </p:spPr>
+            <a:endParaRPr lang="en-US" sz="4000" dirty="0"/>
+          </a:p>
+        </p:txBody>
       </p:sp>
       <p:sp>
         <p:nvSpPr>
@@ -6276,8 +7787,8 @@
         </p:nvSpPr>
         <p:spPr>
           <a:xfrm>
-            <a:off x="4892040" y="1417320"/>
-            <a:ext cx="3749040" cy="3063240"/>
+            <a:off x="6522720" y="1879092"/>
+            <a:ext cx="4998720" cy="3675888"/>
           </a:xfrm>
           <a:prstGeom prst="roundRect">
             <a:avLst>
@@ -6285,11 +7796,11 @@
             </a:avLst>
           </a:prstGeom>
           <a:solidFill>
-            <a:srgbClr val="1A2652"/>
+            <a:srgbClr val="1E1E1E"/>
           </a:solidFill>
           <a:ln/>
           <a:effectLst>
-            <a:outerShdw sx="100000" sy="100000" kx="0" ky="0" algn="bl" rotWithShape="0" blurRad="101600" dist="38100" dir="5400000">
+            <a:outerShdw sx="100000" sy="100000" kx="0" ky="0" algn="bl" rotWithShape="0" blurRad="135467" dist="50800" dir="5400000">
               <a:srgbClr val="000000">
                 <a:alpha val="25000"/>
               </a:srgbClr>
@@ -6305,8 +7816,8 @@
         </p:nvSpPr>
         <p:spPr>
           <a:xfrm>
-            <a:off x="5020056" y="1527048"/>
-            <a:ext cx="100584" cy="100584"/>
+            <a:off x="6693408" y="2004060"/>
+            <a:ext cx="134112" cy="134112"/>
           </a:xfrm>
           <a:prstGeom prst="ellipse">
             <a:avLst/>
@@ -6325,8 +7836,8 @@
         </p:nvSpPr>
         <p:spPr>
           <a:xfrm>
-            <a:off x="5202936" y="1527048"/>
-            <a:ext cx="100584" cy="100584"/>
+            <a:off x="6937248" y="2004060"/>
+            <a:ext cx="134112" cy="134112"/>
           </a:xfrm>
           <a:prstGeom prst="ellipse">
             <a:avLst/>
@@ -6345,8 +7856,8 @@
         </p:nvSpPr>
         <p:spPr>
           <a:xfrm>
-            <a:off x="5385816" y="1527048"/>
-            <a:ext cx="100584" cy="100584"/>
+            <a:off x="7181088" y="2004060"/>
+            <a:ext cx="134112" cy="134112"/>
           </a:xfrm>
           <a:prstGeom prst="ellipse">
             <a:avLst/>
@@ -6365,8 +7876,8 @@
         </p:nvSpPr>
         <p:spPr>
           <a:xfrm>
-            <a:off x="5056632" y="1728216"/>
-            <a:ext cx="3419856" cy="2642616"/>
+            <a:off x="6742176" y="2252167"/>
+            <a:ext cx="4559808" cy="3171139"/>
           </a:xfrm>
           <a:prstGeom prst="rect">
             <a:avLst/>
@@ -6380,14 +7891,14 @@
           <a:p>
             <a:pPr algn="l" indent="0" marL="0">
               <a:lnSpc>
-                <a:spcPts val="1813"/>
+                <a:spcPts val="2417"/>
               </a:lnSpc>
               <a:buNone/>
             </a:pPr>
             <a:r>
-              <a:rPr lang="en-US" sz="1250" dirty="0">
-                <a:solidFill>
-                  <a:srgbClr val="9AA7C4"/>
+              <a:rPr lang="en-US" sz="1667" dirty="0">
+                <a:solidFill>
+                  <a:srgbClr val="BADCF6"/>
                 </a:solidFill>
                 <a:latin typeface="Courier New" pitchFamily="34" charset="0"/>
                 <a:ea typeface="Courier New" pitchFamily="34" charset="-122"/>
@@ -6395,28 +7906,28 @@
               </a:rPr>
               <a:t>PS C:\&gt; wsl --install</a:t>
             </a:r>
-            <a:endParaRPr lang="en-US" sz="1250" dirty="0"/>
+            <a:endParaRPr lang="en-US" sz="1667" dirty="0"/>
           </a:p>
           <a:p>
             <a:pPr algn="l" indent="0" marL="0">
               <a:lnSpc>
-                <a:spcPts val="1813"/>
+                <a:spcPts val="2417"/>
               </a:lnSpc>
               <a:buNone/>
             </a:pPr>
-            <a:endParaRPr lang="en-US" sz="1250" dirty="0"/>
+            <a:endParaRPr lang="en-US" sz="1667" dirty="0"/>
           </a:p>
           <a:p>
             <a:pPr algn="l" indent="0" marL="0">
               <a:lnSpc>
-                <a:spcPts val="1813"/>
+                <a:spcPts val="2417"/>
               </a:lnSpc>
               <a:buNone/>
             </a:pPr>
             <a:r>
-              <a:rPr lang="en-US" sz="1250" dirty="0">
-                <a:solidFill>
-                  <a:srgbClr val="9AA7C4"/>
+              <a:rPr lang="en-US" sz="1667" dirty="0">
+                <a:solidFill>
+                  <a:srgbClr val="BADCF6"/>
                 </a:solidFill>
                 <a:latin typeface="Courier New" pitchFamily="34" charset="0"/>
                 <a:ea typeface="Courier New" pitchFamily="34" charset="-122"/>
@@ -6424,19 +7935,19 @@
               </a:rPr>
               <a:t>Installation: Ubuntu ...</a:t>
             </a:r>
-            <a:endParaRPr lang="en-US" sz="1250" dirty="0"/>
+            <a:endParaRPr lang="en-US" sz="1667" dirty="0"/>
           </a:p>
           <a:p>
             <a:pPr algn="l" indent="0" marL="0">
               <a:lnSpc>
-                <a:spcPts val="1813"/>
+                <a:spcPts val="2417"/>
               </a:lnSpc>
               <a:buNone/>
             </a:pPr>
             <a:r>
-              <a:rPr lang="en-US" sz="1250" dirty="0">
-                <a:solidFill>
-                  <a:srgbClr val="9AA7C4"/>
+              <a:rPr lang="en-US" sz="1667" dirty="0">
+                <a:solidFill>
+                  <a:srgbClr val="BADCF6"/>
                 </a:solidFill>
                 <a:latin typeface="Courier New" pitchFamily="34" charset="0"/>
                 <a:ea typeface="Courier New" pitchFamily="34" charset="-122"/>
@@ -6444,28 +7955,28 @@
               </a:rPr>
               <a:t>Neustart erforderlich.</a:t>
             </a:r>
-            <a:endParaRPr lang="en-US" sz="1250" dirty="0"/>
+            <a:endParaRPr lang="en-US" sz="1667" dirty="0"/>
           </a:p>
           <a:p>
             <a:pPr algn="l" indent="0" marL="0">
               <a:lnSpc>
-                <a:spcPts val="1813"/>
+                <a:spcPts val="2417"/>
               </a:lnSpc>
               <a:buNone/>
             </a:pPr>
-            <a:endParaRPr lang="en-US" sz="1250" dirty="0"/>
+            <a:endParaRPr lang="en-US" sz="1667" dirty="0"/>
           </a:p>
           <a:p>
             <a:pPr algn="l" indent="0" marL="0">
               <a:lnSpc>
-                <a:spcPts val="1813"/>
+                <a:spcPts val="2417"/>
               </a:lnSpc>
               <a:buNone/>
             </a:pPr>
             <a:r>
-              <a:rPr lang="en-US" sz="1250" dirty="0">
-                <a:solidFill>
-                  <a:srgbClr val="FFC20E"/>
+              <a:rPr lang="en-US" sz="1667" dirty="0">
+                <a:solidFill>
+                  <a:srgbClr val="FAE55F"/>
                 </a:solidFill>
                 <a:latin typeface="Courier New" pitchFamily="34" charset="0"/>
                 <a:ea typeface="Courier New" pitchFamily="34" charset="-122"/>
@@ -6473,39 +7984,39 @@
               </a:rPr>
               <a:t>zi@PC:~$ uname -r</a:t>
             </a:r>
-            <a:endParaRPr lang="en-US" sz="1250" dirty="0"/>
+            <a:endParaRPr lang="en-US" sz="1667" dirty="0"/>
           </a:p>
           <a:p>
             <a:pPr algn="l" indent="0" marL="0">
               <a:lnSpc>
-                <a:spcPts val="1813"/>
+                <a:spcPts val="2417"/>
               </a:lnSpc>
               <a:buNone/>
             </a:pPr>
             <a:r>
-              <a:rPr lang="en-US" sz="1250" dirty="0">
-                <a:solidFill>
-                  <a:srgbClr val="DCE3F2"/>
+              <a:rPr lang="en-US" sz="1667" dirty="0">
+                <a:solidFill>
+                  <a:srgbClr val="FFFFFF"/>
                 </a:solidFill>
                 <a:latin typeface="Courier New" pitchFamily="34" charset="0"/>
                 <a:ea typeface="Courier New" pitchFamily="34" charset="-122"/>
                 <a:cs typeface="Courier New" pitchFamily="34" charset="-120"/>
               </a:rPr>
-              <a:t>6.6.87-microsoft-standard</a:t>
-            </a:r>
-            <a:endParaRPr lang="en-US" sz="1250" dirty="0"/>
+              <a:t>6.6.87.2-microsoft-standard-WSL2</a:t>
+            </a:r>
+            <a:endParaRPr lang="en-US" sz="1667" dirty="0"/>
           </a:p>
           <a:p>
             <a:pPr algn="l" indent="0" marL="0">
               <a:lnSpc>
-                <a:spcPts val="1813"/>
+                <a:spcPts val="2417"/>
               </a:lnSpc>
               <a:buNone/>
             </a:pPr>
             <a:r>
-              <a:rPr lang="en-US" sz="1250" b="1" dirty="0">
-                <a:solidFill>
-                  <a:srgbClr val="FFC20E"/>
+              <a:rPr lang="en-US" sz="1667" b="1" dirty="0">
+                <a:solidFill>
+                  <a:srgbClr val="FAE55F"/>
                 </a:solidFill>
                 <a:latin typeface="Courier New" pitchFamily="34" charset="0"/>
                 <a:ea typeface="Courier New" pitchFamily="34" charset="-122"/>
@@ -6513,7 +8024,7 @@
               </a:rPr>
               <a:t>zi@PC:~$ _</a:t>
             </a:r>
-            <a:endParaRPr lang="en-US" sz="1250" dirty="0"/>
+            <a:endParaRPr lang="en-US" sz="1667" dirty="0"/>
           </a:p>
         </p:txBody>
       </p:sp>
@@ -6525,14 +8036,14 @@
         </p:nvSpPr>
         <p:spPr>
           <a:xfrm>
-            <a:off x="502920" y="1508760"/>
-            <a:ext cx="128016" cy="128016"/>
+            <a:off x="670560" y="1980286"/>
+            <a:ext cx="170688" cy="170688"/>
           </a:xfrm>
           <a:prstGeom prst="ellipse">
             <a:avLst/>
           </a:prstGeom>
           <a:solidFill>
-            <a:srgbClr val="2E5AAC"/>
+            <a:srgbClr val="14508D"/>
           </a:solidFill>
           <a:ln/>
         </p:spPr>
@@ -6545,8 +8056,8 @@
         </p:nvSpPr>
         <p:spPr>
           <a:xfrm>
-            <a:off x="777240" y="1481328"/>
-            <a:ext cx="3931920" cy="731520"/>
+            <a:off x="1036320" y="1955901"/>
+            <a:ext cx="5242560" cy="877824"/>
           </a:xfrm>
           <a:prstGeom prst="rect">
             <a:avLst/>
@@ -6562,13 +8073,13 @@
               <a:buNone/>
             </a:pPr>
             <a:r>
-              <a:rPr lang="en-US" sz="1250" b="1" dirty="0">
-                <a:solidFill>
-                  <a:srgbClr val="222A44"/>
-                </a:solidFill>
-                <a:latin typeface="Calibri" pitchFamily="34" charset="0"/>
-                <a:ea typeface="Calibri" pitchFamily="34" charset="-122"/>
-                <a:cs typeface="Calibri" pitchFamily="34" charset="-120"/>
+              <a:rPr lang="en-US" sz="1667" b="1" dirty="0">
+                <a:solidFill>
+                  <a:srgbClr val="1E1E1E"/>
+                </a:solidFill>
+                <a:latin typeface="Roboto" pitchFamily="34" charset="0"/>
+                <a:ea typeface="Roboto" pitchFamily="34" charset="-122"/>
+                <a:cs typeface="Roboto" pitchFamily="34" charset="-120"/>
               </a:rPr>
               <a:t>Vollwertige, leichtgewichtige VM  </a:t>
             </a:r>
@@ -6576,17 +8087,17 @@
               <a:buNone/>
             </a:pPr>
             <a:r>
-              <a:rPr lang="en-US" sz="1250" dirty="0">
-                <a:solidFill>
-                  <a:srgbClr val="5F6A85"/>
-                </a:solidFill>
-                <a:latin typeface="Calibri" pitchFamily="34" charset="0"/>
-                <a:ea typeface="Calibri" pitchFamily="34" charset="-122"/>
-                <a:cs typeface="Calibri" pitchFamily="34" charset="-120"/>
+              <a:rPr lang="en-US" sz="1667" dirty="0">
+                <a:solidFill>
+                  <a:srgbClr val="595959"/>
+                </a:solidFill>
+                <a:latin typeface="Roboto" pitchFamily="34" charset="0"/>
+                <a:ea typeface="Roboto" pitchFamily="34" charset="-122"/>
+                <a:cs typeface="Roboto" pitchFamily="34" charset="-120"/>
               </a:rPr>
               <a:t>mit echtem Linux-Kernel – kein Emulator, keine Nachbildung wie Git Bash</a:t>
             </a:r>
-            <a:endParaRPr lang="en-US" sz="1250" dirty="0"/>
+            <a:endParaRPr lang="en-US" sz="1667" dirty="0"/>
           </a:p>
         </p:txBody>
       </p:sp>
@@ -6598,14 +8109,14 @@
         </p:nvSpPr>
         <p:spPr>
           <a:xfrm>
-            <a:off x="502920" y="2267712"/>
-            <a:ext cx="128016" cy="128016"/>
+            <a:off x="670560" y="2891028"/>
+            <a:ext cx="170688" cy="170688"/>
           </a:xfrm>
           <a:prstGeom prst="ellipse">
             <a:avLst/>
           </a:prstGeom>
           <a:solidFill>
-            <a:srgbClr val="2E5AAC"/>
+            <a:srgbClr val="14508D"/>
           </a:solidFill>
           <a:ln/>
         </p:spPr>
@@ -6618,8 +8129,8 @@
         </p:nvSpPr>
         <p:spPr>
           <a:xfrm>
-            <a:off x="777240" y="2240280"/>
-            <a:ext cx="3931920" cy="731520"/>
+            <a:off x="1036320" y="2866644"/>
+            <a:ext cx="5242560" cy="877824"/>
           </a:xfrm>
           <a:prstGeom prst="rect">
             <a:avLst/>
@@ -6635,13 +8146,13 @@
               <a:buNone/>
             </a:pPr>
             <a:r>
-              <a:rPr lang="en-US" sz="1250" b="1" dirty="0">
-                <a:solidFill>
-                  <a:srgbClr val="222A44"/>
-                </a:solidFill>
-                <a:latin typeface="Calibri" pitchFamily="34" charset="0"/>
-                <a:ea typeface="Calibri" pitchFamily="34" charset="-122"/>
-                <a:cs typeface="Calibri" pitchFamily="34" charset="-120"/>
+              <a:rPr lang="en-US" sz="1667" b="1" dirty="0">
+                <a:solidFill>
+                  <a:srgbClr val="1E1E1E"/>
+                </a:solidFill>
+                <a:latin typeface="Roboto" pitchFamily="34" charset="0"/>
+                <a:ea typeface="Roboto" pitchFamily="34" charset="-122"/>
+                <a:cs typeface="Roboto" pitchFamily="34" charset="-120"/>
               </a:rPr>
               <a:t>Ein Befehl, eine Kaffeepause  </a:t>
             </a:r>
@@ -6649,17 +8160,17 @@
               <a:buNone/>
             </a:pPr>
             <a:r>
-              <a:rPr lang="en-US" sz="1250" dirty="0">
-                <a:solidFill>
-                  <a:srgbClr val="5F6A85"/>
-                </a:solidFill>
-                <a:latin typeface="Calibri" pitchFamily="34" charset="0"/>
-                <a:ea typeface="Calibri" pitchFamily="34" charset="-122"/>
-                <a:cs typeface="Calibri" pitchFamily="34" charset="-120"/>
+              <a:rPr lang="en-US" sz="1667" dirty="0">
+                <a:solidFill>
+                  <a:srgbClr val="595959"/>
+                </a:solidFill>
+                <a:latin typeface="Roboto" pitchFamily="34" charset="0"/>
+                <a:ea typeface="Roboto" pitchFamily="34" charset="-122"/>
+                <a:cs typeface="Roboto" pitchFamily="34" charset="-120"/>
               </a:rPr>
               <a:t>wsl --install richtet alles ein, inklusive Ubuntu</a:t>
             </a:r>
-            <a:endParaRPr lang="en-US" sz="1250" dirty="0"/>
+            <a:endParaRPr lang="en-US" sz="1667" dirty="0"/>
           </a:p>
         </p:txBody>
       </p:sp>
@@ -6671,14 +8182,14 @@
         </p:nvSpPr>
         <p:spPr>
           <a:xfrm>
-            <a:off x="502920" y="3026664"/>
-            <a:ext cx="128016" cy="128016"/>
+            <a:off x="670560" y="3801770"/>
+            <a:ext cx="170688" cy="170688"/>
           </a:xfrm>
           <a:prstGeom prst="ellipse">
             <a:avLst/>
           </a:prstGeom>
           <a:solidFill>
-            <a:srgbClr val="2E5AAC"/>
+            <a:srgbClr val="14508D"/>
           </a:solidFill>
           <a:ln/>
         </p:spPr>
@@ -6691,8 +8202,8 @@
         </p:nvSpPr>
         <p:spPr>
           <a:xfrm>
-            <a:off x="777240" y="2999232"/>
-            <a:ext cx="3931920" cy="731520"/>
+            <a:off x="1036320" y="3777386"/>
+            <a:ext cx="5242560" cy="877824"/>
           </a:xfrm>
           <a:prstGeom prst="rect">
             <a:avLst/>
@@ -6708,13 +8219,13 @@
               <a:buNone/>
             </a:pPr>
             <a:r>
-              <a:rPr lang="en-US" sz="1250" b="1" dirty="0">
-                <a:solidFill>
-                  <a:srgbClr val="222A44"/>
-                </a:solidFill>
-                <a:latin typeface="Calibri" pitchFamily="34" charset="0"/>
-                <a:ea typeface="Calibri" pitchFamily="34" charset="-122"/>
-                <a:cs typeface="Calibri" pitchFamily="34" charset="-120"/>
+              <a:rPr lang="en-US" sz="1667" b="1" dirty="0">
+                <a:solidFill>
+                  <a:srgbClr val="1E1E1E"/>
+                </a:solidFill>
+                <a:latin typeface="Roboto" pitchFamily="34" charset="0"/>
+                <a:ea typeface="Roboto" pitchFamily="34" charset="-122"/>
+                <a:cs typeface="Roboto" pitchFamily="34" charset="-120"/>
               </a:rPr>
               <a:t>Startet in Sekunden  </a:t>
             </a:r>
@@ -6722,17 +8233,17 @@
               <a:buNone/>
             </a:pPr>
             <a:r>
-              <a:rPr lang="en-US" sz="1250" dirty="0">
-                <a:solidFill>
-                  <a:srgbClr val="5F6A85"/>
-                </a:solidFill>
-                <a:latin typeface="Calibri" pitchFamily="34" charset="0"/>
-                <a:ea typeface="Calibri" pitchFamily="34" charset="-122"/>
-                <a:cs typeface="Calibri" pitchFamily="34" charset="-120"/>
+              <a:rPr lang="en-US" sz="1667" dirty="0">
+                <a:solidFill>
+                  <a:srgbClr val="595959"/>
+                </a:solidFill>
+                <a:latin typeface="Roboto" pitchFamily="34" charset="0"/>
+                <a:ea typeface="Roboto" pitchFamily="34" charset="-122"/>
+                <a:cs typeface="Roboto" pitchFamily="34" charset="-120"/>
               </a:rPr>
               <a:t>fühlt sich an wie ein normales Programm, nicht wie eine virtuelle Maschine</a:t>
             </a:r>
-            <a:endParaRPr lang="en-US" sz="1250" dirty="0"/>
+            <a:endParaRPr lang="en-US" sz="1667" dirty="0"/>
           </a:p>
         </p:txBody>
       </p:sp>
@@ -6744,14 +8255,14 @@
         </p:nvSpPr>
         <p:spPr>
           <a:xfrm>
-            <a:off x="502920" y="3785616"/>
-            <a:ext cx="128016" cy="128016"/>
+            <a:off x="670560" y="4712513"/>
+            <a:ext cx="170688" cy="170688"/>
           </a:xfrm>
           <a:prstGeom prst="ellipse">
             <a:avLst/>
           </a:prstGeom>
           <a:solidFill>
-            <a:srgbClr val="2E5AAC"/>
+            <a:srgbClr val="14508D"/>
           </a:solidFill>
           <a:ln/>
         </p:spPr>
@@ -6764,8 +8275,8 @@
         </p:nvSpPr>
         <p:spPr>
           <a:xfrm>
-            <a:off x="777240" y="3758184"/>
-            <a:ext cx="3931920" cy="731520"/>
+            <a:off x="1036320" y="4688128"/>
+            <a:ext cx="5242560" cy="877824"/>
           </a:xfrm>
           <a:prstGeom prst="rect">
             <a:avLst/>
@@ -6781,13 +8292,13 @@
               <a:buNone/>
             </a:pPr>
             <a:r>
-              <a:rPr lang="en-US" sz="1250" b="1" dirty="0">
-                <a:solidFill>
-                  <a:srgbClr val="222A44"/>
-                </a:solidFill>
-                <a:latin typeface="Calibri" pitchFamily="34" charset="0"/>
-                <a:ea typeface="Calibri" pitchFamily="34" charset="-122"/>
-                <a:cs typeface="Calibri" pitchFamily="34" charset="-120"/>
+              <a:rPr lang="en-US" sz="1667" b="1" dirty="0">
+                <a:solidFill>
+                  <a:srgbClr val="1E1E1E"/>
+                </a:solidFill>
+                <a:latin typeface="Roboto" pitchFamily="34" charset="0"/>
+                <a:ea typeface="Roboto" pitchFamily="34" charset="-122"/>
+                <a:cs typeface="Roboto" pitchFamily="34" charset="-120"/>
               </a:rPr>
               <a:t>Kostenlos &amp; offiziell  </a:t>
             </a:r>
@@ -6795,17 +8306,17 @@
               <a:buNone/>
             </a:pPr>
             <a:r>
-              <a:rPr lang="en-US" sz="1250" dirty="0">
-                <a:solidFill>
-                  <a:srgbClr val="5F6A85"/>
-                </a:solidFill>
-                <a:latin typeface="Calibri" pitchFamily="34" charset="0"/>
-                <a:ea typeface="Calibri" pitchFamily="34" charset="-122"/>
-                <a:cs typeface="Calibri" pitchFamily="34" charset="-120"/>
+              <a:rPr lang="en-US" sz="1667" dirty="0">
+                <a:solidFill>
+                  <a:srgbClr val="595959"/>
+                </a:solidFill>
+                <a:latin typeface="Roboto" pitchFamily="34" charset="0"/>
+                <a:ea typeface="Roboto" pitchFamily="34" charset="-122"/>
+                <a:cs typeface="Roboto" pitchFamily="34" charset="-120"/>
               </a:rPr>
               <a:t>Bestandteil von Windows 10 (ab 2004) und Windows 11</a:t>
             </a:r>
-            <a:endParaRPr lang="en-US" sz="1250" dirty="0"/>
+            <a:endParaRPr lang="en-US" sz="1667" dirty="0"/>
           </a:p>
         </p:txBody>
       </p:sp>
@@ -6820,13 +8331,6 @@
 <file path=ppt/slides/slide5.xml><?xml version="1.0" encoding="utf-8"?>
 <p:sld xmlns:a="http://schemas.openxmlformats.org/drawingml/2006/main" xmlns:r="http://schemas.openxmlformats.org/officeDocument/2006/relationships" xmlns:p="http://schemas.openxmlformats.org/presentationml/2006/main">
   <p:cSld name="Slide 5">
-    <p:bg>
-      <p:bgPr>
-        <a:solidFill>
-          <a:srgbClr val="FFFFFF"/>
-        </a:solidFill>
-      </p:bgPr>
-    </p:bg>
     <p:spTree>
       <p:nvGrpSpPr>
         <p:cNvPr id="1" name=""/>
@@ -6843,20 +8347,67 @@
       </p:grpSpPr>
       <p:sp>
         <p:nvSpPr>
+          <p:cNvPr id="9001" name="Datumsplatzhalter 9001"/>
+          <p:cNvSpPr>
+            <a:spLocks noGrp="1"/>
+          </p:cNvSpPr>
+          <p:nvPr>
+            <p:ph type="dt" sz="half" idx="2"/>
+          </p:nvPr>
+        </p:nvSpPr>
+        <p:spPr/>
+        <p:txBody>
+          <a:bodyPr/>
+          <a:lstStyle/>
+          <a:p>
+            <a:fld id="{86B4728B-49EC-AC4B-92D0-45D4091857E0}" type="datetime1">
+              <a:rPr lang="de-DE"/>
+              <a:pPr/>
+              <a:t>28.10.2026</a:t>
+            </a:fld>
+            <a:endParaRPr lang="de-DE"/>
+          </a:p>
+        </p:txBody>
+      </p:sp>
+      <p:sp>
+        <p:nvSpPr>
+          <p:cNvPr id="9002" name="Foliennummernplatzhalter 9002"/>
+          <p:cNvSpPr>
+            <a:spLocks noGrp="1"/>
+          </p:cNvSpPr>
+          <p:nvPr>
+            <p:ph type="sldNum" sz="quarter" idx="12"/>
+          </p:nvPr>
+        </p:nvSpPr>
+        <p:spPr/>
+        <p:txBody>
+          <a:bodyPr/>
+          <a:lstStyle/>
+          <a:p>
+            <a:fld id="{B7E13D07-A954-7D45-9CFC-776D35F33DC4}" type="slidenum">
+              <a:rPr lang="de-DE"/>
+              <a:t>5</a:t>
+            </a:fld>
+            <a:endParaRPr lang="de-DE"/>
+          </a:p>
+        </p:txBody>
+      </p:sp>
+      <p:sp>
+        <p:nvSpPr>
           <p:cNvPr id="2" name="Shape 0"/>
           <p:cNvSpPr/>
           <p:nvPr/>
         </p:nvSpPr>
         <p:spPr>
           <a:xfrm>
-            <a:off x="502920" y="329184"/>
-            <a:ext cx="118872" cy="118872"/>
+            <a:off x="670560" y="438912"/>
+            <a:ext cx="158496" cy="158496"/>
           </a:xfrm>
           <a:prstGeom prst="rect">
             <a:avLst/>
           </a:prstGeom>
           <a:solidFill>
-            <a:srgbClr val="FFC20E"/>
+            <a:srgbClr val="FAE55F"/>
           </a:solidFill>
           <a:ln/>
         </p:spPr>
@@ -6869,8 +8420,8 @@
         </p:nvSpPr>
         <p:spPr>
           <a:xfrm>
-            <a:off x="713232" y="292608"/>
-            <a:ext cx="7955280" cy="274320"/>
+            <a:off x="950976" y="390144"/>
+            <a:ext cx="10607040" cy="365760"/>
           </a:xfrm>
           <a:prstGeom prst="rect">
             <a:avLst/>
@@ -6886,17 +8437,17 @@
               <a:buNone/>
             </a:pPr>
             <a:r>
-              <a:rPr lang="en-US" sz="1200" b="1" spc="300" kern="0" dirty="0">
-                <a:solidFill>
-                  <a:srgbClr val="2E5AAC"/>
-                </a:solidFill>
-                <a:latin typeface="Calibri" pitchFamily="34" charset="0"/>
-                <a:ea typeface="Calibri" pitchFamily="34" charset="-122"/>
-                <a:cs typeface="Calibri" pitchFamily="34" charset="-120"/>
+              <a:rPr lang="en-US" sz="1600" b="1" spc="300" kern="0" dirty="0">
+                <a:solidFill>
+                  <a:srgbClr val="14508D"/>
+                </a:solidFill>
+                <a:latin typeface="Roboto" pitchFamily="34" charset="0"/>
+                <a:ea typeface="Roboto" pitchFamily="34" charset="-122"/>
+                <a:cs typeface="Roboto" pitchFamily="34" charset="-120"/>
               </a:rPr>
               <a:t>DEMO · LIVE AM BEAMER</a:t>
             </a:r>
-            <a:endParaRPr lang="en-US" sz="1200" dirty="0"/>
+            <a:endParaRPr lang="en-US" sz="1600" dirty="0"/>
           </a:p>
         </p:txBody>
       </p:sp>
@@ -6908,8 +8459,8 @@
         </p:nvSpPr>
         <p:spPr>
           <a:xfrm>
-            <a:off x="502920" y="566928"/>
-            <a:ext cx="8138160" cy="685800"/>
+            <a:off x="670560" y="755904"/>
+            <a:ext cx="10850880" cy="914400"/>
           </a:xfrm>
           <a:prstGeom prst="rect">
             <a:avLst/>
@@ -6925,39 +8476,19 @@
               <a:buNone/>
             </a:pPr>
             <a:r>
-              <a:rPr lang="en-US" sz="3000" b="1" dirty="0">
-                <a:solidFill>
-                  <a:srgbClr val="222A44"/>
-                </a:solidFill>
-                <a:latin typeface="Calibri" pitchFamily="34" charset="0"/>
-                <a:ea typeface="Calibri" pitchFamily="34" charset="-122"/>
-                <a:cs typeface="Calibri" pitchFamily="34" charset="-120"/>
+              <a:rPr lang="en-US" sz="4000" b="1" dirty="0">
+                <a:solidFill>
+                  <a:srgbClr val="1E1E1E"/>
+                </a:solidFill>
+                <a:latin typeface="Roboto" pitchFamily="34" charset="0"/>
+                <a:ea typeface="Roboto" pitchFamily="34" charset="-122"/>
+                <a:cs typeface="Roboto" pitchFamily="34" charset="-120"/>
               </a:rPr>
               <a:t>Zwei Welten, eine Maschine</a:t>
             </a:r>
-            <a:endParaRPr lang="en-US" sz="3000" dirty="0"/>
-          </a:p>
-        </p:txBody>
-      </p:sp>
-      <p:sp>
-        <p:nvSpPr>
-          <p:cNvPr id="5" name="Shape 3"/>
-          <p:cNvSpPr/>
-          <p:nvPr/>
-        </p:nvSpPr>
-        <p:spPr>
-          <a:xfrm>
-            <a:off x="521208" y="1280160"/>
-            <a:ext cx="594360" cy="50292"/>
-          </a:xfrm>
-          <a:prstGeom prst="rect">
-            <a:avLst/>
-          </a:prstGeom>
-          <a:solidFill>
-            <a:srgbClr val="FFC20E"/>
-          </a:solidFill>
-          <a:ln/>
-        </p:spPr>
+            <a:endParaRPr lang="en-US" sz="4000" dirty="0"/>
+          </a:p>
+        </p:txBody>
       </p:sp>
       <p:sp>
         <p:nvSpPr>
@@ -6967,8 +8498,8 @@
         </p:nvSpPr>
         <p:spPr>
           <a:xfrm>
-            <a:off x="502920" y="1463040"/>
-            <a:ext cx="3913632" cy="2514600"/>
+            <a:off x="670560" y="1933956"/>
+            <a:ext cx="5218176" cy="3017520"/>
           </a:xfrm>
           <a:prstGeom prst="roundRect">
             <a:avLst>
@@ -6976,7 +8507,7 @@
             </a:avLst>
           </a:prstGeom>
           <a:solidFill>
-            <a:srgbClr val="EDF2FA"/>
+            <a:srgbClr val="E4F1FB"/>
           </a:solidFill>
           <a:ln/>
         </p:spPr>
@@ -6989,8 +8520,8 @@
         </p:nvSpPr>
         <p:spPr>
           <a:xfrm>
-            <a:off x="758952" y="1719072"/>
-            <a:ext cx="530352" cy="530352"/>
+            <a:off x="1011936" y="2205838"/>
+            <a:ext cx="707136" cy="707136"/>
           </a:xfrm>
           <a:prstGeom prst="ellipse">
             <a:avLst/>
@@ -7017,8 +8548,8 @@
         </p:blipFill>
         <p:spPr>
           <a:xfrm>
-            <a:off x="877824" y="1837944"/>
-            <a:ext cx="292608" cy="292608"/>
+            <a:off x="1170432" y="2364333"/>
+            <a:ext cx="390144" cy="390144"/>
           </a:xfrm>
           <a:prstGeom prst="rect">
             <a:avLst/>
@@ -7033,8 +8564,8 @@
         </p:nvSpPr>
         <p:spPr>
           <a:xfrm>
-            <a:off x="1435608" y="1810512"/>
-            <a:ext cx="2743200" cy="365760"/>
+            <a:off x="1914144" y="2350922"/>
+            <a:ext cx="3657600" cy="438912"/>
           </a:xfrm>
           <a:prstGeom prst="rect">
             <a:avLst/>
@@ -7050,17 +8581,17 @@
               <a:buNone/>
             </a:pPr>
             <a:r>
-              <a:rPr lang="en-US" sz="1700" b="1" dirty="0">
-                <a:solidFill>
-                  <a:srgbClr val="222A44"/>
-                </a:solidFill>
-                <a:latin typeface="Calibri" pitchFamily="34" charset="0"/>
-                <a:ea typeface="Calibri" pitchFamily="34" charset="-122"/>
-                <a:cs typeface="Calibri" pitchFamily="34" charset="-120"/>
+              <a:rPr lang="en-US" sz="2267" b="1" dirty="0">
+                <a:solidFill>
+                  <a:srgbClr val="1E1E1E"/>
+                </a:solidFill>
+                <a:latin typeface="Roboto" pitchFamily="34" charset="0"/>
+                <a:ea typeface="Roboto" pitchFamily="34" charset="-122"/>
+                <a:cs typeface="Roboto" pitchFamily="34" charset="-120"/>
               </a:rPr>
               <a:t>Windows → Linux</a:t>
             </a:r>
-            <a:endParaRPr lang="en-US" sz="1700" dirty="0"/>
+            <a:endParaRPr lang="en-US" sz="2267" dirty="0"/>
           </a:p>
         </p:txBody>
       </p:sp>
@@ -7072,8 +8603,8 @@
         </p:nvSpPr>
         <p:spPr>
           <a:xfrm>
-            <a:off x="758952" y="2395728"/>
-            <a:ext cx="3401568" cy="457200"/>
+            <a:off x="1011936" y="3053181"/>
+            <a:ext cx="4535424" cy="548640"/>
           </a:xfrm>
           <a:prstGeom prst="roundRect">
             <a:avLst>
@@ -7081,7 +8612,7 @@
             </a:avLst>
           </a:prstGeom>
           <a:solidFill>
-            <a:srgbClr val="1A2652"/>
+            <a:srgbClr val="1E1E1E"/>
           </a:solidFill>
           <a:ln/>
         </p:spPr>
@@ -7094,8 +8625,8 @@
         </p:nvSpPr>
         <p:spPr>
           <a:xfrm>
-            <a:off x="896112" y="2395728"/>
-            <a:ext cx="3200400" cy="457200"/>
+            <a:off x="1194816" y="3053181"/>
+            <a:ext cx="4267200" cy="548640"/>
           </a:xfrm>
           <a:prstGeom prst="rect">
             <a:avLst/>
@@ -7111,9 +8642,9 @@
               <a:buNone/>
             </a:pPr>
             <a:r>
-              <a:rPr lang="en-US" sz="1250" dirty="0">
-                <a:solidFill>
-                  <a:srgbClr val="FFC20E"/>
+              <a:rPr lang="en-US" sz="1667" dirty="0">
+                <a:solidFill>
+                  <a:srgbClr val="FAE55F"/>
                 </a:solidFill>
                 <a:latin typeface="Courier New" pitchFamily="34" charset="0"/>
                 <a:ea typeface="Courier New" pitchFamily="34" charset="-122"/>
@@ -7121,7 +8652,7 @@
               </a:rPr>
               <a:t>cd /mnt/c/Users/zi/Desktop</a:t>
             </a:r>
-            <a:endParaRPr lang="en-US" sz="1250" dirty="0"/>
+            <a:endParaRPr lang="en-US" sz="1667" dirty="0"/>
           </a:p>
         </p:txBody>
       </p:sp>
@@ -7133,8 +8664,8 @@
         </p:nvSpPr>
         <p:spPr>
           <a:xfrm>
-            <a:off x="758952" y="2999232"/>
-            <a:ext cx="3401568" cy="868680"/>
+            <a:off x="1011936" y="3777386"/>
+            <a:ext cx="4535424" cy="1042416"/>
           </a:xfrm>
           <a:prstGeom prst="rect">
             <a:avLst/>
@@ -7150,17 +8681,17 @@
               <a:buNone/>
             </a:pPr>
             <a:r>
-              <a:rPr lang="en-US" sz="1200" dirty="0">
-                <a:solidFill>
-                  <a:srgbClr val="5F6A85"/>
-                </a:solidFill>
-                <a:latin typeface="Calibri" pitchFamily="34" charset="0"/>
-                <a:ea typeface="Calibri" pitchFamily="34" charset="-122"/>
-                <a:cs typeface="Calibri" pitchFamily="34" charset="-120"/>
+              <a:rPr lang="en-US" sz="1600" dirty="0">
+                <a:solidFill>
+                  <a:srgbClr val="595959"/>
+                </a:solidFill>
+                <a:latin typeface="Roboto" pitchFamily="34" charset="0"/>
+                <a:ea typeface="Roboto" pitchFamily="34" charset="-122"/>
+                <a:cs typeface="Roboto" pitchFamily="34" charset="-120"/>
               </a:rPr>
               <a:t>Alle Windows-Laufwerke sind im Linux-Dateibaum eingehängt – Unterrichtsmaterial liegt sofort bereit.</a:t>
             </a:r>
-            <a:endParaRPr lang="en-US" sz="1200" dirty="0"/>
+            <a:endParaRPr lang="en-US" sz="1600" dirty="0"/>
           </a:p>
         </p:txBody>
       </p:sp>
@@ -7172,8 +8703,8 @@
         </p:nvSpPr>
         <p:spPr>
           <a:xfrm>
-            <a:off x="4727448" y="1463040"/>
-            <a:ext cx="3913632" cy="2514600"/>
+            <a:off x="6303264" y="1933956"/>
+            <a:ext cx="5218176" cy="3017520"/>
           </a:xfrm>
           <a:prstGeom prst="roundRect">
             <a:avLst>
@@ -7181,7 +8712,7 @@
             </a:avLst>
           </a:prstGeom>
           <a:solidFill>
-            <a:srgbClr val="EDF2FA"/>
+            <a:srgbClr val="E4F1FB"/>
           </a:solidFill>
           <a:ln/>
         </p:spPr>
@@ -7194,8 +8725,8 @@
         </p:nvSpPr>
         <p:spPr>
           <a:xfrm>
-            <a:off x="4983480" y="1719072"/>
-            <a:ext cx="530352" cy="530352"/>
+            <a:off x="6644640" y="2205838"/>
+            <a:ext cx="707136" cy="707136"/>
           </a:xfrm>
           <a:prstGeom prst="ellipse">
             <a:avLst/>
@@ -7222,8 +8753,8 @@
         </p:blipFill>
         <p:spPr>
           <a:xfrm>
-            <a:off x="5102352" y="1837944"/>
-            <a:ext cx="292608" cy="292608"/>
+            <a:off x="6803136" y="2364333"/>
+            <a:ext cx="390144" cy="390144"/>
           </a:xfrm>
           <a:prstGeom prst="rect">
             <a:avLst/>
@@ -7238,8 +8769,8 @@
         </p:nvSpPr>
         <p:spPr>
           <a:xfrm>
-            <a:off x="5660136" y="1810512"/>
-            <a:ext cx="2743200" cy="365760"/>
+            <a:off x="7546848" y="2350922"/>
+            <a:ext cx="3657600" cy="438912"/>
           </a:xfrm>
           <a:prstGeom prst="rect">
             <a:avLst/>
@@ -7255,17 +8786,17 @@
               <a:buNone/>
             </a:pPr>
             <a:r>
-              <a:rPr lang="en-US" sz="1700" b="1" dirty="0">
-                <a:solidFill>
-                  <a:srgbClr val="222A44"/>
-                </a:solidFill>
-                <a:latin typeface="Calibri" pitchFamily="34" charset="0"/>
-                <a:ea typeface="Calibri" pitchFamily="34" charset="-122"/>
-                <a:cs typeface="Calibri" pitchFamily="34" charset="-120"/>
+              <a:rPr lang="en-US" sz="2267" b="1" dirty="0">
+                <a:solidFill>
+                  <a:srgbClr val="1E1E1E"/>
+                </a:solidFill>
+                <a:latin typeface="Roboto" pitchFamily="34" charset="0"/>
+                <a:ea typeface="Roboto" pitchFamily="34" charset="-122"/>
+                <a:cs typeface="Roboto" pitchFamily="34" charset="-120"/>
               </a:rPr>
               <a:t>Linux → Windows</a:t>
             </a:r>
-            <a:endParaRPr lang="en-US" sz="1700" dirty="0"/>
+            <a:endParaRPr lang="en-US" sz="2267" dirty="0"/>
           </a:p>
         </p:txBody>
       </p:sp>
@@ -7277,8 +8808,8 @@
         </p:nvSpPr>
         <p:spPr>
           <a:xfrm>
-            <a:off x="4983480" y="2395728"/>
-            <a:ext cx="3401568" cy="457200"/>
+            <a:off x="6644640" y="3053181"/>
+            <a:ext cx="4535424" cy="548640"/>
           </a:xfrm>
           <a:prstGeom prst="roundRect">
             <a:avLst>
@@ -7286,7 +8817,7 @@
             </a:avLst>
           </a:prstGeom>
           <a:solidFill>
-            <a:srgbClr val="1A2652"/>
+            <a:srgbClr val="1E1E1E"/>
           </a:solidFill>
           <a:ln/>
         </p:spPr>
@@ -7299,8 +8830,8 @@
         </p:nvSpPr>
         <p:spPr>
           <a:xfrm>
-            <a:off x="5120640" y="2395728"/>
-            <a:ext cx="3200400" cy="457200"/>
+            <a:off x="6827520" y="3053181"/>
+            <a:ext cx="4267200" cy="548640"/>
           </a:xfrm>
           <a:prstGeom prst="rect">
             <a:avLst/>
@@ -7316,9 +8847,9 @@
               <a:buNone/>
             </a:pPr>
             <a:r>
-              <a:rPr lang="en-US" sz="1250" dirty="0">
-                <a:solidFill>
-                  <a:srgbClr val="FFC20E"/>
+              <a:rPr lang="en-US" sz="1667" dirty="0">
+                <a:solidFill>
+                  <a:srgbClr val="FAE55F"/>
                 </a:solidFill>
                 <a:latin typeface="Courier New" pitchFamily="34" charset="0"/>
                 <a:ea typeface="Courier New" pitchFamily="34" charset="-122"/>
@@ -7326,7 +8857,7 @@
               </a:rPr>
               <a:t>explorer.exe .</a:t>
             </a:r>
-            <a:endParaRPr lang="en-US" sz="1250" dirty="0"/>
+            <a:endParaRPr lang="en-US" sz="1667" dirty="0"/>
           </a:p>
         </p:txBody>
       </p:sp>
@@ -7338,8 +8869,8 @@
         </p:nvSpPr>
         <p:spPr>
           <a:xfrm>
-            <a:off x="4983480" y="2999232"/>
-            <a:ext cx="3401568" cy="868680"/>
+            <a:off x="6644640" y="3777386"/>
+            <a:ext cx="4535424" cy="1042416"/>
           </a:xfrm>
           <a:prstGeom prst="rect">
             <a:avLst/>
@@ -7355,17 +8886,17 @@
               <a:buNone/>
             </a:pPr>
             <a:r>
-              <a:rPr lang="en-US" sz="1200" dirty="0">
-                <a:solidFill>
-                  <a:srgbClr val="5F6A85"/>
-                </a:solidFill>
-                <a:latin typeface="Calibri" pitchFamily="34" charset="0"/>
-                <a:ea typeface="Calibri" pitchFamily="34" charset="-122"/>
-                <a:cs typeface="Calibri" pitchFamily="34" charset="-120"/>
+              <a:rPr lang="en-US" sz="1600" dirty="0">
+                <a:solidFill>
+                  <a:srgbClr val="595959"/>
+                </a:solidFill>
+                <a:latin typeface="Roboto" pitchFamily="34" charset="0"/>
+                <a:ea typeface="Roboto" pitchFamily="34" charset="-122"/>
+                <a:cs typeface="Roboto" pitchFamily="34" charset="-120"/>
               </a:rPr>
               <a:t>Öffnet das aktuelle Linux-Verzeichnis im Windows-Explorer. Auch VS Code verbindet sich direkt in die Distribution.</a:t>
             </a:r>
-            <a:endParaRPr lang="en-US" sz="1200" dirty="0"/>
+            <a:endParaRPr lang="en-US" sz="1600" dirty="0"/>
           </a:p>
         </p:txBody>
       </p:sp>
@@ -7377,8 +8908,8 @@
         </p:nvSpPr>
         <p:spPr>
           <a:xfrm>
-            <a:off x="502920" y="4206240"/>
-            <a:ext cx="8138160" cy="548640"/>
+            <a:off x="670560" y="5225796"/>
+            <a:ext cx="9799320" cy="658368"/>
           </a:xfrm>
           <a:prstGeom prst="rect">
             <a:avLst/>
@@ -7394,13 +8925,13 @@
               <a:buNone/>
             </a:pPr>
             <a:r>
-              <a:rPr lang="en-US" sz="1400" b="1" dirty="0">
-                <a:solidFill>
-                  <a:srgbClr val="2E5AAC"/>
-                </a:solidFill>
-                <a:latin typeface="Calibri" pitchFamily="34" charset="0"/>
-                <a:ea typeface="Calibri" pitchFamily="34" charset="-122"/>
-                <a:cs typeface="Calibri" pitchFamily="34" charset="-120"/>
+              <a:rPr lang="en-US" sz="1867" b="1" dirty="0">
+                <a:solidFill>
+                  <a:srgbClr val="14508D"/>
+                </a:solidFill>
+                <a:latin typeface="Roboto" pitchFamily="34" charset="0"/>
+                <a:ea typeface="Roboto" pitchFamily="34" charset="-122"/>
+                <a:cs typeface="Roboto" pitchFamily="34" charset="-120"/>
               </a:rPr>
               <a:t>Für den Unterricht heißt das: </a:t>
             </a:r>
@@ -7408,17 +8939,17 @@
               <a:buNone/>
             </a:pPr>
             <a:r>
-              <a:rPr lang="en-US" sz="1400" dirty="0">
-                <a:solidFill>
-                  <a:srgbClr val="222A44"/>
-                </a:solidFill>
-                <a:latin typeface="Calibri" pitchFamily="34" charset="0"/>
-                <a:ea typeface="Calibri" pitchFamily="34" charset="-122"/>
-                <a:cs typeface="Calibri" pitchFamily="34" charset="-120"/>
+              <a:rPr lang="en-US" sz="1867" dirty="0">
+                <a:solidFill>
+                  <a:srgbClr val="1E1E1E"/>
+                </a:solidFill>
+                <a:latin typeface="Roboto" pitchFamily="34" charset="0"/>
+                <a:ea typeface="Roboto" pitchFamily="34" charset="-122"/>
+                <a:cs typeface="Roboto" pitchFamily="34" charset="-120"/>
               </a:rPr>
               <a:t>kein Datei-Hin-und-Her, kein zweiter Rechner, keine Grenze zwischen Arbeitsblatt (Windows) und Übung (Linux).</a:t>
             </a:r>
-            <a:endParaRPr lang="en-US" sz="1400" dirty="0"/>
+            <a:endParaRPr lang="en-US" sz="1867" dirty="0"/>
           </a:p>
         </p:txBody>
       </p:sp>
@@ -7433,13 +8964,6 @@
 <file path=ppt/slides/slide6.xml><?xml version="1.0" encoding="utf-8"?>
 <p:sld xmlns:a="http://schemas.openxmlformats.org/drawingml/2006/main" xmlns:r="http://schemas.openxmlformats.org/officeDocument/2006/relationships" xmlns:p="http://schemas.openxmlformats.org/presentationml/2006/main">
   <p:cSld name="Slide 6">
-    <p:bg>
-      <p:bgPr>
-        <a:solidFill>
-          <a:srgbClr val="FFFFFF"/>
-        </a:solidFill>
-      </p:bgPr>
-    </p:bg>
     <p:spTree>
       <p:nvGrpSpPr>
         <p:cNvPr id="1" name=""/>
@@ -7456,20 +8980,67 @@
       </p:grpSpPr>
       <p:sp>
         <p:nvSpPr>
+          <p:cNvPr id="9001" name="Datumsplatzhalter 9001"/>
+          <p:cNvSpPr>
+            <a:spLocks noGrp="1"/>
+          </p:cNvSpPr>
+          <p:nvPr>
+            <p:ph type="dt" sz="half" idx="2"/>
+          </p:nvPr>
+        </p:nvSpPr>
+        <p:spPr/>
+        <p:txBody>
+          <a:bodyPr/>
+          <a:lstStyle/>
+          <a:p>
+            <a:fld id="{86B4728B-49EC-AC4B-92D0-45D4091857E0}" type="datetime1">
+              <a:rPr lang="de-DE"/>
+              <a:pPr/>
+              <a:t>28.10.2026</a:t>
+            </a:fld>
+            <a:endParaRPr lang="de-DE"/>
+          </a:p>
+        </p:txBody>
+      </p:sp>
+      <p:sp>
+        <p:nvSpPr>
+          <p:cNvPr id="9002" name="Foliennummernplatzhalter 9002"/>
+          <p:cNvSpPr>
+            <a:spLocks noGrp="1"/>
+          </p:cNvSpPr>
+          <p:nvPr>
+            <p:ph type="sldNum" sz="quarter" idx="12"/>
+          </p:nvPr>
+        </p:nvSpPr>
+        <p:spPr/>
+        <p:txBody>
+          <a:bodyPr/>
+          <a:lstStyle/>
+          <a:p>
+            <a:fld id="{B7E13D07-A954-7D45-9CFC-776D35F33DC4}" type="slidenum">
+              <a:rPr lang="de-DE"/>
+              <a:t>6</a:t>
+            </a:fld>
+            <a:endParaRPr lang="de-DE"/>
+          </a:p>
+        </p:txBody>
+      </p:sp>
+      <p:sp>
+        <p:nvSpPr>
           <p:cNvPr id="2" name="Shape 0"/>
           <p:cNvSpPr/>
           <p:nvPr/>
         </p:nvSpPr>
         <p:spPr>
           <a:xfrm>
-            <a:off x="502920" y="329184"/>
-            <a:ext cx="118872" cy="118872"/>
+            <a:off x="670560" y="438912"/>
+            <a:ext cx="158496" cy="158496"/>
           </a:xfrm>
           <a:prstGeom prst="rect">
             <a:avLst/>
           </a:prstGeom>
           <a:solidFill>
-            <a:srgbClr val="FFC20E"/>
+            <a:srgbClr val="FAE55F"/>
           </a:solidFill>
           <a:ln/>
         </p:spPr>
@@ -7482,8 +9053,8 @@
         </p:nvSpPr>
         <p:spPr>
           <a:xfrm>
-            <a:off x="713232" y="292608"/>
-            <a:ext cx="7955280" cy="274320"/>
+            <a:off x="950976" y="390144"/>
+            <a:ext cx="10607040" cy="365760"/>
           </a:xfrm>
           <a:prstGeom prst="rect">
             <a:avLst/>
@@ -7499,17 +9070,17 @@
               <a:buNone/>
             </a:pPr>
             <a:r>
-              <a:rPr lang="en-US" sz="1200" b="1" spc="300" kern="0" dirty="0">
-                <a:solidFill>
-                  <a:srgbClr val="2E5AAC"/>
-                </a:solidFill>
-                <a:latin typeface="Calibri" pitchFamily="34" charset="0"/>
-                <a:ea typeface="Calibri" pitchFamily="34" charset="-122"/>
-                <a:cs typeface="Calibri" pitchFamily="34" charset="-120"/>
+              <a:rPr lang="en-US" sz="1600" b="1" spc="300" kern="0" dirty="0">
+                <a:solidFill>
+                  <a:srgbClr val="14508D"/>
+                </a:solidFill>
+                <a:latin typeface="Roboto" pitchFamily="34" charset="0"/>
+                <a:ea typeface="Roboto" pitchFamily="34" charset="-122"/>
+                <a:cs typeface="Roboto" pitchFamily="34" charset="-120"/>
               </a:rPr>
               <a:t>DEMO · DAS SCHUL-ARGUMENT</a:t>
             </a:r>
-            <a:endParaRPr lang="en-US" sz="1200" dirty="0"/>
+            <a:endParaRPr lang="en-US" sz="1600" dirty="0"/>
           </a:p>
         </p:txBody>
       </p:sp>
@@ -7521,8 +9092,8 @@
         </p:nvSpPr>
         <p:spPr>
           <a:xfrm>
-            <a:off x="502920" y="566928"/>
-            <a:ext cx="8138160" cy="685800"/>
+            <a:off x="670560" y="755904"/>
+            <a:ext cx="10850880" cy="914400"/>
           </a:xfrm>
           <a:prstGeom prst="rect">
             <a:avLst/>
@@ -7538,39 +9109,19 @@
               <a:buNone/>
             </a:pPr>
             <a:r>
-              <a:rPr lang="en-US" sz="3000" b="1" dirty="0">
-                <a:solidFill>
-                  <a:srgbClr val="222A44"/>
-                </a:solidFill>
-                <a:latin typeface="Calibri" pitchFamily="34" charset="0"/>
-                <a:ea typeface="Calibri" pitchFamily="34" charset="-122"/>
-                <a:cs typeface="Calibri" pitchFamily="34" charset="-120"/>
+              <a:rPr lang="en-US" sz="4000" b="1" dirty="0">
+                <a:solidFill>
+                  <a:srgbClr val="1E1E1E"/>
+                </a:solidFill>
+                <a:latin typeface="Roboto" pitchFamily="34" charset="0"/>
+                <a:ea typeface="Roboto" pitchFamily="34" charset="-122"/>
+                <a:cs typeface="Roboto" pitchFamily="34" charset="-120"/>
               </a:rPr>
               <a:t>Das Klassen-Image: 1 Umgebung, 30 Rechner</a:t>
             </a:r>
-            <a:endParaRPr lang="en-US" sz="3000" dirty="0"/>
-          </a:p>
-        </p:txBody>
-      </p:sp>
-      <p:sp>
-        <p:nvSpPr>
-          <p:cNvPr id="5" name="Shape 3"/>
-          <p:cNvSpPr/>
-          <p:nvPr/>
-        </p:nvSpPr>
-        <p:spPr>
-          <a:xfrm>
-            <a:off x="521208" y="1280160"/>
-            <a:ext cx="594360" cy="50292"/>
-          </a:xfrm>
-          <a:prstGeom prst="rect">
-            <a:avLst/>
-          </a:prstGeom>
-          <a:solidFill>
-            <a:srgbClr val="FFC20E"/>
-          </a:solidFill>
-          <a:ln/>
-        </p:spPr>
+            <a:endParaRPr lang="en-US" sz="4000" dirty="0"/>
+          </a:p>
+        </p:txBody>
       </p:sp>
       <p:sp>
         <p:nvSpPr>
@@ -7580,8 +9131,8 @@
         </p:nvSpPr>
         <p:spPr>
           <a:xfrm>
-            <a:off x="502920" y="1463040"/>
-            <a:ext cx="8138160" cy="1600200"/>
+            <a:off x="670560" y="1933956"/>
+            <a:ext cx="10850880" cy="1920240"/>
           </a:xfrm>
           <a:prstGeom prst="roundRect">
             <a:avLst>
@@ -7589,11 +9140,11 @@
             </a:avLst>
           </a:prstGeom>
           <a:solidFill>
-            <a:srgbClr val="1A2652"/>
+            <a:srgbClr val="1E1E1E"/>
           </a:solidFill>
           <a:ln/>
           <a:effectLst>
-            <a:outerShdw sx="100000" sy="100000" kx="0" ky="0" algn="bl" rotWithShape="0" blurRad="101600" dist="38100" dir="5400000">
+            <a:outerShdw sx="100000" sy="100000" kx="0" ky="0" algn="bl" rotWithShape="0" blurRad="135467" dist="50800" dir="5400000">
               <a:srgbClr val="000000">
                 <a:alpha val="25000"/>
               </a:srgbClr>
@@ -7609,8 +9160,8 @@
         </p:nvSpPr>
         <p:spPr>
           <a:xfrm>
-            <a:off x="630936" y="1572768"/>
-            <a:ext cx="100584" cy="100584"/>
+            <a:off x="841248" y="2058924"/>
+            <a:ext cx="134112" cy="134112"/>
           </a:xfrm>
           <a:prstGeom prst="ellipse">
             <a:avLst/>
@@ -7629,8 +9180,8 @@
         </p:nvSpPr>
         <p:spPr>
           <a:xfrm>
-            <a:off x="813816" y="1572768"/>
-            <a:ext cx="100584" cy="100584"/>
+            <a:off x="1085088" y="2058924"/>
+            <a:ext cx="134112" cy="134112"/>
           </a:xfrm>
           <a:prstGeom prst="ellipse">
             <a:avLst/>
@@ -7649,8 +9200,8 @@
         </p:nvSpPr>
         <p:spPr>
           <a:xfrm>
-            <a:off x="996696" y="1572768"/>
-            <a:ext cx="100584" cy="100584"/>
+            <a:off x="1328928" y="2058924"/>
+            <a:ext cx="134112" cy="134112"/>
           </a:xfrm>
           <a:prstGeom prst="ellipse">
             <a:avLst/>
@@ -7669,8 +9220,8 @@
         </p:nvSpPr>
         <p:spPr>
           <a:xfrm>
-            <a:off x="667512" y="1773936"/>
-            <a:ext cx="7808976" cy="1179576"/>
+            <a:off x="890016" y="2307031"/>
+            <a:ext cx="10411968" cy="1415491"/>
           </a:xfrm>
           <a:prstGeom prst="rect">
             <a:avLst/>
@@ -7684,34 +9235,34 @@
           <a:p>
             <a:pPr algn="l" indent="0" marL="0">
               <a:lnSpc>
-                <a:spcPts val="1885"/>
+                <a:spcPts val="2513"/>
               </a:lnSpc>
               <a:buNone/>
             </a:pPr>
             <a:r>
-              <a:rPr lang="en-US" sz="1300" dirty="0">
-                <a:solidFill>
-                  <a:srgbClr val="9AA7C4"/>
+              <a:rPr lang="en-US" sz="1733" dirty="0">
+                <a:solidFill>
+                  <a:srgbClr val="BADCF6"/>
                 </a:solidFill>
                 <a:latin typeface="Courier New" pitchFamily="34" charset="0"/>
                 <a:ea typeface="Courier New" pitchFamily="34" charset="-122"/>
                 <a:cs typeface="Courier New" pitchFamily="34" charset="-120"/>
               </a:rPr>
-              <a:t>REM Lehrer-PC: Muster-Instanz einfrieren</a:t>
-            </a:r>
-            <a:endParaRPr lang="en-US" sz="1300" dirty="0"/>
+              <a:t># Lehrer-PC: Muster-Instanz einfrieren</a:t>
+            </a:r>
+            <a:endParaRPr lang="en-US" sz="1733" dirty="0"/>
           </a:p>
           <a:p>
             <a:pPr algn="l" indent="0" marL="0">
               <a:lnSpc>
-                <a:spcPts val="1885"/>
+                <a:spcPts val="2513"/>
               </a:lnSpc>
               <a:buNone/>
             </a:pPr>
             <a:r>
-              <a:rPr lang="en-US" sz="1300" dirty="0">
-                <a:solidFill>
-                  <a:srgbClr val="FFC20E"/>
+              <a:rPr lang="en-US" sz="1733" dirty="0">
+                <a:solidFill>
+                  <a:srgbClr val="FAE55F"/>
                 </a:solidFill>
                 <a:latin typeface="Courier New" pitchFamily="34" charset="0"/>
                 <a:ea typeface="Courier New" pitchFamily="34" charset="-122"/>
@@ -7719,39 +9270,39 @@
               </a:rPr>
               <a:t>wsl --export Ubuntu C:\Images\fisi-uebung.tar</a:t>
             </a:r>
-            <a:endParaRPr lang="en-US" sz="1300" dirty="0"/>
+            <a:endParaRPr lang="en-US" sz="1733" dirty="0"/>
           </a:p>
           <a:p>
             <a:pPr algn="l" indent="0" marL="0">
               <a:lnSpc>
-                <a:spcPts val="1885"/>
+                <a:spcPts val="2513"/>
               </a:lnSpc>
               <a:buNone/>
             </a:pPr>
             <a:r>
-              <a:rPr lang="en-US" sz="1300" dirty="0">
-                <a:solidFill>
-                  <a:srgbClr val="9AA7C4"/>
+              <a:rPr lang="en-US" sz="1733" dirty="0">
+                <a:solidFill>
+                  <a:srgbClr val="BADCF6"/>
                 </a:solidFill>
                 <a:latin typeface="Courier New" pitchFamily="34" charset="0"/>
                 <a:ea typeface="Courier New" pitchFamily="34" charset="-122"/>
                 <a:cs typeface="Courier New" pitchFamily="34" charset="-120"/>
               </a:rPr>
-              <a:t>REM Schüler-PC: identisch ausrollen</a:t>
-            </a:r>
-            <a:endParaRPr lang="en-US" sz="1300" dirty="0"/>
+              <a:t># Schüler-PC: identisch ausrollen</a:t>
+            </a:r>
+            <a:endParaRPr lang="en-US" sz="1733" dirty="0"/>
           </a:p>
           <a:p>
             <a:pPr algn="l" indent="0" marL="0">
               <a:lnSpc>
-                <a:spcPts val="1885"/>
+                <a:spcPts val="2513"/>
               </a:lnSpc>
               <a:buNone/>
             </a:pPr>
             <a:r>
-              <a:rPr lang="en-US" sz="1300" dirty="0">
-                <a:solidFill>
-                  <a:srgbClr val="FFC20E"/>
+              <a:rPr lang="en-US" sz="1733" dirty="0">
+                <a:solidFill>
+                  <a:srgbClr val="FAE55F"/>
                 </a:solidFill>
                 <a:latin typeface="Courier New" pitchFamily="34" charset="0"/>
                 <a:ea typeface="Courier New" pitchFamily="34" charset="-122"/>
@@ -7759,7 +9310,7 @@
               </a:rPr>
               <a:t>wsl --import FISI-Uebung C:\WSL\fisi C:\Images\fisi-uebung.tar</a:t>
             </a:r>
-            <a:endParaRPr lang="en-US" sz="1300" dirty="0"/>
+            <a:endParaRPr lang="en-US" sz="1733" dirty="0"/>
           </a:p>
         </p:txBody>
       </p:sp>
@@ -7771,14 +9322,14 @@
         </p:nvSpPr>
         <p:spPr>
           <a:xfrm>
-            <a:off x="502920" y="3310128"/>
-            <a:ext cx="457200" cy="457200"/>
+            <a:off x="670560" y="4119982"/>
+            <a:ext cx="609600" cy="609600"/>
           </a:xfrm>
           <a:prstGeom prst="ellipse">
             <a:avLst/>
           </a:prstGeom>
           <a:solidFill>
-            <a:srgbClr val="EDF2FA"/>
+            <a:srgbClr val="E4F1FB"/>
           </a:solidFill>
           <a:ln/>
         </p:spPr>
@@ -7799,8 +9350,8 @@
         </p:blipFill>
         <p:spPr>
           <a:xfrm>
-            <a:off x="603504" y="3410712"/>
-            <a:ext cx="256032" cy="256032"/>
+            <a:off x="804672" y="4254094"/>
+            <a:ext cx="341376" cy="341376"/>
           </a:xfrm>
           <a:prstGeom prst="rect">
             <a:avLst/>
@@ -7815,8 +9366,8 @@
         </p:nvSpPr>
         <p:spPr>
           <a:xfrm>
-            <a:off x="502920" y="3886200"/>
-            <a:ext cx="2606040" cy="1005840"/>
+            <a:off x="670560" y="4841748"/>
+            <a:ext cx="3474720" cy="1207008"/>
           </a:xfrm>
           <a:prstGeom prst="rect">
             <a:avLst/>
@@ -7832,17 +9383,17 @@
               <a:buNone/>
             </a:pPr>
             <a:r>
-              <a:rPr lang="en-US" sz="1150" dirty="0">
-                <a:solidFill>
-                  <a:srgbClr val="222A44"/>
-                </a:solidFill>
-                <a:latin typeface="Calibri" pitchFamily="34" charset="0"/>
-                <a:ea typeface="Calibri" pitchFamily="34" charset="-122"/>
-                <a:cs typeface="Calibri" pitchFamily="34" charset="-120"/>
+              <a:rPr lang="en-US" sz="1533" dirty="0">
+                <a:solidFill>
+                  <a:srgbClr val="1E1E1E"/>
+                </a:solidFill>
+                <a:latin typeface="Roboto" pitchFamily="34" charset="0"/>
+                <a:ea typeface="Roboto" pitchFamily="34" charset="-122"/>
+                <a:cs typeface="Roboto" pitchFamily="34" charset="-120"/>
               </a:rPr>
               <a:t>Einmal vorbereiten: Benutzer, Pakete, Übungsdateien, Startzustand der Lernsituation</a:t>
             </a:r>
-            <a:endParaRPr lang="en-US" sz="1150" dirty="0"/>
+            <a:endParaRPr lang="en-US" sz="1533" dirty="0"/>
           </a:p>
         </p:txBody>
       </p:sp>
@@ -7854,14 +9405,14 @@
         </p:nvSpPr>
         <p:spPr>
           <a:xfrm>
-            <a:off x="3300984" y="3310128"/>
-            <a:ext cx="457200" cy="457200"/>
+            <a:off x="4401312" y="4119982"/>
+            <a:ext cx="609600" cy="609600"/>
           </a:xfrm>
           <a:prstGeom prst="ellipse">
             <a:avLst/>
           </a:prstGeom>
           <a:solidFill>
-            <a:srgbClr val="EDF2FA"/>
+            <a:srgbClr val="E4F1FB"/>
           </a:solidFill>
           <a:ln/>
         </p:spPr>
@@ -7882,8 +9433,8 @@
         </p:blipFill>
         <p:spPr>
           <a:xfrm>
-            <a:off x="3401568" y="3410712"/>
-            <a:ext cx="256032" cy="256032"/>
+            <a:off x="4535424" y="4254094"/>
+            <a:ext cx="341376" cy="341376"/>
           </a:xfrm>
           <a:prstGeom prst="rect">
             <a:avLst/>
@@ -7898,8 +9449,8 @@
         </p:nvSpPr>
         <p:spPr>
           <a:xfrm>
-            <a:off x="3300984" y="3886200"/>
-            <a:ext cx="2606040" cy="1005840"/>
+            <a:off x="4401312" y="4841748"/>
+            <a:ext cx="3474720" cy="1207008"/>
           </a:xfrm>
           <a:prstGeom prst="rect">
             <a:avLst/>
@@ -7915,17 +9466,17 @@
               <a:buNone/>
             </a:pPr>
             <a:r>
-              <a:rPr lang="en-US" sz="1150" dirty="0">
-                <a:solidFill>
-                  <a:srgbClr val="222A44"/>
-                </a:solidFill>
-                <a:latin typeface="Calibri" pitchFamily="34" charset="0"/>
-                <a:ea typeface="Calibri" pitchFamily="34" charset="-122"/>
-                <a:cs typeface="Calibri" pitchFamily="34" charset="-120"/>
+              <a:rPr lang="en-US" sz="1533" dirty="0">
+                <a:solidFill>
+                  <a:srgbClr val="1E1E1E"/>
+                </a:solidFill>
+                <a:latin typeface="Roboto" pitchFamily="34" charset="0"/>
+                <a:ea typeface="Roboto" pitchFamily="34" charset="-122"/>
+                <a:cs typeface="Roboto" pitchFamily="34" charset="-120"/>
               </a:rPr>
               <a:t>Als eine Datei verteilen: Netzlaufwerk, USB oder Softwareverteilung</a:t>
             </a:r>
-            <a:endParaRPr lang="en-US" sz="1150" dirty="0"/>
+            <a:endParaRPr lang="en-US" sz="1533" dirty="0"/>
           </a:p>
         </p:txBody>
       </p:sp>
@@ -7937,14 +9488,14 @@
         </p:nvSpPr>
         <p:spPr>
           <a:xfrm>
-            <a:off x="6099048" y="3310128"/>
-            <a:ext cx="457200" cy="457200"/>
+            <a:off x="8132064" y="4119982"/>
+            <a:ext cx="609600" cy="609600"/>
           </a:xfrm>
           <a:prstGeom prst="ellipse">
             <a:avLst/>
           </a:prstGeom>
           <a:solidFill>
-            <a:srgbClr val="EDF2FA"/>
+            <a:srgbClr val="E4F1FB"/>
           </a:solidFill>
           <a:ln/>
         </p:spPr>
@@ -7965,8 +9516,8 @@
         </p:blipFill>
         <p:spPr>
           <a:xfrm>
-            <a:off x="6199632" y="3410712"/>
-            <a:ext cx="256032" cy="256032"/>
+            <a:off x="8266176" y="4254094"/>
+            <a:ext cx="341376" cy="341376"/>
           </a:xfrm>
           <a:prstGeom prst="rect">
             <a:avLst/>
@@ -7981,8 +9532,8 @@
         </p:nvSpPr>
         <p:spPr>
           <a:xfrm>
-            <a:off x="6099048" y="3886200"/>
-            <a:ext cx="2606040" cy="1005840"/>
+            <a:off x="8132064" y="4841748"/>
+            <a:ext cx="3474720" cy="1207008"/>
           </a:xfrm>
           <a:prstGeom prst="rect">
             <a:avLst/>
@@ -7998,17 +9549,17 @@
               <a:buNone/>
             </a:pPr>
             <a:r>
-              <a:rPr lang="en-US" sz="1150" dirty="0">
-                <a:solidFill>
-                  <a:srgbClr val="222A44"/>
-                </a:solidFill>
-                <a:latin typeface="Calibri" pitchFamily="34" charset="0"/>
-                <a:ea typeface="Calibri" pitchFamily="34" charset="-122"/>
-                <a:cs typeface="Calibri" pitchFamily="34" charset="-120"/>
+              <a:rPr lang="en-US" sz="1533" dirty="0">
+                <a:solidFill>
+                  <a:srgbClr val="1E1E1E"/>
+                </a:solidFill>
+                <a:latin typeface="Roboto" pitchFamily="34" charset="0"/>
+                <a:ea typeface="Roboto" pitchFamily="34" charset="-122"/>
+                <a:cs typeface="Roboto" pitchFamily="34" charset="-120"/>
               </a:rPr>
               <a:t>Nach der Stunde: Instanz verwerfen, nächstes Mal frisch importieren – immer identischer Zustand</a:t>
             </a:r>
-            <a:endParaRPr lang="en-US" sz="1150" dirty="0"/>
+            <a:endParaRPr lang="en-US" sz="1533" dirty="0"/>
           </a:p>
         </p:txBody>
       </p:sp>
@@ -8023,13 +9574,6 @@
 <file path=ppt/slides/slide7.xml><?xml version="1.0" encoding="utf-8"?>
 <p:sld xmlns:a="http://schemas.openxmlformats.org/drawingml/2006/main" xmlns:r="http://schemas.openxmlformats.org/officeDocument/2006/relationships" xmlns:p="http://schemas.openxmlformats.org/presentationml/2006/main">
   <p:cSld name="Slide 7">
-    <p:bg>
-      <p:bgPr>
-        <a:solidFill>
-          <a:srgbClr val="FFFFFF"/>
-        </a:solidFill>
-      </p:bgPr>
-    </p:bg>
     <p:spTree>
       <p:nvGrpSpPr>
         <p:cNvPr id="1" name=""/>
@@ -8046,20 +9590,67 @@
       </p:grpSpPr>
       <p:sp>
         <p:nvSpPr>
+          <p:cNvPr id="9001" name="Datumsplatzhalter 9001"/>
+          <p:cNvSpPr>
+            <a:spLocks noGrp="1"/>
+          </p:cNvSpPr>
+          <p:nvPr>
+            <p:ph type="dt" sz="half" idx="2"/>
+          </p:nvPr>
+        </p:nvSpPr>
+        <p:spPr/>
+        <p:txBody>
+          <a:bodyPr/>
+          <a:lstStyle/>
+          <a:p>
+            <a:fld id="{86B4728B-49EC-AC4B-92D0-45D4091857E0}" type="datetime1">
+              <a:rPr lang="de-DE"/>
+              <a:pPr/>
+              <a:t>28.10.2026</a:t>
+            </a:fld>
+            <a:endParaRPr lang="de-DE"/>
+          </a:p>
+        </p:txBody>
+      </p:sp>
+      <p:sp>
+        <p:nvSpPr>
+          <p:cNvPr id="9002" name="Foliennummernplatzhalter 9002"/>
+          <p:cNvSpPr>
+            <a:spLocks noGrp="1"/>
+          </p:cNvSpPr>
+          <p:nvPr>
+            <p:ph type="sldNum" sz="quarter" idx="12"/>
+          </p:nvPr>
+        </p:nvSpPr>
+        <p:spPr/>
+        <p:txBody>
+          <a:bodyPr/>
+          <a:lstStyle/>
+          <a:p>
+            <a:fld id="{B7E13D07-A954-7D45-9CFC-776D35F33DC4}" type="slidenum">
+              <a:rPr lang="de-DE"/>
+              <a:t>7</a:t>
+            </a:fld>
+            <a:endParaRPr lang="de-DE"/>
+          </a:p>
+        </p:txBody>
+      </p:sp>
+      <p:sp>
+        <p:nvSpPr>
           <p:cNvPr id="2" name="Shape 0"/>
           <p:cNvSpPr/>
           <p:nvPr/>
         </p:nvSpPr>
         <p:spPr>
           <a:xfrm>
-            <a:off x="502920" y="329184"/>
-            <a:ext cx="118872" cy="118872"/>
+            <a:off x="670560" y="438912"/>
+            <a:ext cx="158496" cy="158496"/>
           </a:xfrm>
           <a:prstGeom prst="rect">
             <a:avLst/>
           </a:prstGeom>
           <a:solidFill>
-            <a:srgbClr val="FFC20E"/>
+            <a:srgbClr val="FAE55F"/>
           </a:solidFill>
           <a:ln/>
         </p:spPr>
@@ -8072,8 +9663,8 @@
         </p:nvSpPr>
         <p:spPr>
           <a:xfrm>
-            <a:off x="713232" y="292608"/>
-            <a:ext cx="7955280" cy="274320"/>
+            <a:off x="950976" y="390144"/>
+            <a:ext cx="10607040" cy="365760"/>
           </a:xfrm>
           <a:prstGeom prst="rect">
             <a:avLst/>
@@ -8089,17 +9680,17 @@
               <a:buNone/>
             </a:pPr>
             <a:r>
-              <a:rPr lang="en-US" sz="1200" b="1" spc="300" kern="0" dirty="0">
-                <a:solidFill>
-                  <a:srgbClr val="2E5AAC"/>
-                </a:solidFill>
-                <a:latin typeface="Calibri" pitchFamily="34" charset="0"/>
-                <a:ea typeface="Calibri" pitchFamily="34" charset="-122"/>
-                <a:cs typeface="Calibri" pitchFamily="34" charset="-120"/>
+              <a:rPr lang="en-US" sz="1600" b="1" spc="300" kern="0" dirty="0">
+                <a:solidFill>
+                  <a:srgbClr val="14508D"/>
+                </a:solidFill>
+                <a:latin typeface="Roboto" pitchFamily="34" charset="0"/>
+                <a:ea typeface="Roboto" pitchFamily="34" charset="-122"/>
+                <a:cs typeface="Roboto" pitchFamily="34" charset="-120"/>
               </a:rPr>
               <a:t>DEMO · EHRLICHKEIT MUSS SEIN</a:t>
             </a:r>
-            <a:endParaRPr lang="en-US" sz="1200" dirty="0"/>
+            <a:endParaRPr lang="en-US" sz="1600" dirty="0"/>
           </a:p>
         </p:txBody>
       </p:sp>
@@ -8111,8 +9702,8 @@
         </p:nvSpPr>
         <p:spPr>
           <a:xfrm>
-            <a:off x="502920" y="566928"/>
-            <a:ext cx="8138160" cy="685800"/>
+            <a:off x="670560" y="755904"/>
+            <a:ext cx="10850880" cy="914400"/>
           </a:xfrm>
           <a:prstGeom prst="rect">
             <a:avLst/>
@@ -8128,39 +9719,19 @@
               <a:buNone/>
             </a:pPr>
             <a:r>
-              <a:rPr lang="en-US" sz="3000" b="1" dirty="0">
-                <a:solidFill>
-                  <a:srgbClr val="222A44"/>
-                </a:solidFill>
-                <a:latin typeface="Calibri" pitchFamily="34" charset="0"/>
-                <a:ea typeface="Calibri" pitchFamily="34" charset="-122"/>
-                <a:cs typeface="Calibri" pitchFamily="34" charset="-120"/>
+              <a:rPr lang="en-US" sz="4000" b="1" dirty="0">
+                <a:solidFill>
+                  <a:srgbClr val="1E1E1E"/>
+                </a:solidFill>
+                <a:latin typeface="Roboto" pitchFamily="34" charset="0"/>
+                <a:ea typeface="Roboto" pitchFamily="34" charset="-122"/>
+                <a:cs typeface="Roboto" pitchFamily="34" charset="-120"/>
               </a:rPr>
               <a:t>Die typischen Stolperstellen an Schulen</a:t>
             </a:r>
-            <a:endParaRPr lang="en-US" sz="3000" dirty="0"/>
-          </a:p>
-        </p:txBody>
-      </p:sp>
-      <p:sp>
-        <p:nvSpPr>
-          <p:cNvPr id="5" name="Shape 3"/>
-          <p:cNvSpPr/>
-          <p:nvPr/>
-        </p:nvSpPr>
-        <p:spPr>
-          <a:xfrm>
-            <a:off x="521208" y="1280160"/>
-            <a:ext cx="594360" cy="50292"/>
-          </a:xfrm>
-          <a:prstGeom prst="rect">
-            <a:avLst/>
-          </a:prstGeom>
-          <a:solidFill>
-            <a:srgbClr val="FFC20E"/>
-          </a:solidFill>
-          <a:ln/>
-        </p:spPr>
+            <a:endParaRPr lang="en-US" sz="4000" dirty="0"/>
+          </a:p>
+        </p:txBody>
       </p:sp>
       <p:sp>
         <p:nvSpPr>
@@ -8170,8 +9741,8 @@
         </p:nvSpPr>
         <p:spPr>
           <a:xfrm>
-            <a:off x="502920" y="1463040"/>
-            <a:ext cx="3913632" cy="1207008"/>
+            <a:off x="670560" y="1933956"/>
+            <a:ext cx="5218176" cy="1448409"/>
           </a:xfrm>
           <a:prstGeom prst="roundRect">
             <a:avLst>
@@ -8179,7 +9750,7 @@
             </a:avLst>
           </a:prstGeom>
           <a:solidFill>
-            <a:srgbClr val="FDECEE"/>
+            <a:srgbClr val="F4E6EC"/>
           </a:solidFill>
           <a:ln/>
         </p:spPr>
@@ -8200,8 +9771,8 @@
         </p:blipFill>
         <p:spPr>
           <a:xfrm>
-            <a:off x="704088" y="1645920"/>
-            <a:ext cx="274320" cy="274320"/>
+            <a:off x="938784" y="2135125"/>
+            <a:ext cx="365760" cy="365760"/>
           </a:xfrm>
           <a:prstGeom prst="rect">
             <a:avLst/>
@@ -8216,8 +9787,8 @@
         </p:nvSpPr>
         <p:spPr>
           <a:xfrm>
-            <a:off x="1124712" y="1591056"/>
-            <a:ext cx="3154680" cy="365760"/>
+            <a:off x="1499616" y="2087575"/>
+            <a:ext cx="4206240" cy="438912"/>
           </a:xfrm>
           <a:prstGeom prst="rect">
             <a:avLst/>
@@ -8233,17 +9804,17 @@
               <a:buNone/>
             </a:pPr>
             <a:r>
-              <a:rPr lang="en-US" sz="1350" b="1" dirty="0">
-                <a:solidFill>
-                  <a:srgbClr val="222A44"/>
-                </a:solidFill>
-                <a:latin typeface="Calibri" pitchFamily="34" charset="0"/>
-                <a:ea typeface="Calibri" pitchFamily="34" charset="-122"/>
-                <a:cs typeface="Calibri" pitchFamily="34" charset="-120"/>
+              <a:rPr lang="en-US" sz="1800" b="1" dirty="0">
+                <a:solidFill>
+                  <a:srgbClr val="1E1E1E"/>
+                </a:solidFill>
+                <a:latin typeface="Roboto" pitchFamily="34" charset="0"/>
+                <a:ea typeface="Roboto" pitchFamily="34" charset="-122"/>
+                <a:cs typeface="Roboto" pitchFamily="34" charset="-120"/>
               </a:rPr>
               <a:t>Keine Admin-Rechte auf Dienstgeräten</a:t>
             </a:r>
-            <a:endParaRPr lang="en-US" sz="1350" dirty="0"/>
+            <a:endParaRPr lang="en-US" sz="1800" dirty="0"/>
           </a:p>
         </p:txBody>
       </p:sp>
@@ -8255,8 +9826,8 @@
         </p:nvSpPr>
         <p:spPr>
           <a:xfrm>
-            <a:off x="1124712" y="1956816"/>
-            <a:ext cx="3154680" cy="640080"/>
+            <a:off x="1499616" y="2526487"/>
+            <a:ext cx="4206240" cy="768096"/>
           </a:xfrm>
           <a:prstGeom prst="rect">
             <a:avLst/>
@@ -8272,17 +9843,17 @@
               <a:buNone/>
             </a:pPr>
             <a:r>
-              <a:rPr lang="en-US" sz="1100" dirty="0">
-                <a:solidFill>
-                  <a:srgbClr val="5F6A85"/>
-                </a:solidFill>
-                <a:latin typeface="Calibri" pitchFamily="34" charset="0"/>
-                <a:ea typeface="Calibri" pitchFamily="34" charset="-122"/>
-                <a:cs typeface="Calibri" pitchFamily="34" charset="-120"/>
+              <a:rPr lang="en-US" sz="1467" dirty="0">
+                <a:solidFill>
+                  <a:srgbClr val="595959"/>
+                </a:solidFill>
+                <a:latin typeface="Roboto" pitchFamily="34" charset="0"/>
+                <a:ea typeface="Roboto" pitchFamily="34" charset="-122"/>
+                <a:cs typeface="Roboto" pitchFamily="34" charset="-120"/>
               </a:rPr>
               <a:t>Installation läuft über IT-Administration / Softwareverteilung – das Klassen-Image ist Ihr Argument.</a:t>
             </a:r>
-            <a:endParaRPr lang="en-US" sz="1100" dirty="0"/>
+            <a:endParaRPr lang="en-US" sz="1467" dirty="0"/>
           </a:p>
         </p:txBody>
       </p:sp>
@@ -8294,8 +9865,8 @@
         </p:nvSpPr>
         <p:spPr>
           <a:xfrm>
-            <a:off x="4727448" y="1463040"/>
-            <a:ext cx="3913632" cy="1207008"/>
+            <a:off x="6303264" y="1933956"/>
+            <a:ext cx="5218176" cy="1448409"/>
           </a:xfrm>
           <a:prstGeom prst="roundRect">
             <a:avLst>
@@ -8303,7 +9874,7 @@
             </a:avLst>
           </a:prstGeom>
           <a:solidFill>
-            <a:srgbClr val="FDECEE"/>
+            <a:srgbClr val="F4E6EC"/>
           </a:solidFill>
           <a:ln/>
         </p:spPr>
@@ -8324,8 +9895,8 @@
         </p:blipFill>
         <p:spPr>
           <a:xfrm>
-            <a:off x="4928616" y="1645920"/>
-            <a:ext cx="274320" cy="274320"/>
+            <a:off x="6571488" y="2135125"/>
+            <a:ext cx="365760" cy="365760"/>
           </a:xfrm>
           <a:prstGeom prst="rect">
             <a:avLst/>
@@ -8340,8 +9911,8 @@
         </p:nvSpPr>
         <p:spPr>
           <a:xfrm>
-            <a:off x="5349240" y="1591056"/>
-            <a:ext cx="3154680" cy="365760"/>
+            <a:off x="7132320" y="2087575"/>
+            <a:ext cx="4206240" cy="438912"/>
           </a:xfrm>
           <a:prstGeom prst="rect">
             <a:avLst/>
@@ -8357,17 +9928,17 @@
               <a:buNone/>
             </a:pPr>
             <a:r>
-              <a:rPr lang="en-US" sz="1350" b="1" dirty="0">
-                <a:solidFill>
-                  <a:srgbClr val="222A44"/>
-                </a:solidFill>
-                <a:latin typeface="Calibri" pitchFamily="34" charset="0"/>
-                <a:ea typeface="Calibri" pitchFamily="34" charset="-122"/>
-                <a:cs typeface="Calibri" pitchFamily="34" charset="-120"/>
+              <a:rPr lang="en-US" sz="1800" b="1" dirty="0">
+                <a:solidFill>
+                  <a:srgbClr val="1E1E1E"/>
+                </a:solidFill>
+                <a:latin typeface="Roboto" pitchFamily="34" charset="0"/>
+                <a:ea typeface="Roboto" pitchFamily="34" charset="-122"/>
+                <a:cs typeface="Roboto" pitchFamily="34" charset="-120"/>
               </a:rPr>
               <a:t>Virtualisierung im BIOS deaktiviert</a:t>
             </a:r>
-            <a:endParaRPr lang="en-US" sz="1350" dirty="0"/>
+            <a:endParaRPr lang="en-US" sz="1800" dirty="0"/>
           </a:p>
         </p:txBody>
       </p:sp>
@@ -8379,8 +9950,8 @@
         </p:nvSpPr>
         <p:spPr>
           <a:xfrm>
-            <a:off x="5349240" y="1956816"/>
-            <a:ext cx="3154680" cy="640080"/>
+            <a:off x="7132320" y="2526487"/>
+            <a:ext cx="4206240" cy="768096"/>
           </a:xfrm>
           <a:prstGeom prst="rect">
             <a:avLst/>
@@ -8396,17 +9967,17 @@
               <a:buNone/>
             </a:pPr>
             <a:r>
-              <a:rPr lang="en-US" sz="1100" dirty="0">
-                <a:solidFill>
-                  <a:srgbClr val="5F6A85"/>
-                </a:solidFill>
-                <a:latin typeface="Calibri" pitchFamily="34" charset="0"/>
-                <a:ea typeface="Calibri" pitchFamily="34" charset="-122"/>
-                <a:cs typeface="Calibri" pitchFamily="34" charset="-120"/>
+              <a:rPr lang="en-US" sz="1467" dirty="0">
+                <a:solidFill>
+                  <a:srgbClr val="595959"/>
+                </a:solidFill>
+                <a:latin typeface="Roboto" pitchFamily="34" charset="0"/>
+                <a:ea typeface="Roboto" pitchFamily="34" charset="-122"/>
+                <a:cs typeface="Roboto" pitchFamily="34" charset="-120"/>
               </a:rPr>
               <a:t>Intel VT-x / AMD-V muss aktiv sein; Fehlermeldung erscheint erst beim ersten Start.</a:t>
             </a:r>
-            <a:endParaRPr lang="en-US" sz="1100" dirty="0"/>
+            <a:endParaRPr lang="en-US" sz="1467" dirty="0"/>
           </a:p>
         </p:txBody>
       </p:sp>
@@ -8418,8 +9989,8 @@
         </p:nvSpPr>
         <p:spPr>
           <a:xfrm>
-            <a:off x="502920" y="2834640"/>
-            <a:ext cx="3913632" cy="1207008"/>
+            <a:off x="670560" y="3579876"/>
+            <a:ext cx="5218176" cy="1448409"/>
           </a:xfrm>
           <a:prstGeom prst="roundRect">
             <a:avLst>
@@ -8427,7 +9998,7 @@
             </a:avLst>
           </a:prstGeom>
           <a:solidFill>
-            <a:srgbClr val="FDECEE"/>
+            <a:srgbClr val="F4E6EC"/>
           </a:solidFill>
           <a:ln/>
         </p:spPr>
@@ -8448,8 +10019,8 @@
         </p:blipFill>
         <p:spPr>
           <a:xfrm>
-            <a:off x="704088" y="3017520"/>
-            <a:ext cx="274320" cy="274320"/>
+            <a:off x="938784" y="3781045"/>
+            <a:ext cx="365760" cy="365760"/>
           </a:xfrm>
           <a:prstGeom prst="rect">
             <a:avLst/>
@@ -8464,8 +10035,8 @@
         </p:nvSpPr>
         <p:spPr>
           <a:xfrm>
-            <a:off x="1124712" y="2962656"/>
-            <a:ext cx="3154680" cy="365760"/>
+            <a:off x="1499616" y="3733495"/>
+            <a:ext cx="4206240" cy="438912"/>
           </a:xfrm>
           <a:prstGeom prst="rect">
             <a:avLst/>
@@ -8481,17 +10052,17 @@
               <a:buNone/>
             </a:pPr>
             <a:r>
-              <a:rPr lang="en-US" sz="1350" b="1" dirty="0">
-                <a:solidFill>
-                  <a:srgbClr val="222A44"/>
-                </a:solidFill>
-                <a:latin typeface="Calibri" pitchFamily="34" charset="0"/>
-                <a:ea typeface="Calibri" pitchFamily="34" charset="-122"/>
-                <a:cs typeface="Calibri" pitchFamily="34" charset="-120"/>
+              <a:rPr lang="en-US" sz="1800" b="1" dirty="0">
+                <a:solidFill>
+                  <a:srgbClr val="1E1E1E"/>
+                </a:solidFill>
+                <a:latin typeface="Roboto" pitchFamily="34" charset="0"/>
+                <a:ea typeface="Roboto" pitchFamily="34" charset="-122"/>
+                <a:cs typeface="Roboto" pitchFamily="34" charset="-120"/>
               </a:rPr>
               <a:t>Gruppenrichtlinien &amp; AppLocker</a:t>
             </a:r>
-            <a:endParaRPr lang="en-US" sz="1350" dirty="0"/>
+            <a:endParaRPr lang="en-US" sz="1800" dirty="0"/>
           </a:p>
         </p:txBody>
       </p:sp>
@@ -8503,8 +10074,8 @@
         </p:nvSpPr>
         <p:spPr>
           <a:xfrm>
-            <a:off x="1124712" y="3328416"/>
-            <a:ext cx="3154680" cy="640080"/>
+            <a:off x="1499616" y="4172407"/>
+            <a:ext cx="4206240" cy="768096"/>
           </a:xfrm>
           <a:prstGeom prst="rect">
             <a:avLst/>
@@ -8520,17 +10091,17 @@
               <a:buNone/>
             </a:pPr>
             <a:r>
-              <a:rPr lang="en-US" sz="1100" dirty="0">
-                <a:solidFill>
-                  <a:srgbClr val="5F6A85"/>
-                </a:solidFill>
-                <a:latin typeface="Calibri" pitchFamily="34" charset="0"/>
-                <a:ea typeface="Calibri" pitchFamily="34" charset="-122"/>
-                <a:cs typeface="Calibri" pitchFamily="34" charset="-120"/>
+              <a:rPr lang="en-US" sz="1467" dirty="0">
+                <a:solidFill>
+                  <a:srgbClr val="595959"/>
+                </a:solidFill>
+                <a:latin typeface="Roboto" pitchFamily="34" charset="0"/>
+                <a:ea typeface="Roboto" pitchFamily="34" charset="-122"/>
+                <a:cs typeface="Roboto" pitchFamily="34" charset="-120"/>
               </a:rPr>
               <a:t>Manche Schulträger blockieren optionale Windows-Features – früh mit dem Dienstleister klären.</a:t>
             </a:r>
-            <a:endParaRPr lang="en-US" sz="1100" dirty="0"/>
+            <a:endParaRPr lang="en-US" sz="1467" dirty="0"/>
           </a:p>
         </p:txBody>
       </p:sp>
@@ -8542,8 +10113,8 @@
         </p:nvSpPr>
         <p:spPr>
           <a:xfrm>
-            <a:off x="4727448" y="2834640"/>
-            <a:ext cx="3913632" cy="1207008"/>
+            <a:off x="6303264" y="3579876"/>
+            <a:ext cx="5218176" cy="1448409"/>
           </a:xfrm>
           <a:prstGeom prst="roundRect">
             <a:avLst>
@@ -8551,7 +10122,7 @@
             </a:avLst>
           </a:prstGeom>
           <a:solidFill>
-            <a:srgbClr val="FDECEE"/>
+            <a:srgbClr val="F4E6EC"/>
           </a:solidFill>
           <a:ln/>
         </p:spPr>
@@ -8572,8 +10143,8 @@
         </p:blipFill>
         <p:spPr>
           <a:xfrm>
-            <a:off x="4928616" y="3017520"/>
-            <a:ext cx="274320" cy="274320"/>
+            <a:off x="6571488" y="3781045"/>
+            <a:ext cx="365760" cy="365760"/>
           </a:xfrm>
           <a:prstGeom prst="rect">
             <a:avLst/>
@@ -8588,8 +10159,8 @@
         </p:nvSpPr>
         <p:spPr>
           <a:xfrm>
-            <a:off x="5349240" y="2962656"/>
-            <a:ext cx="3154680" cy="365760"/>
+            <a:off x="7132320" y="3733495"/>
+            <a:ext cx="4206240" cy="438912"/>
           </a:xfrm>
           <a:prstGeom prst="rect">
             <a:avLst/>
@@ -8605,17 +10176,17 @@
               <a:buNone/>
             </a:pPr>
             <a:r>
-              <a:rPr lang="en-US" sz="1350" b="1" dirty="0">
-                <a:solidFill>
-                  <a:srgbClr val="222A44"/>
-                </a:solidFill>
-                <a:latin typeface="Calibri" pitchFamily="34" charset="0"/>
-                <a:ea typeface="Calibri" pitchFamily="34" charset="-122"/>
-                <a:cs typeface="Calibri" pitchFamily="34" charset="-120"/>
+              <a:rPr lang="en-US" sz="1800" b="1" dirty="0">
+                <a:solidFill>
+                  <a:srgbClr val="1E1E1E"/>
+                </a:solidFill>
+                <a:latin typeface="Roboto" pitchFamily="34" charset="0"/>
+                <a:ea typeface="Roboto" pitchFamily="34" charset="-122"/>
+                <a:cs typeface="Roboto" pitchFamily="34" charset="-120"/>
               </a:rPr>
               <a:t>Windows 10 ohne Support</a:t>
             </a:r>
-            <a:endParaRPr lang="en-US" sz="1350" dirty="0"/>
+            <a:endParaRPr lang="en-US" sz="1800" dirty="0"/>
           </a:p>
         </p:txBody>
       </p:sp>
@@ -8627,8 +10198,8 @@
         </p:nvSpPr>
         <p:spPr>
           <a:xfrm>
-            <a:off x="5349240" y="3328416"/>
-            <a:ext cx="3154680" cy="640080"/>
+            <a:off x="7132320" y="4172407"/>
+            <a:ext cx="4206240" cy="768096"/>
           </a:xfrm>
           <a:prstGeom prst="rect">
             <a:avLst/>
@@ -8644,17 +10215,17 @@
               <a:buNone/>
             </a:pPr>
             <a:r>
-              <a:rPr lang="en-US" sz="1100" dirty="0">
-                <a:solidFill>
-                  <a:srgbClr val="5F6A85"/>
-                </a:solidFill>
-                <a:latin typeface="Calibri" pitchFamily="34" charset="0"/>
-                <a:ea typeface="Calibri" pitchFamily="34" charset="-122"/>
-                <a:cs typeface="Calibri" pitchFamily="34" charset="-120"/>
+              <a:rPr lang="en-US" sz="1467" dirty="0">
+                <a:solidFill>
+                  <a:srgbClr val="595959"/>
+                </a:solidFill>
+                <a:latin typeface="Roboto" pitchFamily="34" charset="0"/>
+                <a:ea typeface="Roboto" pitchFamily="34" charset="-122"/>
+                <a:cs typeface="Roboto" pitchFamily="34" charset="-120"/>
               </a:rPr>
               <a:t>WSL2 läuft dort weiter, aber seit Okt. 2025 keine Sicherheitsupdates – Windows 11 einplanen.</a:t>
             </a:r>
-            <a:endParaRPr lang="en-US" sz="1100" dirty="0"/>
+            <a:endParaRPr lang="en-US" sz="1467" dirty="0"/>
           </a:p>
         </p:txBody>
       </p:sp>
@@ -8666,8 +10237,8 @@
         </p:nvSpPr>
         <p:spPr>
           <a:xfrm>
-            <a:off x="502920" y="4343400"/>
-            <a:ext cx="8138160" cy="457200"/>
+            <a:off x="670560" y="5390388"/>
+            <a:ext cx="9799320" cy="548640"/>
           </a:xfrm>
           <a:prstGeom prst="rect">
             <a:avLst/>
@@ -8683,13 +10254,13 @@
               <a:buNone/>
             </a:pPr>
             <a:r>
-              <a:rPr lang="en-US" sz="1400" b="1" dirty="0">
-                <a:solidFill>
-                  <a:srgbClr val="2E5AAC"/>
-                </a:solidFill>
-                <a:latin typeface="Calibri" pitchFamily="34" charset="0"/>
-                <a:ea typeface="Calibri" pitchFamily="34" charset="-122"/>
-                <a:cs typeface="Calibri" pitchFamily="34" charset="-120"/>
+              <a:rPr lang="en-US" sz="1867" b="1" dirty="0">
+                <a:solidFill>
+                  <a:srgbClr val="14508D"/>
+                </a:solidFill>
+                <a:latin typeface="Roboto" pitchFamily="34" charset="0"/>
+                <a:ea typeface="Roboto" pitchFamily="34" charset="-122"/>
+                <a:cs typeface="Roboto" pitchFamily="34" charset="-120"/>
               </a:rPr>
               <a:t>Und fürs Üben braucht es all das gar nicht: </a:t>
             </a:r>
@@ -8697,17 +10268,17 @@
               <a:buNone/>
             </a:pPr>
             <a:r>
-              <a:rPr lang="en-US" sz="1400" dirty="0">
-                <a:solidFill>
-                  <a:srgbClr val="222A44"/>
-                </a:solidFill>
-                <a:latin typeface="Calibri" pitchFamily="34" charset="0"/>
-                <a:ea typeface="Calibri" pitchFamily="34" charset="-122"/>
-                <a:cs typeface="Calibri" pitchFamily="34" charset="-120"/>
+              <a:rPr lang="en-US" sz="1867" dirty="0">
+                <a:solidFill>
+                  <a:srgbClr val="1E1E1E"/>
+                </a:solidFill>
+                <a:latin typeface="Roboto" pitchFamily="34" charset="0"/>
+                <a:ea typeface="Roboto" pitchFamily="34" charset="-122"/>
+                <a:cs typeface="Roboto" pitchFamily="34" charset="-120"/>
               </a:rPr>
               <a:t>Ein gemeinsamer Linux-Server im Netz genügt – gleich arbeiten Sie selbst auf einem.</a:t>
             </a:r>
-            <a:endParaRPr lang="en-US" sz="1400" dirty="0"/>
+            <a:endParaRPr lang="en-US" sz="1867" dirty="0"/>
           </a:p>
         </p:txBody>
       </p:sp>
@@ -8722,20 +10293,6 @@
 <file path=ppt/slides/slide8.xml><?xml version="1.0" encoding="utf-8"?>
 <p:sld xmlns:a="http://schemas.openxmlformats.org/drawingml/2006/main" xmlns:r="http://schemas.openxmlformats.org/officeDocument/2006/relationships" xmlns:p="http://schemas.openxmlformats.org/presentationml/2006/main">
   <p:cSld name="Slide 8">
-    <p:bg>
-      <p:bgPr>
-        <a:blipFill dpi="0" rotWithShape="1">
-          <a:blip r:embed="rId1">
-            <a:lum/>
-          </a:blip>
-          <a:srcRect/>
-          <a:stretch>
-            <a:fillRect/>
-          </a:stretch>
-        </a:blipFill>
-        <a:effectLst/>
-      </p:bgPr>
-    </p:bg>
     <p:spTree>
       <p:nvGrpSpPr>
         <p:cNvPr id="1" name=""/>
@@ -8766,8 +10323,8 @@
         </p:blipFill>
         <p:spPr>
           <a:xfrm>
-            <a:off x="548640" y="640080"/>
-            <a:ext cx="502920" cy="502920"/>
+            <a:off x="731520" y="853440"/>
+            <a:ext cx="670560" cy="670560"/>
           </a:xfrm>
           <a:prstGeom prst="rect">
             <a:avLst/>
@@ -8782,8 +10339,8 @@
         </p:nvSpPr>
         <p:spPr>
           <a:xfrm>
-            <a:off x="502920" y="1371600"/>
-            <a:ext cx="8138160" cy="822960"/>
+            <a:off x="670560" y="1828800"/>
+            <a:ext cx="10850880" cy="1097280"/>
           </a:xfrm>
           <a:prstGeom prst="rect">
             <a:avLst/>
@@ -8799,17 +10356,17 @@
               <a:buNone/>
             </a:pPr>
             <a:r>
-              <a:rPr lang="en-US" sz="4400" b="1" dirty="0">
+              <a:rPr lang="en-US" sz="5867" b="1" dirty="0">
                 <a:solidFill>
                   <a:srgbClr val="FFFFFF"/>
                 </a:solidFill>
-                <a:latin typeface="Calibri" pitchFamily="34" charset="0"/>
-                <a:ea typeface="Calibri" pitchFamily="34" charset="-122"/>
-                <a:cs typeface="Calibri" pitchFamily="34" charset="-120"/>
+                <a:latin typeface="Roboto" pitchFamily="34" charset="0"/>
+                <a:ea typeface="Roboto" pitchFamily="34" charset="-122"/>
+                <a:cs typeface="Roboto" pitchFamily="34" charset="-120"/>
               </a:rPr>
               <a:t>Jetzt Sie.</a:t>
             </a:r>
-            <a:endParaRPr lang="en-US" sz="4400" dirty="0"/>
+            <a:endParaRPr lang="en-US" sz="5867" dirty="0"/>
           </a:p>
         </p:txBody>
       </p:sp>
@@ -8821,8 +10378,8 @@
         </p:nvSpPr>
         <p:spPr>
           <a:xfrm>
-            <a:off x="502920" y="2240280"/>
-            <a:ext cx="8138160" cy="457200"/>
+            <a:off x="670560" y="2987040"/>
+            <a:ext cx="10850880" cy="609600"/>
           </a:xfrm>
           <a:prstGeom prst="rect">
             <a:avLst/>
@@ -8838,17 +10395,17 @@
               <a:buNone/>
             </a:pPr>
             <a:r>
-              <a:rPr lang="en-US" sz="1700" dirty="0">
-                <a:solidFill>
-                  <a:srgbClr val="FFC20E"/>
-                </a:solidFill>
-                <a:latin typeface="Calibri" pitchFamily="34" charset="0"/>
-                <a:ea typeface="Calibri" pitchFamily="34" charset="-122"/>
-                <a:cs typeface="Calibri" pitchFamily="34" charset="-120"/>
+              <a:rPr lang="en-US" sz="2267" dirty="0">
+                <a:solidFill>
+                  <a:srgbClr val="FAE55F"/>
+                </a:solidFill>
+                <a:latin typeface="Roboto" pitchFamily="34" charset="0"/>
+                <a:ea typeface="Roboto" pitchFamily="34" charset="-122"/>
+                <a:cs typeface="Roboto" pitchFamily="34" charset="-120"/>
               </a:rPr>
               <a:t>Per SSH auf unseren Übungsserver – der Client steckt schon in Ihrem Windows</a:t>
             </a:r>
-            <a:endParaRPr lang="en-US" sz="1700" dirty="0"/>
+            <a:endParaRPr lang="en-US" sz="2267" dirty="0"/>
           </a:p>
         </p:txBody>
       </p:sp>
@@ -8860,8 +10417,8 @@
         </p:nvSpPr>
         <p:spPr>
           <a:xfrm>
-            <a:off x="566928" y="2926080"/>
-            <a:ext cx="384048" cy="384048"/>
+            <a:off x="755904" y="3901440"/>
+            <a:ext cx="512064" cy="512064"/>
           </a:xfrm>
           <a:prstGeom prst="rect">
             <a:avLst/>
@@ -8877,30 +10434,69 @@
               <a:buNone/>
             </a:pPr>
             <a:r>
-              <a:rPr lang="en-US" sz="2000" b="1" dirty="0">
-                <a:solidFill>
-                  <a:srgbClr val="FFC20E"/>
-                </a:solidFill>
-                <a:latin typeface="Cambria" pitchFamily="34" charset="0"/>
-                <a:ea typeface="Cambria" pitchFamily="34" charset="-122"/>
-                <a:cs typeface="Cambria" pitchFamily="34" charset="-120"/>
+              <a:rPr lang="en-US" sz="2667" b="1" dirty="0">
+                <a:solidFill>
+                  <a:srgbClr val="FAE55F"/>
+                </a:solidFill>
+                <a:latin typeface="Roboto" pitchFamily="34" charset="0"/>
+                <a:ea typeface="Roboto" pitchFamily="34" charset="-122"/>
+                <a:cs typeface="Roboto" pitchFamily="34" charset="-120"/>
               </a:rPr>
               <a:t>1</a:t>
             </a:r>
+            <a:endParaRPr lang="en-US" sz="2667" dirty="0"/>
+          </a:p>
+        </p:txBody>
+      </p:sp>
+      <p:sp>
+        <p:nvSpPr>
+          <p:cNvPr id="6" name="Text 3"/>
+          <p:cNvSpPr/>
+          <p:nvPr/>
+        </p:nvSpPr>
+        <p:spPr>
+          <a:xfrm>
+            <a:off x="1438656" y="3950208"/>
+            <a:ext cx="6949440" cy="548640"/>
+          </a:xfrm>
+          <a:prstGeom prst="rect">
+            <a:avLst/>
+          </a:prstGeom>
+          <a:noFill/>
+          <a:ln/>
+        </p:spPr>
+        <p:txBody>
+          <a:bodyPr wrap="square" lIns="0" tIns="0" rIns="0" bIns="0" rtlCol="0" anchor="ctr"/>
+          <a:lstStyle/>
+          <a:p>
+            <a:pPr indent="0" marL="0">
+              <a:buNone/>
+            </a:pPr>
+            <a:r>
+              <a:rPr lang="en-US" sz="2000" dirty="0">
+                <a:solidFill>
+                  <a:srgbClr val="FFFFFF"/>
+                </a:solidFill>
+                <a:latin typeface="Roboto" pitchFamily="34" charset="0"/>
+                <a:ea typeface="Roboto" pitchFamily="34" charset="-122"/>
+                <a:cs typeface="Roboto" pitchFamily="34" charset="-120"/>
+              </a:rPr>
+              <a:t>PowerShell öffnen – mehr braucht es nicht</a:t>
+            </a:r>
             <a:endParaRPr lang="en-US" sz="2000" dirty="0"/>
           </a:p>
         </p:txBody>
       </p:sp>
       <p:sp>
         <p:nvSpPr>
-          <p:cNvPr id="6" name="Text 3"/>
-          <p:cNvSpPr/>
-          <p:nvPr/>
-        </p:nvSpPr>
-        <p:spPr>
-          <a:xfrm>
-            <a:off x="1078992" y="2962656"/>
-            <a:ext cx="5212080" cy="411480"/>
+          <p:cNvPr id="7" name="Text 4"/>
+          <p:cNvSpPr/>
+          <p:nvPr/>
+        </p:nvSpPr>
+        <p:spPr>
+          <a:xfrm>
+            <a:off x="755904" y="4657344"/>
+            <a:ext cx="512064" cy="512064"/>
           </a:xfrm>
           <a:prstGeom prst="rect">
             <a:avLst/>
@@ -8912,34 +10508,73 @@
           <a:bodyPr wrap="square" lIns="0" tIns="0" rIns="0" bIns="0" rtlCol="0" anchor="ctr"/>
           <a:lstStyle/>
           <a:p>
+            <a:pPr algn="ctr" indent="0" marL="0">
+              <a:buNone/>
+            </a:pPr>
+            <a:r>
+              <a:rPr lang="en-US" sz="2667" b="1" dirty="0">
+                <a:solidFill>
+                  <a:srgbClr val="FAE55F"/>
+                </a:solidFill>
+                <a:latin typeface="Roboto" pitchFamily="34" charset="0"/>
+                <a:ea typeface="Roboto" pitchFamily="34" charset="-122"/>
+                <a:cs typeface="Roboto" pitchFamily="34" charset="-120"/>
+              </a:rPr>
+              <a:t>2</a:t>
+            </a:r>
+            <a:endParaRPr lang="en-US" sz="2667" dirty="0"/>
+          </a:p>
+        </p:txBody>
+      </p:sp>
+      <p:sp>
+        <p:nvSpPr>
+          <p:cNvPr id="8" name="Text 5"/>
+          <p:cNvSpPr/>
+          <p:nvPr/>
+        </p:nvSpPr>
+        <p:spPr>
+          <a:xfrm>
+            <a:off x="1438656" y="4706112"/>
+            <a:ext cx="6949440" cy="548640"/>
+          </a:xfrm>
+          <a:prstGeom prst="rect">
+            <a:avLst/>
+          </a:prstGeom>
+          <a:noFill/>
+          <a:ln/>
+        </p:spPr>
+        <p:txBody>
+          <a:bodyPr wrap="square" lIns="0" tIns="0" rIns="0" bIns="0" rtlCol="0" anchor="ctr"/>
+          <a:lstStyle/>
+          <a:p>
             <a:pPr indent="0" marL="0">
               <a:buNone/>
             </a:pPr>
             <a:r>
-              <a:rPr lang="en-US" sz="1500" dirty="0">
-                <a:solidFill>
-                  <a:srgbClr val="DCE3F2"/>
-                </a:solidFill>
-                <a:latin typeface="Calibri" pitchFamily="34" charset="0"/>
-                <a:ea typeface="Calibri" pitchFamily="34" charset="-122"/>
-                <a:cs typeface="Calibri" pitchFamily="34" charset="-120"/>
-              </a:rPr>
-              <a:t>PowerShell öffnen – mehr braucht es nicht</a:t>
-            </a:r>
-            <a:endParaRPr lang="en-US" sz="1500" dirty="0"/>
-          </a:p>
-        </p:txBody>
-      </p:sp>
-      <p:sp>
-        <p:nvSpPr>
-          <p:cNvPr id="7" name="Text 4"/>
-          <p:cNvSpPr/>
-          <p:nvPr/>
-        </p:nvSpPr>
-        <p:spPr>
-          <a:xfrm>
-            <a:off x="566928" y="3493008"/>
-            <a:ext cx="384048" cy="384048"/>
+              <a:rPr lang="en-US" sz="2000" dirty="0">
+                <a:solidFill>
+                  <a:srgbClr val="FFFFFF"/>
+                </a:solidFill>
+                <a:latin typeface="Roboto" pitchFamily="34" charset="0"/>
+                <a:ea typeface="Roboto" pitchFamily="34" charset="-122"/>
+                <a:cs typeface="Roboto" pitchFamily="34" charset="-120"/>
+              </a:rPr>
+              <a:t>Mit der Team-Nummer anmelden – das Passwort bleibt unsichtbar</a:t>
+            </a:r>
+            <a:endParaRPr lang="en-US" sz="2000" dirty="0"/>
+          </a:p>
+        </p:txBody>
+      </p:sp>
+      <p:sp>
+        <p:nvSpPr>
+          <p:cNvPr id="9" name="Text 6"/>
+          <p:cNvSpPr/>
+          <p:nvPr/>
+        </p:nvSpPr>
+        <p:spPr>
+          <a:xfrm>
+            <a:off x="755904" y="5413248"/>
+            <a:ext cx="512064" cy="512064"/>
           </a:xfrm>
           <a:prstGeom prst="rect">
             <a:avLst/>
@@ -8955,15 +10590,54 @@
               <a:buNone/>
             </a:pPr>
             <a:r>
-              <a:rPr lang="en-US" sz="2000" b="1" dirty="0">
-                <a:solidFill>
-                  <a:srgbClr val="FFC20E"/>
-                </a:solidFill>
-                <a:latin typeface="Cambria" pitchFamily="34" charset="0"/>
-                <a:ea typeface="Cambria" pitchFamily="34" charset="-122"/>
-                <a:cs typeface="Cambria" pitchFamily="34" charset="-120"/>
-              </a:rPr>
-              <a:t>2</a:t>
+              <a:rPr lang="en-US" sz="2667" b="1" dirty="0">
+                <a:solidFill>
+                  <a:srgbClr val="FAE55F"/>
+                </a:solidFill>
+                <a:latin typeface="Roboto" pitchFamily="34" charset="0"/>
+                <a:ea typeface="Roboto" pitchFamily="34" charset="-122"/>
+                <a:cs typeface="Roboto" pitchFamily="34" charset="-120"/>
+              </a:rPr>
+              <a:t>3</a:t>
+            </a:r>
+            <a:endParaRPr lang="en-US" sz="2667" dirty="0"/>
+          </a:p>
+        </p:txBody>
+      </p:sp>
+      <p:sp>
+        <p:nvSpPr>
+          <p:cNvPr id="10" name="Text 7"/>
+          <p:cNvSpPr/>
+          <p:nvPr/>
+        </p:nvSpPr>
+        <p:spPr>
+          <a:xfrm>
+            <a:off x="1438656" y="5462016"/>
+            <a:ext cx="6949440" cy="548640"/>
+          </a:xfrm>
+          <a:prstGeom prst="rect">
+            <a:avLst/>
+          </a:prstGeom>
+          <a:noFill/>
+          <a:ln/>
+        </p:spPr>
+        <p:txBody>
+          <a:bodyPr wrap="square" lIns="0" tIns="0" rIns="0" bIns="0" rtlCol="0" anchor="ctr"/>
+          <a:lstStyle/>
+          <a:p>
+            <a:pPr indent="0" marL="0">
+              <a:buNone/>
+            </a:pPr>
+            <a:r>
+              <a:rPr lang="en-US" sz="2000" dirty="0">
+                <a:solidFill>
+                  <a:srgbClr val="FFFFFF"/>
+                </a:solidFill>
+                <a:latin typeface="Roboto" pitchFamily="34" charset="0"/>
+                <a:ea typeface="Roboto" pitchFamily="34" charset="-122"/>
+                <a:cs typeface="Roboto" pitchFamily="34" charset="-120"/>
+              </a:rPr>
+              <a:t>Zu zweit: eine Person tippt, eine liest vor</a:t>
             </a:r>
             <a:endParaRPr lang="en-US" sz="2000" dirty="0"/>
           </a:p>
@@ -8971,131 +10645,14 @@
       </p:sp>
       <p:sp>
         <p:nvSpPr>
-          <p:cNvPr id="8" name="Text 5"/>
-          <p:cNvSpPr/>
-          <p:nvPr/>
-        </p:nvSpPr>
-        <p:spPr>
-          <a:xfrm>
-            <a:off x="1078992" y="3529584"/>
-            <a:ext cx="5212080" cy="411480"/>
-          </a:xfrm>
-          <a:prstGeom prst="rect">
-            <a:avLst/>
-          </a:prstGeom>
-          <a:noFill/>
-          <a:ln/>
-        </p:spPr>
-        <p:txBody>
-          <a:bodyPr wrap="square" lIns="0" tIns="0" rIns="0" bIns="0" rtlCol="0" anchor="ctr"/>
-          <a:lstStyle/>
-          <a:p>
-            <a:pPr indent="0" marL="0">
-              <a:buNone/>
-            </a:pPr>
-            <a:r>
-              <a:rPr lang="en-US" sz="1500" dirty="0">
-                <a:solidFill>
-                  <a:srgbClr val="DCE3F2"/>
-                </a:solidFill>
-                <a:latin typeface="Calibri" pitchFamily="34" charset="0"/>
-                <a:ea typeface="Calibri" pitchFamily="34" charset="-122"/>
-                <a:cs typeface="Calibri" pitchFamily="34" charset="-120"/>
-              </a:rPr>
-              <a:t>Mit der Team-Nummer anmelden – das Passwort bleibt unsichtbar</a:t>
-            </a:r>
-            <a:endParaRPr lang="en-US" sz="1500" dirty="0"/>
-          </a:p>
-        </p:txBody>
-      </p:sp>
-      <p:sp>
-        <p:nvSpPr>
-          <p:cNvPr id="9" name="Text 6"/>
-          <p:cNvSpPr/>
-          <p:nvPr/>
-        </p:nvSpPr>
-        <p:spPr>
-          <a:xfrm>
-            <a:off x="566928" y="4059936"/>
-            <a:ext cx="384048" cy="384048"/>
-          </a:xfrm>
-          <a:prstGeom prst="rect">
-            <a:avLst/>
-          </a:prstGeom>
-          <a:noFill/>
-          <a:ln/>
-        </p:spPr>
-        <p:txBody>
-          <a:bodyPr wrap="square" lIns="0" tIns="0" rIns="0" bIns="0" rtlCol="0" anchor="ctr"/>
-          <a:lstStyle/>
-          <a:p>
-            <a:pPr algn="ctr" indent="0" marL="0">
-              <a:buNone/>
-            </a:pPr>
-            <a:r>
-              <a:rPr lang="en-US" sz="2000" b="1" dirty="0">
-                <a:solidFill>
-                  <a:srgbClr val="FFC20E"/>
-                </a:solidFill>
-                <a:latin typeface="Cambria" pitchFamily="34" charset="0"/>
-                <a:ea typeface="Cambria" pitchFamily="34" charset="-122"/>
-                <a:cs typeface="Cambria" pitchFamily="34" charset="-120"/>
-              </a:rPr>
-              <a:t>3</a:t>
-            </a:r>
-            <a:endParaRPr lang="en-US" sz="2000" dirty="0"/>
-          </a:p>
-        </p:txBody>
-      </p:sp>
-      <p:sp>
-        <p:nvSpPr>
-          <p:cNvPr id="10" name="Text 7"/>
-          <p:cNvSpPr/>
-          <p:nvPr/>
-        </p:nvSpPr>
-        <p:spPr>
-          <a:xfrm>
-            <a:off x="1078992" y="4096512"/>
-            <a:ext cx="5212080" cy="411480"/>
-          </a:xfrm>
-          <a:prstGeom prst="rect">
-            <a:avLst/>
-          </a:prstGeom>
-          <a:noFill/>
-          <a:ln/>
-        </p:spPr>
-        <p:txBody>
-          <a:bodyPr wrap="square" lIns="0" tIns="0" rIns="0" bIns="0" rtlCol="0" anchor="ctr"/>
-          <a:lstStyle/>
-          <a:p>
-            <a:pPr indent="0" marL="0">
-              <a:buNone/>
-            </a:pPr>
-            <a:r>
-              <a:rPr lang="en-US" sz="1500" dirty="0">
-                <a:solidFill>
-                  <a:srgbClr val="DCE3F2"/>
-                </a:solidFill>
-                <a:latin typeface="Calibri" pitchFamily="34" charset="0"/>
-                <a:ea typeface="Calibri" pitchFamily="34" charset="-122"/>
-                <a:cs typeface="Calibri" pitchFamily="34" charset="-120"/>
-              </a:rPr>
-              <a:t>Zu zweit: eine Person tippt, eine liest vor</a:t>
-            </a:r>
-            <a:endParaRPr lang="en-US" sz="1500" dirty="0"/>
-          </a:p>
-        </p:txBody>
-      </p:sp>
-      <p:sp>
-        <p:nvSpPr>
           <p:cNvPr id="11" name="Shape 8"/>
           <p:cNvSpPr/>
           <p:nvPr/>
         </p:nvSpPr>
         <p:spPr>
           <a:xfrm>
-            <a:off x="6126480" y="2697480"/>
-            <a:ext cx="2560320" cy="1965960"/>
+            <a:off x="8168640" y="3596640"/>
+            <a:ext cx="3413760" cy="2621280"/>
           </a:xfrm>
           <a:prstGeom prst="roundRect">
             <a:avLst>
@@ -9103,11 +10660,11 @@
             </a:avLst>
           </a:prstGeom>
           <a:solidFill>
-            <a:srgbClr val="1A2652"/>
+            <a:srgbClr val="1E1E1E"/>
           </a:solidFill>
           <a:ln/>
           <a:effectLst>
-            <a:outerShdw sx="100000" sy="100000" kx="0" ky="0" algn="bl" rotWithShape="0" blurRad="101600" dist="38100" dir="5400000">
+            <a:outerShdw sx="100000" sy="100000" kx="0" ky="0" algn="bl" rotWithShape="0" blurRad="135467" dist="50800" dir="5400000">
               <a:srgbClr val="000000">
                 <a:alpha val="25000"/>
               </a:srgbClr>
@@ -9123,8 +10680,8 @@
         </p:nvSpPr>
         <p:spPr>
           <a:xfrm>
-            <a:off x="6254496" y="2807208"/>
-            <a:ext cx="100584" cy="100584"/>
+            <a:off x="8339328" y="3742944"/>
+            <a:ext cx="134112" cy="134112"/>
           </a:xfrm>
           <a:prstGeom prst="ellipse">
             <a:avLst/>
@@ -9143,8 +10700,8 @@
         </p:nvSpPr>
         <p:spPr>
           <a:xfrm>
-            <a:off x="6437376" y="2807208"/>
-            <a:ext cx="100584" cy="100584"/>
+            <a:off x="8583168" y="3742944"/>
+            <a:ext cx="134112" cy="134112"/>
           </a:xfrm>
           <a:prstGeom prst="ellipse">
             <a:avLst/>
@@ -9163,8 +10720,8 @@
         </p:nvSpPr>
         <p:spPr>
           <a:xfrm>
-            <a:off x="6620256" y="2807208"/>
-            <a:ext cx="100584" cy="100584"/>
+            <a:off x="8827008" y="3742944"/>
+            <a:ext cx="134112" cy="134112"/>
           </a:xfrm>
           <a:prstGeom prst="ellipse">
             <a:avLst/>
@@ -9183,8 +10740,8 @@
         </p:nvSpPr>
         <p:spPr>
           <a:xfrm>
-            <a:off x="6291072" y="3008376"/>
-            <a:ext cx="2231136" cy="1545336"/>
+            <a:off x="8388096" y="4011168"/>
+            <a:ext cx="2974848" cy="2060448"/>
           </a:xfrm>
           <a:prstGeom prst="rect">
             <a:avLst/>
@@ -9198,14 +10755,14 @@
           <a:p>
             <a:pPr algn="l" indent="0" marL="0">
               <a:lnSpc>
-                <a:spcPts val="1668"/>
+                <a:spcPts val="2224"/>
               </a:lnSpc>
               <a:buNone/>
             </a:pPr>
             <a:r>
-              <a:rPr lang="en-US" sz="1150" dirty="0">
-                <a:solidFill>
-                  <a:srgbClr val="9AA7C4"/>
+              <a:rPr lang="en-US" sz="1533" dirty="0">
+                <a:solidFill>
+                  <a:srgbClr val="BADCF6"/>
                 </a:solidFill>
                 <a:latin typeface="Courier New" pitchFamily="34" charset="0"/>
                 <a:ea typeface="Courier New" pitchFamily="34" charset="-122"/>
@@ -9213,19 +10770,19 @@
               </a:rPr>
               <a:t>PS C:\&gt; ssh \</a:t>
             </a:r>
-            <a:endParaRPr lang="en-US" sz="1150" dirty="0"/>
+            <a:endParaRPr lang="en-US" sz="1533" dirty="0"/>
           </a:p>
           <a:p>
             <a:pPr algn="l" indent="0" marL="0">
               <a:lnSpc>
-                <a:spcPts val="1668"/>
+                <a:spcPts val="2224"/>
               </a:lnSpc>
               <a:buNone/>
             </a:pPr>
             <a:r>
-              <a:rPr lang="en-US" sz="1150" b="1" dirty="0">
-                <a:solidFill>
-                  <a:srgbClr val="FFC20E"/>
+              <a:rPr lang="en-US" sz="1533" b="1" dirty="0">
+                <a:solidFill>
+                  <a:srgbClr val="FAE55F"/>
                 </a:solidFill>
                 <a:latin typeface="Courier New" pitchFamily="34" charset="0"/>
                 <a:ea typeface="Courier New" pitchFamily="34" charset="-122"/>
@@ -9233,19 +10790,19 @@
               </a:rPr>
               <a:t>  user07@10.0.0.5</a:t>
             </a:r>
-            <a:endParaRPr lang="en-US" sz="1150" dirty="0"/>
+            <a:endParaRPr lang="en-US" sz="1533" dirty="0"/>
           </a:p>
           <a:p>
             <a:pPr algn="l" indent="0" marL="0">
               <a:lnSpc>
-                <a:spcPts val="1668"/>
+                <a:spcPts val="2224"/>
               </a:lnSpc>
               <a:buNone/>
             </a:pPr>
             <a:r>
-              <a:rPr lang="en-US" sz="1150" dirty="0">
-                <a:solidFill>
-                  <a:srgbClr val="9AA7C4"/>
+              <a:rPr lang="en-US" sz="1533" dirty="0">
+                <a:solidFill>
+                  <a:srgbClr val="BADCF6"/>
                 </a:solidFill>
                 <a:latin typeface="Courier New" pitchFamily="34" charset="0"/>
                 <a:ea typeface="Courier New" pitchFamily="34" charset="-122"/>
@@ -9253,19 +10810,19 @@
               </a:rPr>
               <a:t>password: ********</a:t>
             </a:r>
-            <a:endParaRPr lang="en-US" sz="1150" dirty="0"/>
+            <a:endParaRPr lang="en-US" sz="1533" dirty="0"/>
           </a:p>
           <a:p>
             <a:pPr algn="l" indent="0" marL="0">
               <a:lnSpc>
-                <a:spcPts val="1668"/>
+                <a:spcPts val="2224"/>
               </a:lnSpc>
               <a:buNone/>
             </a:pPr>
             <a:r>
-              <a:rPr lang="en-US" sz="1150" b="1" dirty="0">
-                <a:solidFill>
-                  <a:srgbClr val="FFC20E"/>
+              <a:rPr lang="en-US" sz="1533" b="1" dirty="0">
+                <a:solidFill>
+                  <a:srgbClr val="FAE55F"/>
                 </a:solidFill>
                 <a:latin typeface="Courier New" pitchFamily="34" charset="0"/>
                 <a:ea typeface="Courier New" pitchFamily="34" charset="-122"/>
@@ -9273,7 +10830,7 @@
               </a:rPr>
               <a:t>user07@srv:~$ _</a:t>
             </a:r>
-            <a:endParaRPr lang="en-US" sz="1150" dirty="0"/>
+            <a:endParaRPr lang="en-US" sz="1533" dirty="0"/>
           </a:p>
         </p:txBody>
       </p:sp>
@@ -9288,13 +10845,6 @@
 <file path=ppt/slides/slide9.xml><?xml version="1.0" encoding="utf-8"?>
 <p:sld xmlns:a="http://schemas.openxmlformats.org/drawingml/2006/main" xmlns:r="http://schemas.openxmlformats.org/officeDocument/2006/relationships" xmlns:p="http://schemas.openxmlformats.org/presentationml/2006/main">
   <p:cSld name="Slide 9">
-    <p:bg>
-      <p:bgPr>
-        <a:solidFill>
-          <a:srgbClr val="FFFFFF"/>
-        </a:solidFill>
-      </p:bgPr>
-    </p:bg>
     <p:spTree>
       <p:nvGrpSpPr>
         <p:cNvPr id="1" name=""/>
@@ -9311,20 +10861,67 @@
       </p:grpSpPr>
       <p:sp>
         <p:nvSpPr>
+          <p:cNvPr id="9001" name="Datumsplatzhalter 9001"/>
+          <p:cNvSpPr>
+            <a:spLocks noGrp="1"/>
+          </p:cNvSpPr>
+          <p:nvPr>
+            <p:ph type="dt" sz="half" idx="2"/>
+          </p:nvPr>
+        </p:nvSpPr>
+        <p:spPr/>
+        <p:txBody>
+          <a:bodyPr/>
+          <a:lstStyle/>
+          <a:p>
+            <a:fld id="{86B4728B-49EC-AC4B-92D0-45D4091857E0}" type="datetime1">
+              <a:rPr lang="de-DE"/>
+              <a:pPr/>
+              <a:t>28.10.2026</a:t>
+            </a:fld>
+            <a:endParaRPr lang="de-DE"/>
+          </a:p>
+        </p:txBody>
+      </p:sp>
+      <p:sp>
+        <p:nvSpPr>
+          <p:cNvPr id="9002" name="Foliennummernplatzhalter 9002"/>
+          <p:cNvSpPr>
+            <a:spLocks noGrp="1"/>
+          </p:cNvSpPr>
+          <p:nvPr>
+            <p:ph type="sldNum" sz="quarter" idx="12"/>
+          </p:nvPr>
+        </p:nvSpPr>
+        <p:spPr/>
+        <p:txBody>
+          <a:bodyPr/>
+          <a:lstStyle/>
+          <a:p>
+            <a:fld id="{B7E13D07-A954-7D45-9CFC-776D35F33DC4}" type="slidenum">
+              <a:rPr lang="de-DE"/>
+              <a:t>9</a:t>
+            </a:fld>
+            <a:endParaRPr lang="de-DE"/>
+          </a:p>
+        </p:txBody>
+      </p:sp>
+      <p:sp>
+        <p:nvSpPr>
           <p:cNvPr id="2" name="Shape 0"/>
           <p:cNvSpPr/>
           <p:nvPr/>
         </p:nvSpPr>
         <p:spPr>
           <a:xfrm>
-            <a:off x="502920" y="329184"/>
-            <a:ext cx="118872" cy="118872"/>
+            <a:off x="670560" y="438912"/>
+            <a:ext cx="158496" cy="158496"/>
           </a:xfrm>
           <a:prstGeom prst="rect">
             <a:avLst/>
           </a:prstGeom>
           <a:solidFill>
-            <a:srgbClr val="FFC20E"/>
+            <a:srgbClr val="FAE55F"/>
           </a:solidFill>
           <a:ln/>
         </p:spPr>
@@ -9337,8 +10934,8 @@
         </p:nvSpPr>
         <p:spPr>
           <a:xfrm>
-            <a:off x="713232" y="292608"/>
-            <a:ext cx="7955280" cy="274320"/>
+            <a:off x="950976" y="390144"/>
+            <a:ext cx="10607040" cy="365760"/>
           </a:xfrm>
           <a:prstGeom prst="rect">
             <a:avLst/>
@@ -9354,17 +10951,17 @@
               <a:buNone/>
             </a:pPr>
             <a:r>
-              <a:rPr lang="en-US" sz="1200" b="1" spc="300" kern="0" dirty="0">
-                <a:solidFill>
-                  <a:srgbClr val="2E5AAC"/>
-                </a:solidFill>
-                <a:latin typeface="Calibri" pitchFamily="34" charset="0"/>
-                <a:ea typeface="Calibri" pitchFamily="34" charset="-122"/>
-                <a:cs typeface="Calibri" pitchFamily="34" charset="-120"/>
+              <a:rPr lang="en-US" sz="1600" b="1" spc="300" kern="0" dirty="0">
+                <a:solidFill>
+                  <a:srgbClr val="14508D"/>
+                </a:solidFill>
+                <a:latin typeface="Roboto" pitchFamily="34" charset="0"/>
+                <a:ea typeface="Roboto" pitchFamily="34" charset="-122"/>
+                <a:cs typeface="Roboto" pitchFamily="34" charset="-120"/>
               </a:rPr>
               <a:t>HANDS-ON I · MINUTE 25–37</a:t>
             </a:r>
-            <a:endParaRPr lang="en-US" sz="1200" dirty="0"/>
+            <a:endParaRPr lang="en-US" sz="1600" dirty="0"/>
           </a:p>
         </p:txBody>
       </p:sp>
@@ -9376,8 +10973,8 @@
         </p:nvSpPr>
         <p:spPr>
           <a:xfrm>
-            <a:off x="502920" y="566928"/>
-            <a:ext cx="8138160" cy="685800"/>
+            <a:off x="670560" y="755904"/>
+            <a:ext cx="10850880" cy="914400"/>
           </a:xfrm>
           <a:prstGeom prst="rect">
             <a:avLst/>
@@ -9393,39 +10990,19 @@
               <a:buNone/>
             </a:pPr>
             <a:r>
-              <a:rPr lang="en-US" sz="3000" b="1" dirty="0">
-                <a:solidFill>
-                  <a:srgbClr val="222A44"/>
-                </a:solidFill>
-                <a:latin typeface="Calibri" pitchFamily="34" charset="0"/>
-                <a:ea typeface="Calibri" pitchFamily="34" charset="-122"/>
-                <a:cs typeface="Calibri" pitchFamily="34" charset="-120"/>
+              <a:rPr lang="en-US" sz="4000" b="1" dirty="0">
+                <a:solidFill>
+                  <a:srgbClr val="1E1E1E"/>
+                </a:solidFill>
+                <a:latin typeface="Roboto" pitchFamily="34" charset="0"/>
+                <a:ea typeface="Roboto" pitchFamily="34" charset="-122"/>
+                <a:cs typeface="Roboto" pitchFamily="34" charset="-120"/>
               </a:rPr>
               <a:t>Mini-Rallye: Orientierung im Dateisystem</a:t>
             </a:r>
-            <a:endParaRPr lang="en-US" sz="3000" dirty="0"/>
-          </a:p>
-        </p:txBody>
-      </p:sp>
-      <p:sp>
-        <p:nvSpPr>
-          <p:cNvPr id="5" name="Shape 3"/>
-          <p:cNvSpPr/>
-          <p:nvPr/>
-        </p:nvSpPr>
-        <p:spPr>
-          <a:xfrm>
-            <a:off x="521208" y="1280160"/>
-            <a:ext cx="594360" cy="50292"/>
-          </a:xfrm>
-          <a:prstGeom prst="rect">
-            <a:avLst/>
-          </a:prstGeom>
-          <a:solidFill>
-            <a:srgbClr val="FFC20E"/>
-          </a:solidFill>
-          <a:ln/>
-        </p:spPr>
+            <a:endParaRPr lang="en-US" sz="4000" dirty="0"/>
+          </a:p>
+        </p:txBody>
       </p:sp>
       <p:sp>
         <p:nvSpPr>
@@ -9435,8 +11012,8 @@
         </p:nvSpPr>
         <p:spPr>
           <a:xfrm>
-            <a:off x="5029200" y="1417320"/>
-            <a:ext cx="3611880" cy="2651760"/>
+            <a:off x="6705600" y="1879092"/>
+            <a:ext cx="4815840" cy="3182112"/>
           </a:xfrm>
           <a:prstGeom prst="roundRect">
             <a:avLst>
@@ -9444,11 +11021,11 @@
             </a:avLst>
           </a:prstGeom>
           <a:solidFill>
-            <a:srgbClr val="1A2652"/>
+            <a:srgbClr val="1E1E1E"/>
           </a:solidFill>
           <a:ln/>
           <a:effectLst>
-            <a:outerShdw sx="100000" sy="100000" kx="0" ky="0" algn="bl" rotWithShape="0" blurRad="101600" dist="38100" dir="5400000">
+            <a:outerShdw sx="100000" sy="100000" kx="0" ky="0" algn="bl" rotWithShape="0" blurRad="135467" dist="50800" dir="5400000">
               <a:srgbClr val="000000">
                 <a:alpha val="25000"/>
               </a:srgbClr>
@@ -9464,8 +11041,8 @@
         </p:nvSpPr>
         <p:spPr>
           <a:xfrm>
-            <a:off x="5157216" y="1527048"/>
-            <a:ext cx="100584" cy="100584"/>
+            <a:off x="6876288" y="2004060"/>
+            <a:ext cx="134112" cy="134112"/>
           </a:xfrm>
           <a:prstGeom prst="ellipse">
             <a:avLst/>
@@ -9484,8 +11061,8 @@
         </p:nvSpPr>
         <p:spPr>
           <a:xfrm>
-            <a:off x="5340096" y="1527048"/>
-            <a:ext cx="100584" cy="100584"/>
+            <a:off x="7120128" y="2004060"/>
+            <a:ext cx="134112" cy="134112"/>
           </a:xfrm>
           <a:prstGeom prst="ellipse">
             <a:avLst/>
@@ -9504,8 +11081,8 @@
         </p:nvSpPr>
         <p:spPr>
           <a:xfrm>
-            <a:off x="5522976" y="1527048"/>
-            <a:ext cx="100584" cy="100584"/>
+            <a:off x="7363968" y="2004060"/>
+            <a:ext cx="134112" cy="134112"/>
           </a:xfrm>
           <a:prstGeom prst="ellipse">
             <a:avLst/>
@@ -9524,8 +11101,8 @@
         </p:nvSpPr>
         <p:spPr>
           <a:xfrm>
-            <a:off x="5193792" y="1728216"/>
-            <a:ext cx="3282696" cy="2231136"/>
+            <a:off x="6925056" y="2252167"/>
+            <a:ext cx="4376928" cy="2677363"/>
           </a:xfrm>
           <a:prstGeom prst="rect">
             <a:avLst/>
@@ -9539,14 +11116,14 @@
           <a:p>
             <a:pPr algn="l" indent="0" marL="0">
               <a:lnSpc>
-                <a:spcPts val="1813"/>
+                <a:spcPts val="2417"/>
               </a:lnSpc>
               <a:buNone/>
             </a:pPr>
             <a:r>
-              <a:rPr lang="en-US" sz="1250" dirty="0">
-                <a:solidFill>
-                  <a:srgbClr val="FFC20E"/>
+              <a:rPr lang="en-US" sz="1667" dirty="0">
+                <a:solidFill>
+                  <a:srgbClr val="FAE55F"/>
                 </a:solidFill>
                 <a:latin typeface="Courier New" pitchFamily="34" charset="0"/>
                 <a:ea typeface="Courier New" pitchFamily="34" charset="-122"/>
@@ -9554,39 +11131,39 @@
               </a:rPr>
               <a:t>$ pwd</a:t>
             </a:r>
-            <a:endParaRPr lang="en-US" sz="1250" dirty="0"/>
+            <a:endParaRPr lang="en-US" sz="1667" dirty="0"/>
           </a:p>
           <a:p>
             <a:pPr algn="l" indent="0" marL="0">
               <a:lnSpc>
-                <a:spcPts val="1813"/>
+                <a:spcPts val="2417"/>
               </a:lnSpc>
               <a:buNone/>
             </a:pPr>
             <a:r>
-              <a:rPr lang="en-US" sz="1250" dirty="0">
-                <a:solidFill>
-                  <a:srgbClr val="DCE3F2"/>
+              <a:rPr lang="en-US" sz="1667" dirty="0">
+                <a:solidFill>
+                  <a:srgbClr val="FFFFFF"/>
                 </a:solidFill>
                 <a:latin typeface="Courier New" pitchFamily="34" charset="0"/>
                 <a:ea typeface="Courier New" pitchFamily="34" charset="-122"/>
                 <a:cs typeface="Courier New" pitchFamily="34" charset="-120"/>
               </a:rPr>
-              <a:t>/home/zi</a:t>
-            </a:r>
-            <a:endParaRPr lang="en-US" sz="1250" dirty="0"/>
+              <a:t>/home/user07</a:t>
+            </a:r>
+            <a:endParaRPr lang="en-US" sz="1667" dirty="0"/>
           </a:p>
           <a:p>
             <a:pPr algn="l" indent="0" marL="0">
               <a:lnSpc>
-                <a:spcPts val="1813"/>
+                <a:spcPts val="2417"/>
               </a:lnSpc>
               <a:buNone/>
             </a:pPr>
             <a:r>
-              <a:rPr lang="en-US" sz="1250" dirty="0">
-                <a:solidFill>
-                  <a:srgbClr val="FFC20E"/>
+              <a:rPr lang="en-US" sz="1667" dirty="0">
+                <a:solidFill>
+                  <a:srgbClr val="FAE55F"/>
                 </a:solidFill>
                 <a:latin typeface="Courier New" pitchFamily="34" charset="0"/>
                 <a:ea typeface="Courier New" pitchFamily="34" charset="-122"/>
@@ -9594,19 +11171,19 @@
               </a:rPr>
               <a:t>$ mkdir -p workshop/logs</a:t>
             </a:r>
-            <a:endParaRPr lang="en-US" sz="1250" dirty="0"/>
+            <a:endParaRPr lang="en-US" sz="1667" dirty="0"/>
           </a:p>
           <a:p>
             <a:pPr algn="l" indent="0" marL="0">
               <a:lnSpc>
-                <a:spcPts val="1813"/>
+                <a:spcPts val="2417"/>
               </a:lnSpc>
               <a:buNone/>
             </a:pPr>
             <a:r>
-              <a:rPr lang="en-US" sz="1250" dirty="0">
-                <a:solidFill>
-                  <a:srgbClr val="FFC20E"/>
+              <a:rPr lang="en-US" sz="1667" dirty="0">
+                <a:solidFill>
+                  <a:srgbClr val="FAE55F"/>
                 </a:solidFill>
                 <a:latin typeface="Courier New" pitchFamily="34" charset="0"/>
                 <a:ea typeface="Courier New" pitchFamily="34" charset="-122"/>
@@ -9614,19 +11191,19 @@
               </a:rPr>
               <a:t>$ cd workshop/logs</a:t>
             </a:r>
-            <a:endParaRPr lang="en-US" sz="1250" dirty="0"/>
+            <a:endParaRPr lang="en-US" sz="1667" dirty="0"/>
           </a:p>
           <a:p>
             <a:pPr algn="l" indent="0" marL="0">
               <a:lnSpc>
-                <a:spcPts val="1813"/>
+                <a:spcPts val="2417"/>
               </a:lnSpc>
               <a:buNone/>
             </a:pPr>
             <a:r>
-              <a:rPr lang="en-US" sz="1250" dirty="0">
-                <a:solidFill>
-                  <a:srgbClr val="FFC20E"/>
+              <a:rPr lang="en-US" sz="1667" dirty="0">
+                <a:solidFill>
+                  <a:srgbClr val="FAE55F"/>
                 </a:solidFill>
                 <a:latin typeface="Courier New" pitchFamily="34" charset="0"/>
                 <a:ea typeface="Courier New" pitchFamily="34" charset="-122"/>
@@ -9634,19 +11211,19 @@
               </a:rPr>
               <a:t>$ man ls</a:t>
             </a:r>
-            <a:endParaRPr lang="en-US" sz="1250" dirty="0"/>
+            <a:endParaRPr lang="en-US" sz="1667" dirty="0"/>
           </a:p>
           <a:p>
             <a:pPr algn="l" indent="0" marL="0">
               <a:lnSpc>
-                <a:spcPts val="1813"/>
+                <a:spcPts val="2417"/>
               </a:lnSpc>
               <a:buNone/>
             </a:pPr>
             <a:r>
-              <a:rPr lang="en-US" sz="1250" dirty="0">
-                <a:solidFill>
-                  <a:srgbClr val="9AA7C4"/>
+              <a:rPr lang="en-US" sz="1667" dirty="0">
+                <a:solidFill>
+                  <a:srgbClr val="BADCF6"/>
                 </a:solidFill>
                 <a:latin typeface="Courier New" pitchFamily="34" charset="0"/>
                 <a:ea typeface="Courier New" pitchFamily="34" charset="-122"/>
@@ -9654,7 +11231,7 @@
               </a:rPr>
               <a:t>  -t  sort by time ...</a:t>
             </a:r>
-            <a:endParaRPr lang="en-US" sz="1250" dirty="0"/>
+            <a:endParaRPr lang="en-US" sz="1667" dirty="0"/>
           </a:p>
         </p:txBody>
       </p:sp>
@@ -9666,14 +11243,14 @@
         </p:nvSpPr>
         <p:spPr>
           <a:xfrm>
-            <a:off x="502920" y="1581912"/>
-            <a:ext cx="128016" cy="128016"/>
+            <a:off x="670560" y="2068068"/>
+            <a:ext cx="170688" cy="170688"/>
           </a:xfrm>
           <a:prstGeom prst="ellipse">
             <a:avLst/>
           </a:prstGeom>
           <a:solidFill>
-            <a:srgbClr val="2E5AAC"/>
+            <a:srgbClr val="14508D"/>
           </a:solidFill>
           <a:ln/>
         </p:spPr>
@@ -9686,8 +11263,8 @@
         </p:nvSpPr>
         <p:spPr>
           <a:xfrm>
-            <a:off x="777240" y="1554480"/>
-            <a:ext cx="4069080" cy="822960"/>
+            <a:off x="1036320" y="2043684"/>
+            <a:ext cx="5425440" cy="987552"/>
           </a:xfrm>
           <a:prstGeom prst="rect">
             <a:avLst/>
@@ -9703,13 +11280,13 @@
               <a:buNone/>
             </a:pPr>
             <a:r>
-              <a:rPr lang="en-US" sz="1300" b="1" dirty="0">
-                <a:solidFill>
-                  <a:srgbClr val="222A44"/>
-                </a:solidFill>
-                <a:latin typeface="Calibri" pitchFamily="34" charset="0"/>
-                <a:ea typeface="Calibri" pitchFamily="34" charset="-122"/>
-                <a:cs typeface="Calibri" pitchFamily="34" charset="-120"/>
+              <a:rPr lang="en-US" sz="1733" b="1" dirty="0">
+                <a:solidFill>
+                  <a:srgbClr val="1E1E1E"/>
+                </a:solidFill>
+                <a:latin typeface="Roboto" pitchFamily="34" charset="0"/>
+                <a:ea typeface="Roboto" pitchFamily="34" charset="-122"/>
+                <a:cs typeface="Roboto" pitchFamily="34" charset="-120"/>
               </a:rPr>
               <a:t>6 Aufgaben auf dem Arbeitsblatt  –  </a:t>
             </a:r>
@@ -9717,17 +11294,17 @@
               <a:buNone/>
             </a:pPr>
             <a:r>
-              <a:rPr lang="en-US" sz="1300" dirty="0">
-                <a:solidFill>
-                  <a:srgbClr val="5F6A85"/>
-                </a:solidFill>
-                <a:latin typeface="Calibri" pitchFamily="34" charset="0"/>
-                <a:ea typeface="Calibri" pitchFamily="34" charset="-122"/>
-                <a:cs typeface="Calibri" pitchFamily="34" charset="-120"/>
+              <a:rPr lang="en-US" sz="1733" dirty="0">
+                <a:solidFill>
+                  <a:srgbClr val="595959"/>
+                </a:solidFill>
+                <a:latin typeface="Roboto" pitchFamily="34" charset="0"/>
+                <a:ea typeface="Roboto" pitchFamily="34" charset="-122"/>
+                <a:cs typeface="Roboto" pitchFamily="34" charset="-120"/>
               </a:rPr>
               <a:t>wo bin ich, was liegt hier, Ordner bauen, Datei umbenennen, Handbuch lesen</a:t>
             </a:r>
-            <a:endParaRPr lang="en-US" sz="1300" dirty="0"/>
+            <a:endParaRPr lang="en-US" sz="1733" dirty="0"/>
           </a:p>
         </p:txBody>
       </p:sp>
@@ -9739,14 +11316,14 @@
         </p:nvSpPr>
         <p:spPr>
           <a:xfrm>
-            <a:off x="502920" y="2478024"/>
-            <a:ext cx="128016" cy="128016"/>
+            <a:off x="670560" y="3143402"/>
+            <a:ext cx="170688" cy="170688"/>
           </a:xfrm>
           <a:prstGeom prst="ellipse">
             <a:avLst/>
           </a:prstGeom>
           <a:solidFill>
-            <a:srgbClr val="2E5AAC"/>
+            <a:srgbClr val="14508D"/>
           </a:solidFill>
           <a:ln/>
         </p:spPr>
@@ -9759,8 +11336,8 @@
         </p:nvSpPr>
         <p:spPr>
           <a:xfrm>
-            <a:off x="777240" y="2450592"/>
-            <a:ext cx="4069080" cy="822960"/>
+            <a:off x="1036320" y="3119018"/>
+            <a:ext cx="5425440" cy="987552"/>
           </a:xfrm>
           <a:prstGeom prst="rect">
             <a:avLst/>
@@ -9776,13 +11353,13 @@
               <a:buNone/>
             </a:pPr>
             <a:r>
-              <a:rPr lang="en-US" sz="1300" b="1" dirty="0">
-                <a:solidFill>
-                  <a:srgbClr val="222A44"/>
-                </a:solidFill>
-                <a:latin typeface="Calibri" pitchFamily="34" charset="0"/>
-                <a:ea typeface="Calibri" pitchFamily="34" charset="-122"/>
-                <a:cs typeface="Calibri" pitchFamily="34" charset="-120"/>
+              <a:rPr lang="en-US" sz="1733" b="1" dirty="0">
+                <a:solidFill>
+                  <a:srgbClr val="1E1E1E"/>
+                </a:solidFill>
+                <a:latin typeface="Roboto" pitchFamily="34" charset="0"/>
+                <a:ea typeface="Roboto" pitchFamily="34" charset="-122"/>
+                <a:cs typeface="Roboto" pitchFamily="34" charset="-120"/>
               </a:rPr>
               <a:t>Partnerarbeit „Pair Administration“  –  </a:t>
             </a:r>
@@ -9790,17 +11367,17 @@
               <a:buNone/>
             </a:pPr>
             <a:r>
-              <a:rPr lang="en-US" sz="1300" dirty="0">
-                <a:solidFill>
-                  <a:srgbClr val="5F6A85"/>
-                </a:solidFill>
-                <a:latin typeface="Calibri" pitchFamily="34" charset="0"/>
-                <a:ea typeface="Calibri" pitchFamily="34" charset="-122"/>
-                <a:cs typeface="Calibri" pitchFamily="34" charset="-120"/>
+              <a:rPr lang="en-US" sz="1733" dirty="0">
+                <a:solidFill>
+                  <a:srgbClr val="595959"/>
+                </a:solidFill>
+                <a:latin typeface="Roboto" pitchFamily="34" charset="0"/>
+                <a:ea typeface="Roboto" pitchFamily="34" charset="-122"/>
+                <a:cs typeface="Roboto" pitchFamily="34" charset="-120"/>
               </a:rPr>
               <a:t>eine Person tippt, die andere liest vor und kontrolliert – nach Teil A tauschen</a:t>
             </a:r>
-            <a:endParaRPr lang="en-US" sz="1300" dirty="0"/>
+            <a:endParaRPr lang="en-US" sz="1733" dirty="0"/>
           </a:p>
         </p:txBody>
       </p:sp>
@@ -9812,14 +11389,14 @@
         </p:nvSpPr>
         <p:spPr>
           <a:xfrm>
-            <a:off x="502920" y="3374136"/>
-            <a:ext cx="128016" cy="128016"/>
+            <a:off x="670560" y="4218737"/>
+            <a:ext cx="170688" cy="170688"/>
           </a:xfrm>
           <a:prstGeom prst="ellipse">
             <a:avLst/>
           </a:prstGeom>
           <a:solidFill>
-            <a:srgbClr val="2E5AAC"/>
+            <a:srgbClr val="14508D"/>
           </a:solidFill>
           <a:ln/>
         </p:spPr>
@@ -9832,8 +11409,8 @@
         </p:nvSpPr>
         <p:spPr>
           <a:xfrm>
-            <a:off x="777240" y="3346704"/>
-            <a:ext cx="4069080" cy="822960"/>
+            <a:off x="1036320" y="4194352"/>
+            <a:ext cx="5425440" cy="987552"/>
           </a:xfrm>
           <a:prstGeom prst="rect">
             <a:avLst/>
@@ -9849,13 +11426,13 @@
               <a:buNone/>
             </a:pPr>
             <a:r>
-              <a:rPr lang="en-US" sz="1300" b="1" dirty="0">
-                <a:solidFill>
-                  <a:srgbClr val="222A44"/>
-                </a:solidFill>
-                <a:latin typeface="Calibri" pitchFamily="34" charset="0"/>
-                <a:ea typeface="Calibri" pitchFamily="34" charset="-122"/>
-                <a:cs typeface="Calibri" pitchFamily="34" charset="-120"/>
+              <a:rPr lang="en-US" sz="1733" b="1" dirty="0">
+                <a:solidFill>
+                  <a:srgbClr val="1E1E1E"/>
+                </a:solidFill>
+                <a:latin typeface="Roboto" pitchFamily="34" charset="0"/>
+                <a:ea typeface="Roboto" pitchFamily="34" charset="-122"/>
+                <a:cs typeface="Roboto" pitchFamily="34" charset="-120"/>
               </a:rPr>
               <a:t>Zwei Abkürzungen sofort mitnehmen  –  </a:t>
             </a:r>
@@ -9863,17 +11440,17 @@
               <a:buNone/>
             </a:pPr>
             <a:r>
-              <a:rPr lang="en-US" sz="1300" dirty="0">
-                <a:solidFill>
-                  <a:srgbClr val="5F6A85"/>
-                </a:solidFill>
-                <a:latin typeface="Calibri" pitchFamily="34" charset="0"/>
-                <a:ea typeface="Calibri" pitchFamily="34" charset="-122"/>
-                <a:cs typeface="Calibri" pitchFamily="34" charset="-120"/>
+              <a:rPr lang="en-US" sz="1733" dirty="0">
+                <a:solidFill>
+                  <a:srgbClr val="595959"/>
+                </a:solidFill>
+                <a:latin typeface="Roboto" pitchFamily="34" charset="0"/>
+                <a:ea typeface="Roboto" pitchFamily="34" charset="-122"/>
+                <a:cs typeface="Roboto" pitchFamily="34" charset="-120"/>
               </a:rPr>
               <a:t>Tab vervollständigt, ↑ holt den letzten Befehl zurück</a:t>
             </a:r>
-            <a:endParaRPr lang="en-US" sz="1300" dirty="0"/>
+            <a:endParaRPr lang="en-US" sz="1733" dirty="0"/>
           </a:p>
         </p:txBody>
       </p:sp>
@@ -9885,8 +11462,8 @@
         </p:nvSpPr>
         <p:spPr>
           <a:xfrm>
-            <a:off x="502920" y="4297680"/>
-            <a:ext cx="8138160" cy="502920"/>
+            <a:off x="670560" y="5335524"/>
+            <a:ext cx="9799320" cy="603504"/>
           </a:xfrm>
           <a:prstGeom prst="rect">
             <a:avLst/>
@@ -9902,13 +11479,13 @@
               <a:buNone/>
             </a:pPr>
             <a:r>
-              <a:rPr lang="en-US" sz="1350" b="1" dirty="0">
-                <a:solidFill>
-                  <a:srgbClr val="2E5AAC"/>
-                </a:solidFill>
-                <a:latin typeface="Calibri" pitchFamily="34" charset="0"/>
-                <a:ea typeface="Calibri" pitchFamily="34" charset="-122"/>
-                <a:cs typeface="Calibri" pitchFamily="34" charset="-120"/>
+              <a:rPr lang="en-US" sz="1800" b="1" dirty="0">
+                <a:solidFill>
+                  <a:srgbClr val="14508D"/>
+                </a:solidFill>
+                <a:latin typeface="Roboto" pitchFamily="34" charset="0"/>
+                <a:ea typeface="Roboto" pitchFamily="34" charset="-122"/>
+                <a:cs typeface="Roboto" pitchFamily="34" charset="-120"/>
               </a:rPr>
               <a:t>Ziel-Zeit: 12 Minuten. </a:t>
             </a:r>
@@ -9916,17 +11493,17 @@
               <a:buNone/>
             </a:pPr>
             <a:r>
-              <a:rPr lang="en-US" sz="1350" dirty="0">
-                <a:solidFill>
-                  <a:srgbClr val="222A44"/>
-                </a:solidFill>
-                <a:latin typeface="Calibri" pitchFamily="34" charset="0"/>
-                <a:ea typeface="Calibri" pitchFamily="34" charset="-122"/>
-                <a:cs typeface="Calibri" pitchFamily="34" charset="-120"/>
+              <a:rPr lang="en-US" sz="1800" dirty="0">
+                <a:solidFill>
+                  <a:srgbClr val="1E1E1E"/>
+                </a:solidFill>
+                <a:latin typeface="Roboto" pitchFamily="34" charset="0"/>
+                <a:ea typeface="Roboto" pitchFamily="34" charset="-122"/>
+                <a:cs typeface="Roboto" pitchFamily="34" charset="-120"/>
               </a:rPr>
               <a:t>Wer fertig ist, klärt die Zusatzfrage: Was bewirkt ls -lt – und wofür braucht das ein Admin?</a:t>
             </a:r>
-            <a:endParaRPr lang="en-US" sz="1350" dirty="0"/>
+            <a:endParaRPr lang="en-US" sz="1800" dirty="0"/>
           </a:p>
         </p:txBody>
       </p:sp>
@@ -9939,107 +11516,55 @@
 </file>
 
 <file path=ppt/theme/theme1.xml><?xml version="1.0" encoding="utf-8"?>
-<a:theme xmlns:a="http://schemas.openxmlformats.org/drawingml/2006/main" name="Office Theme">
+<a:theme xmlns:a="http://schemas.openxmlformats.org/drawingml/2006/main" name="Office">
   <a:themeElements>
-    <a:clrScheme name="Office">
+    <a:clrScheme name="MMBBS CI Farben 2025">
       <a:dk1>
-        <a:sysClr val="windowText" lastClr="000000"/>
+        <a:srgbClr val="1E1E1E"/>
       </a:dk1>
       <a:lt1>
-        <a:sysClr val="window" lastClr="FFFFFF"/>
+        <a:srgbClr val="FFFFFF"/>
       </a:lt1>
       <a:dk2>
-        <a:srgbClr val="44546A"/>
+        <a:srgbClr val="1E1E1E"/>
       </a:dk2>
       <a:lt2>
-        <a:srgbClr val="E7E6E6"/>
+        <a:srgbClr val="FFFFFF"/>
       </a:lt2>
       <a:accent1>
-        <a:srgbClr val="4472C4"/>
+        <a:srgbClr val="FAE55F"/>
       </a:accent1>
       <a:accent2>
-        <a:srgbClr val="ED7D31"/>
+        <a:srgbClr val="954161"/>
       </a:accent2>
       <a:accent3>
-        <a:srgbClr val="A5A5A5"/>
+        <a:srgbClr val="B35779"/>
       </a:accent3>
       <a:accent4>
-        <a:srgbClr val="FFC000"/>
+        <a:srgbClr val="14508D"/>
       </a:accent4>
       <a:accent5>
-        <a:srgbClr val="5B9BD5"/>
+        <a:srgbClr val="1F87C9"/>
       </a:accent5>
       <a:accent6>
-        <a:srgbClr val="70AD47"/>
+        <a:srgbClr val="BADCF6"/>
       </a:accent6>
       <a:hlink>
-        <a:srgbClr val="0563C1"/>
+        <a:srgbClr val="BADCF6"/>
       </a:hlink>
       <a:folHlink>
-        <a:srgbClr val="954F72"/>
+        <a:srgbClr val="1F87C9"/>
       </a:folHlink>
     </a:clrScheme>
-    <a:fontScheme name="Office">
+    <a:fontScheme name="Arial">
       <a:majorFont>
-        <a:latin typeface="Calibri Light" panose="020F0302020204030204"/>
+        <a:latin typeface="Arial" panose="020B0604020202020204"/>
         <a:ea typeface=""/>
         <a:cs typeface=""/>
-        <a:font script="Jpan" typeface="游ゴシック Light"/>
-        <a:font script="Hang" typeface="맑은 고딕"/>
-        <a:font script="Hans" typeface="等线 Light"/>
-        <a:font script="Hant" typeface="新細明體"/>
-        <a:font script="Arab" typeface="Times New Roman"/>
-        <a:font script="Hebr" typeface="Times New Roman"/>
-        <a:font script="Thai" typeface="Angsana New"/>
-        <a:font script="Ethi" typeface="Nyala"/>
-        <a:font script="Beng" typeface="Vrinda"/>
-        <a:font script="Gujr" typeface="Shruti"/>
-        <a:font script="Khmr" typeface="MoolBoran"/>
-        <a:font script="Knda" typeface="Tunga"/>
-        <a:font script="Guru" typeface="Raavi"/>
-        <a:font script="Cans" typeface="Euphemia"/>
-        <a:font script="Cher" typeface="Plantagenet Cherokee"/>
-        <a:font script="Yiii" typeface="Microsoft Yi Baiti"/>
-        <a:font script="Tibt" typeface="Microsoft Himalaya"/>
-        <a:font script="Thaa" typeface="MV Boli"/>
-        <a:font script="Deva" typeface="Mangal"/>
-        <a:font script="Telu" typeface="Gautami"/>
-        <a:font script="Taml" typeface="Latha"/>
-        <a:font script="Syrc" typeface="Estrangelo Edessa"/>
-        <a:font script="Orya" typeface="Kalinga"/>
-        <a:font script="Mlym" typeface="Kartika"/>
-        <a:font script="Laoo" typeface="DokChampa"/>
-        <a:font script="Sinh" typeface="Iskoola Pota"/>
-        <a:font script="Mong" typeface="Mongolian Baiti"/>
-        <a:font script="Viet" typeface="Times New Roman"/>
-        <a:font script="Uigh" typeface="Microsoft Uighur"/>
-        <a:font script="Geor" typeface="Sylfaen"/>
-        <a:font script="Armn" typeface="Arial"/>
-        <a:font script="Bugi" typeface="Leelawadee UI"/>
-        <a:font script="Bopo" typeface="Microsoft JhengHei"/>
-        <a:font script="Java" typeface="Javanese Text"/>
-        <a:font script="Lisu" typeface="Segoe UI"/>
-        <a:font script="Mymr" typeface="Myanmar Text"/>
-        <a:font script="Nkoo" typeface="Ebrima"/>
-        <a:font script="Olck" typeface="Nirmala UI"/>
-        <a:font script="Osma" typeface="Ebrima"/>
-        <a:font script="Phag" typeface="Phagspa"/>
-        <a:font script="Syrn" typeface="Estrangelo Edessa"/>
-        <a:font script="Syrj" typeface="Estrangelo Edessa"/>
-        <a:font script="Syre" typeface="Estrangelo Edessa"/>
-        <a:font script="Sora" typeface="Nirmala UI"/>
-        <a:font script="Tale" typeface="Microsoft Tai Le"/>
-        <a:font script="Talu" typeface="Microsoft New Tai Lue"/>
-        <a:font script="Tfng" typeface="Ebrima"/>
-      </a:majorFont>
-      <a:minorFont>
-        <a:latin typeface="Calibri" panose="020F0502020204030204"/>
-        <a:ea typeface=""/>
-        <a:cs typeface=""/>
-        <a:font script="Jpan" typeface="游ゴシック"/>
-        <a:font script="Hang" typeface="맑은 고딕"/>
-        <a:font script="Hans" typeface="等线"/>
-        <a:font script="Hant" typeface="新細明體"/>
+        <a:font script="Jpan" typeface="ＭＳ Ｐゴシック"/>
+        <a:font script="Hang" typeface="굴림"/>
+        <a:font script="Hans" typeface="黑体"/>
+        <a:font script="Hant" typeface="微軟正黑體"/>
         <a:font script="Arab" typeface="Arial"/>
         <a:font script="Hebr" typeface="Arial"/>
         <a:font script="Thai" typeface="Cordia New"/>
@@ -10066,23 +11591,41 @@
         <a:font script="Viet" typeface="Arial"/>
         <a:font script="Uigh" typeface="Microsoft Uighur"/>
         <a:font script="Geor" typeface="Sylfaen"/>
-        <a:font script="Armn" typeface="Arial"/>
-        <a:font script="Bugi" typeface="Leelawadee UI"/>
-        <a:font script="Bopo" typeface="Microsoft JhengHei"/>
-        <a:font script="Java" typeface="Javanese Text"/>
-        <a:font script="Lisu" typeface="Segoe UI"/>
-        <a:font script="Mymr" typeface="Myanmar Text"/>
-        <a:font script="Nkoo" typeface="Ebrima"/>
-        <a:font script="Olck" typeface="Nirmala UI"/>
-        <a:font script="Osma" typeface="Ebrima"/>
-        <a:font script="Phag" typeface="Phagspa"/>
-        <a:font script="Syrn" typeface="Estrangelo Edessa"/>
-        <a:font script="Syrj" typeface="Estrangelo Edessa"/>
-        <a:font script="Syre" typeface="Estrangelo Edessa"/>
-        <a:font script="Sora" typeface="Nirmala UI"/>
-        <a:font script="Tale" typeface="Microsoft Tai Le"/>
-        <a:font script="Talu" typeface="Microsoft New Tai Lue"/>
-        <a:font script="Tfng" typeface="Ebrima"/>
+      </a:majorFont>
+      <a:minorFont>
+        <a:latin typeface="Arial" panose="020B0604020202020204"/>
+        <a:ea typeface=""/>
+        <a:cs typeface=""/>
+        <a:font script="Jpan" typeface="ＭＳ Ｐゴシック"/>
+        <a:font script="Hang" typeface="굴림"/>
+        <a:font script="Hans" typeface="黑体"/>
+        <a:font script="Hant" typeface="微軟正黑體"/>
+        <a:font script="Arab" typeface="Arial"/>
+        <a:font script="Hebr" typeface="Arial"/>
+        <a:font script="Thai" typeface="Cordia New"/>
+        <a:font script="Ethi" typeface="Nyala"/>
+        <a:font script="Beng" typeface="Vrinda"/>
+        <a:font script="Gujr" typeface="Shruti"/>
+        <a:font script="Khmr" typeface="DaunPenh"/>
+        <a:font script="Knda" typeface="Tunga"/>
+        <a:font script="Guru" typeface="Raavi"/>
+        <a:font script="Cans" typeface="Euphemia"/>
+        <a:font script="Cher" typeface="Plantagenet Cherokee"/>
+        <a:font script="Yiii" typeface="Microsoft Yi Baiti"/>
+        <a:font script="Tibt" typeface="Microsoft Himalaya"/>
+        <a:font script="Thaa" typeface="MV Boli"/>
+        <a:font script="Deva" typeface="Mangal"/>
+        <a:font script="Telu" typeface="Gautami"/>
+        <a:font script="Taml" typeface="Latha"/>
+        <a:font script="Syrc" typeface="Estrangelo Edessa"/>
+        <a:font script="Orya" typeface="Kalinga"/>
+        <a:font script="Mlym" typeface="Kartika"/>
+        <a:font script="Laoo" typeface="DokChampa"/>
+        <a:font script="Sinh" typeface="Iskoola Pota"/>
+        <a:font script="Mong" typeface="Mongolian Baiti"/>
+        <a:font script="Viet" typeface="Arial"/>
+        <a:font script="Uigh" typeface="Microsoft Uighur"/>
+        <a:font script="Geor" typeface="Sylfaen"/>
       </a:minorFont>
     </a:fontScheme>
     <a:fmtScheme name="Office">
@@ -10227,7 +11770,7 @@
   <a:extraClrSchemeLst/>
   <a:extLst>
     <a:ext uri="{05A4C25C-085E-4340-85A3-A5531E510DB2}">
-      <thm15:themeFamily xmlns:thm15="http://schemas.microsoft.com/office/thememl/2012/main" name="Office Theme" id="{62F939B6-93AF-4DB8-9C6B-D6C7DFDC589F}" vid="{4A3C46E8-61CC-4603-A589-7422A47A8E4A}"/>
+      <thm15:themeFamily xmlns:thm15="http://schemas.microsoft.com/office/thememl/2012/main" name="MMBBS_PPT_Vorlage_092025_2" id="{13A2E612-8D9A-4D7A-B894-4A76A57E1391}" vid="{3BF8BFD0-A21D-49C5-8A8D-9EE9D94DFE1F}"/>
     </a:ext>
   </a:extLst>
 </a:theme>
